--- a/output/wordlabs-push-3day.pptx
+++ b/output/wordlabs-push-3day.pptx
@@ -4240,7 +4240,7 @@
                 <a:ea typeface="Calibri" pitchFamily="34" charset="-122"/>
                 <a:cs typeface="Calibri" pitchFamily="34" charset="-120"/>
               </a:rPr>
-              <a:t>"to move forward with force"</a:t>
+              <a:t>"to press or move forward"</a:t>
             </a:r>
             <a:endParaRPr lang="en-US" sz="2200" dirty="0"/>
           </a:p>
@@ -5288,7 +5288,7 @@
                 <a:ea typeface="Calibri" pitchFamily="34" charset="-122"/>
                 <a:cs typeface="Calibri" pitchFamily="34" charset="-120"/>
               </a:rPr>
-              <a:t>Word Labs  •  wordlabs.app  •  Root: 'push' = to move forward with force</a:t>
+              <a:t>Word Labs  •  wordlabs.app  •  Root: 'push' = to press or move forward</a:t>
             </a:r>
             <a:endParaRPr lang="en-US" sz="800" dirty="0"/>
           </a:p>
@@ -5622,7 +5622,7 @@
                 <a:ea typeface="Trebuchet MS" pitchFamily="34" charset="-122"/>
                 <a:cs typeface="Trebuchet MS" pitchFamily="34" charset="-120"/>
               </a:rPr>
-              <a:t>0</a:t>
+              <a:t>1</a:t>
             </a:r>
             <a:pPr algn="ctr" indent="0" marL="0">
               <a:buNone/>
@@ -5928,7 +5928,7 @@
                 <a:ea typeface="Calibri" pitchFamily="34" charset="-122"/>
                 <a:cs typeface="Calibri" pitchFamily="34" charset="-120"/>
               </a:rPr>
-              <a:t>Word Labs  •  wordlabs.app  •  Root: 'push' = to move forward with force</a:t>
+              <a:t>Word Labs  •  wordlabs.app  •  Root: 'push' = to press or move forward</a:t>
             </a:r>
             <a:endParaRPr lang="en-US" sz="800" dirty="0"/>
           </a:p>
@@ -6040,7 +6040,7 @@
                 <a:ea typeface="Calibri" pitchFamily="34" charset="-122"/>
                 <a:cs typeface="Calibri" pitchFamily="34" charset="-120"/>
               </a:rPr>
-              <a:t>The </a:t>
+              <a:t>Jake was </a:t>
             </a:r>
             <a:pPr algn="l" indent="0" marL="0">
               <a:buNone/>
@@ -6057,7 +6057,7 @@
                 <a:ea typeface="Calibri" pitchFamily="34" charset="-122"/>
                 <a:cs typeface="Calibri" pitchFamily="34" charset="-120"/>
               </a:rPr>
-              <a:t>pushy</a:t>
+              <a:t>pushing</a:t>
             </a:r>
             <a:pPr algn="l" indent="0" marL="0">
               <a:buNone/>
@@ -6071,7 +6071,7 @@
                 <a:ea typeface="Calibri" pitchFamily="34" charset="-122"/>
                 <a:cs typeface="Calibri" pitchFamily="34" charset="-120"/>
               </a:rPr>
-              <a:t> student kept </a:t>
+              <a:t> the heavy cart down the hill, but his little sister thought it was a </a:t>
             </a:r>
             <a:pPr algn="l" indent="0" marL="0">
               <a:buNone/>
@@ -6088,7 +6088,7 @@
                 <a:ea typeface="Calibri" pitchFamily="34" charset="-122"/>
                 <a:cs typeface="Calibri" pitchFamily="34" charset="-120"/>
               </a:rPr>
-              <a:t>pushing</a:t>
+              <a:t>pushover</a:t>
             </a:r>
             <a:pPr algn="l" indent="0" marL="0">
               <a:buNone/>
@@ -6102,7 +6102,7 @@
                 <a:ea typeface="Calibri" pitchFamily="34" charset="-122"/>
                 <a:cs typeface="Calibri" pitchFamily="34" charset="-120"/>
               </a:rPr>
-              <a:t> past everyone in the lunch queue.</a:t>
+              <a:t>!</a:t>
             </a:r>
             <a:endParaRPr lang="en-US" sz="1800" dirty="0"/>
           </a:p>
@@ -6257,7 +6257,7 @@
                 <a:ea typeface="Trebuchet MS" pitchFamily="34" charset="-122"/>
                 <a:cs typeface="Trebuchet MS" pitchFamily="34" charset="-120"/>
               </a:rPr>
-              <a:t>pushy</a:t>
+              <a:t>pushing</a:t>
             </a:r>
             <a:endParaRPr lang="en-US" sz="1400" dirty="0"/>
           </a:p>
@@ -6385,7 +6385,7 @@
                 <a:ea typeface="Trebuchet MS" pitchFamily="34" charset="-122"/>
                 <a:cs typeface="Trebuchet MS" pitchFamily="34" charset="-120"/>
               </a:rPr>
-              <a:t>pushing</a:t>
+              <a:t>pushover</a:t>
             </a:r>
             <a:endParaRPr lang="en-US" sz="1400" dirty="0"/>
           </a:p>
@@ -6716,7 +6716,7 @@
                 <a:ea typeface="Calibri" pitchFamily="34" charset="-122"/>
                 <a:cs typeface="Calibri" pitchFamily="34" charset="-120"/>
               </a:rPr>
-              <a:t>Word Labs  •  wordlabs.app  •  Root: 'push' = to move forward with force</a:t>
+              <a:t>Word Labs  •  wordlabs.app  •  Root: 'push' = to press or move forward</a:t>
             </a:r>
             <a:endParaRPr lang="en-US" sz="800" dirty="0"/>
           </a:p>
@@ -6855,7 +6855,7 @@
                 <a:ea typeface="Trebuchet MS" pitchFamily="34" charset="-122"/>
                 <a:cs typeface="Trebuchet MS" pitchFamily="34" charset="-120"/>
               </a:rPr>
-              <a:t>pushy</a:t>
+              <a:t>pushing</a:t>
             </a:r>
             <a:endParaRPr lang="en-US" sz="2800" dirty="0"/>
           </a:p>
@@ -7543,7 +7543,7 @@
                 <a:ea typeface="Calibri" pitchFamily="34" charset="-122"/>
                 <a:cs typeface="Calibri" pitchFamily="34" charset="-120"/>
               </a:rPr>
-              <a:t>Word Labs  •  wordlabs.app  •  Root: 'push' = to move forward with force</a:t>
+              <a:t>Word Labs  •  wordlabs.app  •  Root: 'push' = to press or move forward</a:t>
             </a:r>
             <a:endParaRPr lang="en-US" sz="800" dirty="0"/>
           </a:p>
@@ -7682,7 +7682,7 @@
                 <a:ea typeface="Trebuchet MS" pitchFamily="34" charset="-122"/>
                 <a:cs typeface="Trebuchet MS" pitchFamily="34" charset="-120"/>
               </a:rPr>
-              <a:t>pushy</a:t>
+              <a:t>pushing</a:t>
             </a:r>
             <a:endParaRPr lang="en-US" sz="2800" dirty="0"/>
           </a:p>
@@ -7860,7 +7860,7 @@
                 <a:ea typeface="Calibri" pitchFamily="34" charset="-122"/>
                 <a:cs typeface="Calibri" pitchFamily="34" charset="-120"/>
               </a:rPr>
-              <a:t>to move with force</a:t>
+              <a:t>to press or move forward</a:t>
             </a:r>
             <a:endParaRPr lang="en-US" sz="850" dirty="0"/>
           </a:p>
@@ -7933,7 +7933,7 @@
                 <a:ea typeface="Trebuchet MS" pitchFamily="34" charset="-122"/>
                 <a:cs typeface="Trebuchet MS" pitchFamily="34" charset="-120"/>
               </a:rPr>
-              <a:t>y</a:t>
+              <a:t>ing</a:t>
             </a:r>
             <a:endParaRPr lang="en-US" sz="1300" dirty="0"/>
           </a:p>
@@ -7972,7 +7972,7 @@
                 <a:ea typeface="Calibri" pitchFamily="34" charset="-122"/>
                 <a:cs typeface="Calibri" pitchFamily="34" charset="-120"/>
               </a:rPr>
-              <a:t>having the quality of</a:t>
+              <a:t>action happening now</a:t>
             </a:r>
             <a:endParaRPr lang="en-US" sz="850" dirty="0"/>
           </a:p>
@@ -8528,7 +8528,7 @@
                 <a:ea typeface="Calibri" pitchFamily="34" charset="-122"/>
                 <a:cs typeface="Calibri" pitchFamily="34" charset="-120"/>
               </a:rPr>
-              <a:t>Word Labs  •  wordlabs.app  •  Root: 'push' = to move forward with force</a:t>
+              <a:t>Word Labs  •  wordlabs.app  •  Root: 'push' = to press or move forward</a:t>
             </a:r>
             <a:endParaRPr lang="en-US" sz="800" dirty="0"/>
           </a:p>
@@ -8667,7 +8667,7 @@
                 <a:ea typeface="Trebuchet MS" pitchFamily="34" charset="-122"/>
                 <a:cs typeface="Trebuchet MS" pitchFamily="34" charset="-120"/>
               </a:rPr>
-              <a:t>pushy</a:t>
+              <a:t>pushing</a:t>
             </a:r>
             <a:endParaRPr lang="en-US" sz="2800" dirty="0"/>
           </a:p>
@@ -8845,7 +8845,7 @@
                 <a:ea typeface="Calibri" pitchFamily="34" charset="-122"/>
                 <a:cs typeface="Calibri" pitchFamily="34" charset="-120"/>
               </a:rPr>
-              <a:t>to move with force</a:t>
+              <a:t>to press or move forward</a:t>
             </a:r>
             <a:endParaRPr lang="en-US" sz="850" dirty="0"/>
           </a:p>
@@ -8918,7 +8918,7 @@
                 <a:ea typeface="Trebuchet MS" pitchFamily="34" charset="-122"/>
                 <a:cs typeface="Trebuchet MS" pitchFamily="34" charset="-120"/>
               </a:rPr>
-              <a:t>y</a:t>
+              <a:t>ing</a:t>
             </a:r>
             <a:endParaRPr lang="en-US" sz="1300" dirty="0"/>
           </a:p>
@@ -8957,7 +8957,7 @@
                 <a:ea typeface="Calibri" pitchFamily="34" charset="-122"/>
                 <a:cs typeface="Calibri" pitchFamily="34" charset="-120"/>
               </a:rPr>
-              <a:t>having the quality of</a:t>
+              <a:t>action happening now</a:t>
             </a:r>
             <a:endParaRPr lang="en-US" sz="850" dirty="0"/>
           </a:p>
@@ -9221,7 +9221,7 @@
                 <a:ea typeface="Trebuchet MS" pitchFamily="34" charset="-122"/>
                 <a:cs typeface="Trebuchet MS" pitchFamily="34" charset="-120"/>
               </a:rPr>
-              <a:t>y</a:t>
+              <a:t>ing</a:t>
             </a:r>
             <a:endParaRPr lang="en-US" sz="1400" dirty="0"/>
           </a:p>
@@ -9645,7 +9645,7 @@
                 <a:ea typeface="Calibri" pitchFamily="34" charset="-122"/>
                 <a:cs typeface="Calibri" pitchFamily="34" charset="-120"/>
               </a:rPr>
-              <a:t>Word Labs  •  wordlabs.app  •  Root: 'push' = to move forward with force</a:t>
+              <a:t>Word Labs  •  wordlabs.app  •  Root: 'push' = to press or move forward</a:t>
             </a:r>
             <a:endParaRPr lang="en-US" sz="800" dirty="0"/>
           </a:p>
@@ -9784,7 +9784,7 @@
                 <a:ea typeface="Trebuchet MS" pitchFamily="34" charset="-122"/>
                 <a:cs typeface="Trebuchet MS" pitchFamily="34" charset="-120"/>
               </a:rPr>
-              <a:t>pushy</a:t>
+              <a:t>pushing</a:t>
             </a:r>
             <a:endParaRPr lang="en-US" sz="2800" dirty="0"/>
           </a:p>
@@ -9962,7 +9962,7 @@
                 <a:ea typeface="Calibri" pitchFamily="34" charset="-122"/>
                 <a:cs typeface="Calibri" pitchFamily="34" charset="-120"/>
               </a:rPr>
-              <a:t>to move with force</a:t>
+              <a:t>to press or move forward</a:t>
             </a:r>
             <a:endParaRPr lang="en-US" sz="850" dirty="0"/>
           </a:p>
@@ -10035,7 +10035,7 @@
                 <a:ea typeface="Trebuchet MS" pitchFamily="34" charset="-122"/>
                 <a:cs typeface="Trebuchet MS" pitchFamily="34" charset="-120"/>
               </a:rPr>
-              <a:t>y</a:t>
+              <a:t>ing</a:t>
             </a:r>
             <a:endParaRPr lang="en-US" sz="1300" dirty="0"/>
           </a:p>
@@ -10074,7 +10074,7 @@
                 <a:ea typeface="Calibri" pitchFamily="34" charset="-122"/>
                 <a:cs typeface="Calibri" pitchFamily="34" charset="-120"/>
               </a:rPr>
-              <a:t>having the quality of</a:t>
+              <a:t>action happening now</a:t>
             </a:r>
             <a:endParaRPr lang="en-US" sz="850" dirty="0"/>
           </a:p>
@@ -10338,7 +10338,7 @@
                 <a:ea typeface="Trebuchet MS" pitchFamily="34" charset="-122"/>
                 <a:cs typeface="Trebuchet MS" pitchFamily="34" charset="-120"/>
               </a:rPr>
-              <a:t>y</a:t>
+              <a:t>ing</a:t>
             </a:r>
             <a:endParaRPr lang="en-US" sz="1400" dirty="0"/>
           </a:p>
@@ -10445,7 +10445,7 @@
         </p:nvSpPr>
         <p:spPr>
           <a:xfrm>
-            <a:off x="2670048" y="4169664"/>
+            <a:off x="2427732" y="4169664"/>
             <a:ext cx="685800" cy="475488"/>
           </a:xfrm>
           <a:prstGeom prst="rect">
@@ -10472,7 +10472,7 @@
         </p:nvSpPr>
         <p:spPr>
           <a:xfrm>
-            <a:off x="2670048" y="4169664"/>
+            <a:off x="2427732" y="4169664"/>
             <a:ext cx="685800" cy="475488"/>
           </a:xfrm>
           <a:prstGeom prst="rect">
@@ -10511,7 +10511,7 @@
         </p:nvSpPr>
         <p:spPr>
           <a:xfrm>
-            <a:off x="4123944" y="4169664"/>
+            <a:off x="3639312" y="4169664"/>
             <a:ext cx="685800" cy="475488"/>
           </a:xfrm>
           <a:prstGeom prst="rect">
@@ -10538,7 +10538,7 @@
         </p:nvSpPr>
         <p:spPr>
           <a:xfrm>
-            <a:off x="4123944" y="4169664"/>
+            <a:off x="3639312" y="4169664"/>
             <a:ext cx="685800" cy="475488"/>
           </a:xfrm>
           <a:prstGeom prst="rect">
@@ -10577,7 +10577,7 @@
         </p:nvSpPr>
         <p:spPr>
           <a:xfrm>
-            <a:off x="5577840" y="4169664"/>
+            <a:off x="4850892" y="4169664"/>
             <a:ext cx="685800" cy="475488"/>
           </a:xfrm>
           <a:prstGeom prst="rect">
@@ -10604,7 +10604,7 @@
         </p:nvSpPr>
         <p:spPr>
           <a:xfrm>
-            <a:off x="5577840" y="4169664"/>
+            <a:off x="4850892" y="4169664"/>
             <a:ext cx="685800" cy="475488"/>
           </a:xfrm>
           <a:prstGeom prst="rect">
@@ -10643,7 +10643,7 @@
         </p:nvSpPr>
         <p:spPr>
           <a:xfrm>
-            <a:off x="7031736" y="4169664"/>
+            <a:off x="6062472" y="4169664"/>
             <a:ext cx="685800" cy="475488"/>
           </a:xfrm>
           <a:prstGeom prst="rect">
@@ -10670,7 +10670,7 @@
         </p:nvSpPr>
         <p:spPr>
           <a:xfrm>
-            <a:off x="7031736" y="4169664"/>
+            <a:off x="6062472" y="4169664"/>
             <a:ext cx="685800" cy="475488"/>
           </a:xfrm>
           <a:prstGeom prst="rect">
@@ -10695,7 +10695,73 @@
                 <a:ea typeface="Trebuchet MS" pitchFamily="34" charset="-122"/>
                 <a:cs typeface="Trebuchet MS" pitchFamily="34" charset="-120"/>
               </a:rPr>
-              <a:t>y</a:t>
+              <a:t>i</a:t>
+            </a:r>
+            <a:endParaRPr lang="en-US" sz="900" dirty="0"/>
+          </a:p>
+        </p:txBody>
+      </p:sp>
+      <p:sp>
+        <p:nvSpPr>
+          <p:cNvPr id="41" name="Shape 39"/>
+          <p:cNvSpPr/>
+          <p:nvPr/>
+        </p:nvSpPr>
+        <p:spPr>
+          <a:xfrm>
+            <a:off x="7274052" y="4169664"/>
+            <a:ext cx="685800" cy="475488"/>
+          </a:xfrm>
+          <a:prstGeom prst="rect">
+            <a:avLst>
+              <a:gd name="adj" fmla="val 7692"/>
+            </a:avLst>
+          </a:prstGeom>
+          <a:solidFill>
+            <a:srgbClr val="FFFFFF"/>
+          </a:solidFill>
+          <a:ln w="12700">
+            <a:solidFill>
+              <a:srgbClr val="DB2777"/>
+            </a:solidFill>
+            <a:prstDash val="solid"/>
+          </a:ln>
+        </p:spPr>
+      </p:sp>
+      <p:sp>
+        <p:nvSpPr>
+          <p:cNvPr id="42" name="Text 40"/>
+          <p:cNvSpPr/>
+          <p:nvPr/>
+        </p:nvSpPr>
+        <p:spPr>
+          <a:xfrm>
+            <a:off x="7274052" y="4169664"/>
+            <a:ext cx="685800" cy="475488"/>
+          </a:xfrm>
+          <a:prstGeom prst="rect">
+            <a:avLst/>
+          </a:prstGeom>
+          <a:noFill/>
+          <a:ln/>
+        </p:spPr>
+        <p:txBody>
+          <a:bodyPr wrap="square" lIns="0" tIns="0" rIns="0" bIns="0" rtlCol="0" anchor="ctr"/>
+          <a:lstStyle/>
+          <a:p>
+            <a:pPr algn="ctr" indent="0" marL="0">
+              <a:buNone/>
+            </a:pPr>
+            <a:r>
+              <a:rPr lang="en-US" sz="900" b="1" dirty="0">
+                <a:solidFill>
+                  <a:srgbClr val="9D174D"/>
+                </a:solidFill>
+                <a:latin typeface="Trebuchet MS" pitchFamily="34" charset="0"/>
+                <a:ea typeface="Trebuchet MS" pitchFamily="34" charset="-122"/>
+                <a:cs typeface="Trebuchet MS" pitchFamily="34" charset="-120"/>
+              </a:rPr>
+              <a:t>ng</a:t>
             </a:r>
             <a:endParaRPr lang="en-US" sz="900" dirty="0"/>
           </a:p>
@@ -10987,7 +11053,7 @@
                 <a:ea typeface="Calibri" pitchFamily="34" charset="-122"/>
                 <a:cs typeface="Calibri" pitchFamily="34" charset="-120"/>
               </a:rPr>
-              <a:t>Word Labs  •  wordlabs.app  •  Root: 'push' = to move forward with force</a:t>
+              <a:t>Word Labs  •  wordlabs.app  •  Root: 'push' = to press or move forward</a:t>
             </a:r>
             <a:endParaRPr lang="en-US" sz="800" dirty="0"/>
           </a:p>
@@ -11126,7 +11192,7 @@
                 <a:ea typeface="Trebuchet MS" pitchFamily="34" charset="-122"/>
                 <a:cs typeface="Trebuchet MS" pitchFamily="34" charset="-120"/>
               </a:rPr>
-              <a:t>pushing</a:t>
+              <a:t>pushover</a:t>
             </a:r>
             <a:endParaRPr lang="en-US" sz="2800" dirty="0"/>
           </a:p>
@@ -11814,7 +11880,7 @@
                 <a:ea typeface="Calibri" pitchFamily="34" charset="-122"/>
                 <a:cs typeface="Calibri" pitchFamily="34" charset="-120"/>
               </a:rPr>
-              <a:t>Word Labs  •  wordlabs.app  •  Root: 'push' = to move forward with force</a:t>
+              <a:t>Word Labs  •  wordlabs.app  •  Root: 'push' = to press or move forward</a:t>
             </a:r>
             <a:endParaRPr lang="en-US" sz="800" dirty="0"/>
           </a:p>
@@ -11953,7 +12019,7 @@
                 <a:ea typeface="Trebuchet MS" pitchFamily="34" charset="-122"/>
                 <a:cs typeface="Trebuchet MS" pitchFamily="34" charset="-120"/>
               </a:rPr>
-              <a:t>pushing</a:t>
+              <a:t>pushover</a:t>
             </a:r>
             <a:endParaRPr lang="en-US" sz="2800" dirty="0"/>
           </a:p>
@@ -12131,7 +12197,7 @@
                 <a:ea typeface="Calibri" pitchFamily="34" charset="-122"/>
                 <a:cs typeface="Calibri" pitchFamily="34" charset="-120"/>
               </a:rPr>
-              <a:t>to move with force</a:t>
+              <a:t>to press or move forward</a:t>
             </a:r>
             <a:endParaRPr lang="en-US" sz="850" dirty="0"/>
           </a:p>
@@ -12204,7 +12270,7 @@
                 <a:ea typeface="Trebuchet MS" pitchFamily="34" charset="-122"/>
                 <a:cs typeface="Trebuchet MS" pitchFamily="34" charset="-120"/>
               </a:rPr>
-              <a:t>ing</a:t>
+              <a:t>over</a:t>
             </a:r>
             <a:endParaRPr lang="en-US" sz="1300" dirty="0"/>
           </a:p>
@@ -12243,7 +12309,7 @@
                 <a:ea typeface="Calibri" pitchFamily="34" charset="-122"/>
                 <a:cs typeface="Calibri" pitchFamily="34" charset="-120"/>
               </a:rPr>
-              <a:t>action happening now</a:t>
+              <a:t>across or beyond</a:t>
             </a:r>
             <a:endParaRPr lang="en-US" sz="850" dirty="0"/>
           </a:p>
@@ -12799,7 +12865,7 @@
                 <a:ea typeface="Calibri" pitchFamily="34" charset="-122"/>
                 <a:cs typeface="Calibri" pitchFamily="34" charset="-120"/>
               </a:rPr>
-              <a:t>Word Labs  •  wordlabs.app  •  Root: 'push' = to move forward with force</a:t>
+              <a:t>Word Labs  •  wordlabs.app  •  Root: 'push' = to press or move forward</a:t>
             </a:r>
             <a:endParaRPr lang="en-US" sz="800" dirty="0"/>
           </a:p>
@@ -12938,7 +13004,7 @@
                 <a:ea typeface="Trebuchet MS" pitchFamily="34" charset="-122"/>
                 <a:cs typeface="Trebuchet MS" pitchFamily="34" charset="-120"/>
               </a:rPr>
-              <a:t>pushing</a:t>
+              <a:t>pushover</a:t>
             </a:r>
             <a:endParaRPr lang="en-US" sz="2800" dirty="0"/>
           </a:p>
@@ -13116,7 +13182,7 @@
                 <a:ea typeface="Calibri" pitchFamily="34" charset="-122"/>
                 <a:cs typeface="Calibri" pitchFamily="34" charset="-120"/>
               </a:rPr>
-              <a:t>to move with force</a:t>
+              <a:t>to press or move forward</a:t>
             </a:r>
             <a:endParaRPr lang="en-US" sz="850" dirty="0"/>
           </a:p>
@@ -13189,7 +13255,7 @@
                 <a:ea typeface="Trebuchet MS" pitchFamily="34" charset="-122"/>
                 <a:cs typeface="Trebuchet MS" pitchFamily="34" charset="-120"/>
               </a:rPr>
-              <a:t>ing</a:t>
+              <a:t>over</a:t>
             </a:r>
             <a:endParaRPr lang="en-US" sz="1300" dirty="0"/>
           </a:p>
@@ -13228,7 +13294,7 @@
                 <a:ea typeface="Calibri" pitchFamily="34" charset="-122"/>
                 <a:cs typeface="Calibri" pitchFamily="34" charset="-120"/>
               </a:rPr>
-              <a:t>action happening now</a:t>
+              <a:t>across or beyond</a:t>
             </a:r>
             <a:endParaRPr lang="en-US" sz="850" dirty="0"/>
           </a:p>
@@ -13335,7 +13401,7 @@
         </p:nvSpPr>
         <p:spPr>
           <a:xfrm>
-            <a:off x="2999232" y="3364992"/>
+            <a:off x="2313432" y="3364992"/>
             <a:ext cx="1645920" cy="475488"/>
           </a:xfrm>
           <a:prstGeom prst="rect">
@@ -13362,7 +13428,7 @@
         </p:nvSpPr>
         <p:spPr>
           <a:xfrm>
-            <a:off x="2999232" y="3364992"/>
+            <a:off x="2313432" y="3364992"/>
             <a:ext cx="1645920" cy="475488"/>
           </a:xfrm>
           <a:prstGeom prst="rect">
@@ -13401,8 +13467,8 @@
         </p:nvSpPr>
         <p:spPr>
           <a:xfrm>
-            <a:off x="4645152" y="3364992"/>
-            <a:ext cx="1097280" cy="475488"/>
+            <a:off x="3959352" y="3364992"/>
+            <a:ext cx="411480" cy="475488"/>
           </a:xfrm>
           <a:prstGeom prst="rect">
             <a:avLst/>
@@ -13440,7 +13506,7 @@
         </p:nvSpPr>
         <p:spPr>
           <a:xfrm>
-            <a:off x="5742432" y="3364992"/>
+            <a:off x="4370832" y="3364992"/>
             <a:ext cx="1645920" cy="475488"/>
           </a:xfrm>
           <a:prstGeom prst="rect">
@@ -13467,7 +13533,7 @@
         </p:nvSpPr>
         <p:spPr>
           <a:xfrm>
-            <a:off x="5742432" y="3364992"/>
+            <a:off x="4370832" y="3364992"/>
             <a:ext cx="1645920" cy="475488"/>
           </a:xfrm>
           <a:prstGeom prst="rect">
@@ -13492,7 +13558,7 @@
                 <a:ea typeface="Trebuchet MS" pitchFamily="34" charset="-122"/>
                 <a:cs typeface="Trebuchet MS" pitchFamily="34" charset="-120"/>
               </a:rPr>
-              <a:t>ing</a:t>
+              <a:t>o</a:t>
             </a:r>
             <a:endParaRPr lang="en-US" sz="1400" dirty="0"/>
           </a:p>
@@ -13500,7 +13566,112 @@
       </p:sp>
       <p:sp>
         <p:nvSpPr>
-          <p:cNvPr id="30" name="Shape 28"/>
+          <p:cNvPr id="30" name="Text 28"/>
+          <p:cNvSpPr/>
+          <p:nvPr/>
+        </p:nvSpPr>
+        <p:spPr>
+          <a:xfrm>
+            <a:off x="6016752" y="3364992"/>
+            <a:ext cx="411480" cy="475488"/>
+          </a:xfrm>
+          <a:prstGeom prst="rect">
+            <a:avLst/>
+          </a:prstGeom>
+          <a:noFill/>
+          <a:ln/>
+        </p:spPr>
+        <p:txBody>
+          <a:bodyPr wrap="square" lIns="0" tIns="0" rIns="0" bIns="0" rtlCol="0" anchor="ctr"/>
+          <a:lstStyle/>
+          <a:p>
+            <a:pPr algn="ctr" indent="0" marL="0">
+              <a:buNone/>
+            </a:pPr>
+            <a:r>
+              <a:rPr lang="en-US" sz="1600" b="1" dirty="0">
+                <a:solidFill>
+                  <a:srgbClr val="0D9488"/>
+                </a:solidFill>
+                <a:latin typeface="Trebuchet MS" pitchFamily="34" charset="0"/>
+                <a:ea typeface="Trebuchet MS" pitchFamily="34" charset="-122"/>
+                <a:cs typeface="Trebuchet MS" pitchFamily="34" charset="-120"/>
+              </a:rPr>
+              <a:t>·</a:t>
+            </a:r>
+            <a:endParaRPr lang="en-US" sz="1600" dirty="0"/>
+          </a:p>
+        </p:txBody>
+      </p:sp>
+      <p:sp>
+        <p:nvSpPr>
+          <p:cNvPr id="31" name="Shape 29"/>
+          <p:cNvSpPr/>
+          <p:nvPr/>
+        </p:nvSpPr>
+        <p:spPr>
+          <a:xfrm>
+            <a:off x="6428232" y="3364992"/>
+            <a:ext cx="1645920" cy="475488"/>
+          </a:xfrm>
+          <a:prstGeom prst="rect">
+            <a:avLst>
+              <a:gd name="adj" fmla="val 9615"/>
+            </a:avLst>
+          </a:prstGeom>
+          <a:solidFill>
+            <a:srgbClr val="FFFFFF"/>
+          </a:solidFill>
+          <a:ln w="12700">
+            <a:solidFill>
+              <a:srgbClr val="0D9488"/>
+            </a:solidFill>
+            <a:prstDash val="solid"/>
+          </a:ln>
+        </p:spPr>
+      </p:sp>
+      <p:sp>
+        <p:nvSpPr>
+          <p:cNvPr id="32" name="Text 30"/>
+          <p:cNvSpPr/>
+          <p:nvPr/>
+        </p:nvSpPr>
+        <p:spPr>
+          <a:xfrm>
+            <a:off x="6428232" y="3364992"/>
+            <a:ext cx="1645920" cy="475488"/>
+          </a:xfrm>
+          <a:prstGeom prst="rect">
+            <a:avLst/>
+          </a:prstGeom>
+          <a:noFill/>
+          <a:ln/>
+        </p:spPr>
+        <p:txBody>
+          <a:bodyPr wrap="square" lIns="0" tIns="0" rIns="0" bIns="0" rtlCol="0" anchor="ctr"/>
+          <a:lstStyle/>
+          <a:p>
+            <a:pPr algn="ctr" indent="0" marL="0">
+              <a:buNone/>
+            </a:pPr>
+            <a:r>
+              <a:rPr lang="en-US" sz="1400" b="1" dirty="0">
+                <a:solidFill>
+                  <a:srgbClr val="0D9488"/>
+                </a:solidFill>
+                <a:latin typeface="Trebuchet MS" pitchFamily="34" charset="0"/>
+                <a:ea typeface="Trebuchet MS" pitchFamily="34" charset="-122"/>
+                <a:cs typeface="Trebuchet MS" pitchFamily="34" charset="-120"/>
+              </a:rPr>
+              <a:t>ver</a:t>
+            </a:r>
+            <a:endParaRPr lang="en-US" sz="1400" dirty="0"/>
+          </a:p>
+        </p:txBody>
+      </p:sp>
+      <p:sp>
+        <p:nvSpPr>
+          <p:cNvPr id="33" name="Shape 31"/>
           <p:cNvSpPr/>
           <p:nvPr/>
         </p:nvSpPr>
@@ -13527,7 +13698,7 @@
       </p:sp>
       <p:sp>
         <p:nvSpPr>
-          <p:cNvPr id="31" name="Text 29"/>
+          <p:cNvPr id="34" name="Text 32"/>
           <p:cNvSpPr/>
           <p:nvPr/>
         </p:nvSpPr>
@@ -13566,7 +13737,7 @@
       </p:sp>
       <p:sp>
         <p:nvSpPr>
-          <p:cNvPr id="32" name="Shape 30"/>
+          <p:cNvPr id="35" name="Shape 33"/>
           <p:cNvSpPr/>
           <p:nvPr/>
         </p:nvSpPr>
@@ -13593,7 +13764,7 @@
       </p:sp>
       <p:sp>
         <p:nvSpPr>
-          <p:cNvPr id="33" name="Text 31"/>
+          <p:cNvPr id="36" name="Text 34"/>
           <p:cNvSpPr/>
           <p:nvPr/>
         </p:nvSpPr>
@@ -13825,7 +13996,7 @@
                 <a:ea typeface="Calibri" pitchFamily="34" charset="-122"/>
                 <a:cs typeface="Calibri" pitchFamily="34" charset="-120"/>
               </a:rPr>
-              <a:t>Root 'push' — to move forward with force</a:t>
+              <a:t>Root 'push' — to press or move forward</a:t>
             </a:r>
             <a:endParaRPr lang="en-US" sz="1600" dirty="0"/>
           </a:p>
@@ -14181,7 +14352,7 @@
                 <a:ea typeface="Calibri" pitchFamily="34" charset="-122"/>
                 <a:cs typeface="Calibri" pitchFamily="34" charset="-120"/>
               </a:rPr>
-              <a:t>Word Labs  •  wordlabs.app  •  Root: 'push' = to move forward with force</a:t>
+              <a:t>Word Labs  •  wordlabs.app  •  Root: 'push' = to press or move forward</a:t>
             </a:r>
             <a:endParaRPr lang="en-US" sz="800" dirty="0"/>
           </a:p>
@@ -14320,7 +14491,7 @@
                 <a:ea typeface="Trebuchet MS" pitchFamily="34" charset="-122"/>
                 <a:cs typeface="Trebuchet MS" pitchFamily="34" charset="-120"/>
               </a:rPr>
-              <a:t>pushing</a:t>
+              <a:t>pushover</a:t>
             </a:r>
             <a:endParaRPr lang="en-US" sz="2800" dirty="0"/>
           </a:p>
@@ -14498,7 +14669,7 @@
                 <a:ea typeface="Calibri" pitchFamily="34" charset="-122"/>
                 <a:cs typeface="Calibri" pitchFamily="34" charset="-120"/>
               </a:rPr>
-              <a:t>to move with force</a:t>
+              <a:t>to press or move forward</a:t>
             </a:r>
             <a:endParaRPr lang="en-US" sz="850" dirty="0"/>
           </a:p>
@@ -14571,7 +14742,7 @@
                 <a:ea typeface="Trebuchet MS" pitchFamily="34" charset="-122"/>
                 <a:cs typeface="Trebuchet MS" pitchFamily="34" charset="-120"/>
               </a:rPr>
-              <a:t>ing</a:t>
+              <a:t>over</a:t>
             </a:r>
             <a:endParaRPr lang="en-US" sz="1300" dirty="0"/>
           </a:p>
@@ -14610,7 +14781,7 @@
                 <a:ea typeface="Calibri" pitchFamily="34" charset="-122"/>
                 <a:cs typeface="Calibri" pitchFamily="34" charset="-120"/>
               </a:rPr>
-              <a:t>action happening now</a:t>
+              <a:t>across or beyond</a:t>
             </a:r>
             <a:endParaRPr lang="en-US" sz="850" dirty="0"/>
           </a:p>
@@ -14717,7 +14888,7 @@
         </p:nvSpPr>
         <p:spPr>
           <a:xfrm>
-            <a:off x="2999232" y="3364992"/>
+            <a:off x="2313432" y="3364992"/>
             <a:ext cx="1645920" cy="475488"/>
           </a:xfrm>
           <a:prstGeom prst="rect">
@@ -14744,7 +14915,7 @@
         </p:nvSpPr>
         <p:spPr>
           <a:xfrm>
-            <a:off x="2999232" y="3364992"/>
+            <a:off x="2313432" y="3364992"/>
             <a:ext cx="1645920" cy="475488"/>
           </a:xfrm>
           <a:prstGeom prst="rect">
@@ -14783,8 +14954,8 @@
         </p:nvSpPr>
         <p:spPr>
           <a:xfrm>
-            <a:off x="4645152" y="3364992"/>
-            <a:ext cx="1097280" cy="475488"/>
+            <a:off x="3959352" y="3364992"/>
+            <a:ext cx="411480" cy="475488"/>
           </a:xfrm>
           <a:prstGeom prst="rect">
             <a:avLst/>
@@ -14822,7 +14993,7 @@
         </p:nvSpPr>
         <p:spPr>
           <a:xfrm>
-            <a:off x="5742432" y="3364992"/>
+            <a:off x="4370832" y="3364992"/>
             <a:ext cx="1645920" cy="475488"/>
           </a:xfrm>
           <a:prstGeom prst="rect">
@@ -14849,7 +15020,7 @@
         </p:nvSpPr>
         <p:spPr>
           <a:xfrm>
-            <a:off x="5742432" y="3364992"/>
+            <a:off x="4370832" y="3364992"/>
             <a:ext cx="1645920" cy="475488"/>
           </a:xfrm>
           <a:prstGeom prst="rect">
@@ -14874,7 +15045,7 @@
                 <a:ea typeface="Trebuchet MS" pitchFamily="34" charset="-122"/>
                 <a:cs typeface="Trebuchet MS" pitchFamily="34" charset="-120"/>
               </a:rPr>
-              <a:t>ing</a:t>
+              <a:t>o</a:t>
             </a:r>
             <a:endParaRPr lang="en-US" sz="1400" dirty="0"/>
           </a:p>
@@ -14882,7 +15053,112 @@
       </p:sp>
       <p:sp>
         <p:nvSpPr>
-          <p:cNvPr id="30" name="Shape 28"/>
+          <p:cNvPr id="30" name="Text 28"/>
+          <p:cNvSpPr/>
+          <p:nvPr/>
+        </p:nvSpPr>
+        <p:spPr>
+          <a:xfrm>
+            <a:off x="6016752" y="3364992"/>
+            <a:ext cx="411480" cy="475488"/>
+          </a:xfrm>
+          <a:prstGeom prst="rect">
+            <a:avLst/>
+          </a:prstGeom>
+          <a:noFill/>
+          <a:ln/>
+        </p:spPr>
+        <p:txBody>
+          <a:bodyPr wrap="square" lIns="0" tIns="0" rIns="0" bIns="0" rtlCol="0" anchor="ctr"/>
+          <a:lstStyle/>
+          <a:p>
+            <a:pPr algn="ctr" indent="0" marL="0">
+              <a:buNone/>
+            </a:pPr>
+            <a:r>
+              <a:rPr lang="en-US" sz="1600" b="1" dirty="0">
+                <a:solidFill>
+                  <a:srgbClr val="0D9488"/>
+                </a:solidFill>
+                <a:latin typeface="Trebuchet MS" pitchFamily="34" charset="0"/>
+                <a:ea typeface="Trebuchet MS" pitchFamily="34" charset="-122"/>
+                <a:cs typeface="Trebuchet MS" pitchFamily="34" charset="-120"/>
+              </a:rPr>
+              <a:t>·</a:t>
+            </a:r>
+            <a:endParaRPr lang="en-US" sz="1600" dirty="0"/>
+          </a:p>
+        </p:txBody>
+      </p:sp>
+      <p:sp>
+        <p:nvSpPr>
+          <p:cNvPr id="31" name="Shape 29"/>
+          <p:cNvSpPr/>
+          <p:nvPr/>
+        </p:nvSpPr>
+        <p:spPr>
+          <a:xfrm>
+            <a:off x="6428232" y="3364992"/>
+            <a:ext cx="1645920" cy="475488"/>
+          </a:xfrm>
+          <a:prstGeom prst="rect">
+            <a:avLst>
+              <a:gd name="adj" fmla="val 9615"/>
+            </a:avLst>
+          </a:prstGeom>
+          <a:solidFill>
+            <a:srgbClr val="FFFFFF"/>
+          </a:solidFill>
+          <a:ln w="12700">
+            <a:solidFill>
+              <a:srgbClr val="0D9488"/>
+            </a:solidFill>
+            <a:prstDash val="solid"/>
+          </a:ln>
+        </p:spPr>
+      </p:sp>
+      <p:sp>
+        <p:nvSpPr>
+          <p:cNvPr id="32" name="Text 30"/>
+          <p:cNvSpPr/>
+          <p:nvPr/>
+        </p:nvSpPr>
+        <p:spPr>
+          <a:xfrm>
+            <a:off x="6428232" y="3364992"/>
+            <a:ext cx="1645920" cy="475488"/>
+          </a:xfrm>
+          <a:prstGeom prst="rect">
+            <a:avLst/>
+          </a:prstGeom>
+          <a:noFill/>
+          <a:ln/>
+        </p:spPr>
+        <p:txBody>
+          <a:bodyPr wrap="square" lIns="0" tIns="0" rIns="0" bIns="0" rtlCol="0" anchor="ctr"/>
+          <a:lstStyle/>
+          <a:p>
+            <a:pPr algn="ctr" indent="0" marL="0">
+              <a:buNone/>
+            </a:pPr>
+            <a:r>
+              <a:rPr lang="en-US" sz="1400" b="1" dirty="0">
+                <a:solidFill>
+                  <a:srgbClr val="0D9488"/>
+                </a:solidFill>
+                <a:latin typeface="Trebuchet MS" pitchFamily="34" charset="0"/>
+                <a:ea typeface="Trebuchet MS" pitchFamily="34" charset="-122"/>
+                <a:cs typeface="Trebuchet MS" pitchFamily="34" charset="-120"/>
+              </a:rPr>
+              <a:t>ver</a:t>
+            </a:r>
+            <a:endParaRPr lang="en-US" sz="1400" dirty="0"/>
+          </a:p>
+        </p:txBody>
+      </p:sp>
+      <p:sp>
+        <p:nvSpPr>
+          <p:cNvPr id="33" name="Shape 31"/>
           <p:cNvSpPr/>
           <p:nvPr/>
         </p:nvSpPr>
@@ -14909,7 +15185,7 @@
       </p:sp>
       <p:sp>
         <p:nvSpPr>
-          <p:cNvPr id="31" name="Text 29"/>
+          <p:cNvPr id="34" name="Text 32"/>
           <p:cNvSpPr/>
           <p:nvPr/>
         </p:nvSpPr>
@@ -14948,7 +15224,7 @@
       </p:sp>
       <p:sp>
         <p:nvSpPr>
-          <p:cNvPr id="32" name="Shape 30"/>
+          <p:cNvPr id="35" name="Shape 33"/>
           <p:cNvSpPr/>
           <p:nvPr/>
         </p:nvSpPr>
@@ -14975,13 +15251,13 @@
       </p:sp>
       <p:sp>
         <p:nvSpPr>
-          <p:cNvPr id="33" name="Shape 31"/>
-          <p:cNvSpPr/>
-          <p:nvPr/>
-        </p:nvSpPr>
-        <p:spPr>
-          <a:xfrm>
-            <a:off x="2427732" y="4169664"/>
+          <p:cNvPr id="36" name="Shape 34"/>
+          <p:cNvSpPr/>
+          <p:nvPr/>
+        </p:nvSpPr>
+        <p:spPr>
+          <a:xfrm>
+            <a:off x="2254649" y="4169664"/>
             <a:ext cx="685800" cy="475488"/>
           </a:xfrm>
           <a:prstGeom prst="rect">
@@ -15002,13 +15278,13 @@
       </p:sp>
       <p:sp>
         <p:nvSpPr>
-          <p:cNvPr id="34" name="Text 32"/>
-          <p:cNvSpPr/>
-          <p:nvPr/>
-        </p:nvSpPr>
-        <p:spPr>
-          <a:xfrm>
-            <a:off x="2427732" y="4169664"/>
+          <p:cNvPr id="37" name="Text 35"/>
+          <p:cNvSpPr/>
+          <p:nvPr/>
+        </p:nvSpPr>
+        <p:spPr>
+          <a:xfrm>
+            <a:off x="2254649" y="4169664"/>
             <a:ext cx="685800" cy="475488"/>
           </a:xfrm>
           <a:prstGeom prst="rect">
@@ -15041,13 +15317,13 @@
       </p:sp>
       <p:sp>
         <p:nvSpPr>
-          <p:cNvPr id="35" name="Shape 33"/>
-          <p:cNvSpPr/>
-          <p:nvPr/>
-        </p:nvSpPr>
-        <p:spPr>
-          <a:xfrm>
-            <a:off x="3639312" y="4169664"/>
+          <p:cNvPr id="38" name="Shape 36"/>
+          <p:cNvSpPr/>
+          <p:nvPr/>
+        </p:nvSpPr>
+        <p:spPr>
+          <a:xfrm>
+            <a:off x="3293146" y="4169664"/>
             <a:ext cx="685800" cy="475488"/>
           </a:xfrm>
           <a:prstGeom prst="rect">
@@ -15068,13 +15344,13 @@
       </p:sp>
       <p:sp>
         <p:nvSpPr>
-          <p:cNvPr id="36" name="Text 34"/>
-          <p:cNvSpPr/>
-          <p:nvPr/>
-        </p:nvSpPr>
-        <p:spPr>
-          <a:xfrm>
-            <a:off x="3639312" y="4169664"/>
+          <p:cNvPr id="39" name="Text 37"/>
+          <p:cNvSpPr/>
+          <p:nvPr/>
+        </p:nvSpPr>
+        <p:spPr>
+          <a:xfrm>
+            <a:off x="3293146" y="4169664"/>
             <a:ext cx="685800" cy="475488"/>
           </a:xfrm>
           <a:prstGeom prst="rect">
@@ -15107,13 +15383,13 @@
       </p:sp>
       <p:sp>
         <p:nvSpPr>
-          <p:cNvPr id="37" name="Shape 35"/>
-          <p:cNvSpPr/>
-          <p:nvPr/>
-        </p:nvSpPr>
-        <p:spPr>
-          <a:xfrm>
-            <a:off x="4850892" y="4169664"/>
+          <p:cNvPr id="40" name="Shape 38"/>
+          <p:cNvSpPr/>
+          <p:nvPr/>
+        </p:nvSpPr>
+        <p:spPr>
+          <a:xfrm>
+            <a:off x="4331643" y="4169664"/>
             <a:ext cx="685800" cy="475488"/>
           </a:xfrm>
           <a:prstGeom prst="rect">
@@ -15134,13 +15410,13 @@
       </p:sp>
       <p:sp>
         <p:nvSpPr>
-          <p:cNvPr id="38" name="Text 36"/>
-          <p:cNvSpPr/>
-          <p:nvPr/>
-        </p:nvSpPr>
-        <p:spPr>
-          <a:xfrm>
-            <a:off x="4850892" y="4169664"/>
+          <p:cNvPr id="41" name="Text 39"/>
+          <p:cNvSpPr/>
+          <p:nvPr/>
+        </p:nvSpPr>
+        <p:spPr>
+          <a:xfrm>
+            <a:off x="4331643" y="4169664"/>
             <a:ext cx="685800" cy="475488"/>
           </a:xfrm>
           <a:prstGeom prst="rect">
@@ -15173,13 +15449,13 @@
       </p:sp>
       <p:sp>
         <p:nvSpPr>
-          <p:cNvPr id="39" name="Shape 37"/>
-          <p:cNvSpPr/>
-          <p:nvPr/>
-        </p:nvSpPr>
-        <p:spPr>
-          <a:xfrm>
-            <a:off x="6062472" y="4169664"/>
+          <p:cNvPr id="42" name="Shape 40"/>
+          <p:cNvSpPr/>
+          <p:nvPr/>
+        </p:nvSpPr>
+        <p:spPr>
+          <a:xfrm>
+            <a:off x="5370141" y="4169664"/>
             <a:ext cx="685800" cy="475488"/>
           </a:xfrm>
           <a:prstGeom prst="rect">
@@ -15200,13 +15476,13 @@
       </p:sp>
       <p:sp>
         <p:nvSpPr>
-          <p:cNvPr id="40" name="Text 38"/>
-          <p:cNvSpPr/>
-          <p:nvPr/>
-        </p:nvSpPr>
-        <p:spPr>
-          <a:xfrm>
-            <a:off x="6062472" y="4169664"/>
+          <p:cNvPr id="43" name="Text 41"/>
+          <p:cNvSpPr/>
+          <p:nvPr/>
+        </p:nvSpPr>
+        <p:spPr>
+          <a:xfrm>
+            <a:off x="5370141" y="4169664"/>
             <a:ext cx="685800" cy="475488"/>
           </a:xfrm>
           <a:prstGeom prst="rect">
@@ -15231,7 +15507,7 @@
                 <a:ea typeface="Trebuchet MS" pitchFamily="34" charset="-122"/>
                 <a:cs typeface="Trebuchet MS" pitchFamily="34" charset="-120"/>
               </a:rPr>
-              <a:t>i</a:t>
+              <a:t>o</a:t>
             </a:r>
             <a:endParaRPr lang="en-US" sz="900" dirty="0"/>
           </a:p>
@@ -15239,13 +15515,13 @@
       </p:sp>
       <p:sp>
         <p:nvSpPr>
-          <p:cNvPr id="41" name="Shape 39"/>
-          <p:cNvSpPr/>
-          <p:nvPr/>
-        </p:nvSpPr>
-        <p:spPr>
-          <a:xfrm>
-            <a:off x="7274052" y="4169664"/>
+          <p:cNvPr id="44" name="Shape 42"/>
+          <p:cNvSpPr/>
+          <p:nvPr/>
+        </p:nvSpPr>
+        <p:spPr>
+          <a:xfrm>
+            <a:off x="6408638" y="4169664"/>
             <a:ext cx="685800" cy="475488"/>
           </a:xfrm>
           <a:prstGeom prst="rect">
@@ -15266,13 +15542,13 @@
       </p:sp>
       <p:sp>
         <p:nvSpPr>
-          <p:cNvPr id="42" name="Text 40"/>
-          <p:cNvSpPr/>
-          <p:nvPr/>
-        </p:nvSpPr>
-        <p:spPr>
-          <a:xfrm>
-            <a:off x="7274052" y="4169664"/>
+          <p:cNvPr id="45" name="Text 43"/>
+          <p:cNvSpPr/>
+          <p:nvPr/>
+        </p:nvSpPr>
+        <p:spPr>
+          <a:xfrm>
+            <a:off x="6408638" y="4169664"/>
             <a:ext cx="685800" cy="475488"/>
           </a:xfrm>
           <a:prstGeom prst="rect">
@@ -15297,7 +15573,73 @@
                 <a:ea typeface="Trebuchet MS" pitchFamily="34" charset="-122"/>
                 <a:cs typeface="Trebuchet MS" pitchFamily="34" charset="-120"/>
               </a:rPr>
-              <a:t>ng</a:t>
+              <a:t>v</a:t>
+            </a:r>
+            <a:endParaRPr lang="en-US" sz="900" dirty="0"/>
+          </a:p>
+        </p:txBody>
+      </p:sp>
+      <p:sp>
+        <p:nvSpPr>
+          <p:cNvPr id="46" name="Shape 44"/>
+          <p:cNvSpPr/>
+          <p:nvPr/>
+        </p:nvSpPr>
+        <p:spPr>
+          <a:xfrm>
+            <a:off x="7447135" y="4169664"/>
+            <a:ext cx="685800" cy="475488"/>
+          </a:xfrm>
+          <a:prstGeom prst="rect">
+            <a:avLst>
+              <a:gd name="adj" fmla="val 7692"/>
+            </a:avLst>
+          </a:prstGeom>
+          <a:solidFill>
+            <a:srgbClr val="FFFFFF"/>
+          </a:solidFill>
+          <a:ln w="12700">
+            <a:solidFill>
+              <a:srgbClr val="DB2777"/>
+            </a:solidFill>
+            <a:prstDash val="solid"/>
+          </a:ln>
+        </p:spPr>
+      </p:sp>
+      <p:sp>
+        <p:nvSpPr>
+          <p:cNvPr id="47" name="Text 45"/>
+          <p:cNvSpPr/>
+          <p:nvPr/>
+        </p:nvSpPr>
+        <p:spPr>
+          <a:xfrm>
+            <a:off x="7447135" y="4169664"/>
+            <a:ext cx="685800" cy="475488"/>
+          </a:xfrm>
+          <a:prstGeom prst="rect">
+            <a:avLst/>
+          </a:prstGeom>
+          <a:noFill/>
+          <a:ln/>
+        </p:spPr>
+        <p:txBody>
+          <a:bodyPr wrap="square" lIns="0" tIns="0" rIns="0" bIns="0" rtlCol="0" anchor="ctr"/>
+          <a:lstStyle/>
+          <a:p>
+            <a:pPr algn="ctr" indent="0" marL="0">
+              <a:buNone/>
+            </a:pPr>
+            <a:r>
+              <a:rPr lang="en-US" sz="900" b="1" dirty="0">
+                <a:solidFill>
+                  <a:srgbClr val="9D174D"/>
+                </a:solidFill>
+                <a:latin typeface="Trebuchet MS" pitchFamily="34" charset="0"/>
+                <a:ea typeface="Trebuchet MS" pitchFamily="34" charset="-122"/>
+                <a:cs typeface="Trebuchet MS" pitchFamily="34" charset="-120"/>
+              </a:rPr>
+              <a:t>er</a:t>
             </a:r>
             <a:endParaRPr lang="en-US" sz="900" dirty="0"/>
           </a:p>
@@ -15871,7 +16213,7 @@
                 <a:ea typeface="Calibri" pitchFamily="34" charset="-122"/>
                 <a:cs typeface="Calibri" pitchFamily="34" charset="-120"/>
               </a:rPr>
-              <a:t>Word Labs  •  wordlabs.app  •  Root: 'push' = to move forward with force</a:t>
+              <a:t>Word Labs  •  wordlabs.app  •  Root: 'push' = to press or move forward</a:t>
             </a:r>
             <a:endParaRPr lang="en-US" sz="800" dirty="0"/>
           </a:p>
@@ -16205,7 +16547,7 @@
                 <a:ea typeface="Trebuchet MS" pitchFamily="34" charset="-122"/>
                 <a:cs typeface="Trebuchet MS" pitchFamily="34" charset="-120"/>
               </a:rPr>
-              <a:t>1</a:t>
+              <a:t>2</a:t>
             </a:r>
             <a:pPr algn="ctr" indent="0" marL="0">
               <a:buNone/>
@@ -16219,7 +16561,7 @@
                 <a:ea typeface="Trebuchet MS" pitchFamily="34" charset="-122"/>
                 <a:cs typeface="Trebuchet MS" pitchFamily="34" charset="-120"/>
               </a:rPr>
-              <a:t>  punctuation mark</a:t>
+              <a:t>  punctuation marks</a:t>
             </a:r>
             <a:endParaRPr lang="en-US" sz="2800" dirty="0"/>
           </a:p>
@@ -16511,7 +16853,7 @@
                 <a:ea typeface="Calibri" pitchFamily="34" charset="-122"/>
                 <a:cs typeface="Calibri" pitchFamily="34" charset="-120"/>
               </a:rPr>
-              <a:t>Word Labs  •  wordlabs.app  •  Root: 'push' = to move forward with force</a:t>
+              <a:t>Word Labs  •  wordlabs.app  •  Root: 'push' = to press or move forward</a:t>
             </a:r>
             <a:endParaRPr lang="en-US" sz="800" dirty="0"/>
           </a:p>
@@ -16640,7 +16982,7 @@
                 <a:ea typeface="Calibri" pitchFamily="34" charset="-122"/>
                 <a:cs typeface="Calibri" pitchFamily="34" charset="-120"/>
               </a:rPr>
-              <a:t>pusher</a:t>
+              <a:t>pushed</a:t>
             </a:r>
             <a:pPr algn="l" indent="0" marL="0">
               <a:buNone/>
@@ -16654,7 +16996,7 @@
                 <a:ea typeface="Calibri" pitchFamily="34" charset="-122"/>
                 <a:cs typeface="Calibri" pitchFamily="34" charset="-120"/>
               </a:rPr>
-              <a:t> at the back kept </a:t>
+              <a:t> trolley rolled into the </a:t>
             </a:r>
             <a:pPr algn="l" indent="0" marL="0">
               <a:buNone/>
@@ -16671,7 +17013,7 @@
                 <a:ea typeface="Calibri" pitchFamily="34" charset="-122"/>
                 <a:cs typeface="Calibri" pitchFamily="34" charset="-120"/>
               </a:rPr>
-              <a:t>pushing</a:t>
+              <a:t>pushchair</a:t>
             </a:r>
             <a:pPr algn="l" indent="0" marL="0">
               <a:buNone/>
@@ -16685,7 +17027,7 @@
                 <a:ea typeface="Calibri" pitchFamily="34" charset="-122"/>
                 <a:cs typeface="Calibri" pitchFamily="34" charset="-120"/>
               </a:rPr>
-              <a:t> too hard, so everyone became a </a:t>
+              <a:t>, but luckily the quick-thinking </a:t>
             </a:r>
             <a:pPr algn="l" indent="0" marL="0">
               <a:buNone/>
@@ -16702,7 +17044,7 @@
                 <a:ea typeface="Calibri" pitchFamily="34" charset="-122"/>
                 <a:cs typeface="Calibri" pitchFamily="34" charset="-120"/>
               </a:rPr>
-              <a:t>pushover</a:t>
+              <a:t>pusher</a:t>
             </a:r>
             <a:pPr algn="l" indent="0" marL="0">
               <a:buNone/>
@@ -16716,7 +17058,7 @@
                 <a:ea typeface="Calibri" pitchFamily="34" charset="-122"/>
                 <a:cs typeface="Calibri" pitchFamily="34" charset="-120"/>
               </a:rPr>
-              <a:t> and stepped aside.</a:t>
+              <a:t> grabbed it in time!</a:t>
             </a:r>
             <a:endParaRPr lang="en-US" sz="1800" dirty="0"/>
           </a:p>
@@ -16871,7 +17213,7 @@
                 <a:ea typeface="Trebuchet MS" pitchFamily="34" charset="-122"/>
                 <a:cs typeface="Trebuchet MS" pitchFamily="34" charset="-120"/>
               </a:rPr>
-              <a:t>pusher</a:t>
+              <a:t>pushed</a:t>
             </a:r>
             <a:endParaRPr lang="en-US" sz="1400" dirty="0"/>
           </a:p>
@@ -16999,7 +17341,7 @@
                 <a:ea typeface="Trebuchet MS" pitchFamily="34" charset="-122"/>
                 <a:cs typeface="Trebuchet MS" pitchFamily="34" charset="-120"/>
               </a:rPr>
-              <a:t>pushing</a:t>
+              <a:t>pushchair</a:t>
             </a:r>
             <a:endParaRPr lang="en-US" sz="1400" dirty="0"/>
           </a:p>
@@ -17127,7 +17469,7 @@
                 <a:ea typeface="Trebuchet MS" pitchFamily="34" charset="-122"/>
                 <a:cs typeface="Trebuchet MS" pitchFamily="34" charset="-120"/>
               </a:rPr>
-              <a:t>pushover</a:t>
+              <a:t>pusher</a:t>
             </a:r>
             <a:endParaRPr lang="en-US" sz="1400" dirty="0"/>
           </a:p>
@@ -17458,7 +17800,7 @@
                 <a:ea typeface="Calibri" pitchFamily="34" charset="-122"/>
                 <a:cs typeface="Calibri" pitchFamily="34" charset="-120"/>
               </a:rPr>
-              <a:t>Word Labs  •  wordlabs.app  •  Root: 'push' = to move forward with force</a:t>
+              <a:t>Word Labs  •  wordlabs.app  •  Root: 'push' = to press or move forward</a:t>
             </a:r>
             <a:endParaRPr lang="en-US" sz="800" dirty="0"/>
           </a:p>
@@ -17597,7 +17939,7 @@
                 <a:ea typeface="Trebuchet MS" pitchFamily="34" charset="-122"/>
                 <a:cs typeface="Trebuchet MS" pitchFamily="34" charset="-120"/>
               </a:rPr>
-              <a:t>pusher</a:t>
+              <a:t>pushed</a:t>
             </a:r>
             <a:endParaRPr lang="en-US" sz="2800" dirty="0"/>
           </a:p>
@@ -18285,7 +18627,7 @@
                 <a:ea typeface="Calibri" pitchFamily="34" charset="-122"/>
                 <a:cs typeface="Calibri" pitchFamily="34" charset="-120"/>
               </a:rPr>
-              <a:t>Word Labs  •  wordlabs.app  •  Root: 'push' = to move forward with force</a:t>
+              <a:t>Word Labs  •  wordlabs.app  •  Root: 'push' = to press or move forward</a:t>
             </a:r>
             <a:endParaRPr lang="en-US" sz="800" dirty="0"/>
           </a:p>
@@ -18424,7 +18766,7 @@
                 <a:ea typeface="Trebuchet MS" pitchFamily="34" charset="-122"/>
                 <a:cs typeface="Trebuchet MS" pitchFamily="34" charset="-120"/>
               </a:rPr>
-              <a:t>pusher</a:t>
+              <a:t>pushed</a:t>
             </a:r>
             <a:endParaRPr lang="en-US" sz="2800" dirty="0"/>
           </a:p>
@@ -18602,7 +18944,7 @@
                 <a:ea typeface="Calibri" pitchFamily="34" charset="-122"/>
                 <a:cs typeface="Calibri" pitchFamily="34" charset="-120"/>
               </a:rPr>
-              <a:t>to move with force</a:t>
+              <a:t>to press or move forward</a:t>
             </a:r>
             <a:endParaRPr lang="en-US" sz="850" dirty="0"/>
           </a:p>
@@ -18675,7 +19017,7 @@
                 <a:ea typeface="Trebuchet MS" pitchFamily="34" charset="-122"/>
                 <a:cs typeface="Trebuchet MS" pitchFamily="34" charset="-120"/>
               </a:rPr>
-              <a:t>er</a:t>
+              <a:t>ed</a:t>
             </a:r>
             <a:endParaRPr lang="en-US" sz="1300" dirty="0"/>
           </a:p>
@@ -18714,7 +19056,7 @@
                 <a:ea typeface="Calibri" pitchFamily="34" charset="-122"/>
                 <a:cs typeface="Calibri" pitchFamily="34" charset="-120"/>
               </a:rPr>
-              <a:t>person or thing that does</a:t>
+              <a:t>action already done in the past</a:t>
             </a:r>
             <a:endParaRPr lang="en-US" sz="850" dirty="0"/>
           </a:p>
@@ -19270,7 +19612,7 @@
                 <a:ea typeface="Calibri" pitchFamily="34" charset="-122"/>
                 <a:cs typeface="Calibri" pitchFamily="34" charset="-120"/>
               </a:rPr>
-              <a:t>Word Labs  •  wordlabs.app  •  Root: 'push' = to move forward with force</a:t>
+              <a:t>Word Labs  •  wordlabs.app  •  Root: 'push' = to press or move forward</a:t>
             </a:r>
             <a:endParaRPr lang="en-US" sz="800" dirty="0"/>
           </a:p>
@@ -19409,7 +19751,7 @@
                 <a:ea typeface="Trebuchet MS" pitchFamily="34" charset="-122"/>
                 <a:cs typeface="Trebuchet MS" pitchFamily="34" charset="-120"/>
               </a:rPr>
-              <a:t>pusher</a:t>
+              <a:t>pushed</a:t>
             </a:r>
             <a:endParaRPr lang="en-US" sz="2800" dirty="0"/>
           </a:p>
@@ -19587,7 +19929,7 @@
                 <a:ea typeface="Calibri" pitchFamily="34" charset="-122"/>
                 <a:cs typeface="Calibri" pitchFamily="34" charset="-120"/>
               </a:rPr>
-              <a:t>to move with force</a:t>
+              <a:t>to press or move forward</a:t>
             </a:r>
             <a:endParaRPr lang="en-US" sz="850" dirty="0"/>
           </a:p>
@@ -19660,7 +20002,7 @@
                 <a:ea typeface="Trebuchet MS" pitchFamily="34" charset="-122"/>
                 <a:cs typeface="Trebuchet MS" pitchFamily="34" charset="-120"/>
               </a:rPr>
-              <a:t>er</a:t>
+              <a:t>ed</a:t>
             </a:r>
             <a:endParaRPr lang="en-US" sz="1300" dirty="0"/>
           </a:p>
@@ -19699,7 +20041,7 @@
                 <a:ea typeface="Calibri" pitchFamily="34" charset="-122"/>
                 <a:cs typeface="Calibri" pitchFamily="34" charset="-120"/>
               </a:rPr>
-              <a:t>person or thing that does</a:t>
+              <a:t>action already done in the past</a:t>
             </a:r>
             <a:endParaRPr lang="en-US" sz="850" dirty="0"/>
           </a:p>
@@ -19806,7 +20148,7 @@
         </p:nvSpPr>
         <p:spPr>
           <a:xfrm>
-            <a:off x="2999232" y="3364992"/>
+            <a:off x="4370832" y="3364992"/>
             <a:ext cx="1645920" cy="475488"/>
           </a:xfrm>
           <a:prstGeom prst="rect">
@@ -19833,7 +20175,7 @@
         </p:nvSpPr>
         <p:spPr>
           <a:xfrm>
-            <a:off x="2999232" y="3364992"/>
+            <a:off x="4370832" y="3364992"/>
             <a:ext cx="1645920" cy="475488"/>
           </a:xfrm>
           <a:prstGeom prst="rect">
@@ -19858,7 +20200,7 @@
                 <a:ea typeface="Trebuchet MS" pitchFamily="34" charset="-122"/>
                 <a:cs typeface="Trebuchet MS" pitchFamily="34" charset="-120"/>
               </a:rPr>
-              <a:t>push</a:t>
+              <a:t>pushed</a:t>
             </a:r>
             <a:endParaRPr lang="en-US" sz="1400" dirty="0"/>
           </a:p>
@@ -19866,14 +20208,41 @@
       </p:sp>
       <p:sp>
         <p:nvSpPr>
-          <p:cNvPr id="27" name="Text 25"/>
-          <p:cNvSpPr/>
-          <p:nvPr/>
-        </p:nvSpPr>
-        <p:spPr>
-          <a:xfrm>
-            <a:off x="4645152" y="3364992"/>
-            <a:ext cx="1097280" cy="475488"/>
+          <p:cNvPr id="27" name="Shape 25"/>
+          <p:cNvSpPr/>
+          <p:nvPr/>
+        </p:nvSpPr>
+        <p:spPr>
+          <a:xfrm>
+            <a:off x="365760" y="4096512"/>
+            <a:ext cx="1371600" cy="804672"/>
+          </a:xfrm>
+          <a:prstGeom prst="rect">
+            <a:avLst>
+              <a:gd name="adj" fmla="val 6818"/>
+            </a:avLst>
+          </a:prstGeom>
+          <a:solidFill>
+            <a:srgbClr val="E2E8F0"/>
+          </a:solidFill>
+          <a:ln w="12700">
+            <a:solidFill>
+              <a:srgbClr val="E2E8F0"/>
+            </a:solidFill>
+            <a:prstDash val="solid"/>
+          </a:ln>
+        </p:spPr>
+      </p:sp>
+      <p:sp>
+        <p:nvSpPr>
+          <p:cNvPr id="28" name="Text 26"/>
+          <p:cNvSpPr/>
+          <p:nvPr/>
+        </p:nvSpPr>
+        <p:spPr>
+          <a:xfrm>
+            <a:off x="365760" y="4096512"/>
+            <a:ext cx="1371600" cy="804672"/>
           </a:xfrm>
           <a:prstGeom prst="rect">
             <a:avLst/>
@@ -19889,96 +20258,30 @@
               <a:buNone/>
             </a:pPr>
             <a:r>
-              <a:rPr lang="en-US" sz="1600" b="1" dirty="0">
-                <a:solidFill>
-                  <a:srgbClr val="0D9488"/>
+              <a:rPr lang="en-US" sz="1100" b="1" dirty="0">
+                <a:solidFill>
+                  <a:srgbClr val="475569"/>
                 </a:solidFill>
                 <a:latin typeface="Trebuchet MS" pitchFamily="34" charset="0"/>
                 <a:ea typeface="Trebuchet MS" pitchFamily="34" charset="-122"/>
                 <a:cs typeface="Trebuchet MS" pitchFamily="34" charset="-120"/>
               </a:rPr>
-              <a:t>·</a:t>
-            </a:r>
-            <a:endParaRPr lang="en-US" sz="1600" dirty="0"/>
-          </a:p>
-        </p:txBody>
-      </p:sp>
-      <p:sp>
-        <p:nvSpPr>
-          <p:cNvPr id="28" name="Shape 26"/>
-          <p:cNvSpPr/>
-          <p:nvPr/>
-        </p:nvSpPr>
-        <p:spPr>
-          <a:xfrm>
-            <a:off x="5742432" y="3364992"/>
-            <a:ext cx="1645920" cy="475488"/>
-          </a:xfrm>
-          <a:prstGeom prst="rect">
-            <a:avLst>
-              <a:gd name="adj" fmla="val 9615"/>
-            </a:avLst>
-          </a:prstGeom>
-          <a:solidFill>
-            <a:srgbClr val="FFFFFF"/>
-          </a:solidFill>
-          <a:ln w="12700">
-            <a:solidFill>
-              <a:srgbClr val="0D9488"/>
-            </a:solidFill>
-            <a:prstDash val="solid"/>
-          </a:ln>
-        </p:spPr>
-      </p:sp>
-      <p:sp>
-        <p:nvSpPr>
-          <p:cNvPr id="29" name="Text 27"/>
-          <p:cNvSpPr/>
-          <p:nvPr/>
-        </p:nvSpPr>
-        <p:spPr>
-          <a:xfrm>
-            <a:off x="5742432" y="3364992"/>
-            <a:ext cx="1645920" cy="475488"/>
-          </a:xfrm>
-          <a:prstGeom prst="rect">
-            <a:avLst/>
-          </a:prstGeom>
-          <a:noFill/>
-          <a:ln/>
-        </p:spPr>
-        <p:txBody>
-          <a:bodyPr wrap="square" lIns="0" tIns="0" rIns="0" bIns="0" rtlCol="0" anchor="ctr"/>
-          <a:lstStyle/>
-          <a:p>
-            <a:pPr algn="ctr" indent="0" marL="0">
-              <a:buNone/>
-            </a:pPr>
-            <a:r>
-              <a:rPr lang="en-US" sz="1400" b="1" dirty="0">
-                <a:solidFill>
-                  <a:srgbClr val="0D9488"/>
-                </a:solidFill>
-                <a:latin typeface="Trebuchet MS" pitchFamily="34" charset="0"/>
-                <a:ea typeface="Trebuchet MS" pitchFamily="34" charset="-122"/>
-                <a:cs typeface="Trebuchet MS" pitchFamily="34" charset="-120"/>
-              </a:rPr>
-              <a:t>er</a:t>
-            </a:r>
-            <a:endParaRPr lang="en-US" sz="1400" dirty="0"/>
-          </a:p>
-        </p:txBody>
-      </p:sp>
-      <p:sp>
-        <p:nvSpPr>
-          <p:cNvPr id="30" name="Shape 28"/>
-          <p:cNvSpPr/>
-          <p:nvPr/>
-        </p:nvSpPr>
-        <p:spPr>
-          <a:xfrm>
-            <a:off x="365760" y="4096512"/>
-            <a:ext cx="1371600" cy="804672"/>
+              <a:t>Phonemes</a:t>
+            </a:r>
+            <a:endParaRPr lang="en-US" sz="1100" dirty="0"/>
+          </a:p>
+        </p:txBody>
+      </p:sp>
+      <p:sp>
+        <p:nvSpPr>
+          <p:cNvPr id="29" name="Shape 27"/>
+          <p:cNvSpPr/>
+          <p:nvPr/>
+        </p:nvSpPr>
+        <p:spPr>
+          <a:xfrm>
+            <a:off x="1874520" y="4096512"/>
+            <a:ext cx="6903720" cy="804672"/>
           </a:xfrm>
           <a:prstGeom prst="rect">
             <a:avLst>
@@ -19986,85 +20289,19 @@
             </a:avLst>
           </a:prstGeom>
           <a:solidFill>
-            <a:srgbClr val="E2E8F0"/>
+            <a:srgbClr val="F8FAFC"/>
           </a:solidFill>
           <a:ln w="12700">
             <a:solidFill>
               <a:srgbClr val="E2E8F0"/>
             </a:solidFill>
-            <a:prstDash val="solid"/>
-          </a:ln>
-        </p:spPr>
-      </p:sp>
-      <p:sp>
-        <p:nvSpPr>
-          <p:cNvPr id="31" name="Text 29"/>
-          <p:cNvSpPr/>
-          <p:nvPr/>
-        </p:nvSpPr>
-        <p:spPr>
-          <a:xfrm>
-            <a:off x="365760" y="4096512"/>
-            <a:ext cx="1371600" cy="804672"/>
-          </a:xfrm>
-          <a:prstGeom prst="rect">
-            <a:avLst/>
-          </a:prstGeom>
-          <a:noFill/>
-          <a:ln/>
-        </p:spPr>
-        <p:txBody>
-          <a:bodyPr wrap="square" lIns="0" tIns="0" rIns="0" bIns="0" rtlCol="0" anchor="ctr"/>
-          <a:lstStyle/>
-          <a:p>
-            <a:pPr algn="ctr" indent="0" marL="0">
-              <a:buNone/>
-            </a:pPr>
-            <a:r>
-              <a:rPr lang="en-US" sz="1100" b="1" dirty="0">
-                <a:solidFill>
-                  <a:srgbClr val="475569"/>
-                </a:solidFill>
-                <a:latin typeface="Trebuchet MS" pitchFamily="34" charset="0"/>
-                <a:ea typeface="Trebuchet MS" pitchFamily="34" charset="-122"/>
-                <a:cs typeface="Trebuchet MS" pitchFamily="34" charset="-120"/>
-              </a:rPr>
-              <a:t>Phonemes</a:t>
-            </a:r>
-            <a:endParaRPr lang="en-US" sz="1100" dirty="0"/>
-          </a:p>
-        </p:txBody>
-      </p:sp>
-      <p:sp>
-        <p:nvSpPr>
-          <p:cNvPr id="32" name="Shape 30"/>
-          <p:cNvSpPr/>
-          <p:nvPr/>
-        </p:nvSpPr>
-        <p:spPr>
-          <a:xfrm>
-            <a:off x="1874520" y="4096512"/>
-            <a:ext cx="6903720" cy="804672"/>
-          </a:xfrm>
-          <a:prstGeom prst="rect">
-            <a:avLst>
-              <a:gd name="adj" fmla="val 6818"/>
-            </a:avLst>
-          </a:prstGeom>
-          <a:solidFill>
-            <a:srgbClr val="F8FAFC"/>
-          </a:solidFill>
-          <a:ln w="12700">
-            <a:solidFill>
-              <a:srgbClr val="E2E8F0"/>
-            </a:solidFill>
             <a:prstDash val="dash"/>
           </a:ln>
         </p:spPr>
       </p:sp>
       <p:sp>
         <p:nvSpPr>
-          <p:cNvPr id="33" name="Text 31"/>
+          <p:cNvPr id="30" name="Text 28"/>
           <p:cNvSpPr/>
           <p:nvPr/>
         </p:nvSpPr>
@@ -20387,7 +20624,7 @@
                 <a:ea typeface="Calibri" pitchFamily="34" charset="-122"/>
                 <a:cs typeface="Calibri" pitchFamily="34" charset="-120"/>
               </a:rPr>
-              <a:t>Word Labs  •  wordlabs.app  •  Root: 'push' = to move forward with force</a:t>
+              <a:t>Word Labs  •  wordlabs.app  •  Root: 'push' = to press or move forward</a:t>
             </a:r>
             <a:endParaRPr lang="en-US" sz="800" dirty="0"/>
           </a:p>
@@ -20526,7 +20763,7 @@
                 <a:ea typeface="Trebuchet MS" pitchFamily="34" charset="-122"/>
                 <a:cs typeface="Trebuchet MS" pitchFamily="34" charset="-120"/>
               </a:rPr>
-              <a:t>pusher</a:t>
+              <a:t>pushed</a:t>
             </a:r>
             <a:endParaRPr lang="en-US" sz="2800" dirty="0"/>
           </a:p>
@@ -20704,7 +20941,7 @@
                 <a:ea typeface="Calibri" pitchFamily="34" charset="-122"/>
                 <a:cs typeface="Calibri" pitchFamily="34" charset="-120"/>
               </a:rPr>
-              <a:t>to move with force</a:t>
+              <a:t>to press or move forward</a:t>
             </a:r>
             <a:endParaRPr lang="en-US" sz="850" dirty="0"/>
           </a:p>
@@ -20777,7 +21014,7 @@
                 <a:ea typeface="Trebuchet MS" pitchFamily="34" charset="-122"/>
                 <a:cs typeface="Trebuchet MS" pitchFamily="34" charset="-120"/>
               </a:rPr>
-              <a:t>er</a:t>
+              <a:t>ed</a:t>
             </a:r>
             <a:endParaRPr lang="en-US" sz="1300" dirty="0"/>
           </a:p>
@@ -20816,7 +21053,7 @@
                 <a:ea typeface="Calibri" pitchFamily="34" charset="-122"/>
                 <a:cs typeface="Calibri" pitchFamily="34" charset="-120"/>
               </a:rPr>
-              <a:t>person or thing that does</a:t>
+              <a:t>action already done in the past</a:t>
             </a:r>
             <a:endParaRPr lang="en-US" sz="850" dirty="0"/>
           </a:p>
@@ -20923,7 +21160,7 @@
         </p:nvSpPr>
         <p:spPr>
           <a:xfrm>
-            <a:off x="2999232" y="3364992"/>
+            <a:off x="4370832" y="3364992"/>
             <a:ext cx="1645920" cy="475488"/>
           </a:xfrm>
           <a:prstGeom prst="rect">
@@ -20950,7 +21187,7 @@
         </p:nvSpPr>
         <p:spPr>
           <a:xfrm>
-            <a:off x="2999232" y="3364992"/>
+            <a:off x="4370832" y="3364992"/>
             <a:ext cx="1645920" cy="475488"/>
           </a:xfrm>
           <a:prstGeom prst="rect">
@@ -20975,7 +21212,7 @@
                 <a:ea typeface="Trebuchet MS" pitchFamily="34" charset="-122"/>
                 <a:cs typeface="Trebuchet MS" pitchFamily="34" charset="-120"/>
               </a:rPr>
-              <a:t>push</a:t>
+              <a:t>pushed</a:t>
             </a:r>
             <a:endParaRPr lang="en-US" sz="1400" dirty="0"/>
           </a:p>
@@ -20983,14 +21220,41 @@
       </p:sp>
       <p:sp>
         <p:nvSpPr>
-          <p:cNvPr id="27" name="Text 25"/>
-          <p:cNvSpPr/>
-          <p:nvPr/>
-        </p:nvSpPr>
-        <p:spPr>
-          <a:xfrm>
-            <a:off x="4645152" y="3364992"/>
-            <a:ext cx="1097280" cy="475488"/>
+          <p:cNvPr id="27" name="Shape 25"/>
+          <p:cNvSpPr/>
+          <p:nvPr/>
+        </p:nvSpPr>
+        <p:spPr>
+          <a:xfrm>
+            <a:off x="365760" y="4096512"/>
+            <a:ext cx="1371600" cy="804672"/>
+          </a:xfrm>
+          <a:prstGeom prst="rect">
+            <a:avLst>
+              <a:gd name="adj" fmla="val 6818"/>
+            </a:avLst>
+          </a:prstGeom>
+          <a:solidFill>
+            <a:srgbClr val="E2E8F0"/>
+          </a:solidFill>
+          <a:ln w="12700">
+            <a:solidFill>
+              <a:srgbClr val="E2E8F0"/>
+            </a:solidFill>
+            <a:prstDash val="solid"/>
+          </a:ln>
+        </p:spPr>
+      </p:sp>
+      <p:sp>
+        <p:nvSpPr>
+          <p:cNvPr id="28" name="Text 26"/>
+          <p:cNvSpPr/>
+          <p:nvPr/>
+        </p:nvSpPr>
+        <p:spPr>
+          <a:xfrm>
+            <a:off x="365760" y="4096512"/>
+            <a:ext cx="1371600" cy="804672"/>
           </a:xfrm>
           <a:prstGeom prst="rect">
             <a:avLst/>
@@ -21006,57 +21270,84 @@
               <a:buNone/>
             </a:pPr>
             <a:r>
-              <a:rPr lang="en-US" sz="1600" b="1" dirty="0">
-                <a:solidFill>
-                  <a:srgbClr val="0D9488"/>
+              <a:rPr lang="en-US" sz="1100" b="1" dirty="0">
+                <a:solidFill>
+                  <a:srgbClr val="475569"/>
                 </a:solidFill>
                 <a:latin typeface="Trebuchet MS" pitchFamily="34" charset="0"/>
                 <a:ea typeface="Trebuchet MS" pitchFamily="34" charset="-122"/>
                 <a:cs typeface="Trebuchet MS" pitchFamily="34" charset="-120"/>
               </a:rPr>
-              <a:t>·</a:t>
-            </a:r>
-            <a:endParaRPr lang="en-US" sz="1600" dirty="0"/>
-          </a:p>
-        </p:txBody>
-      </p:sp>
-      <p:sp>
-        <p:nvSpPr>
-          <p:cNvPr id="28" name="Shape 26"/>
-          <p:cNvSpPr/>
-          <p:nvPr/>
-        </p:nvSpPr>
-        <p:spPr>
-          <a:xfrm>
-            <a:off x="5742432" y="3364992"/>
-            <a:ext cx="1645920" cy="475488"/>
+              <a:t>Phonemes</a:t>
+            </a:r>
+            <a:endParaRPr lang="en-US" sz="1100" dirty="0"/>
+          </a:p>
+        </p:txBody>
+      </p:sp>
+      <p:sp>
+        <p:nvSpPr>
+          <p:cNvPr id="29" name="Shape 27"/>
+          <p:cNvSpPr/>
+          <p:nvPr/>
+        </p:nvSpPr>
+        <p:spPr>
+          <a:xfrm>
+            <a:off x="1874520" y="4096512"/>
+            <a:ext cx="6903720" cy="804672"/>
           </a:xfrm>
           <a:prstGeom prst="rect">
             <a:avLst>
-              <a:gd name="adj" fmla="val 9615"/>
+              <a:gd name="adj" fmla="val 6818"/>
             </a:avLst>
           </a:prstGeom>
           <a:solidFill>
+            <a:srgbClr val="FCE7F3"/>
+          </a:solidFill>
+          <a:ln w="12700">
+            <a:solidFill>
+              <a:srgbClr val="DB2777"/>
+            </a:solidFill>
+            <a:prstDash val="solid"/>
+          </a:ln>
+        </p:spPr>
+      </p:sp>
+      <p:sp>
+        <p:nvSpPr>
+          <p:cNvPr id="30" name="Shape 28"/>
+          <p:cNvSpPr/>
+          <p:nvPr/>
+        </p:nvSpPr>
+        <p:spPr>
+          <a:xfrm>
+            <a:off x="2670048" y="4169664"/>
+            <a:ext cx="685800" cy="384048"/>
+          </a:xfrm>
+          <a:prstGeom prst="rect">
+            <a:avLst>
+              <a:gd name="adj" fmla="val 9524"/>
+            </a:avLst>
+          </a:prstGeom>
+          <a:solidFill>
             <a:srgbClr val="FFFFFF"/>
           </a:solidFill>
           <a:ln w="12700">
             <a:solidFill>
-              <a:srgbClr val="0D9488"/>
-            </a:solidFill>
-            <a:prstDash val="solid"/>
-          </a:ln>
-        </p:spPr>
-      </p:sp>
-      <p:sp>
-        <p:nvSpPr>
-          <p:cNvPr id="29" name="Text 27"/>
-          <p:cNvSpPr/>
-          <p:nvPr/>
-        </p:nvSpPr>
-        <p:spPr>
-          <a:xfrm>
-            <a:off x="5742432" y="3364992"/>
-            <a:ext cx="1645920" cy="475488"/>
+              <a:srgbClr val="DB2777"/>
+            </a:solidFill>
+            <a:prstDash val="solid"/>
+          </a:ln>
+        </p:spPr>
+      </p:sp>
+      <p:sp>
+        <p:nvSpPr>
+          <p:cNvPr id="31" name="Text 29"/>
+          <p:cNvSpPr/>
+          <p:nvPr/>
+        </p:nvSpPr>
+        <p:spPr>
+          <a:xfrm>
+            <a:off x="2670048" y="4169664"/>
+            <a:ext cx="685800" cy="384048"/>
           </a:xfrm>
           <a:prstGeom prst="rect">
             <a:avLst/>
@@ -21072,57 +21363,57 @@
               <a:buNone/>
             </a:pPr>
             <a:r>
-              <a:rPr lang="en-US" sz="1400" b="1" dirty="0">
-                <a:solidFill>
-                  <a:srgbClr val="0D9488"/>
+              <a:rPr lang="en-US" sz="900" b="1" dirty="0">
+                <a:solidFill>
+                  <a:srgbClr val="9D174D"/>
                 </a:solidFill>
                 <a:latin typeface="Trebuchet MS" pitchFamily="34" charset="0"/>
                 <a:ea typeface="Trebuchet MS" pitchFamily="34" charset="-122"/>
                 <a:cs typeface="Trebuchet MS" pitchFamily="34" charset="-120"/>
               </a:rPr>
-              <a:t>er</a:t>
-            </a:r>
-            <a:endParaRPr lang="en-US" sz="1400" dirty="0"/>
-          </a:p>
-        </p:txBody>
-      </p:sp>
-      <p:sp>
-        <p:nvSpPr>
-          <p:cNvPr id="30" name="Shape 28"/>
-          <p:cNvSpPr/>
-          <p:nvPr/>
-        </p:nvSpPr>
-        <p:spPr>
-          <a:xfrm>
-            <a:off x="365760" y="4096512"/>
-            <a:ext cx="1371600" cy="804672"/>
+              <a:t>p</a:t>
+            </a:r>
+            <a:endParaRPr lang="en-US" sz="900" dirty="0"/>
+          </a:p>
+        </p:txBody>
+      </p:sp>
+      <p:sp>
+        <p:nvSpPr>
+          <p:cNvPr id="32" name="Shape 30"/>
+          <p:cNvSpPr/>
+          <p:nvPr/>
+        </p:nvSpPr>
+        <p:spPr>
+          <a:xfrm>
+            <a:off x="4123944" y="4169664"/>
+            <a:ext cx="685800" cy="384048"/>
           </a:xfrm>
           <a:prstGeom prst="rect">
             <a:avLst>
-              <a:gd name="adj" fmla="val 6818"/>
+              <a:gd name="adj" fmla="val 9524"/>
             </a:avLst>
           </a:prstGeom>
           <a:solidFill>
-            <a:srgbClr val="E2E8F0"/>
-          </a:solidFill>
-          <a:ln w="12700">
-            <a:solidFill>
-              <a:srgbClr val="E2E8F0"/>
-            </a:solidFill>
-            <a:prstDash val="solid"/>
-          </a:ln>
-        </p:spPr>
-      </p:sp>
-      <p:sp>
-        <p:nvSpPr>
-          <p:cNvPr id="31" name="Text 29"/>
-          <p:cNvSpPr/>
-          <p:nvPr/>
-        </p:nvSpPr>
-        <p:spPr>
-          <a:xfrm>
-            <a:off x="365760" y="4096512"/>
-            <a:ext cx="1371600" cy="804672"/>
+            <a:srgbClr val="FFFFFF"/>
+          </a:solidFill>
+          <a:ln w="12700">
+            <a:solidFill>
+              <a:srgbClr val="DB2777"/>
+            </a:solidFill>
+            <a:prstDash val="solid"/>
+          </a:ln>
+        </p:spPr>
+      </p:sp>
+      <p:sp>
+        <p:nvSpPr>
+          <p:cNvPr id="33" name="Text 31"/>
+          <p:cNvSpPr/>
+          <p:nvPr/>
+        </p:nvSpPr>
+        <p:spPr>
+          <a:xfrm>
+            <a:off x="4123944" y="4169664"/>
+            <a:ext cx="685800" cy="384048"/>
           </a:xfrm>
           <a:prstGeom prst="rect">
             <a:avLst/>
@@ -21138,38 +21429,38 @@
               <a:buNone/>
             </a:pPr>
             <a:r>
-              <a:rPr lang="en-US" sz="1100" b="1" dirty="0">
-                <a:solidFill>
-                  <a:srgbClr val="475569"/>
+              <a:rPr lang="en-US" sz="900" b="1" dirty="0">
+                <a:solidFill>
+                  <a:srgbClr val="9D174D"/>
                 </a:solidFill>
                 <a:latin typeface="Trebuchet MS" pitchFamily="34" charset="0"/>
                 <a:ea typeface="Trebuchet MS" pitchFamily="34" charset="-122"/>
                 <a:cs typeface="Trebuchet MS" pitchFamily="34" charset="-120"/>
               </a:rPr>
-              <a:t>Phonemes</a:t>
-            </a:r>
-            <a:endParaRPr lang="en-US" sz="1100" dirty="0"/>
-          </a:p>
-        </p:txBody>
-      </p:sp>
-      <p:sp>
-        <p:nvSpPr>
-          <p:cNvPr id="32" name="Shape 30"/>
-          <p:cNvSpPr/>
-          <p:nvPr/>
-        </p:nvSpPr>
-        <p:spPr>
-          <a:xfrm>
-            <a:off x="1874520" y="4096512"/>
-            <a:ext cx="6903720" cy="658368"/>
+              <a:t>u</a:t>
+            </a:r>
+            <a:endParaRPr lang="en-US" sz="900" dirty="0"/>
+          </a:p>
+        </p:txBody>
+      </p:sp>
+      <p:sp>
+        <p:nvSpPr>
+          <p:cNvPr id="34" name="Shape 32"/>
+          <p:cNvSpPr/>
+          <p:nvPr/>
+        </p:nvSpPr>
+        <p:spPr>
+          <a:xfrm>
+            <a:off x="5577840" y="4169664"/>
+            <a:ext cx="685800" cy="384048"/>
           </a:xfrm>
           <a:prstGeom prst="rect">
             <a:avLst>
-              <a:gd name="adj" fmla="val 8333"/>
+              <a:gd name="adj" fmla="val 9524"/>
             </a:avLst>
           </a:prstGeom>
           <a:solidFill>
-            <a:srgbClr val="FCE7F3"/>
+            <a:srgbClr val="FFFFFF"/>
           </a:solidFill>
           <a:ln w="12700">
             <a:solidFill>
@@ -21181,41 +21472,14 @@
       </p:sp>
       <p:sp>
         <p:nvSpPr>
-          <p:cNvPr id="33" name="Shape 31"/>
-          <p:cNvSpPr/>
-          <p:nvPr/>
-        </p:nvSpPr>
-        <p:spPr>
-          <a:xfrm>
-            <a:off x="2670048" y="4169664"/>
-            <a:ext cx="685800" cy="475488"/>
-          </a:xfrm>
-          <a:prstGeom prst="rect">
-            <a:avLst>
-              <a:gd name="adj" fmla="val 7692"/>
-            </a:avLst>
-          </a:prstGeom>
-          <a:solidFill>
-            <a:srgbClr val="FFFFFF"/>
-          </a:solidFill>
-          <a:ln w="12700">
-            <a:solidFill>
-              <a:srgbClr val="DB2777"/>
-            </a:solidFill>
-            <a:prstDash val="solid"/>
-          </a:ln>
-        </p:spPr>
-      </p:sp>
-      <p:sp>
-        <p:nvSpPr>
-          <p:cNvPr id="34" name="Text 32"/>
-          <p:cNvSpPr/>
-          <p:nvPr/>
-        </p:nvSpPr>
-        <p:spPr>
-          <a:xfrm>
-            <a:off x="2670048" y="4169664"/>
-            <a:ext cx="685800" cy="475488"/>
+          <p:cNvPr id="35" name="Text 33"/>
+          <p:cNvSpPr/>
+          <p:nvPr/>
+        </p:nvSpPr>
+        <p:spPr>
+          <a:xfrm>
+            <a:off x="5577840" y="4169664"/>
+            <a:ext cx="685800" cy="384048"/>
           </a:xfrm>
           <a:prstGeom prst="rect">
             <a:avLst/>
@@ -21239,7 +21503,7 @@
                 <a:ea typeface="Trebuchet MS" pitchFamily="34" charset="-122"/>
                 <a:cs typeface="Trebuchet MS" pitchFamily="34" charset="-120"/>
               </a:rPr>
-              <a:t>p</a:t>
+              <a:t>sh</a:t>
             </a:r>
             <a:endParaRPr lang="en-US" sz="900" dirty="0"/>
           </a:p>
@@ -21247,18 +21511,18 @@
       </p:sp>
       <p:sp>
         <p:nvSpPr>
-          <p:cNvPr id="35" name="Shape 33"/>
-          <p:cNvSpPr/>
-          <p:nvPr/>
-        </p:nvSpPr>
-        <p:spPr>
-          <a:xfrm>
-            <a:off x="4123944" y="4169664"/>
-            <a:ext cx="685800" cy="475488"/>
+          <p:cNvPr id="36" name="Shape 34"/>
+          <p:cNvSpPr/>
+          <p:nvPr/>
+        </p:nvSpPr>
+        <p:spPr>
+          <a:xfrm>
+            <a:off x="7031736" y="4169664"/>
+            <a:ext cx="685800" cy="384048"/>
           </a:xfrm>
           <a:prstGeom prst="rect">
             <a:avLst>
-              <a:gd name="adj" fmla="val 7692"/>
+              <a:gd name="adj" fmla="val 9524"/>
             </a:avLst>
           </a:prstGeom>
           <a:solidFill>
@@ -21274,14 +21538,14 @@
       </p:sp>
       <p:sp>
         <p:nvSpPr>
-          <p:cNvPr id="36" name="Text 34"/>
-          <p:cNvSpPr/>
-          <p:nvPr/>
-        </p:nvSpPr>
-        <p:spPr>
-          <a:xfrm>
-            <a:off x="4123944" y="4169664"/>
-            <a:ext cx="685800" cy="475488"/>
+          <p:cNvPr id="37" name="Text 35"/>
+          <p:cNvSpPr/>
+          <p:nvPr/>
+        </p:nvSpPr>
+        <p:spPr>
+          <a:xfrm>
+            <a:off x="7031736" y="4169664"/>
+            <a:ext cx="685800" cy="384048"/>
           </a:xfrm>
           <a:prstGeom prst="rect">
             <a:avLst/>
@@ -21305,7 +21569,7 @@
                 <a:ea typeface="Trebuchet MS" pitchFamily="34" charset="-122"/>
                 <a:cs typeface="Trebuchet MS" pitchFamily="34" charset="-120"/>
               </a:rPr>
-              <a:t>u</a:t>
+              <a:t>ed</a:t>
             </a:r>
             <a:endParaRPr lang="en-US" sz="900" dirty="0"/>
           </a:p>
@@ -21313,133 +21577,40 @@
       </p:sp>
       <p:sp>
         <p:nvSpPr>
-          <p:cNvPr id="37" name="Shape 35"/>
-          <p:cNvSpPr/>
-          <p:nvPr/>
-        </p:nvSpPr>
-        <p:spPr>
-          <a:xfrm>
-            <a:off x="5577840" y="4169664"/>
-            <a:ext cx="685800" cy="475488"/>
-          </a:xfrm>
-          <a:prstGeom prst="rect">
-            <a:avLst>
-              <a:gd name="adj" fmla="val 7692"/>
-            </a:avLst>
-          </a:prstGeom>
-          <a:solidFill>
-            <a:srgbClr val="FFFFFF"/>
-          </a:solidFill>
-          <a:ln w="12700">
-            <a:solidFill>
-              <a:srgbClr val="DB2777"/>
-            </a:solidFill>
-            <a:prstDash val="solid"/>
-          </a:ln>
-        </p:spPr>
-      </p:sp>
-      <p:sp>
-        <p:nvSpPr>
           <p:cNvPr id="38" name="Text 36"/>
           <p:cNvSpPr/>
           <p:nvPr/>
         </p:nvSpPr>
         <p:spPr>
           <a:xfrm>
-            <a:off x="5577840" y="4169664"/>
-            <a:ext cx="685800" cy="475488"/>
-          </a:xfrm>
-          <a:prstGeom prst="rect">
-            <a:avLst/>
-          </a:prstGeom>
-          <a:noFill/>
-          <a:ln/>
-        </p:spPr>
-        <p:txBody>
-          <a:bodyPr wrap="square" lIns="0" tIns="0" rIns="0" bIns="0" rtlCol="0" anchor="ctr"/>
-          <a:lstStyle/>
-          <a:p>
-            <a:pPr algn="ctr" indent="0" marL="0">
-              <a:buNone/>
-            </a:pPr>
-            <a:r>
-              <a:rPr lang="en-US" sz="900" b="1" dirty="0">
-                <a:solidFill>
-                  <a:srgbClr val="9D174D"/>
-                </a:solidFill>
-                <a:latin typeface="Trebuchet MS" pitchFamily="34" charset="0"/>
-                <a:ea typeface="Trebuchet MS" pitchFamily="34" charset="-122"/>
-                <a:cs typeface="Trebuchet MS" pitchFamily="34" charset="-120"/>
-              </a:rPr>
-              <a:t>sh</a:t>
-            </a:r>
-            <a:endParaRPr lang="en-US" sz="900" dirty="0"/>
-          </a:p>
-        </p:txBody>
-      </p:sp>
-      <p:sp>
-        <p:nvSpPr>
-          <p:cNvPr id="39" name="Shape 37"/>
-          <p:cNvSpPr/>
-          <p:nvPr/>
-        </p:nvSpPr>
-        <p:spPr>
-          <a:xfrm>
-            <a:off x="7031736" y="4169664"/>
-            <a:ext cx="685800" cy="475488"/>
-          </a:xfrm>
-          <a:prstGeom prst="rect">
-            <a:avLst>
-              <a:gd name="adj" fmla="val 7692"/>
-            </a:avLst>
-          </a:prstGeom>
-          <a:solidFill>
-            <a:srgbClr val="FFFFFF"/>
-          </a:solidFill>
-          <a:ln w="12700">
-            <a:solidFill>
-              <a:srgbClr val="DB2777"/>
-            </a:solidFill>
-            <a:prstDash val="solid"/>
-          </a:ln>
-        </p:spPr>
-      </p:sp>
-      <p:sp>
-        <p:nvSpPr>
-          <p:cNvPr id="40" name="Text 38"/>
-          <p:cNvSpPr/>
-          <p:nvPr/>
-        </p:nvSpPr>
-        <p:spPr>
-          <a:xfrm>
-            <a:off x="7031736" y="4169664"/>
-            <a:ext cx="685800" cy="475488"/>
-          </a:xfrm>
-          <a:prstGeom prst="rect">
-            <a:avLst/>
-          </a:prstGeom>
-          <a:noFill/>
-          <a:ln/>
-        </p:spPr>
-        <p:txBody>
-          <a:bodyPr wrap="square" lIns="0" tIns="0" rIns="0" bIns="0" rtlCol="0" anchor="ctr"/>
-          <a:lstStyle/>
-          <a:p>
-            <a:pPr algn="ctr" indent="0" marL="0">
-              <a:buNone/>
-            </a:pPr>
-            <a:r>
-              <a:rPr lang="en-US" sz="900" b="1" dirty="0">
-                <a:solidFill>
-                  <a:srgbClr val="9D174D"/>
-                </a:solidFill>
-                <a:latin typeface="Trebuchet MS" pitchFamily="34" charset="0"/>
-                <a:ea typeface="Trebuchet MS" pitchFamily="34" charset="-122"/>
-                <a:cs typeface="Trebuchet MS" pitchFamily="34" charset="-120"/>
-              </a:rPr>
-              <a:t>er</a:t>
-            </a:r>
-            <a:endParaRPr lang="en-US" sz="900" dirty="0"/>
+            <a:off x="7031736" y="4572000"/>
+            <a:ext cx="685800" cy="219456"/>
+          </a:xfrm>
+          <a:prstGeom prst="rect">
+            <a:avLst/>
+          </a:prstGeom>
+          <a:noFill/>
+          <a:ln/>
+        </p:spPr>
+        <p:txBody>
+          <a:bodyPr wrap="square" lIns="0" tIns="0" rIns="0" bIns="0" rtlCol="0" anchor="t"/>
+          <a:lstStyle/>
+          <a:p>
+            <a:pPr algn="ctr" indent="0" marL="0">
+              <a:buNone/>
+            </a:pPr>
+            <a:r>
+              <a:rPr lang="en-US" sz="750" i="1" dirty="0">
+                <a:solidFill>
+                  <a:srgbClr val="94A3B8"/>
+                </a:solidFill>
+                <a:latin typeface="Calibri" pitchFamily="34" charset="0"/>
+                <a:ea typeface="Calibri" pitchFamily="34" charset="-122"/>
+                <a:cs typeface="Calibri" pitchFamily="34" charset="-120"/>
+              </a:rPr>
+              <a:t>/t/</a:t>
+            </a:r>
+            <a:endParaRPr lang="en-US" sz="750" dirty="0"/>
           </a:p>
         </p:txBody>
       </p:sp>
@@ -21729,7 +21900,7 @@
                 <a:ea typeface="Calibri" pitchFamily="34" charset="-122"/>
                 <a:cs typeface="Calibri" pitchFamily="34" charset="-120"/>
               </a:rPr>
-              <a:t>Word Labs  •  wordlabs.app  •  Root: 'push' = to move forward with force</a:t>
+              <a:t>Word Labs  •  wordlabs.app  •  Root: 'push' = to press or move forward</a:t>
             </a:r>
             <a:endParaRPr lang="en-US" sz="800" dirty="0"/>
           </a:p>
@@ -21868,7 +22039,7 @@
                 <a:ea typeface="Trebuchet MS" pitchFamily="34" charset="-122"/>
                 <a:cs typeface="Trebuchet MS" pitchFamily="34" charset="-120"/>
               </a:rPr>
-              <a:t>pushing</a:t>
+              <a:t>pushchair</a:t>
             </a:r>
             <a:endParaRPr lang="en-US" sz="2800" dirty="0"/>
           </a:p>
@@ -22556,7 +22727,7 @@
                 <a:ea typeface="Calibri" pitchFamily="34" charset="-122"/>
                 <a:cs typeface="Calibri" pitchFamily="34" charset="-120"/>
               </a:rPr>
-              <a:t>Word Labs  •  wordlabs.app  •  Root: 'push' = to move forward with force</a:t>
+              <a:t>Word Labs  •  wordlabs.app  •  Root: 'push' = to press or move forward</a:t>
             </a:r>
             <a:endParaRPr lang="en-US" sz="800" dirty="0"/>
           </a:p>
@@ -22695,7 +22866,7 @@
                 <a:ea typeface="Trebuchet MS" pitchFamily="34" charset="-122"/>
                 <a:cs typeface="Trebuchet MS" pitchFamily="34" charset="-120"/>
               </a:rPr>
-              <a:t>pushing</a:t>
+              <a:t>pushchair</a:t>
             </a:r>
             <a:endParaRPr lang="en-US" sz="2800" dirty="0"/>
           </a:p>
@@ -22873,7 +23044,7 @@
                 <a:ea typeface="Calibri" pitchFamily="34" charset="-122"/>
                 <a:cs typeface="Calibri" pitchFamily="34" charset="-120"/>
               </a:rPr>
-              <a:t>to move with force</a:t>
+              <a:t>to press or move forward</a:t>
             </a:r>
             <a:endParaRPr lang="en-US" sz="850" dirty="0"/>
           </a:p>
@@ -22946,7 +23117,7 @@
                 <a:ea typeface="Trebuchet MS" pitchFamily="34" charset="-122"/>
                 <a:cs typeface="Trebuchet MS" pitchFamily="34" charset="-120"/>
               </a:rPr>
-              <a:t>ing</a:t>
+              <a:t>chair</a:t>
             </a:r>
             <a:endParaRPr lang="en-US" sz="1300" dirty="0"/>
           </a:p>
@@ -22985,7 +23156,7 @@
                 <a:ea typeface="Calibri" pitchFamily="34" charset="-122"/>
                 <a:cs typeface="Calibri" pitchFamily="34" charset="-120"/>
               </a:rPr>
-              <a:t>action happening now</a:t>
+              <a:t>a seat</a:t>
             </a:r>
             <a:endParaRPr lang="en-US" sz="850" dirty="0"/>
           </a:p>
@@ -23541,7 +23712,7 @@
                 <a:ea typeface="Calibri" pitchFamily="34" charset="-122"/>
                 <a:cs typeface="Calibri" pitchFamily="34" charset="-120"/>
               </a:rPr>
-              <a:t>Word Labs  •  wordlabs.app  •  Root: 'push' = to move forward with force</a:t>
+              <a:t>Word Labs  •  wordlabs.app  •  Root: 'push' = to press or move forward</a:t>
             </a:r>
             <a:endParaRPr lang="en-US" sz="800" dirty="0"/>
           </a:p>
@@ -23614,7 +23785,7 @@
                 <a:ea typeface="Trebuchet MS" pitchFamily="34" charset="-122"/>
                 <a:cs typeface="Trebuchet MS" pitchFamily="34" charset="-120"/>
               </a:rPr>
-              <a:t>We are learning that the root 'push' means 'to move forward with force'.</a:t>
+              <a:t>We are learning that the root 'push' means 'to press or move forward'.</a:t>
             </a:r>
             <a:endParaRPr lang="en-US" sz="2000" dirty="0"/>
           </a:p>
@@ -24260,7 +24431,7 @@
                 <a:ea typeface="Calibri" pitchFamily="34" charset="-122"/>
                 <a:cs typeface="Calibri" pitchFamily="34" charset="-120"/>
               </a:rPr>
-              <a:t>Word Labs  •  wordlabs.app  •  Root: 'push' = to move forward with force</a:t>
+              <a:t>Word Labs  •  wordlabs.app  •  Root: 'push' = to press or move forward</a:t>
             </a:r>
             <a:endParaRPr lang="en-US" sz="800" dirty="0"/>
           </a:p>
@@ -24399,7 +24570,7 @@
                 <a:ea typeface="Trebuchet MS" pitchFamily="34" charset="-122"/>
                 <a:cs typeface="Trebuchet MS" pitchFamily="34" charset="-120"/>
               </a:rPr>
-              <a:t>pushing</a:t>
+              <a:t>pushchair</a:t>
             </a:r>
             <a:endParaRPr lang="en-US" sz="2800" dirty="0"/>
           </a:p>
@@ -24577,7 +24748,7 @@
                 <a:ea typeface="Calibri" pitchFamily="34" charset="-122"/>
                 <a:cs typeface="Calibri" pitchFamily="34" charset="-120"/>
               </a:rPr>
-              <a:t>to move with force</a:t>
+              <a:t>to press or move forward</a:t>
             </a:r>
             <a:endParaRPr lang="en-US" sz="850" dirty="0"/>
           </a:p>
@@ -24650,7 +24821,7 @@
                 <a:ea typeface="Trebuchet MS" pitchFamily="34" charset="-122"/>
                 <a:cs typeface="Trebuchet MS" pitchFamily="34" charset="-120"/>
               </a:rPr>
-              <a:t>ing</a:t>
+              <a:t>chair</a:t>
             </a:r>
             <a:endParaRPr lang="en-US" sz="1300" dirty="0"/>
           </a:p>
@@ -24689,7 +24860,7 @@
                 <a:ea typeface="Calibri" pitchFamily="34" charset="-122"/>
                 <a:cs typeface="Calibri" pitchFamily="34" charset="-120"/>
               </a:rPr>
-              <a:t>action happening now</a:t>
+              <a:t>a seat</a:t>
             </a:r>
             <a:endParaRPr lang="en-US" sz="850" dirty="0"/>
           </a:p>
@@ -24953,7 +25124,7 @@
                 <a:ea typeface="Trebuchet MS" pitchFamily="34" charset="-122"/>
                 <a:cs typeface="Trebuchet MS" pitchFamily="34" charset="-120"/>
               </a:rPr>
-              <a:t>ing</a:t>
+              <a:t>chair</a:t>
             </a:r>
             <a:endParaRPr lang="en-US" sz="1400" dirty="0"/>
           </a:p>
@@ -25377,7 +25548,7 @@
                 <a:ea typeface="Calibri" pitchFamily="34" charset="-122"/>
                 <a:cs typeface="Calibri" pitchFamily="34" charset="-120"/>
               </a:rPr>
-              <a:t>Word Labs  •  wordlabs.app  •  Root: 'push' = to move forward with force</a:t>
+              <a:t>Word Labs  •  wordlabs.app  •  Root: 'push' = to press or move forward</a:t>
             </a:r>
             <a:endParaRPr lang="en-US" sz="800" dirty="0"/>
           </a:p>
@@ -25516,7 +25687,7 @@
                 <a:ea typeface="Trebuchet MS" pitchFamily="34" charset="-122"/>
                 <a:cs typeface="Trebuchet MS" pitchFamily="34" charset="-120"/>
               </a:rPr>
-              <a:t>pushing</a:t>
+              <a:t>pushchair</a:t>
             </a:r>
             <a:endParaRPr lang="en-US" sz="2800" dirty="0"/>
           </a:p>
@@ -25694,7 +25865,7 @@
                 <a:ea typeface="Calibri" pitchFamily="34" charset="-122"/>
                 <a:cs typeface="Calibri" pitchFamily="34" charset="-120"/>
               </a:rPr>
-              <a:t>to move with force</a:t>
+              <a:t>to press or move forward</a:t>
             </a:r>
             <a:endParaRPr lang="en-US" sz="850" dirty="0"/>
           </a:p>
@@ -25767,7 +25938,7 @@
                 <a:ea typeface="Trebuchet MS" pitchFamily="34" charset="-122"/>
                 <a:cs typeface="Trebuchet MS" pitchFamily="34" charset="-120"/>
               </a:rPr>
-              <a:t>ing</a:t>
+              <a:t>chair</a:t>
             </a:r>
             <a:endParaRPr lang="en-US" sz="1300" dirty="0"/>
           </a:p>
@@ -25806,7 +25977,7 @@
                 <a:ea typeface="Calibri" pitchFamily="34" charset="-122"/>
                 <a:cs typeface="Calibri" pitchFamily="34" charset="-120"/>
               </a:rPr>
-              <a:t>action happening now</a:t>
+              <a:t>a seat</a:t>
             </a:r>
             <a:endParaRPr lang="en-US" sz="850" dirty="0"/>
           </a:p>
@@ -26070,7 +26241,7 @@
                 <a:ea typeface="Trebuchet MS" pitchFamily="34" charset="-122"/>
                 <a:cs typeface="Trebuchet MS" pitchFamily="34" charset="-120"/>
               </a:rPr>
-              <a:t>ing</a:t>
+              <a:t>chair</a:t>
             </a:r>
             <a:endParaRPr lang="en-US" sz="1400" dirty="0"/>
           </a:p>
@@ -26427,7 +26598,7 @@
                 <a:ea typeface="Trebuchet MS" pitchFamily="34" charset="-122"/>
                 <a:cs typeface="Trebuchet MS" pitchFamily="34" charset="-120"/>
               </a:rPr>
-              <a:t>i</a:t>
+              <a:t>ch</a:t>
             </a:r>
             <a:endParaRPr lang="en-US" sz="900" dirty="0"/>
           </a:p>
@@ -26493,7 +26664,7 @@
                 <a:ea typeface="Trebuchet MS" pitchFamily="34" charset="-122"/>
                 <a:cs typeface="Trebuchet MS" pitchFamily="34" charset="-120"/>
               </a:rPr>
-              <a:t>ng</a:t>
+              <a:t>air</a:t>
             </a:r>
             <a:endParaRPr lang="en-US" sz="900" dirty="0"/>
           </a:p>
@@ -26785,7 +26956,7 @@
                 <a:ea typeface="Calibri" pitchFamily="34" charset="-122"/>
                 <a:cs typeface="Calibri" pitchFamily="34" charset="-120"/>
               </a:rPr>
-              <a:t>Word Labs  •  wordlabs.app  •  Root: 'push' = to move forward with force</a:t>
+              <a:t>Word Labs  •  wordlabs.app  •  Root: 'push' = to press or move forward</a:t>
             </a:r>
             <a:endParaRPr lang="en-US" sz="800" dirty="0"/>
           </a:p>
@@ -26924,7 +27095,7 @@
                 <a:ea typeface="Trebuchet MS" pitchFamily="34" charset="-122"/>
                 <a:cs typeface="Trebuchet MS" pitchFamily="34" charset="-120"/>
               </a:rPr>
-              <a:t>pushover</a:t>
+              <a:t>pusher</a:t>
             </a:r>
             <a:endParaRPr lang="en-US" sz="2800" dirty="0"/>
           </a:p>
@@ -27612,7 +27783,7 @@
                 <a:ea typeface="Calibri" pitchFamily="34" charset="-122"/>
                 <a:cs typeface="Calibri" pitchFamily="34" charset="-120"/>
               </a:rPr>
-              <a:t>Word Labs  •  wordlabs.app  •  Root: 'push' = to move forward with force</a:t>
+              <a:t>Word Labs  •  wordlabs.app  •  Root: 'push' = to press or move forward</a:t>
             </a:r>
             <a:endParaRPr lang="en-US" sz="800" dirty="0"/>
           </a:p>
@@ -27751,7 +27922,7 @@
                 <a:ea typeface="Trebuchet MS" pitchFamily="34" charset="-122"/>
                 <a:cs typeface="Trebuchet MS" pitchFamily="34" charset="-120"/>
               </a:rPr>
-              <a:t>pushover</a:t>
+              <a:t>pusher</a:t>
             </a:r>
             <a:endParaRPr lang="en-US" sz="2800" dirty="0"/>
           </a:p>
@@ -27929,7 +28100,7 @@
                 <a:ea typeface="Calibri" pitchFamily="34" charset="-122"/>
                 <a:cs typeface="Calibri" pitchFamily="34" charset="-120"/>
               </a:rPr>
-              <a:t>to move with force</a:t>
+              <a:t>to press or move forward</a:t>
             </a:r>
             <a:endParaRPr lang="en-US" sz="850" dirty="0"/>
           </a:p>
@@ -28002,7 +28173,7 @@
                 <a:ea typeface="Trebuchet MS" pitchFamily="34" charset="-122"/>
                 <a:cs typeface="Trebuchet MS" pitchFamily="34" charset="-120"/>
               </a:rPr>
-              <a:t>over</a:t>
+              <a:t>er</a:t>
             </a:r>
             <a:endParaRPr lang="en-US" sz="1300" dirty="0"/>
           </a:p>
@@ -28041,7 +28212,7 @@
                 <a:ea typeface="Calibri" pitchFamily="34" charset="-122"/>
                 <a:cs typeface="Calibri" pitchFamily="34" charset="-120"/>
               </a:rPr>
-              <a:t>across or beyond</a:t>
+              <a:t>a person or thing that does something</a:t>
             </a:r>
             <a:endParaRPr lang="en-US" sz="850" dirty="0"/>
           </a:p>
@@ -28597,7 +28768,7 @@
                 <a:ea typeface="Calibri" pitchFamily="34" charset="-122"/>
                 <a:cs typeface="Calibri" pitchFamily="34" charset="-120"/>
               </a:rPr>
-              <a:t>Word Labs  •  wordlabs.app  •  Root: 'push' = to move forward with force</a:t>
+              <a:t>Word Labs  •  wordlabs.app  •  Root: 'push' = to press or move forward</a:t>
             </a:r>
             <a:endParaRPr lang="en-US" sz="800" dirty="0"/>
           </a:p>
@@ -28736,7 +28907,7 @@
                 <a:ea typeface="Trebuchet MS" pitchFamily="34" charset="-122"/>
                 <a:cs typeface="Trebuchet MS" pitchFamily="34" charset="-120"/>
               </a:rPr>
-              <a:t>pushover</a:t>
+              <a:t>pusher</a:t>
             </a:r>
             <a:endParaRPr lang="en-US" sz="2800" dirty="0"/>
           </a:p>
@@ -28914,7 +29085,7 @@
                 <a:ea typeface="Calibri" pitchFamily="34" charset="-122"/>
                 <a:cs typeface="Calibri" pitchFamily="34" charset="-120"/>
               </a:rPr>
-              <a:t>to move with force</a:t>
+              <a:t>to press or move forward</a:t>
             </a:r>
             <a:endParaRPr lang="en-US" sz="850" dirty="0"/>
           </a:p>
@@ -28987,7 +29158,7 @@
                 <a:ea typeface="Trebuchet MS" pitchFamily="34" charset="-122"/>
                 <a:cs typeface="Trebuchet MS" pitchFamily="34" charset="-120"/>
               </a:rPr>
-              <a:t>over</a:t>
+              <a:t>er</a:t>
             </a:r>
             <a:endParaRPr lang="en-US" sz="1300" dirty="0"/>
           </a:p>
@@ -29026,7 +29197,7 @@
                 <a:ea typeface="Calibri" pitchFamily="34" charset="-122"/>
                 <a:cs typeface="Calibri" pitchFamily="34" charset="-120"/>
               </a:rPr>
-              <a:t>across or beyond</a:t>
+              <a:t>a person or thing that does something</a:t>
             </a:r>
             <a:endParaRPr lang="en-US" sz="850" dirty="0"/>
           </a:p>
@@ -29133,7 +29304,7 @@
         </p:nvSpPr>
         <p:spPr>
           <a:xfrm>
-            <a:off x="2313432" y="3364992"/>
+            <a:off x="2999232" y="3364992"/>
             <a:ext cx="1645920" cy="475488"/>
           </a:xfrm>
           <a:prstGeom prst="rect">
@@ -29160,7 +29331,7 @@
         </p:nvSpPr>
         <p:spPr>
           <a:xfrm>
-            <a:off x="2313432" y="3364992"/>
+            <a:off x="2999232" y="3364992"/>
             <a:ext cx="1645920" cy="475488"/>
           </a:xfrm>
           <a:prstGeom prst="rect">
@@ -29199,8 +29370,8 @@
         </p:nvSpPr>
         <p:spPr>
           <a:xfrm>
-            <a:off x="3959352" y="3364992"/>
-            <a:ext cx="411480" cy="475488"/>
+            <a:off x="4645152" y="3364992"/>
+            <a:ext cx="1097280" cy="475488"/>
           </a:xfrm>
           <a:prstGeom prst="rect">
             <a:avLst/>
@@ -29238,7 +29409,7 @@
         </p:nvSpPr>
         <p:spPr>
           <a:xfrm>
-            <a:off x="4370832" y="3364992"/>
+            <a:off x="5742432" y="3364992"/>
             <a:ext cx="1645920" cy="475488"/>
           </a:xfrm>
           <a:prstGeom prst="rect">
@@ -29265,7 +29436,7 @@
         </p:nvSpPr>
         <p:spPr>
           <a:xfrm>
-            <a:off x="4370832" y="3364992"/>
+            <a:off x="5742432" y="3364992"/>
             <a:ext cx="1645920" cy="475488"/>
           </a:xfrm>
           <a:prstGeom prst="rect">
@@ -29290,7 +29461,7 @@
                 <a:ea typeface="Trebuchet MS" pitchFamily="34" charset="-122"/>
                 <a:cs typeface="Trebuchet MS" pitchFamily="34" charset="-120"/>
               </a:rPr>
-              <a:t>o</a:t>
+              <a:t>er</a:t>
             </a:r>
             <a:endParaRPr lang="en-US" sz="1400" dirty="0"/>
           </a:p>
@@ -29298,14 +29469,41 @@
       </p:sp>
       <p:sp>
         <p:nvSpPr>
-          <p:cNvPr id="30" name="Text 28"/>
-          <p:cNvSpPr/>
-          <p:nvPr/>
-        </p:nvSpPr>
-        <p:spPr>
-          <a:xfrm>
-            <a:off x="6016752" y="3364992"/>
-            <a:ext cx="411480" cy="475488"/>
+          <p:cNvPr id="30" name="Shape 28"/>
+          <p:cNvSpPr/>
+          <p:nvPr/>
+        </p:nvSpPr>
+        <p:spPr>
+          <a:xfrm>
+            <a:off x="365760" y="4096512"/>
+            <a:ext cx="1371600" cy="804672"/>
+          </a:xfrm>
+          <a:prstGeom prst="rect">
+            <a:avLst>
+              <a:gd name="adj" fmla="val 6818"/>
+            </a:avLst>
+          </a:prstGeom>
+          <a:solidFill>
+            <a:srgbClr val="E2E8F0"/>
+          </a:solidFill>
+          <a:ln w="12700">
+            <a:solidFill>
+              <a:srgbClr val="E2E8F0"/>
+            </a:solidFill>
+            <a:prstDash val="solid"/>
+          </a:ln>
+        </p:spPr>
+      </p:sp>
+      <p:sp>
+        <p:nvSpPr>
+          <p:cNvPr id="31" name="Text 29"/>
+          <p:cNvSpPr/>
+          <p:nvPr/>
+        </p:nvSpPr>
+        <p:spPr>
+          <a:xfrm>
+            <a:off x="365760" y="4096512"/>
+            <a:ext cx="1371600" cy="804672"/>
           </a:xfrm>
           <a:prstGeom prst="rect">
             <a:avLst/>
@@ -29321,96 +29519,30 @@
               <a:buNone/>
             </a:pPr>
             <a:r>
-              <a:rPr lang="en-US" sz="1600" b="1" dirty="0">
-                <a:solidFill>
-                  <a:srgbClr val="0D9488"/>
+              <a:rPr lang="en-US" sz="1100" b="1" dirty="0">
+                <a:solidFill>
+                  <a:srgbClr val="475569"/>
                 </a:solidFill>
                 <a:latin typeface="Trebuchet MS" pitchFamily="34" charset="0"/>
                 <a:ea typeface="Trebuchet MS" pitchFamily="34" charset="-122"/>
                 <a:cs typeface="Trebuchet MS" pitchFamily="34" charset="-120"/>
               </a:rPr>
-              <a:t>·</a:t>
-            </a:r>
-            <a:endParaRPr lang="en-US" sz="1600" dirty="0"/>
-          </a:p>
-        </p:txBody>
-      </p:sp>
-      <p:sp>
-        <p:nvSpPr>
-          <p:cNvPr id="31" name="Shape 29"/>
-          <p:cNvSpPr/>
-          <p:nvPr/>
-        </p:nvSpPr>
-        <p:spPr>
-          <a:xfrm>
-            <a:off x="6428232" y="3364992"/>
-            <a:ext cx="1645920" cy="475488"/>
-          </a:xfrm>
-          <a:prstGeom prst="rect">
-            <a:avLst>
-              <a:gd name="adj" fmla="val 9615"/>
-            </a:avLst>
-          </a:prstGeom>
-          <a:solidFill>
-            <a:srgbClr val="FFFFFF"/>
-          </a:solidFill>
-          <a:ln w="12700">
-            <a:solidFill>
-              <a:srgbClr val="0D9488"/>
-            </a:solidFill>
-            <a:prstDash val="solid"/>
-          </a:ln>
-        </p:spPr>
-      </p:sp>
-      <p:sp>
-        <p:nvSpPr>
-          <p:cNvPr id="32" name="Text 30"/>
-          <p:cNvSpPr/>
-          <p:nvPr/>
-        </p:nvSpPr>
-        <p:spPr>
-          <a:xfrm>
-            <a:off x="6428232" y="3364992"/>
-            <a:ext cx="1645920" cy="475488"/>
-          </a:xfrm>
-          <a:prstGeom prst="rect">
-            <a:avLst/>
-          </a:prstGeom>
-          <a:noFill/>
-          <a:ln/>
-        </p:spPr>
-        <p:txBody>
-          <a:bodyPr wrap="square" lIns="0" tIns="0" rIns="0" bIns="0" rtlCol="0" anchor="ctr"/>
-          <a:lstStyle/>
-          <a:p>
-            <a:pPr algn="ctr" indent="0" marL="0">
-              <a:buNone/>
-            </a:pPr>
-            <a:r>
-              <a:rPr lang="en-US" sz="1400" b="1" dirty="0">
-                <a:solidFill>
-                  <a:srgbClr val="0D9488"/>
-                </a:solidFill>
-                <a:latin typeface="Trebuchet MS" pitchFamily="34" charset="0"/>
-                <a:ea typeface="Trebuchet MS" pitchFamily="34" charset="-122"/>
-                <a:cs typeface="Trebuchet MS" pitchFamily="34" charset="-120"/>
-              </a:rPr>
-              <a:t>ver</a:t>
-            </a:r>
-            <a:endParaRPr lang="en-US" sz="1400" dirty="0"/>
-          </a:p>
-        </p:txBody>
-      </p:sp>
-      <p:sp>
-        <p:nvSpPr>
-          <p:cNvPr id="33" name="Shape 31"/>
-          <p:cNvSpPr/>
-          <p:nvPr/>
-        </p:nvSpPr>
-        <p:spPr>
-          <a:xfrm>
-            <a:off x="365760" y="4096512"/>
-            <a:ext cx="1371600" cy="804672"/>
+              <a:t>Phonemes</a:t>
+            </a:r>
+            <a:endParaRPr lang="en-US" sz="1100" dirty="0"/>
+          </a:p>
+        </p:txBody>
+      </p:sp>
+      <p:sp>
+        <p:nvSpPr>
+          <p:cNvPr id="32" name="Shape 30"/>
+          <p:cNvSpPr/>
+          <p:nvPr/>
+        </p:nvSpPr>
+        <p:spPr>
+          <a:xfrm>
+            <a:off x="1874520" y="4096512"/>
+            <a:ext cx="6903720" cy="804672"/>
           </a:xfrm>
           <a:prstGeom prst="rect">
             <a:avLst>
@@ -29418,85 +29550,19 @@
             </a:avLst>
           </a:prstGeom>
           <a:solidFill>
-            <a:srgbClr val="E2E8F0"/>
+            <a:srgbClr val="F8FAFC"/>
           </a:solidFill>
           <a:ln w="12700">
             <a:solidFill>
               <a:srgbClr val="E2E8F0"/>
             </a:solidFill>
-            <a:prstDash val="solid"/>
-          </a:ln>
-        </p:spPr>
-      </p:sp>
-      <p:sp>
-        <p:nvSpPr>
-          <p:cNvPr id="34" name="Text 32"/>
-          <p:cNvSpPr/>
-          <p:nvPr/>
-        </p:nvSpPr>
-        <p:spPr>
-          <a:xfrm>
-            <a:off x="365760" y="4096512"/>
-            <a:ext cx="1371600" cy="804672"/>
-          </a:xfrm>
-          <a:prstGeom prst="rect">
-            <a:avLst/>
-          </a:prstGeom>
-          <a:noFill/>
-          <a:ln/>
-        </p:spPr>
-        <p:txBody>
-          <a:bodyPr wrap="square" lIns="0" tIns="0" rIns="0" bIns="0" rtlCol="0" anchor="ctr"/>
-          <a:lstStyle/>
-          <a:p>
-            <a:pPr algn="ctr" indent="0" marL="0">
-              <a:buNone/>
-            </a:pPr>
-            <a:r>
-              <a:rPr lang="en-US" sz="1100" b="1" dirty="0">
-                <a:solidFill>
-                  <a:srgbClr val="475569"/>
-                </a:solidFill>
-                <a:latin typeface="Trebuchet MS" pitchFamily="34" charset="0"/>
-                <a:ea typeface="Trebuchet MS" pitchFamily="34" charset="-122"/>
-                <a:cs typeface="Trebuchet MS" pitchFamily="34" charset="-120"/>
-              </a:rPr>
-              <a:t>Phonemes</a:t>
-            </a:r>
-            <a:endParaRPr lang="en-US" sz="1100" dirty="0"/>
-          </a:p>
-        </p:txBody>
-      </p:sp>
-      <p:sp>
-        <p:nvSpPr>
-          <p:cNvPr id="35" name="Shape 33"/>
-          <p:cNvSpPr/>
-          <p:nvPr/>
-        </p:nvSpPr>
-        <p:spPr>
-          <a:xfrm>
-            <a:off x="1874520" y="4096512"/>
-            <a:ext cx="6903720" cy="804672"/>
-          </a:xfrm>
-          <a:prstGeom prst="rect">
-            <a:avLst>
-              <a:gd name="adj" fmla="val 6818"/>
-            </a:avLst>
-          </a:prstGeom>
-          <a:solidFill>
-            <a:srgbClr val="F8FAFC"/>
-          </a:solidFill>
-          <a:ln w="12700">
-            <a:solidFill>
-              <a:srgbClr val="E2E8F0"/>
-            </a:solidFill>
             <a:prstDash val="dash"/>
           </a:ln>
         </p:spPr>
       </p:sp>
       <p:sp>
         <p:nvSpPr>
-          <p:cNvPr id="36" name="Text 34"/>
+          <p:cNvPr id="33" name="Text 31"/>
           <p:cNvSpPr/>
           <p:nvPr/>
         </p:nvSpPr>
@@ -29819,7 +29885,7 @@
                 <a:ea typeface="Calibri" pitchFamily="34" charset="-122"/>
                 <a:cs typeface="Calibri" pitchFamily="34" charset="-120"/>
               </a:rPr>
-              <a:t>Word Labs  •  wordlabs.app  •  Root: 'push' = to move forward with force</a:t>
+              <a:t>Word Labs  •  wordlabs.app  •  Root: 'push' = to press or move forward</a:t>
             </a:r>
             <a:endParaRPr lang="en-US" sz="800" dirty="0"/>
           </a:p>
@@ -29958,7 +30024,7 @@
                 <a:ea typeface="Trebuchet MS" pitchFamily="34" charset="-122"/>
                 <a:cs typeface="Trebuchet MS" pitchFamily="34" charset="-120"/>
               </a:rPr>
-              <a:t>pushover</a:t>
+              <a:t>pusher</a:t>
             </a:r>
             <a:endParaRPr lang="en-US" sz="2800" dirty="0"/>
           </a:p>
@@ -30136,7 +30202,7 @@
                 <a:ea typeface="Calibri" pitchFamily="34" charset="-122"/>
                 <a:cs typeface="Calibri" pitchFamily="34" charset="-120"/>
               </a:rPr>
-              <a:t>to move with force</a:t>
+              <a:t>to press or move forward</a:t>
             </a:r>
             <a:endParaRPr lang="en-US" sz="850" dirty="0"/>
           </a:p>
@@ -30209,7 +30275,7 @@
                 <a:ea typeface="Trebuchet MS" pitchFamily="34" charset="-122"/>
                 <a:cs typeface="Trebuchet MS" pitchFamily="34" charset="-120"/>
               </a:rPr>
-              <a:t>over</a:t>
+              <a:t>er</a:t>
             </a:r>
             <a:endParaRPr lang="en-US" sz="1300" dirty="0"/>
           </a:p>
@@ -30248,7 +30314,7 @@
                 <a:ea typeface="Calibri" pitchFamily="34" charset="-122"/>
                 <a:cs typeface="Calibri" pitchFamily="34" charset="-120"/>
               </a:rPr>
-              <a:t>across or beyond</a:t>
+              <a:t>a person or thing that does something</a:t>
             </a:r>
             <a:endParaRPr lang="en-US" sz="850" dirty="0"/>
           </a:p>
@@ -30355,7 +30421,7 @@
         </p:nvSpPr>
         <p:spPr>
           <a:xfrm>
-            <a:off x="2313432" y="3364992"/>
+            <a:off x="2999232" y="3364992"/>
             <a:ext cx="1645920" cy="475488"/>
           </a:xfrm>
           <a:prstGeom prst="rect">
@@ -30382,7 +30448,7 @@
         </p:nvSpPr>
         <p:spPr>
           <a:xfrm>
-            <a:off x="2313432" y="3364992"/>
+            <a:off x="2999232" y="3364992"/>
             <a:ext cx="1645920" cy="475488"/>
           </a:xfrm>
           <a:prstGeom prst="rect">
@@ -30421,8 +30487,8 @@
         </p:nvSpPr>
         <p:spPr>
           <a:xfrm>
-            <a:off x="3959352" y="3364992"/>
-            <a:ext cx="411480" cy="475488"/>
+            <a:off x="4645152" y="3364992"/>
+            <a:ext cx="1097280" cy="475488"/>
           </a:xfrm>
           <a:prstGeom prst="rect">
             <a:avLst/>
@@ -30460,7 +30526,7 @@
         </p:nvSpPr>
         <p:spPr>
           <a:xfrm>
-            <a:off x="4370832" y="3364992"/>
+            <a:off x="5742432" y="3364992"/>
             <a:ext cx="1645920" cy="475488"/>
           </a:xfrm>
           <a:prstGeom prst="rect">
@@ -30487,7 +30553,7 @@
         </p:nvSpPr>
         <p:spPr>
           <a:xfrm>
-            <a:off x="4370832" y="3364992"/>
+            <a:off x="5742432" y="3364992"/>
             <a:ext cx="1645920" cy="475488"/>
           </a:xfrm>
           <a:prstGeom prst="rect">
@@ -30512,7 +30578,7 @@
                 <a:ea typeface="Trebuchet MS" pitchFamily="34" charset="-122"/>
                 <a:cs typeface="Trebuchet MS" pitchFamily="34" charset="-120"/>
               </a:rPr>
-              <a:t>o</a:t>
+              <a:t>er</a:t>
             </a:r>
             <a:endParaRPr lang="en-US" sz="1400" dirty="0"/>
           </a:p>
@@ -30520,14 +30586,41 @@
       </p:sp>
       <p:sp>
         <p:nvSpPr>
-          <p:cNvPr id="30" name="Text 28"/>
-          <p:cNvSpPr/>
-          <p:nvPr/>
-        </p:nvSpPr>
-        <p:spPr>
-          <a:xfrm>
-            <a:off x="6016752" y="3364992"/>
-            <a:ext cx="411480" cy="475488"/>
+          <p:cNvPr id="30" name="Shape 28"/>
+          <p:cNvSpPr/>
+          <p:nvPr/>
+        </p:nvSpPr>
+        <p:spPr>
+          <a:xfrm>
+            <a:off x="365760" y="4096512"/>
+            <a:ext cx="1371600" cy="804672"/>
+          </a:xfrm>
+          <a:prstGeom prst="rect">
+            <a:avLst>
+              <a:gd name="adj" fmla="val 6818"/>
+            </a:avLst>
+          </a:prstGeom>
+          <a:solidFill>
+            <a:srgbClr val="E2E8F0"/>
+          </a:solidFill>
+          <a:ln w="12700">
+            <a:solidFill>
+              <a:srgbClr val="E2E8F0"/>
+            </a:solidFill>
+            <a:prstDash val="solid"/>
+          </a:ln>
+        </p:spPr>
+      </p:sp>
+      <p:sp>
+        <p:nvSpPr>
+          <p:cNvPr id="31" name="Text 29"/>
+          <p:cNvSpPr/>
+          <p:nvPr/>
+        </p:nvSpPr>
+        <p:spPr>
+          <a:xfrm>
+            <a:off x="365760" y="4096512"/>
+            <a:ext cx="1371600" cy="804672"/>
           </a:xfrm>
           <a:prstGeom prst="rect">
             <a:avLst/>
@@ -30543,57 +30636,84 @@
               <a:buNone/>
             </a:pPr>
             <a:r>
-              <a:rPr lang="en-US" sz="1600" b="1" dirty="0">
-                <a:solidFill>
-                  <a:srgbClr val="0D9488"/>
+              <a:rPr lang="en-US" sz="1100" b="1" dirty="0">
+                <a:solidFill>
+                  <a:srgbClr val="475569"/>
                 </a:solidFill>
                 <a:latin typeface="Trebuchet MS" pitchFamily="34" charset="0"/>
                 <a:ea typeface="Trebuchet MS" pitchFamily="34" charset="-122"/>
                 <a:cs typeface="Trebuchet MS" pitchFamily="34" charset="-120"/>
               </a:rPr>
-              <a:t>·</a:t>
-            </a:r>
-            <a:endParaRPr lang="en-US" sz="1600" dirty="0"/>
-          </a:p>
-        </p:txBody>
-      </p:sp>
-      <p:sp>
-        <p:nvSpPr>
-          <p:cNvPr id="31" name="Shape 29"/>
-          <p:cNvSpPr/>
-          <p:nvPr/>
-        </p:nvSpPr>
-        <p:spPr>
-          <a:xfrm>
-            <a:off x="6428232" y="3364992"/>
-            <a:ext cx="1645920" cy="475488"/>
+              <a:t>Phonemes</a:t>
+            </a:r>
+            <a:endParaRPr lang="en-US" sz="1100" dirty="0"/>
+          </a:p>
+        </p:txBody>
+      </p:sp>
+      <p:sp>
+        <p:nvSpPr>
+          <p:cNvPr id="32" name="Shape 30"/>
+          <p:cNvSpPr/>
+          <p:nvPr/>
+        </p:nvSpPr>
+        <p:spPr>
+          <a:xfrm>
+            <a:off x="1874520" y="4096512"/>
+            <a:ext cx="6903720" cy="658368"/>
           </a:xfrm>
           <a:prstGeom prst="rect">
             <a:avLst>
-              <a:gd name="adj" fmla="val 9615"/>
+              <a:gd name="adj" fmla="val 8333"/>
             </a:avLst>
           </a:prstGeom>
           <a:solidFill>
+            <a:srgbClr val="FCE7F3"/>
+          </a:solidFill>
+          <a:ln w="12700">
+            <a:solidFill>
+              <a:srgbClr val="DB2777"/>
+            </a:solidFill>
+            <a:prstDash val="solid"/>
+          </a:ln>
+        </p:spPr>
+      </p:sp>
+      <p:sp>
+        <p:nvSpPr>
+          <p:cNvPr id="33" name="Shape 31"/>
+          <p:cNvSpPr/>
+          <p:nvPr/>
+        </p:nvSpPr>
+        <p:spPr>
+          <a:xfrm>
+            <a:off x="2670048" y="4169664"/>
+            <a:ext cx="685800" cy="475488"/>
+          </a:xfrm>
+          <a:prstGeom prst="rect">
+            <a:avLst>
+              <a:gd name="adj" fmla="val 7692"/>
+            </a:avLst>
+          </a:prstGeom>
+          <a:solidFill>
             <a:srgbClr val="FFFFFF"/>
           </a:solidFill>
           <a:ln w="12700">
             <a:solidFill>
-              <a:srgbClr val="0D9488"/>
-            </a:solidFill>
-            <a:prstDash val="solid"/>
-          </a:ln>
-        </p:spPr>
-      </p:sp>
-      <p:sp>
-        <p:nvSpPr>
-          <p:cNvPr id="32" name="Text 30"/>
-          <p:cNvSpPr/>
-          <p:nvPr/>
-        </p:nvSpPr>
-        <p:spPr>
-          <a:xfrm>
-            <a:off x="6428232" y="3364992"/>
-            <a:ext cx="1645920" cy="475488"/>
+              <a:srgbClr val="DB2777"/>
+            </a:solidFill>
+            <a:prstDash val="solid"/>
+          </a:ln>
+        </p:spPr>
+      </p:sp>
+      <p:sp>
+        <p:nvSpPr>
+          <p:cNvPr id="34" name="Text 32"/>
+          <p:cNvSpPr/>
+          <p:nvPr/>
+        </p:nvSpPr>
+        <p:spPr>
+          <a:xfrm>
+            <a:off x="2670048" y="4169664"/>
+            <a:ext cx="685800" cy="475488"/>
           </a:xfrm>
           <a:prstGeom prst="rect">
             <a:avLst/>
@@ -30609,57 +30729,57 @@
               <a:buNone/>
             </a:pPr>
             <a:r>
-              <a:rPr lang="en-US" sz="1400" b="1" dirty="0">
-                <a:solidFill>
-                  <a:srgbClr val="0D9488"/>
+              <a:rPr lang="en-US" sz="900" b="1" dirty="0">
+                <a:solidFill>
+                  <a:srgbClr val="9D174D"/>
                 </a:solidFill>
                 <a:latin typeface="Trebuchet MS" pitchFamily="34" charset="0"/>
                 <a:ea typeface="Trebuchet MS" pitchFamily="34" charset="-122"/>
                 <a:cs typeface="Trebuchet MS" pitchFamily="34" charset="-120"/>
               </a:rPr>
-              <a:t>ver</a:t>
-            </a:r>
-            <a:endParaRPr lang="en-US" sz="1400" dirty="0"/>
-          </a:p>
-        </p:txBody>
-      </p:sp>
-      <p:sp>
-        <p:nvSpPr>
-          <p:cNvPr id="33" name="Shape 31"/>
-          <p:cNvSpPr/>
-          <p:nvPr/>
-        </p:nvSpPr>
-        <p:spPr>
-          <a:xfrm>
-            <a:off x="365760" y="4096512"/>
-            <a:ext cx="1371600" cy="804672"/>
+              <a:t>p</a:t>
+            </a:r>
+            <a:endParaRPr lang="en-US" sz="900" dirty="0"/>
+          </a:p>
+        </p:txBody>
+      </p:sp>
+      <p:sp>
+        <p:nvSpPr>
+          <p:cNvPr id="35" name="Shape 33"/>
+          <p:cNvSpPr/>
+          <p:nvPr/>
+        </p:nvSpPr>
+        <p:spPr>
+          <a:xfrm>
+            <a:off x="4123944" y="4169664"/>
+            <a:ext cx="685800" cy="475488"/>
           </a:xfrm>
           <a:prstGeom prst="rect">
             <a:avLst>
-              <a:gd name="adj" fmla="val 6818"/>
+              <a:gd name="adj" fmla="val 7692"/>
             </a:avLst>
           </a:prstGeom>
           <a:solidFill>
-            <a:srgbClr val="E2E8F0"/>
-          </a:solidFill>
-          <a:ln w="12700">
-            <a:solidFill>
-              <a:srgbClr val="E2E8F0"/>
-            </a:solidFill>
-            <a:prstDash val="solid"/>
-          </a:ln>
-        </p:spPr>
-      </p:sp>
-      <p:sp>
-        <p:nvSpPr>
-          <p:cNvPr id="34" name="Text 32"/>
-          <p:cNvSpPr/>
-          <p:nvPr/>
-        </p:nvSpPr>
-        <p:spPr>
-          <a:xfrm>
-            <a:off x="365760" y="4096512"/>
-            <a:ext cx="1371600" cy="804672"/>
+            <a:srgbClr val="FFFFFF"/>
+          </a:solidFill>
+          <a:ln w="12700">
+            <a:solidFill>
+              <a:srgbClr val="DB2777"/>
+            </a:solidFill>
+            <a:prstDash val="solid"/>
+          </a:ln>
+        </p:spPr>
+      </p:sp>
+      <p:sp>
+        <p:nvSpPr>
+          <p:cNvPr id="36" name="Text 34"/>
+          <p:cNvSpPr/>
+          <p:nvPr/>
+        </p:nvSpPr>
+        <p:spPr>
+          <a:xfrm>
+            <a:off x="4123944" y="4169664"/>
+            <a:ext cx="685800" cy="475488"/>
           </a:xfrm>
           <a:prstGeom prst="rect">
             <a:avLst/>
@@ -30675,56 +30795,29 @@
               <a:buNone/>
             </a:pPr>
             <a:r>
-              <a:rPr lang="en-US" sz="1100" b="1" dirty="0">
-                <a:solidFill>
-                  <a:srgbClr val="475569"/>
+              <a:rPr lang="en-US" sz="900" b="1" dirty="0">
+                <a:solidFill>
+                  <a:srgbClr val="9D174D"/>
                 </a:solidFill>
                 <a:latin typeface="Trebuchet MS" pitchFamily="34" charset="0"/>
                 <a:ea typeface="Trebuchet MS" pitchFamily="34" charset="-122"/>
                 <a:cs typeface="Trebuchet MS" pitchFamily="34" charset="-120"/>
               </a:rPr>
-              <a:t>Phonemes</a:t>
-            </a:r>
-            <a:endParaRPr lang="en-US" sz="1100" dirty="0"/>
-          </a:p>
-        </p:txBody>
-      </p:sp>
-      <p:sp>
-        <p:nvSpPr>
-          <p:cNvPr id="35" name="Shape 33"/>
-          <p:cNvSpPr/>
-          <p:nvPr/>
-        </p:nvSpPr>
-        <p:spPr>
-          <a:xfrm>
-            <a:off x="1874520" y="4096512"/>
-            <a:ext cx="6903720" cy="658368"/>
-          </a:xfrm>
-          <a:prstGeom prst="rect">
-            <a:avLst>
-              <a:gd name="adj" fmla="val 8333"/>
-            </a:avLst>
-          </a:prstGeom>
-          <a:solidFill>
-            <a:srgbClr val="FCE7F3"/>
-          </a:solidFill>
-          <a:ln w="12700">
-            <a:solidFill>
-              <a:srgbClr val="DB2777"/>
-            </a:solidFill>
-            <a:prstDash val="solid"/>
-          </a:ln>
-        </p:spPr>
-      </p:sp>
-      <p:sp>
-        <p:nvSpPr>
-          <p:cNvPr id="36" name="Shape 34"/>
-          <p:cNvSpPr/>
-          <p:nvPr/>
-        </p:nvSpPr>
-        <p:spPr>
-          <a:xfrm>
-            <a:off x="2254649" y="4169664"/>
+              <a:t>u</a:t>
+            </a:r>
+            <a:endParaRPr lang="en-US" sz="900" dirty="0"/>
+          </a:p>
+        </p:txBody>
+      </p:sp>
+      <p:sp>
+        <p:nvSpPr>
+          <p:cNvPr id="37" name="Shape 35"/>
+          <p:cNvSpPr/>
+          <p:nvPr/>
+        </p:nvSpPr>
+        <p:spPr>
+          <a:xfrm>
+            <a:off x="5577840" y="4169664"/>
             <a:ext cx="685800" cy="475488"/>
           </a:xfrm>
           <a:prstGeom prst="rect">
@@ -30745,13 +30838,13 @@
       </p:sp>
       <p:sp>
         <p:nvSpPr>
-          <p:cNvPr id="37" name="Text 35"/>
-          <p:cNvSpPr/>
-          <p:nvPr/>
-        </p:nvSpPr>
-        <p:spPr>
-          <a:xfrm>
-            <a:off x="2254649" y="4169664"/>
+          <p:cNvPr id="38" name="Text 36"/>
+          <p:cNvSpPr/>
+          <p:nvPr/>
+        </p:nvSpPr>
+        <p:spPr>
+          <a:xfrm>
+            <a:off x="5577840" y="4169664"/>
             <a:ext cx="685800" cy="475488"/>
           </a:xfrm>
           <a:prstGeom prst="rect">
@@ -30776,7 +30869,7 @@
                 <a:ea typeface="Trebuchet MS" pitchFamily="34" charset="-122"/>
                 <a:cs typeface="Trebuchet MS" pitchFamily="34" charset="-120"/>
               </a:rPr>
-              <a:t>p</a:t>
+              <a:t>sh</a:t>
             </a:r>
             <a:endParaRPr lang="en-US" sz="900" dirty="0"/>
           </a:p>
@@ -30784,13 +30877,13 @@
       </p:sp>
       <p:sp>
         <p:nvSpPr>
-          <p:cNvPr id="38" name="Shape 36"/>
-          <p:cNvSpPr/>
-          <p:nvPr/>
-        </p:nvSpPr>
-        <p:spPr>
-          <a:xfrm>
-            <a:off x="3293146" y="4169664"/>
+          <p:cNvPr id="39" name="Shape 37"/>
+          <p:cNvSpPr/>
+          <p:nvPr/>
+        </p:nvSpPr>
+        <p:spPr>
+          <a:xfrm>
+            <a:off x="7031736" y="4169664"/>
             <a:ext cx="685800" cy="475488"/>
           </a:xfrm>
           <a:prstGeom prst="rect">
@@ -30811,277 +30904,13 @@
       </p:sp>
       <p:sp>
         <p:nvSpPr>
-          <p:cNvPr id="39" name="Text 37"/>
-          <p:cNvSpPr/>
-          <p:nvPr/>
-        </p:nvSpPr>
-        <p:spPr>
-          <a:xfrm>
-            <a:off x="3293146" y="4169664"/>
-            <a:ext cx="685800" cy="475488"/>
-          </a:xfrm>
-          <a:prstGeom prst="rect">
-            <a:avLst/>
-          </a:prstGeom>
-          <a:noFill/>
-          <a:ln/>
-        </p:spPr>
-        <p:txBody>
-          <a:bodyPr wrap="square" lIns="0" tIns="0" rIns="0" bIns="0" rtlCol="0" anchor="ctr"/>
-          <a:lstStyle/>
-          <a:p>
-            <a:pPr algn="ctr" indent="0" marL="0">
-              <a:buNone/>
-            </a:pPr>
-            <a:r>
-              <a:rPr lang="en-US" sz="900" b="1" dirty="0">
-                <a:solidFill>
-                  <a:srgbClr val="9D174D"/>
-                </a:solidFill>
-                <a:latin typeface="Trebuchet MS" pitchFamily="34" charset="0"/>
-                <a:ea typeface="Trebuchet MS" pitchFamily="34" charset="-122"/>
-                <a:cs typeface="Trebuchet MS" pitchFamily="34" charset="-120"/>
-              </a:rPr>
-              <a:t>u</a:t>
-            </a:r>
-            <a:endParaRPr lang="en-US" sz="900" dirty="0"/>
-          </a:p>
-        </p:txBody>
-      </p:sp>
-      <p:sp>
-        <p:nvSpPr>
-          <p:cNvPr id="40" name="Shape 38"/>
-          <p:cNvSpPr/>
-          <p:nvPr/>
-        </p:nvSpPr>
-        <p:spPr>
-          <a:xfrm>
-            <a:off x="4331643" y="4169664"/>
-            <a:ext cx="685800" cy="475488"/>
-          </a:xfrm>
-          <a:prstGeom prst="rect">
-            <a:avLst>
-              <a:gd name="adj" fmla="val 7692"/>
-            </a:avLst>
-          </a:prstGeom>
-          <a:solidFill>
-            <a:srgbClr val="FFFFFF"/>
-          </a:solidFill>
-          <a:ln w="12700">
-            <a:solidFill>
-              <a:srgbClr val="DB2777"/>
-            </a:solidFill>
-            <a:prstDash val="solid"/>
-          </a:ln>
-        </p:spPr>
-      </p:sp>
-      <p:sp>
-        <p:nvSpPr>
-          <p:cNvPr id="41" name="Text 39"/>
-          <p:cNvSpPr/>
-          <p:nvPr/>
-        </p:nvSpPr>
-        <p:spPr>
-          <a:xfrm>
-            <a:off x="4331643" y="4169664"/>
-            <a:ext cx="685800" cy="475488"/>
-          </a:xfrm>
-          <a:prstGeom prst="rect">
-            <a:avLst/>
-          </a:prstGeom>
-          <a:noFill/>
-          <a:ln/>
-        </p:spPr>
-        <p:txBody>
-          <a:bodyPr wrap="square" lIns="0" tIns="0" rIns="0" bIns="0" rtlCol="0" anchor="ctr"/>
-          <a:lstStyle/>
-          <a:p>
-            <a:pPr algn="ctr" indent="0" marL="0">
-              <a:buNone/>
-            </a:pPr>
-            <a:r>
-              <a:rPr lang="en-US" sz="900" b="1" dirty="0">
-                <a:solidFill>
-                  <a:srgbClr val="9D174D"/>
-                </a:solidFill>
-                <a:latin typeface="Trebuchet MS" pitchFamily="34" charset="0"/>
-                <a:ea typeface="Trebuchet MS" pitchFamily="34" charset="-122"/>
-                <a:cs typeface="Trebuchet MS" pitchFamily="34" charset="-120"/>
-              </a:rPr>
-              <a:t>sh</a:t>
-            </a:r>
-            <a:endParaRPr lang="en-US" sz="900" dirty="0"/>
-          </a:p>
-        </p:txBody>
-      </p:sp>
-      <p:sp>
-        <p:nvSpPr>
-          <p:cNvPr id="42" name="Shape 40"/>
-          <p:cNvSpPr/>
-          <p:nvPr/>
-        </p:nvSpPr>
-        <p:spPr>
-          <a:xfrm>
-            <a:off x="5370141" y="4169664"/>
-            <a:ext cx="685800" cy="475488"/>
-          </a:xfrm>
-          <a:prstGeom prst="rect">
-            <a:avLst>
-              <a:gd name="adj" fmla="val 7692"/>
-            </a:avLst>
-          </a:prstGeom>
-          <a:solidFill>
-            <a:srgbClr val="FFFFFF"/>
-          </a:solidFill>
-          <a:ln w="12700">
-            <a:solidFill>
-              <a:srgbClr val="DB2777"/>
-            </a:solidFill>
-            <a:prstDash val="solid"/>
-          </a:ln>
-        </p:spPr>
-      </p:sp>
-      <p:sp>
-        <p:nvSpPr>
-          <p:cNvPr id="43" name="Text 41"/>
-          <p:cNvSpPr/>
-          <p:nvPr/>
-        </p:nvSpPr>
-        <p:spPr>
-          <a:xfrm>
-            <a:off x="5370141" y="4169664"/>
-            <a:ext cx="685800" cy="475488"/>
-          </a:xfrm>
-          <a:prstGeom prst="rect">
-            <a:avLst/>
-          </a:prstGeom>
-          <a:noFill/>
-          <a:ln/>
-        </p:spPr>
-        <p:txBody>
-          <a:bodyPr wrap="square" lIns="0" tIns="0" rIns="0" bIns="0" rtlCol="0" anchor="ctr"/>
-          <a:lstStyle/>
-          <a:p>
-            <a:pPr algn="ctr" indent="0" marL="0">
-              <a:buNone/>
-            </a:pPr>
-            <a:r>
-              <a:rPr lang="en-US" sz="900" b="1" dirty="0">
-                <a:solidFill>
-                  <a:srgbClr val="9D174D"/>
-                </a:solidFill>
-                <a:latin typeface="Trebuchet MS" pitchFamily="34" charset="0"/>
-                <a:ea typeface="Trebuchet MS" pitchFamily="34" charset="-122"/>
-                <a:cs typeface="Trebuchet MS" pitchFamily="34" charset="-120"/>
-              </a:rPr>
-              <a:t>o</a:t>
-            </a:r>
-            <a:endParaRPr lang="en-US" sz="900" dirty="0"/>
-          </a:p>
-        </p:txBody>
-      </p:sp>
-      <p:sp>
-        <p:nvSpPr>
-          <p:cNvPr id="44" name="Shape 42"/>
-          <p:cNvSpPr/>
-          <p:nvPr/>
-        </p:nvSpPr>
-        <p:spPr>
-          <a:xfrm>
-            <a:off x="6408638" y="4169664"/>
-            <a:ext cx="685800" cy="475488"/>
-          </a:xfrm>
-          <a:prstGeom prst="rect">
-            <a:avLst>
-              <a:gd name="adj" fmla="val 7692"/>
-            </a:avLst>
-          </a:prstGeom>
-          <a:solidFill>
-            <a:srgbClr val="FFFFFF"/>
-          </a:solidFill>
-          <a:ln w="12700">
-            <a:solidFill>
-              <a:srgbClr val="DB2777"/>
-            </a:solidFill>
-            <a:prstDash val="solid"/>
-          </a:ln>
-        </p:spPr>
-      </p:sp>
-      <p:sp>
-        <p:nvSpPr>
-          <p:cNvPr id="45" name="Text 43"/>
-          <p:cNvSpPr/>
-          <p:nvPr/>
-        </p:nvSpPr>
-        <p:spPr>
-          <a:xfrm>
-            <a:off x="6408638" y="4169664"/>
-            <a:ext cx="685800" cy="475488"/>
-          </a:xfrm>
-          <a:prstGeom prst="rect">
-            <a:avLst/>
-          </a:prstGeom>
-          <a:noFill/>
-          <a:ln/>
-        </p:spPr>
-        <p:txBody>
-          <a:bodyPr wrap="square" lIns="0" tIns="0" rIns="0" bIns="0" rtlCol="0" anchor="ctr"/>
-          <a:lstStyle/>
-          <a:p>
-            <a:pPr algn="ctr" indent="0" marL="0">
-              <a:buNone/>
-            </a:pPr>
-            <a:r>
-              <a:rPr lang="en-US" sz="900" b="1" dirty="0">
-                <a:solidFill>
-                  <a:srgbClr val="9D174D"/>
-                </a:solidFill>
-                <a:latin typeface="Trebuchet MS" pitchFamily="34" charset="0"/>
-                <a:ea typeface="Trebuchet MS" pitchFamily="34" charset="-122"/>
-                <a:cs typeface="Trebuchet MS" pitchFamily="34" charset="-120"/>
-              </a:rPr>
-              <a:t>v</a:t>
-            </a:r>
-            <a:endParaRPr lang="en-US" sz="900" dirty="0"/>
-          </a:p>
-        </p:txBody>
-      </p:sp>
-      <p:sp>
-        <p:nvSpPr>
-          <p:cNvPr id="46" name="Shape 44"/>
-          <p:cNvSpPr/>
-          <p:nvPr/>
-        </p:nvSpPr>
-        <p:spPr>
-          <a:xfrm>
-            <a:off x="7447135" y="4169664"/>
-            <a:ext cx="685800" cy="475488"/>
-          </a:xfrm>
-          <a:prstGeom prst="rect">
-            <a:avLst>
-              <a:gd name="adj" fmla="val 7692"/>
-            </a:avLst>
-          </a:prstGeom>
-          <a:solidFill>
-            <a:srgbClr val="FFFFFF"/>
-          </a:solidFill>
-          <a:ln w="12700">
-            <a:solidFill>
-              <a:srgbClr val="DB2777"/>
-            </a:solidFill>
-            <a:prstDash val="solid"/>
-          </a:ln>
-        </p:spPr>
-      </p:sp>
-      <p:sp>
-        <p:nvSpPr>
-          <p:cNvPr id="47" name="Text 45"/>
-          <p:cNvSpPr/>
-          <p:nvPr/>
-        </p:nvSpPr>
-        <p:spPr>
-          <a:xfrm>
-            <a:off x="7447135" y="4169664"/>
+          <p:cNvPr id="40" name="Text 38"/>
+          <p:cNvSpPr/>
+          <p:nvPr/>
+        </p:nvSpPr>
+        <p:spPr>
+          <a:xfrm>
+            <a:off x="7031736" y="4169664"/>
             <a:ext cx="685800" cy="475488"/>
           </a:xfrm>
           <a:prstGeom prst="rect">
@@ -31398,7 +31227,7 @@
                 <a:ea typeface="Calibri" pitchFamily="34" charset="-122"/>
                 <a:cs typeface="Calibri" pitchFamily="34" charset="-120"/>
               </a:rPr>
-              <a:t>Word Labs  •  wordlabs.app  •  Root: 'push' = to move forward with force</a:t>
+              <a:t>Word Labs  •  wordlabs.app  •  Root: 'push' = to press or move forward</a:t>
             </a:r>
             <a:endParaRPr lang="en-US" sz="800" dirty="0"/>
           </a:p>
@@ -32567,7 +32396,7 @@
                 <a:ea typeface="Calibri" pitchFamily="34" charset="-122"/>
                 <a:cs typeface="Calibri" pitchFamily="34" charset="-120"/>
               </a:rPr>
-              <a:t>Word Labs  •  wordlabs.app  •  Root: 'push' = to move forward with force</a:t>
+              <a:t>Word Labs  •  wordlabs.app  •  Root: 'push' = to press or move forward</a:t>
             </a:r>
             <a:endParaRPr lang="en-US" sz="800" dirty="0"/>
           </a:p>
@@ -33366,7 +33195,7 @@
                 <a:ea typeface="Trebuchet MS" pitchFamily="34" charset="-122"/>
                 <a:cs typeface="Trebuchet MS" pitchFamily="34" charset="-120"/>
               </a:rPr>
-              <a:t>back-</a:t>
+              <a:t>re-</a:t>
             </a:r>
             <a:endParaRPr lang="en-US" sz="1300" dirty="0"/>
           </a:p>
@@ -33519,7 +33348,7 @@
                 <a:ea typeface="Trebuchet MS" pitchFamily="34" charset="-122"/>
                 <a:cs typeface="Trebuchet MS" pitchFamily="34" charset="-120"/>
               </a:rPr>
-              <a:t>fore-</a:t>
+              <a:t>hand-</a:t>
             </a:r>
             <a:endParaRPr lang="en-US" sz="1300" dirty="0"/>
           </a:p>
@@ -33608,7 +33437,7 @@
                 <a:ea typeface="Trebuchet MS" pitchFamily="34" charset="-122"/>
                 <a:cs typeface="Trebuchet MS" pitchFamily="34" charset="-120"/>
               </a:rPr>
-              <a:t>-y</a:t>
+              <a:t>-over</a:t>
             </a:r>
             <a:endParaRPr lang="en-US" sz="1300" dirty="0"/>
           </a:p>
@@ -33713,7 +33542,7 @@
                 <a:ea typeface="Trebuchet MS" pitchFamily="34" charset="-122"/>
                 <a:cs typeface="Trebuchet MS" pitchFamily="34" charset="-120"/>
               </a:rPr>
-              <a:t>pushes</a:t>
+              <a:t>pushchair</a:t>
             </a:r>
             <a:endParaRPr lang="en-US" sz="1200" dirty="0"/>
           </a:p>
@@ -33779,7 +33608,7 @@
                 <a:ea typeface="Trebuchet MS" pitchFamily="34" charset="-122"/>
                 <a:cs typeface="Trebuchet MS" pitchFamily="34" charset="-120"/>
               </a:rPr>
-              <a:t>pushed</a:t>
+              <a:t>pushing</a:t>
             </a:r>
             <a:endParaRPr lang="en-US" sz="1200" dirty="0"/>
           </a:p>
@@ -33845,7 +33674,7 @@
                 <a:ea typeface="Trebuchet MS" pitchFamily="34" charset="-122"/>
                 <a:cs typeface="Trebuchet MS" pitchFamily="34" charset="-120"/>
               </a:rPr>
-              <a:t>pushing</a:t>
+              <a:t>pushed</a:t>
             </a:r>
             <a:endParaRPr lang="en-US" sz="1200" dirty="0"/>
           </a:p>
@@ -33977,7 +33806,7 @@
                 <a:ea typeface="Trebuchet MS" pitchFamily="34" charset="-122"/>
                 <a:cs typeface="Trebuchet MS" pitchFamily="34" charset="-120"/>
               </a:rPr>
-              <a:t>pushy</a:t>
+              <a:t>outpush</a:t>
             </a:r>
             <a:endParaRPr lang="en-US" sz="1200" dirty="0"/>
           </a:p>
@@ -34043,7 +33872,7 @@
                 <a:ea typeface="Trebuchet MS" pitchFamily="34" charset="-122"/>
                 <a:cs typeface="Trebuchet MS" pitchFamily="34" charset="-120"/>
               </a:rPr>
-              <a:t>outpush</a:t>
+              <a:t>pushover</a:t>
             </a:r>
             <a:endParaRPr lang="en-US" sz="1200" dirty="0"/>
           </a:p>
@@ -34109,7 +33938,7 @@
                 <a:ea typeface="Trebuchet MS" pitchFamily="34" charset="-122"/>
                 <a:cs typeface="Trebuchet MS" pitchFamily="34" charset="-120"/>
               </a:rPr>
-              <a:t>upward push</a:t>
+              <a:t>pushpin</a:t>
             </a:r>
             <a:endParaRPr lang="en-US" sz="1200" dirty="0"/>
           </a:p>
@@ -34175,7 +34004,7 @@
                 <a:ea typeface="Trebuchet MS" pitchFamily="34" charset="-122"/>
                 <a:cs typeface="Trebuchet MS" pitchFamily="34" charset="-120"/>
               </a:rPr>
-              <a:t>pushover</a:t>
+              <a:t>handpush</a:t>
             </a:r>
             <a:endParaRPr lang="en-US" sz="1200" dirty="0"/>
           </a:p>
@@ -34467,7 +34296,7 @@
                 <a:ea typeface="Calibri" pitchFamily="34" charset="-122"/>
                 <a:cs typeface="Calibri" pitchFamily="34" charset="-120"/>
               </a:rPr>
-              <a:t>Word Labs  •  wordlabs.app  •  Root: 'push' = to move forward with force</a:t>
+              <a:t>Word Labs  •  wordlabs.app  •  Root: 'push' = to press or move forward</a:t>
             </a:r>
             <a:endParaRPr lang="en-US" sz="800" dirty="0"/>
           </a:p>
@@ -34631,7 +34460,7 @@
                 <a:ea typeface="Calibri" pitchFamily="34" charset="-122"/>
                 <a:cs typeface="Calibri" pitchFamily="34" charset="-120"/>
               </a:rPr>
-              <a:t>The core part of a word carrying its basic meaning. For example, 'push' means 'to move forward with force'.</a:t>
+              <a:t>The core part of a word carrying its basic meaning. For example, 'push' means 'to press or move forward'.</a:t>
             </a:r>
             <a:endParaRPr lang="en-US" sz="1350" dirty="0"/>
           </a:p>
@@ -35251,7 +35080,7 @@
                 <a:ea typeface="Calibri" pitchFamily="34" charset="-122"/>
                 <a:cs typeface="Calibri" pitchFamily="34" charset="-120"/>
               </a:rPr>
-              <a:t>Word Labs  •  wordlabs.app  •  Root: 'push' = to move forward with force</a:t>
+              <a:t>Word Labs  •  wordlabs.app  •  Root: 'push' = to press or move forward</a:t>
             </a:r>
             <a:endParaRPr lang="en-US" sz="800" dirty="0"/>
           </a:p>
@@ -35363,7 +35192,7 @@
                 <a:ea typeface="Calibri" pitchFamily="34" charset="-122"/>
                 <a:cs typeface="Calibri" pitchFamily="34" charset="-120"/>
               </a:rPr>
-              <a:t>1.  The word 'pushed' is formed by adding the suffix '-ed' to the root 'push'.</a:t>
+              <a:t>1.  The suffix '-ing' cannot be added to the root 'push'.</a:t>
             </a:r>
             <a:endParaRPr lang="en-US" sz="1300" dirty="0"/>
           </a:p>
@@ -35386,11 +35215,11 @@
             </a:avLst>
           </a:prstGeom>
           <a:solidFill>
-            <a:srgbClr val="DCFCE7"/>
-          </a:solidFill>
-          <a:ln w="12700">
-            <a:solidFill>
-              <a:srgbClr val="16A34A"/>
+            <a:srgbClr val="FEE2E2"/>
+          </a:solidFill>
+          <a:ln w="12700">
+            <a:solidFill>
+              <a:srgbClr val="DC2626"/>
             </a:solidFill>
             <a:prstDash val="solid"/>
           </a:ln>
@@ -35423,13 +35252,13 @@
             <a:r>
               <a:rPr lang="en-US" sz="1100" b="1" dirty="0">
                 <a:solidFill>
-                  <a:srgbClr val="16A34A"/>
+                  <a:srgbClr val="DC2626"/>
                 </a:solidFill>
                 <a:latin typeface="Trebuchet MS" pitchFamily="34" charset="0"/>
                 <a:ea typeface="Trebuchet MS" pitchFamily="34" charset="-122"/>
                 <a:cs typeface="Trebuchet MS" pitchFamily="34" charset="-120"/>
               </a:rPr>
-              <a:t>TRUE</a:t>
+              <a:t>FALSE</a:t>
             </a:r>
             <a:endParaRPr lang="en-US" sz="1100" dirty="0"/>
           </a:p>
@@ -35502,7 +35331,7 @@
                 <a:ea typeface="Calibri" pitchFamily="34" charset="-122"/>
                 <a:cs typeface="Calibri" pitchFamily="34" charset="-120"/>
               </a:rPr>
-              <a:t>2.  The root 'push' comes from a Greek word.</a:t>
+              <a:t>2.  The root 'push' comes from a Greek word meaning 'to pull'.</a:t>
             </a:r>
             <a:endParaRPr lang="en-US" sz="1300" dirty="0"/>
           </a:p>
@@ -35641,7 +35470,7 @@
                 <a:ea typeface="Calibri" pitchFamily="34" charset="-122"/>
                 <a:cs typeface="Calibri" pitchFamily="34" charset="-120"/>
               </a:rPr>
-              <a:t>3.  A 'pushover' is someone who is easily convinced to do things.</a:t>
+              <a:t>3.  A 'pushchair' is a type of wheeled chair that you push.</a:t>
             </a:r>
             <a:endParaRPr lang="en-US" sz="1300" dirty="0"/>
           </a:p>
@@ -35780,7 +35609,7 @@
                 <a:ea typeface="Calibri" pitchFamily="34" charset="-122"/>
                 <a:cs typeface="Calibri" pitchFamily="34" charset="-120"/>
               </a:rPr>
-              <a:t>4.  The suffix '-er' in 'pusher' means the person or thing doing the pushing.</a:t>
+              <a:t>4.  Adding '-ed' to 'push' makes a past tense word.</a:t>
             </a:r>
             <a:endParaRPr lang="en-US" sz="1300" dirty="0"/>
           </a:p>
@@ -35919,7 +35748,7 @@
                 <a:ea typeface="Calibri" pitchFamily="34" charset="-122"/>
                 <a:cs typeface="Calibri" pitchFamily="34" charset="-120"/>
               </a:rPr>
-              <a:t>5.  'Pushy' means someone who never tries to get what they want.</a:t>
+              <a:t>5.  The word 'pushover' contains the root 'push'.</a:t>
             </a:r>
             <a:endParaRPr lang="en-US" sz="1300" dirty="0"/>
           </a:p>
@@ -35942,11 +35771,11 @@
             </a:avLst>
           </a:prstGeom>
           <a:solidFill>
-            <a:srgbClr val="FEE2E2"/>
-          </a:solidFill>
-          <a:ln w="12700">
-            <a:solidFill>
-              <a:srgbClr val="DC2626"/>
+            <a:srgbClr val="DCFCE7"/>
+          </a:solidFill>
+          <a:ln w="12700">
+            <a:solidFill>
+              <a:srgbClr val="16A34A"/>
             </a:solidFill>
             <a:prstDash val="solid"/>
           </a:ln>
@@ -35979,13 +35808,13 @@
             <a:r>
               <a:rPr lang="en-US" sz="1100" b="1" dirty="0">
                 <a:solidFill>
-                  <a:srgbClr val="DC2626"/>
+                  <a:srgbClr val="16A34A"/>
                 </a:solidFill>
                 <a:latin typeface="Trebuchet MS" pitchFamily="34" charset="0"/>
                 <a:ea typeface="Trebuchet MS" pitchFamily="34" charset="-122"/>
                 <a:cs typeface="Trebuchet MS" pitchFamily="34" charset="-120"/>
               </a:rPr>
-              <a:t>FALSE</a:t>
+              <a:t>TRUE</a:t>
             </a:r>
             <a:endParaRPr lang="en-US" sz="1100" dirty="0"/>
           </a:p>
@@ -36277,7 +36106,7 @@
                 <a:ea typeface="Calibri" pitchFamily="34" charset="-122"/>
                 <a:cs typeface="Calibri" pitchFamily="34" charset="-120"/>
               </a:rPr>
-              <a:t>Word Labs  •  wordlabs.app  •  Root: 'push' = to move forward with force</a:t>
+              <a:t>Word Labs  •  wordlabs.app  •  Root: 'push' = to press or move forward</a:t>
             </a:r>
             <a:endParaRPr lang="en-US" sz="800" dirty="0"/>
           </a:p>
@@ -36414,7 +36243,7 @@
                 <a:ea typeface="Trebuchet MS" pitchFamily="34" charset="-122"/>
                 <a:cs typeface="Trebuchet MS" pitchFamily="34" charset="-120"/>
               </a:rPr>
-              <a:t>to move forward with force</a:t>
+              <a:t>to press or move forward</a:t>
             </a:r>
             <a:endParaRPr lang="en-US" sz="2000" dirty="0"/>
           </a:p>
@@ -36558,7 +36387,7 @@
                 <a:ea typeface="Trebuchet MS" pitchFamily="34" charset="-122"/>
                 <a:cs typeface="Trebuchet MS" pitchFamily="34" charset="-120"/>
               </a:rPr>
-              <a:t>pushes</a:t>
+              <a:t>pushchair</a:t>
             </a:r>
             <a:endParaRPr lang="en-US" sz="1300" dirty="0"/>
           </a:p>
@@ -36624,7 +36453,7 @@
                 <a:ea typeface="Trebuchet MS" pitchFamily="34" charset="-122"/>
                 <a:cs typeface="Trebuchet MS" pitchFamily="34" charset="-120"/>
               </a:rPr>
-              <a:t>pushed</a:t>
+              <a:t>pushing</a:t>
             </a:r>
             <a:endParaRPr lang="en-US" sz="1300" dirty="0"/>
           </a:p>
@@ -36690,7 +36519,7 @@
                 <a:ea typeface="Trebuchet MS" pitchFamily="34" charset="-122"/>
                 <a:cs typeface="Trebuchet MS" pitchFamily="34" charset="-120"/>
               </a:rPr>
-              <a:t>pushing</a:t>
+              <a:t>pushed</a:t>
             </a:r>
             <a:endParaRPr lang="en-US" sz="1300" dirty="0"/>
           </a:p>
@@ -36822,7 +36651,7 @@
                 <a:ea typeface="Trebuchet MS" pitchFamily="34" charset="-122"/>
                 <a:cs typeface="Trebuchet MS" pitchFamily="34" charset="-120"/>
               </a:rPr>
-              <a:t>pushy</a:t>
+              <a:t>outpush</a:t>
             </a:r>
             <a:endParaRPr lang="en-US" sz="1300" dirty="0"/>
           </a:p>
@@ -36888,7 +36717,7 @@
                 <a:ea typeface="Trebuchet MS" pitchFamily="34" charset="-122"/>
                 <a:cs typeface="Trebuchet MS" pitchFamily="34" charset="-120"/>
               </a:rPr>
-              <a:t>outpush</a:t>
+              <a:t>pushover</a:t>
             </a:r>
             <a:endParaRPr lang="en-US" sz="1300" dirty="0"/>
           </a:p>
@@ -36954,7 +36783,7 @@
                 <a:ea typeface="Trebuchet MS" pitchFamily="34" charset="-122"/>
                 <a:cs typeface="Trebuchet MS" pitchFamily="34" charset="-120"/>
               </a:rPr>
-              <a:t>upward push</a:t>
+              <a:t>pushpin</a:t>
             </a:r>
             <a:endParaRPr lang="en-US" sz="1300" dirty="0"/>
           </a:p>
@@ -37246,7 +37075,7 @@
                 <a:ea typeface="Calibri" pitchFamily="34" charset="-122"/>
                 <a:cs typeface="Calibri" pitchFamily="34" charset="-120"/>
               </a:rPr>
-              <a:t>Word Labs  •  wordlabs.app  •  Root: 'push' = to move forward with force</a:t>
+              <a:t>Word Labs  •  wordlabs.app  •  Root: 'push' = to press or move forward</a:t>
             </a:r>
             <a:endParaRPr lang="en-US" sz="800" dirty="0"/>
           </a:p>
@@ -38045,7 +37874,7 @@
                 <a:ea typeface="Trebuchet MS" pitchFamily="34" charset="-122"/>
                 <a:cs typeface="Trebuchet MS" pitchFamily="34" charset="-120"/>
               </a:rPr>
-              <a:t>back-</a:t>
+              <a:t>re-</a:t>
             </a:r>
             <a:endParaRPr lang="en-US" sz="1300" dirty="0"/>
           </a:p>
@@ -38198,7 +38027,7 @@
                 <a:ea typeface="Trebuchet MS" pitchFamily="34" charset="-122"/>
                 <a:cs typeface="Trebuchet MS" pitchFamily="34" charset="-120"/>
               </a:rPr>
-              <a:t>fore-</a:t>
+              <a:t>hand-</a:t>
             </a:r>
             <a:endParaRPr lang="en-US" sz="1300" dirty="0"/>
           </a:p>
@@ -38287,7 +38116,7 @@
                 <a:ea typeface="Trebuchet MS" pitchFamily="34" charset="-122"/>
                 <a:cs typeface="Trebuchet MS" pitchFamily="34" charset="-120"/>
               </a:rPr>
-              <a:t>-y</a:t>
+              <a:t>-over</a:t>
             </a:r>
             <a:endParaRPr lang="en-US" sz="1300" dirty="0"/>
           </a:p>
@@ -38728,7 +38557,7 @@
                 <a:ea typeface="Trebuchet MS" pitchFamily="34" charset="-122"/>
                 <a:cs typeface="Trebuchet MS" pitchFamily="34" charset="-120"/>
               </a:rPr>
-              <a:t>pushes</a:t>
+              <a:t>pushchair</a:t>
             </a:r>
             <a:endParaRPr lang="en-US" sz="1400" dirty="0"/>
           </a:p>
@@ -39020,7 +38849,7 @@
                 <a:ea typeface="Calibri" pitchFamily="34" charset="-122"/>
                 <a:cs typeface="Calibri" pitchFamily="34" charset="-120"/>
               </a:rPr>
-              <a:t>Word Labs  •  wordlabs.app  •  Root: 'push' = to move forward with force</a:t>
+              <a:t>Word Labs  •  wordlabs.app  •  Root: 'push' = to press or move forward</a:t>
             </a:r>
             <a:endParaRPr lang="en-US" sz="800" dirty="0"/>
           </a:p>
@@ -39132,7 +38961,7 @@
                 <a:ea typeface="Trebuchet MS" pitchFamily="34" charset="-122"/>
                 <a:cs typeface="Trebuchet MS" pitchFamily="34" charset="-120"/>
               </a:rPr>
-              <a:t>pushes</a:t>
+              <a:t>pushchair</a:t>
             </a:r>
             <a:endParaRPr lang="en-US" sz="1200" dirty="0"/>
           </a:p>
@@ -39198,7 +39027,7 @@
                 <a:ea typeface="Calibri" pitchFamily="34" charset="-122"/>
                 <a:cs typeface="Calibri" pitchFamily="34" charset="-120"/>
               </a:rPr>
-              <a:t>Using force right now to move something along.</a:t>
+              <a:t>What happened when someone already moved something away using force.</a:t>
             </a:r>
             <a:endParaRPr lang="en-US" sz="1200" dirty="0"/>
           </a:p>
@@ -39271,7 +39100,7 @@
                 <a:ea typeface="Trebuchet MS" pitchFamily="34" charset="-122"/>
                 <a:cs typeface="Trebuchet MS" pitchFamily="34" charset="-120"/>
               </a:rPr>
-              <a:t>pushed</a:t>
+              <a:t>pushing</a:t>
             </a:r>
             <a:endParaRPr lang="en-US" sz="1200" dirty="0"/>
           </a:p>
@@ -39337,7 +39166,7 @@
                 <a:ea typeface="Calibri" pitchFamily="34" charset="-122"/>
                 <a:cs typeface="Calibri" pitchFamily="34" charset="-120"/>
               </a:rPr>
-              <a:t>Describes someone who tries too hard to get what they want.</a:t>
+              <a:t>To push something outward or beyond a normal boundary.</a:t>
             </a:r>
             <a:endParaRPr lang="en-US" sz="1200" dirty="0"/>
           </a:p>
@@ -39410,7 +39239,7 @@
                 <a:ea typeface="Trebuchet MS" pitchFamily="34" charset="-122"/>
                 <a:cs typeface="Trebuchet MS" pitchFamily="34" charset="-120"/>
               </a:rPr>
-              <a:t>pushing</a:t>
+              <a:t>pushed</a:t>
             </a:r>
             <a:endParaRPr lang="en-US" sz="1200" dirty="0"/>
           </a:p>
@@ -39476,7 +39305,7 @@
                 <a:ea typeface="Calibri" pitchFamily="34" charset="-122"/>
                 <a:cs typeface="Calibri" pitchFamily="34" charset="-120"/>
               </a:rPr>
-              <a:t>Moves something forward using force more than once.</a:t>
+              <a:t>A small chair on wheels that you push to carry a baby or young child around.</a:t>
             </a:r>
             <a:endParaRPr lang="en-US" sz="1200" dirty="0"/>
           </a:p>
@@ -39615,7 +39444,7 @@
                 <a:ea typeface="Calibri" pitchFamily="34" charset="-122"/>
                 <a:cs typeface="Calibri" pitchFamily="34" charset="-120"/>
               </a:rPr>
-              <a:t>To push beyond a limit or push further than something else.</a:t>
+              <a:t>Something very easy to do, or a person who is easily convinced to do things.</a:t>
             </a:r>
             <a:endParaRPr lang="en-US" sz="1200" dirty="0"/>
           </a:p>
@@ -39688,7 +39517,7 @@
                 <a:ea typeface="Trebuchet MS" pitchFamily="34" charset="-122"/>
                 <a:cs typeface="Trebuchet MS" pitchFamily="34" charset="-120"/>
               </a:rPr>
-              <a:t>pushy</a:t>
+              <a:t>outpush</a:t>
             </a:r>
             <a:endParaRPr lang="en-US" sz="1200" dirty="0"/>
           </a:p>
@@ -39754,7 +39583,7 @@
                 <a:ea typeface="Calibri" pitchFamily="34" charset="-122"/>
                 <a:cs typeface="Calibri" pitchFamily="34" charset="-120"/>
               </a:rPr>
-              <a:t>A force that moves something upwards.</a:t>
+              <a:t>A small pin with a flat top used to stick paper to a board by pushing it in.</a:t>
             </a:r>
             <a:endParaRPr lang="en-US" sz="1200" dirty="0"/>
           </a:p>
@@ -39827,7 +39656,7 @@
                 <a:ea typeface="Trebuchet MS" pitchFamily="34" charset="-122"/>
                 <a:cs typeface="Trebuchet MS" pitchFamily="34" charset="-120"/>
               </a:rPr>
-              <a:t>outpush</a:t>
+              <a:t>pushover</a:t>
             </a:r>
             <a:endParaRPr lang="en-US" sz="1200" dirty="0"/>
           </a:p>
@@ -39893,7 +39722,7 @@
                 <a:ea typeface="Calibri" pitchFamily="34" charset="-122"/>
                 <a:cs typeface="Calibri" pitchFamily="34" charset="-120"/>
               </a:rPr>
-              <a:t>A person or thing that pushes something.</a:t>
+              <a:t>A person or thing that pushes something along.</a:t>
             </a:r>
             <a:endParaRPr lang="en-US" sz="1200" dirty="0"/>
           </a:p>
@@ -39966,7 +39795,7 @@
                 <a:ea typeface="Trebuchet MS" pitchFamily="34" charset="-122"/>
                 <a:cs typeface="Trebuchet MS" pitchFamily="34" charset="-120"/>
               </a:rPr>
-              <a:t>upward push</a:t>
+              <a:t>pushpin</a:t>
             </a:r>
             <a:endParaRPr lang="en-US" sz="1200" dirty="0"/>
           </a:p>
@@ -40032,7 +39861,7 @@
                 <a:ea typeface="Calibri" pitchFamily="34" charset="-122"/>
                 <a:cs typeface="Calibri" pitchFamily="34" charset="-120"/>
               </a:rPr>
-              <a:t>Used force to move something away in the past.</a:t>
+              <a:t>Using your hands or body to move something away from you with force.</a:t>
             </a:r>
             <a:endParaRPr lang="en-US" sz="1200" dirty="0"/>
           </a:p>
@@ -40324,7 +40153,7 @@
                 <a:ea typeface="Calibri" pitchFamily="34" charset="-122"/>
                 <a:cs typeface="Calibri" pitchFamily="34" charset="-120"/>
               </a:rPr>
-              <a:t>Word Labs  •  wordlabs.app  •  Root: 'push' = to move forward with force</a:t>
+              <a:t>Word Labs  •  wordlabs.app  •  Root: 'push' = to press or move forward</a:t>
             </a:r>
             <a:endParaRPr lang="en-US" sz="800" dirty="0"/>
           </a:p>
@@ -40527,7 +40356,7 @@
                 <a:ea typeface="Calibri" pitchFamily="34" charset="-122"/>
                 <a:cs typeface="Calibri" pitchFamily="34" charset="-120"/>
               </a:rPr>
-              <a:t>The children were pushing the heavy box across the classroom floor.</a:t>
+              <a:t>The teacher reminded the students that pushing in the corridor is dangerous and disrespectful.</a:t>
             </a:r>
             <a:endParaRPr lang="en-US" sz="1500" dirty="0"/>
           </a:p>
@@ -40691,7 +40520,7 @@
                 <a:ea typeface="Calibri" pitchFamily="34" charset="-122"/>
                 <a:cs typeface="Calibri" pitchFamily="34" charset="-120"/>
               </a:rPr>
-              <a:t>My little sister is so pushy when she wants the last biscuit at afternoon tea.</a:t>
+              <a:t>During the science experiment, the children discovered that a pushpin could hold several sheets of paper to the board.</a:t>
             </a:r>
             <a:endParaRPr lang="en-US" sz="1500" dirty="0"/>
           </a:p>
@@ -40855,7 +40684,7 @@
                 <a:ea typeface="Calibri" pitchFamily="34" charset="-122"/>
                 <a:cs typeface="Calibri" pitchFamily="34" charset="-120"/>
               </a:rPr>
-              <a:t>The teacher said, 'Don't be a pushover — stand up for what you believe is right!'</a:t>
+              <a:t>Mia found the maths puzzle to be a complete pushover because she had practised all week.</a:t>
             </a:r>
             <a:endParaRPr lang="en-US" sz="1500" dirty="0"/>
           </a:p>

--- a/output/wordlabs-push-3day.pptx
+++ b/output/wordlabs-push-3day.pptx
@@ -4240,7 +4240,7 @@
                 <a:ea typeface="Calibri" pitchFamily="34" charset="-122"/>
                 <a:cs typeface="Calibri" pitchFamily="34" charset="-120"/>
               </a:rPr>
-              <a:t>"to press or move forward"</a:t>
+              <a:t>"to press forward with force"</a:t>
             </a:r>
             <a:endParaRPr lang="en-US" sz="2200" dirty="0"/>
           </a:p>
@@ -4279,7 +4279,7 @@
                 <a:ea typeface="Calibri" pitchFamily="34" charset="-122"/>
                 <a:cs typeface="Calibri" pitchFamily="34" charset="-120"/>
               </a:rPr>
-              <a:t>Origin: Latin: pulsare</a:t>
+              <a:t>Origin: Anglo-Saxon (Old English) root</a:t>
             </a:r>
             <a:endParaRPr lang="en-US" sz="1300" dirty="0"/>
           </a:p>
@@ -5288,7 +5288,7 @@
                 <a:ea typeface="Calibri" pitchFamily="34" charset="-122"/>
                 <a:cs typeface="Calibri" pitchFamily="34" charset="-120"/>
               </a:rPr>
-              <a:t>Word Labs  •  wordlabs.app  •  Root: 'push' = to press or move forward</a:t>
+              <a:t>Word Labs  •  wordlabs.app  •  Root: 'push' = to press forward with force</a:t>
             </a:r>
             <a:endParaRPr lang="en-US" sz="800" dirty="0"/>
           </a:p>
@@ -5622,7 +5622,7 @@
                 <a:ea typeface="Trebuchet MS" pitchFamily="34" charset="-122"/>
                 <a:cs typeface="Trebuchet MS" pitchFamily="34" charset="-120"/>
               </a:rPr>
-              <a:t>1</a:t>
+              <a:t>0</a:t>
             </a:r>
             <a:pPr algn="ctr" indent="0" marL="0">
               <a:buNone/>
@@ -5928,7 +5928,7 @@
                 <a:ea typeface="Calibri" pitchFamily="34" charset="-122"/>
                 <a:cs typeface="Calibri" pitchFamily="34" charset="-120"/>
               </a:rPr>
-              <a:t>Word Labs  •  wordlabs.app  •  Root: 'push' = to press or move forward</a:t>
+              <a:t>Word Labs  •  wordlabs.app  •  Root: 'push' = to press forward with force</a:t>
             </a:r>
             <a:endParaRPr lang="en-US" sz="800" dirty="0"/>
           </a:p>
@@ -6040,7 +6040,7 @@
                 <a:ea typeface="Calibri" pitchFamily="34" charset="-122"/>
                 <a:cs typeface="Calibri" pitchFamily="34" charset="-120"/>
               </a:rPr>
-              <a:t>Jake was </a:t>
+              <a:t>She </a:t>
             </a:r>
             <a:pPr algn="l" indent="0" marL="0">
               <a:buNone/>
@@ -6057,7 +6057,7 @@
                 <a:ea typeface="Calibri" pitchFamily="34" charset="-122"/>
                 <a:cs typeface="Calibri" pitchFamily="34" charset="-120"/>
               </a:rPr>
-              <a:t>pushing</a:t>
+              <a:t>pushed</a:t>
             </a:r>
             <a:pPr algn="l" indent="0" marL="0">
               <a:buNone/>
@@ -6071,7 +6071,7 @@
                 <a:ea typeface="Calibri" pitchFamily="34" charset="-122"/>
                 <a:cs typeface="Calibri" pitchFamily="34" charset="-120"/>
               </a:rPr>
-              <a:t> the heavy cart down the hill, but his little sister thought it was a </a:t>
+              <a:t> the door open with both hands. The </a:t>
             </a:r>
             <a:pPr algn="l" indent="0" marL="0">
               <a:buNone/>
@@ -6088,7 +6088,7 @@
                 <a:ea typeface="Calibri" pitchFamily="34" charset="-122"/>
                 <a:cs typeface="Calibri" pitchFamily="34" charset="-120"/>
               </a:rPr>
-              <a:t>pushover</a:t>
+              <a:t>pusher</a:t>
             </a:r>
             <a:pPr algn="l" indent="0" marL="0">
               <a:buNone/>
@@ -6102,7 +6102,7 @@
                 <a:ea typeface="Calibri" pitchFamily="34" charset="-122"/>
                 <a:cs typeface="Calibri" pitchFamily="34" charset="-120"/>
               </a:rPr>
-              <a:t>!</a:t>
+              <a:t> moved the trolley down the aisle.</a:t>
             </a:r>
             <a:endParaRPr lang="en-US" sz="1800" dirty="0"/>
           </a:p>
@@ -6257,7 +6257,7 @@
                 <a:ea typeface="Trebuchet MS" pitchFamily="34" charset="-122"/>
                 <a:cs typeface="Trebuchet MS" pitchFamily="34" charset="-120"/>
               </a:rPr>
-              <a:t>pushing</a:t>
+              <a:t>pushed</a:t>
             </a:r>
             <a:endParaRPr lang="en-US" sz="1400" dirty="0"/>
           </a:p>
@@ -6385,7 +6385,7 @@
                 <a:ea typeface="Trebuchet MS" pitchFamily="34" charset="-122"/>
                 <a:cs typeface="Trebuchet MS" pitchFamily="34" charset="-120"/>
               </a:rPr>
-              <a:t>pushover</a:t>
+              <a:t>pusher</a:t>
             </a:r>
             <a:endParaRPr lang="en-US" sz="1400" dirty="0"/>
           </a:p>
@@ -6716,7 +6716,7 @@
                 <a:ea typeface="Calibri" pitchFamily="34" charset="-122"/>
                 <a:cs typeface="Calibri" pitchFamily="34" charset="-120"/>
               </a:rPr>
-              <a:t>Word Labs  •  wordlabs.app  •  Root: 'push' = to press or move forward</a:t>
+              <a:t>Word Labs  •  wordlabs.app  •  Root: 'push' = to press forward with force</a:t>
             </a:r>
             <a:endParaRPr lang="en-US" sz="800" dirty="0"/>
           </a:p>
@@ -6855,7 +6855,7 @@
                 <a:ea typeface="Trebuchet MS" pitchFamily="34" charset="-122"/>
                 <a:cs typeface="Trebuchet MS" pitchFamily="34" charset="-120"/>
               </a:rPr>
-              <a:t>pushing</a:t>
+              <a:t>pushed</a:t>
             </a:r>
             <a:endParaRPr lang="en-US" sz="2800" dirty="0"/>
           </a:p>
@@ -7543,7 +7543,7 @@
                 <a:ea typeface="Calibri" pitchFamily="34" charset="-122"/>
                 <a:cs typeface="Calibri" pitchFamily="34" charset="-120"/>
               </a:rPr>
-              <a:t>Word Labs  •  wordlabs.app  •  Root: 'push' = to press or move forward</a:t>
+              <a:t>Word Labs  •  wordlabs.app  •  Root: 'push' = to press forward with force</a:t>
             </a:r>
             <a:endParaRPr lang="en-US" sz="800" dirty="0"/>
           </a:p>
@@ -7682,7 +7682,7 @@
                 <a:ea typeface="Trebuchet MS" pitchFamily="34" charset="-122"/>
                 <a:cs typeface="Trebuchet MS" pitchFamily="34" charset="-120"/>
               </a:rPr>
-              <a:t>pushing</a:t>
+              <a:t>pushed</a:t>
             </a:r>
             <a:endParaRPr lang="en-US" sz="2800" dirty="0"/>
           </a:p>
@@ -7860,7 +7860,7 @@
                 <a:ea typeface="Calibri" pitchFamily="34" charset="-122"/>
                 <a:cs typeface="Calibri" pitchFamily="34" charset="-120"/>
               </a:rPr>
-              <a:t>to press or move forward</a:t>
+              <a:t>to press forward with force</a:t>
             </a:r>
             <a:endParaRPr lang="en-US" sz="850" dirty="0"/>
           </a:p>
@@ -7933,7 +7933,7 @@
                 <a:ea typeface="Trebuchet MS" pitchFamily="34" charset="-122"/>
                 <a:cs typeface="Trebuchet MS" pitchFamily="34" charset="-120"/>
               </a:rPr>
-              <a:t>ing</a:t>
+              <a:t>ed</a:t>
             </a:r>
             <a:endParaRPr lang="en-US" sz="1300" dirty="0"/>
           </a:p>
@@ -7972,7 +7972,7 @@
                 <a:ea typeface="Calibri" pitchFamily="34" charset="-122"/>
                 <a:cs typeface="Calibri" pitchFamily="34" charset="-120"/>
               </a:rPr>
-              <a:t>action happening now</a:t>
+              <a:t>past tense</a:t>
             </a:r>
             <a:endParaRPr lang="en-US" sz="850" dirty="0"/>
           </a:p>
@@ -8528,7 +8528,7 @@
                 <a:ea typeface="Calibri" pitchFamily="34" charset="-122"/>
                 <a:cs typeface="Calibri" pitchFamily="34" charset="-120"/>
               </a:rPr>
-              <a:t>Word Labs  •  wordlabs.app  •  Root: 'push' = to press or move forward</a:t>
+              <a:t>Word Labs  •  wordlabs.app  •  Root: 'push' = to press forward with force</a:t>
             </a:r>
             <a:endParaRPr lang="en-US" sz="800" dirty="0"/>
           </a:p>
@@ -8667,7 +8667,7 @@
                 <a:ea typeface="Trebuchet MS" pitchFamily="34" charset="-122"/>
                 <a:cs typeface="Trebuchet MS" pitchFamily="34" charset="-120"/>
               </a:rPr>
-              <a:t>pushing</a:t>
+              <a:t>pushed</a:t>
             </a:r>
             <a:endParaRPr lang="en-US" sz="2800" dirty="0"/>
           </a:p>
@@ -8845,7 +8845,7 @@
                 <a:ea typeface="Calibri" pitchFamily="34" charset="-122"/>
                 <a:cs typeface="Calibri" pitchFamily="34" charset="-120"/>
               </a:rPr>
-              <a:t>to press or move forward</a:t>
+              <a:t>to press forward with force</a:t>
             </a:r>
             <a:endParaRPr lang="en-US" sz="850" dirty="0"/>
           </a:p>
@@ -8918,7 +8918,7 @@
                 <a:ea typeface="Trebuchet MS" pitchFamily="34" charset="-122"/>
                 <a:cs typeface="Trebuchet MS" pitchFamily="34" charset="-120"/>
               </a:rPr>
-              <a:t>ing</a:t>
+              <a:t>ed</a:t>
             </a:r>
             <a:endParaRPr lang="en-US" sz="1300" dirty="0"/>
           </a:p>
@@ -8957,7 +8957,7 @@
                 <a:ea typeface="Calibri" pitchFamily="34" charset="-122"/>
                 <a:cs typeface="Calibri" pitchFamily="34" charset="-120"/>
               </a:rPr>
-              <a:t>action happening now</a:t>
+              <a:t>past tense</a:t>
             </a:r>
             <a:endParaRPr lang="en-US" sz="850" dirty="0"/>
           </a:p>
@@ -9064,7 +9064,7 @@
         </p:nvSpPr>
         <p:spPr>
           <a:xfrm>
-            <a:off x="2999232" y="3364992"/>
+            <a:off x="4370832" y="3364992"/>
             <a:ext cx="1645920" cy="475488"/>
           </a:xfrm>
           <a:prstGeom prst="rect">
@@ -9091,7 +9091,7 @@
         </p:nvSpPr>
         <p:spPr>
           <a:xfrm>
-            <a:off x="2999232" y="3364992"/>
+            <a:off x="4370832" y="3364992"/>
             <a:ext cx="1645920" cy="475488"/>
           </a:xfrm>
           <a:prstGeom prst="rect">
@@ -9116,7 +9116,7 @@
                 <a:ea typeface="Trebuchet MS" pitchFamily="34" charset="-122"/>
                 <a:cs typeface="Trebuchet MS" pitchFamily="34" charset="-120"/>
               </a:rPr>
-              <a:t>push</a:t>
+              <a:t>pushed</a:t>
             </a:r>
             <a:endParaRPr lang="en-US" sz="1400" dirty="0"/>
           </a:p>
@@ -9124,14 +9124,41 @@
       </p:sp>
       <p:sp>
         <p:nvSpPr>
-          <p:cNvPr id="27" name="Text 25"/>
-          <p:cNvSpPr/>
-          <p:nvPr/>
-        </p:nvSpPr>
-        <p:spPr>
-          <a:xfrm>
-            <a:off x="4645152" y="3364992"/>
-            <a:ext cx="1097280" cy="475488"/>
+          <p:cNvPr id="27" name="Shape 25"/>
+          <p:cNvSpPr/>
+          <p:nvPr/>
+        </p:nvSpPr>
+        <p:spPr>
+          <a:xfrm>
+            <a:off x="365760" y="4096512"/>
+            <a:ext cx="1371600" cy="804672"/>
+          </a:xfrm>
+          <a:prstGeom prst="rect">
+            <a:avLst>
+              <a:gd name="adj" fmla="val 6818"/>
+            </a:avLst>
+          </a:prstGeom>
+          <a:solidFill>
+            <a:srgbClr val="E2E8F0"/>
+          </a:solidFill>
+          <a:ln w="12700">
+            <a:solidFill>
+              <a:srgbClr val="E2E8F0"/>
+            </a:solidFill>
+            <a:prstDash val="solid"/>
+          </a:ln>
+        </p:spPr>
+      </p:sp>
+      <p:sp>
+        <p:nvSpPr>
+          <p:cNvPr id="28" name="Text 26"/>
+          <p:cNvSpPr/>
+          <p:nvPr/>
+        </p:nvSpPr>
+        <p:spPr>
+          <a:xfrm>
+            <a:off x="365760" y="4096512"/>
+            <a:ext cx="1371600" cy="804672"/>
           </a:xfrm>
           <a:prstGeom prst="rect">
             <a:avLst/>
@@ -9147,96 +9174,30 @@
               <a:buNone/>
             </a:pPr>
             <a:r>
-              <a:rPr lang="en-US" sz="1600" b="1" dirty="0">
-                <a:solidFill>
-                  <a:srgbClr val="0D9488"/>
+              <a:rPr lang="en-US" sz="1100" b="1" dirty="0">
+                <a:solidFill>
+                  <a:srgbClr val="475569"/>
                 </a:solidFill>
                 <a:latin typeface="Trebuchet MS" pitchFamily="34" charset="0"/>
                 <a:ea typeface="Trebuchet MS" pitchFamily="34" charset="-122"/>
                 <a:cs typeface="Trebuchet MS" pitchFamily="34" charset="-120"/>
               </a:rPr>
-              <a:t>·</a:t>
-            </a:r>
-            <a:endParaRPr lang="en-US" sz="1600" dirty="0"/>
-          </a:p>
-        </p:txBody>
-      </p:sp>
-      <p:sp>
-        <p:nvSpPr>
-          <p:cNvPr id="28" name="Shape 26"/>
-          <p:cNvSpPr/>
-          <p:nvPr/>
-        </p:nvSpPr>
-        <p:spPr>
-          <a:xfrm>
-            <a:off x="5742432" y="3364992"/>
-            <a:ext cx="1645920" cy="475488"/>
-          </a:xfrm>
-          <a:prstGeom prst="rect">
-            <a:avLst>
-              <a:gd name="adj" fmla="val 9615"/>
-            </a:avLst>
-          </a:prstGeom>
-          <a:solidFill>
-            <a:srgbClr val="FFFFFF"/>
-          </a:solidFill>
-          <a:ln w="12700">
-            <a:solidFill>
-              <a:srgbClr val="0D9488"/>
-            </a:solidFill>
-            <a:prstDash val="solid"/>
-          </a:ln>
-        </p:spPr>
-      </p:sp>
-      <p:sp>
-        <p:nvSpPr>
-          <p:cNvPr id="29" name="Text 27"/>
-          <p:cNvSpPr/>
-          <p:nvPr/>
-        </p:nvSpPr>
-        <p:spPr>
-          <a:xfrm>
-            <a:off x="5742432" y="3364992"/>
-            <a:ext cx="1645920" cy="475488"/>
-          </a:xfrm>
-          <a:prstGeom prst="rect">
-            <a:avLst/>
-          </a:prstGeom>
-          <a:noFill/>
-          <a:ln/>
-        </p:spPr>
-        <p:txBody>
-          <a:bodyPr wrap="square" lIns="0" tIns="0" rIns="0" bIns="0" rtlCol="0" anchor="ctr"/>
-          <a:lstStyle/>
-          <a:p>
-            <a:pPr algn="ctr" indent="0" marL="0">
-              <a:buNone/>
-            </a:pPr>
-            <a:r>
-              <a:rPr lang="en-US" sz="1400" b="1" dirty="0">
-                <a:solidFill>
-                  <a:srgbClr val="0D9488"/>
-                </a:solidFill>
-                <a:latin typeface="Trebuchet MS" pitchFamily="34" charset="0"/>
-                <a:ea typeface="Trebuchet MS" pitchFamily="34" charset="-122"/>
-                <a:cs typeface="Trebuchet MS" pitchFamily="34" charset="-120"/>
-              </a:rPr>
-              <a:t>ing</a:t>
-            </a:r>
-            <a:endParaRPr lang="en-US" sz="1400" dirty="0"/>
-          </a:p>
-        </p:txBody>
-      </p:sp>
-      <p:sp>
-        <p:nvSpPr>
-          <p:cNvPr id="30" name="Shape 28"/>
-          <p:cNvSpPr/>
-          <p:nvPr/>
-        </p:nvSpPr>
-        <p:spPr>
-          <a:xfrm>
-            <a:off x="365760" y="4096512"/>
-            <a:ext cx="1371600" cy="804672"/>
+              <a:t>Phonemes</a:t>
+            </a:r>
+            <a:endParaRPr lang="en-US" sz="1100" dirty="0"/>
+          </a:p>
+        </p:txBody>
+      </p:sp>
+      <p:sp>
+        <p:nvSpPr>
+          <p:cNvPr id="29" name="Shape 27"/>
+          <p:cNvSpPr/>
+          <p:nvPr/>
+        </p:nvSpPr>
+        <p:spPr>
+          <a:xfrm>
+            <a:off x="1874520" y="4096512"/>
+            <a:ext cx="6903720" cy="804672"/>
           </a:xfrm>
           <a:prstGeom prst="rect">
             <a:avLst>
@@ -9244,85 +9205,19 @@
             </a:avLst>
           </a:prstGeom>
           <a:solidFill>
-            <a:srgbClr val="E2E8F0"/>
+            <a:srgbClr val="F8FAFC"/>
           </a:solidFill>
           <a:ln w="12700">
             <a:solidFill>
               <a:srgbClr val="E2E8F0"/>
             </a:solidFill>
-            <a:prstDash val="solid"/>
-          </a:ln>
-        </p:spPr>
-      </p:sp>
-      <p:sp>
-        <p:nvSpPr>
-          <p:cNvPr id="31" name="Text 29"/>
-          <p:cNvSpPr/>
-          <p:nvPr/>
-        </p:nvSpPr>
-        <p:spPr>
-          <a:xfrm>
-            <a:off x="365760" y="4096512"/>
-            <a:ext cx="1371600" cy="804672"/>
-          </a:xfrm>
-          <a:prstGeom prst="rect">
-            <a:avLst/>
-          </a:prstGeom>
-          <a:noFill/>
-          <a:ln/>
-        </p:spPr>
-        <p:txBody>
-          <a:bodyPr wrap="square" lIns="0" tIns="0" rIns="0" bIns="0" rtlCol="0" anchor="ctr"/>
-          <a:lstStyle/>
-          <a:p>
-            <a:pPr algn="ctr" indent="0" marL="0">
-              <a:buNone/>
-            </a:pPr>
-            <a:r>
-              <a:rPr lang="en-US" sz="1100" b="1" dirty="0">
-                <a:solidFill>
-                  <a:srgbClr val="475569"/>
-                </a:solidFill>
-                <a:latin typeface="Trebuchet MS" pitchFamily="34" charset="0"/>
-                <a:ea typeface="Trebuchet MS" pitchFamily="34" charset="-122"/>
-                <a:cs typeface="Trebuchet MS" pitchFamily="34" charset="-120"/>
-              </a:rPr>
-              <a:t>Phonemes</a:t>
-            </a:r>
-            <a:endParaRPr lang="en-US" sz="1100" dirty="0"/>
-          </a:p>
-        </p:txBody>
-      </p:sp>
-      <p:sp>
-        <p:nvSpPr>
-          <p:cNvPr id="32" name="Shape 30"/>
-          <p:cNvSpPr/>
-          <p:nvPr/>
-        </p:nvSpPr>
-        <p:spPr>
-          <a:xfrm>
-            <a:off x="1874520" y="4096512"/>
-            <a:ext cx="6903720" cy="804672"/>
-          </a:xfrm>
-          <a:prstGeom prst="rect">
-            <a:avLst>
-              <a:gd name="adj" fmla="val 6818"/>
-            </a:avLst>
-          </a:prstGeom>
-          <a:solidFill>
-            <a:srgbClr val="F8FAFC"/>
-          </a:solidFill>
-          <a:ln w="12700">
-            <a:solidFill>
-              <a:srgbClr val="E2E8F0"/>
-            </a:solidFill>
             <a:prstDash val="dash"/>
           </a:ln>
         </p:spPr>
       </p:sp>
       <p:sp>
         <p:nvSpPr>
-          <p:cNvPr id="33" name="Text 31"/>
+          <p:cNvPr id="30" name="Text 28"/>
           <p:cNvSpPr/>
           <p:nvPr/>
         </p:nvSpPr>
@@ -9645,7 +9540,7 @@
                 <a:ea typeface="Calibri" pitchFamily="34" charset="-122"/>
                 <a:cs typeface="Calibri" pitchFamily="34" charset="-120"/>
               </a:rPr>
-              <a:t>Word Labs  •  wordlabs.app  •  Root: 'push' = to press or move forward</a:t>
+              <a:t>Word Labs  •  wordlabs.app  •  Root: 'push' = to press forward with force</a:t>
             </a:r>
             <a:endParaRPr lang="en-US" sz="800" dirty="0"/>
           </a:p>
@@ -9784,7 +9679,7 @@
                 <a:ea typeface="Trebuchet MS" pitchFamily="34" charset="-122"/>
                 <a:cs typeface="Trebuchet MS" pitchFamily="34" charset="-120"/>
               </a:rPr>
-              <a:t>pushing</a:t>
+              <a:t>pushed</a:t>
             </a:r>
             <a:endParaRPr lang="en-US" sz="2800" dirty="0"/>
           </a:p>
@@ -9962,7 +9857,7 @@
                 <a:ea typeface="Calibri" pitchFamily="34" charset="-122"/>
                 <a:cs typeface="Calibri" pitchFamily="34" charset="-120"/>
               </a:rPr>
-              <a:t>to press or move forward</a:t>
+              <a:t>to press forward with force</a:t>
             </a:r>
             <a:endParaRPr lang="en-US" sz="850" dirty="0"/>
           </a:p>
@@ -10035,7 +9930,7 @@
                 <a:ea typeface="Trebuchet MS" pitchFamily="34" charset="-122"/>
                 <a:cs typeface="Trebuchet MS" pitchFamily="34" charset="-120"/>
               </a:rPr>
-              <a:t>ing</a:t>
+              <a:t>ed</a:t>
             </a:r>
             <a:endParaRPr lang="en-US" sz="1300" dirty="0"/>
           </a:p>
@@ -10074,7 +9969,7 @@
                 <a:ea typeface="Calibri" pitchFamily="34" charset="-122"/>
                 <a:cs typeface="Calibri" pitchFamily="34" charset="-120"/>
               </a:rPr>
-              <a:t>action happening now</a:t>
+              <a:t>past tense</a:t>
             </a:r>
             <a:endParaRPr lang="en-US" sz="850" dirty="0"/>
           </a:p>
@@ -10181,7 +10076,7 @@
         </p:nvSpPr>
         <p:spPr>
           <a:xfrm>
-            <a:off x="2999232" y="3364992"/>
+            <a:off x="4370832" y="3364992"/>
             <a:ext cx="1645920" cy="475488"/>
           </a:xfrm>
           <a:prstGeom prst="rect">
@@ -10208,7 +10103,7 @@
         </p:nvSpPr>
         <p:spPr>
           <a:xfrm>
-            <a:off x="2999232" y="3364992"/>
+            <a:off x="4370832" y="3364992"/>
             <a:ext cx="1645920" cy="475488"/>
           </a:xfrm>
           <a:prstGeom prst="rect">
@@ -10233,7 +10128,7 @@
                 <a:ea typeface="Trebuchet MS" pitchFamily="34" charset="-122"/>
                 <a:cs typeface="Trebuchet MS" pitchFamily="34" charset="-120"/>
               </a:rPr>
-              <a:t>push</a:t>
+              <a:t>pushed</a:t>
             </a:r>
             <a:endParaRPr lang="en-US" sz="1400" dirty="0"/>
           </a:p>
@@ -10241,14 +10136,41 @@
       </p:sp>
       <p:sp>
         <p:nvSpPr>
-          <p:cNvPr id="27" name="Text 25"/>
-          <p:cNvSpPr/>
-          <p:nvPr/>
-        </p:nvSpPr>
-        <p:spPr>
-          <a:xfrm>
-            <a:off x="4645152" y="3364992"/>
-            <a:ext cx="1097280" cy="475488"/>
+          <p:cNvPr id="27" name="Shape 25"/>
+          <p:cNvSpPr/>
+          <p:nvPr/>
+        </p:nvSpPr>
+        <p:spPr>
+          <a:xfrm>
+            <a:off x="365760" y="4096512"/>
+            <a:ext cx="1371600" cy="804672"/>
+          </a:xfrm>
+          <a:prstGeom prst="rect">
+            <a:avLst>
+              <a:gd name="adj" fmla="val 6818"/>
+            </a:avLst>
+          </a:prstGeom>
+          <a:solidFill>
+            <a:srgbClr val="E2E8F0"/>
+          </a:solidFill>
+          <a:ln w="12700">
+            <a:solidFill>
+              <a:srgbClr val="E2E8F0"/>
+            </a:solidFill>
+            <a:prstDash val="solid"/>
+          </a:ln>
+        </p:spPr>
+      </p:sp>
+      <p:sp>
+        <p:nvSpPr>
+          <p:cNvPr id="28" name="Text 26"/>
+          <p:cNvSpPr/>
+          <p:nvPr/>
+        </p:nvSpPr>
+        <p:spPr>
+          <a:xfrm>
+            <a:off x="365760" y="4096512"/>
+            <a:ext cx="1371600" cy="804672"/>
           </a:xfrm>
           <a:prstGeom prst="rect">
             <a:avLst/>
@@ -10264,57 +10186,84 @@
               <a:buNone/>
             </a:pPr>
             <a:r>
-              <a:rPr lang="en-US" sz="1600" b="1" dirty="0">
-                <a:solidFill>
-                  <a:srgbClr val="0D9488"/>
+              <a:rPr lang="en-US" sz="1100" b="1" dirty="0">
+                <a:solidFill>
+                  <a:srgbClr val="475569"/>
                 </a:solidFill>
                 <a:latin typeface="Trebuchet MS" pitchFamily="34" charset="0"/>
                 <a:ea typeface="Trebuchet MS" pitchFamily="34" charset="-122"/>
                 <a:cs typeface="Trebuchet MS" pitchFamily="34" charset="-120"/>
               </a:rPr>
-              <a:t>·</a:t>
-            </a:r>
-            <a:endParaRPr lang="en-US" sz="1600" dirty="0"/>
-          </a:p>
-        </p:txBody>
-      </p:sp>
-      <p:sp>
-        <p:nvSpPr>
-          <p:cNvPr id="28" name="Shape 26"/>
-          <p:cNvSpPr/>
-          <p:nvPr/>
-        </p:nvSpPr>
-        <p:spPr>
-          <a:xfrm>
-            <a:off x="5742432" y="3364992"/>
-            <a:ext cx="1645920" cy="475488"/>
+              <a:t>Phonemes</a:t>
+            </a:r>
+            <a:endParaRPr lang="en-US" sz="1100" dirty="0"/>
+          </a:p>
+        </p:txBody>
+      </p:sp>
+      <p:sp>
+        <p:nvSpPr>
+          <p:cNvPr id="29" name="Shape 27"/>
+          <p:cNvSpPr/>
+          <p:nvPr/>
+        </p:nvSpPr>
+        <p:spPr>
+          <a:xfrm>
+            <a:off x="1874520" y="4096512"/>
+            <a:ext cx="6903720" cy="658368"/>
           </a:xfrm>
           <a:prstGeom prst="rect">
             <a:avLst>
-              <a:gd name="adj" fmla="val 9615"/>
+              <a:gd name="adj" fmla="val 8333"/>
             </a:avLst>
           </a:prstGeom>
           <a:solidFill>
+            <a:srgbClr val="FCE7F3"/>
+          </a:solidFill>
+          <a:ln w="12700">
+            <a:solidFill>
+              <a:srgbClr val="DB2777"/>
+            </a:solidFill>
+            <a:prstDash val="solid"/>
+          </a:ln>
+        </p:spPr>
+      </p:sp>
+      <p:sp>
+        <p:nvSpPr>
+          <p:cNvPr id="30" name="Shape 28"/>
+          <p:cNvSpPr/>
+          <p:nvPr/>
+        </p:nvSpPr>
+        <p:spPr>
+          <a:xfrm>
+            <a:off x="2670048" y="4169664"/>
+            <a:ext cx="685800" cy="475488"/>
+          </a:xfrm>
+          <a:prstGeom prst="rect">
+            <a:avLst>
+              <a:gd name="adj" fmla="val 7692"/>
+            </a:avLst>
+          </a:prstGeom>
+          <a:solidFill>
             <a:srgbClr val="FFFFFF"/>
           </a:solidFill>
           <a:ln w="12700">
             <a:solidFill>
-              <a:srgbClr val="0D9488"/>
-            </a:solidFill>
-            <a:prstDash val="solid"/>
-          </a:ln>
-        </p:spPr>
-      </p:sp>
-      <p:sp>
-        <p:nvSpPr>
-          <p:cNvPr id="29" name="Text 27"/>
-          <p:cNvSpPr/>
-          <p:nvPr/>
-        </p:nvSpPr>
-        <p:spPr>
-          <a:xfrm>
-            <a:off x="5742432" y="3364992"/>
-            <a:ext cx="1645920" cy="475488"/>
+              <a:srgbClr val="DB2777"/>
+            </a:solidFill>
+            <a:prstDash val="solid"/>
+          </a:ln>
+        </p:spPr>
+      </p:sp>
+      <p:sp>
+        <p:nvSpPr>
+          <p:cNvPr id="31" name="Text 29"/>
+          <p:cNvSpPr/>
+          <p:nvPr/>
+        </p:nvSpPr>
+        <p:spPr>
+          <a:xfrm>
+            <a:off x="2670048" y="4169664"/>
+            <a:ext cx="685800" cy="475488"/>
           </a:xfrm>
           <a:prstGeom prst="rect">
             <a:avLst/>
@@ -10330,57 +10279,57 @@
               <a:buNone/>
             </a:pPr>
             <a:r>
-              <a:rPr lang="en-US" sz="1400" b="1" dirty="0">
-                <a:solidFill>
-                  <a:srgbClr val="0D9488"/>
+              <a:rPr lang="en-US" sz="900" b="1" dirty="0">
+                <a:solidFill>
+                  <a:srgbClr val="9D174D"/>
                 </a:solidFill>
                 <a:latin typeface="Trebuchet MS" pitchFamily="34" charset="0"/>
                 <a:ea typeface="Trebuchet MS" pitchFamily="34" charset="-122"/>
                 <a:cs typeface="Trebuchet MS" pitchFamily="34" charset="-120"/>
               </a:rPr>
-              <a:t>ing</a:t>
-            </a:r>
-            <a:endParaRPr lang="en-US" sz="1400" dirty="0"/>
-          </a:p>
-        </p:txBody>
-      </p:sp>
-      <p:sp>
-        <p:nvSpPr>
-          <p:cNvPr id="30" name="Shape 28"/>
-          <p:cNvSpPr/>
-          <p:nvPr/>
-        </p:nvSpPr>
-        <p:spPr>
-          <a:xfrm>
-            <a:off x="365760" y="4096512"/>
-            <a:ext cx="1371600" cy="804672"/>
+              <a:t>p</a:t>
+            </a:r>
+            <a:endParaRPr lang="en-US" sz="900" dirty="0"/>
+          </a:p>
+        </p:txBody>
+      </p:sp>
+      <p:sp>
+        <p:nvSpPr>
+          <p:cNvPr id="32" name="Shape 30"/>
+          <p:cNvSpPr/>
+          <p:nvPr/>
+        </p:nvSpPr>
+        <p:spPr>
+          <a:xfrm>
+            <a:off x="4123944" y="4169664"/>
+            <a:ext cx="685800" cy="475488"/>
           </a:xfrm>
           <a:prstGeom prst="rect">
             <a:avLst>
-              <a:gd name="adj" fmla="val 6818"/>
+              <a:gd name="adj" fmla="val 7692"/>
             </a:avLst>
           </a:prstGeom>
           <a:solidFill>
-            <a:srgbClr val="E2E8F0"/>
-          </a:solidFill>
-          <a:ln w="12700">
-            <a:solidFill>
-              <a:srgbClr val="E2E8F0"/>
-            </a:solidFill>
-            <a:prstDash val="solid"/>
-          </a:ln>
-        </p:spPr>
-      </p:sp>
-      <p:sp>
-        <p:nvSpPr>
-          <p:cNvPr id="31" name="Text 29"/>
-          <p:cNvSpPr/>
-          <p:nvPr/>
-        </p:nvSpPr>
-        <p:spPr>
-          <a:xfrm>
-            <a:off x="365760" y="4096512"/>
-            <a:ext cx="1371600" cy="804672"/>
+            <a:srgbClr val="FFFFFF"/>
+          </a:solidFill>
+          <a:ln w="12700">
+            <a:solidFill>
+              <a:srgbClr val="DB2777"/>
+            </a:solidFill>
+            <a:prstDash val="solid"/>
+          </a:ln>
+        </p:spPr>
+      </p:sp>
+      <p:sp>
+        <p:nvSpPr>
+          <p:cNvPr id="33" name="Text 31"/>
+          <p:cNvSpPr/>
+          <p:nvPr/>
+        </p:nvSpPr>
+        <p:spPr>
+          <a:xfrm>
+            <a:off x="4123944" y="4169664"/>
+            <a:ext cx="685800" cy="475488"/>
           </a:xfrm>
           <a:prstGeom prst="rect">
             <a:avLst/>
@@ -10396,56 +10345,29 @@
               <a:buNone/>
             </a:pPr>
             <a:r>
-              <a:rPr lang="en-US" sz="1100" b="1" dirty="0">
-                <a:solidFill>
-                  <a:srgbClr val="475569"/>
+              <a:rPr lang="en-US" sz="900" b="1" dirty="0">
+                <a:solidFill>
+                  <a:srgbClr val="9D174D"/>
                 </a:solidFill>
                 <a:latin typeface="Trebuchet MS" pitchFamily="34" charset="0"/>
                 <a:ea typeface="Trebuchet MS" pitchFamily="34" charset="-122"/>
                 <a:cs typeface="Trebuchet MS" pitchFamily="34" charset="-120"/>
               </a:rPr>
-              <a:t>Phonemes</a:t>
-            </a:r>
-            <a:endParaRPr lang="en-US" sz="1100" dirty="0"/>
-          </a:p>
-        </p:txBody>
-      </p:sp>
-      <p:sp>
-        <p:nvSpPr>
-          <p:cNvPr id="32" name="Shape 30"/>
-          <p:cNvSpPr/>
-          <p:nvPr/>
-        </p:nvSpPr>
-        <p:spPr>
-          <a:xfrm>
-            <a:off x="1874520" y="4096512"/>
-            <a:ext cx="6903720" cy="658368"/>
-          </a:xfrm>
-          <a:prstGeom prst="rect">
-            <a:avLst>
-              <a:gd name="adj" fmla="val 8333"/>
-            </a:avLst>
-          </a:prstGeom>
-          <a:solidFill>
-            <a:srgbClr val="FCE7F3"/>
-          </a:solidFill>
-          <a:ln w="12700">
-            <a:solidFill>
-              <a:srgbClr val="DB2777"/>
-            </a:solidFill>
-            <a:prstDash val="solid"/>
-          </a:ln>
-        </p:spPr>
-      </p:sp>
-      <p:sp>
-        <p:nvSpPr>
-          <p:cNvPr id="33" name="Shape 31"/>
-          <p:cNvSpPr/>
-          <p:nvPr/>
-        </p:nvSpPr>
-        <p:spPr>
-          <a:xfrm>
-            <a:off x="2427732" y="4169664"/>
+              <a:t>u</a:t>
+            </a:r>
+            <a:endParaRPr lang="en-US" sz="900" dirty="0"/>
+          </a:p>
+        </p:txBody>
+      </p:sp>
+      <p:sp>
+        <p:nvSpPr>
+          <p:cNvPr id="34" name="Shape 32"/>
+          <p:cNvSpPr/>
+          <p:nvPr/>
+        </p:nvSpPr>
+        <p:spPr>
+          <a:xfrm>
+            <a:off x="5577840" y="4169664"/>
             <a:ext cx="685800" cy="475488"/>
           </a:xfrm>
           <a:prstGeom prst="rect">
@@ -10466,13 +10388,13 @@
       </p:sp>
       <p:sp>
         <p:nvSpPr>
-          <p:cNvPr id="34" name="Text 32"/>
-          <p:cNvSpPr/>
-          <p:nvPr/>
-        </p:nvSpPr>
-        <p:spPr>
-          <a:xfrm>
-            <a:off x="2427732" y="4169664"/>
+          <p:cNvPr id="35" name="Text 33"/>
+          <p:cNvSpPr/>
+          <p:nvPr/>
+        </p:nvSpPr>
+        <p:spPr>
+          <a:xfrm>
+            <a:off x="5577840" y="4169664"/>
             <a:ext cx="685800" cy="475488"/>
           </a:xfrm>
           <a:prstGeom prst="rect">
@@ -10497,7 +10419,7 @@
                 <a:ea typeface="Trebuchet MS" pitchFamily="34" charset="-122"/>
                 <a:cs typeface="Trebuchet MS" pitchFamily="34" charset="-120"/>
               </a:rPr>
-              <a:t>p</a:t>
+              <a:t>sh</a:t>
             </a:r>
             <a:endParaRPr lang="en-US" sz="900" dirty="0"/>
           </a:p>
@@ -10505,13 +10427,13 @@
       </p:sp>
       <p:sp>
         <p:nvSpPr>
-          <p:cNvPr id="35" name="Shape 33"/>
-          <p:cNvSpPr/>
-          <p:nvPr/>
-        </p:nvSpPr>
-        <p:spPr>
-          <a:xfrm>
-            <a:off x="3639312" y="4169664"/>
+          <p:cNvPr id="36" name="Shape 34"/>
+          <p:cNvSpPr/>
+          <p:nvPr/>
+        </p:nvSpPr>
+        <p:spPr>
+          <a:xfrm>
+            <a:off x="7031736" y="4169664"/>
             <a:ext cx="685800" cy="475488"/>
           </a:xfrm>
           <a:prstGeom prst="rect">
@@ -10532,13 +10454,13 @@
       </p:sp>
       <p:sp>
         <p:nvSpPr>
-          <p:cNvPr id="36" name="Text 34"/>
-          <p:cNvSpPr/>
-          <p:nvPr/>
-        </p:nvSpPr>
-        <p:spPr>
-          <a:xfrm>
-            <a:off x="3639312" y="4169664"/>
+          <p:cNvPr id="37" name="Text 35"/>
+          <p:cNvSpPr/>
+          <p:nvPr/>
+        </p:nvSpPr>
+        <p:spPr>
+          <a:xfrm>
+            <a:off x="7031736" y="4169664"/>
             <a:ext cx="685800" cy="475488"/>
           </a:xfrm>
           <a:prstGeom prst="rect">
@@ -10563,205 +10485,7 @@
                 <a:ea typeface="Trebuchet MS" pitchFamily="34" charset="-122"/>
                 <a:cs typeface="Trebuchet MS" pitchFamily="34" charset="-120"/>
               </a:rPr>
-              <a:t>u</a:t>
-            </a:r>
-            <a:endParaRPr lang="en-US" sz="900" dirty="0"/>
-          </a:p>
-        </p:txBody>
-      </p:sp>
-      <p:sp>
-        <p:nvSpPr>
-          <p:cNvPr id="37" name="Shape 35"/>
-          <p:cNvSpPr/>
-          <p:nvPr/>
-        </p:nvSpPr>
-        <p:spPr>
-          <a:xfrm>
-            <a:off x="4850892" y="4169664"/>
-            <a:ext cx="685800" cy="475488"/>
-          </a:xfrm>
-          <a:prstGeom prst="rect">
-            <a:avLst>
-              <a:gd name="adj" fmla="val 7692"/>
-            </a:avLst>
-          </a:prstGeom>
-          <a:solidFill>
-            <a:srgbClr val="FFFFFF"/>
-          </a:solidFill>
-          <a:ln w="12700">
-            <a:solidFill>
-              <a:srgbClr val="DB2777"/>
-            </a:solidFill>
-            <a:prstDash val="solid"/>
-          </a:ln>
-        </p:spPr>
-      </p:sp>
-      <p:sp>
-        <p:nvSpPr>
-          <p:cNvPr id="38" name="Text 36"/>
-          <p:cNvSpPr/>
-          <p:nvPr/>
-        </p:nvSpPr>
-        <p:spPr>
-          <a:xfrm>
-            <a:off x="4850892" y="4169664"/>
-            <a:ext cx="685800" cy="475488"/>
-          </a:xfrm>
-          <a:prstGeom prst="rect">
-            <a:avLst/>
-          </a:prstGeom>
-          <a:noFill/>
-          <a:ln/>
-        </p:spPr>
-        <p:txBody>
-          <a:bodyPr wrap="square" lIns="0" tIns="0" rIns="0" bIns="0" rtlCol="0" anchor="ctr"/>
-          <a:lstStyle/>
-          <a:p>
-            <a:pPr algn="ctr" indent="0" marL="0">
-              <a:buNone/>
-            </a:pPr>
-            <a:r>
-              <a:rPr lang="en-US" sz="900" b="1" dirty="0">
-                <a:solidFill>
-                  <a:srgbClr val="9D174D"/>
-                </a:solidFill>
-                <a:latin typeface="Trebuchet MS" pitchFamily="34" charset="0"/>
-                <a:ea typeface="Trebuchet MS" pitchFamily="34" charset="-122"/>
-                <a:cs typeface="Trebuchet MS" pitchFamily="34" charset="-120"/>
-              </a:rPr>
-              <a:t>sh</a:t>
-            </a:r>
-            <a:endParaRPr lang="en-US" sz="900" dirty="0"/>
-          </a:p>
-        </p:txBody>
-      </p:sp>
-      <p:sp>
-        <p:nvSpPr>
-          <p:cNvPr id="39" name="Shape 37"/>
-          <p:cNvSpPr/>
-          <p:nvPr/>
-        </p:nvSpPr>
-        <p:spPr>
-          <a:xfrm>
-            <a:off x="6062472" y="4169664"/>
-            <a:ext cx="685800" cy="475488"/>
-          </a:xfrm>
-          <a:prstGeom prst="rect">
-            <a:avLst>
-              <a:gd name="adj" fmla="val 7692"/>
-            </a:avLst>
-          </a:prstGeom>
-          <a:solidFill>
-            <a:srgbClr val="FFFFFF"/>
-          </a:solidFill>
-          <a:ln w="12700">
-            <a:solidFill>
-              <a:srgbClr val="DB2777"/>
-            </a:solidFill>
-            <a:prstDash val="solid"/>
-          </a:ln>
-        </p:spPr>
-      </p:sp>
-      <p:sp>
-        <p:nvSpPr>
-          <p:cNvPr id="40" name="Text 38"/>
-          <p:cNvSpPr/>
-          <p:nvPr/>
-        </p:nvSpPr>
-        <p:spPr>
-          <a:xfrm>
-            <a:off x="6062472" y="4169664"/>
-            <a:ext cx="685800" cy="475488"/>
-          </a:xfrm>
-          <a:prstGeom prst="rect">
-            <a:avLst/>
-          </a:prstGeom>
-          <a:noFill/>
-          <a:ln/>
-        </p:spPr>
-        <p:txBody>
-          <a:bodyPr wrap="square" lIns="0" tIns="0" rIns="0" bIns="0" rtlCol="0" anchor="ctr"/>
-          <a:lstStyle/>
-          <a:p>
-            <a:pPr algn="ctr" indent="0" marL="0">
-              <a:buNone/>
-            </a:pPr>
-            <a:r>
-              <a:rPr lang="en-US" sz="900" b="1" dirty="0">
-                <a:solidFill>
-                  <a:srgbClr val="9D174D"/>
-                </a:solidFill>
-                <a:latin typeface="Trebuchet MS" pitchFamily="34" charset="0"/>
-                <a:ea typeface="Trebuchet MS" pitchFamily="34" charset="-122"/>
-                <a:cs typeface="Trebuchet MS" pitchFamily="34" charset="-120"/>
-              </a:rPr>
-              <a:t>i</a:t>
-            </a:r>
-            <a:endParaRPr lang="en-US" sz="900" dirty="0"/>
-          </a:p>
-        </p:txBody>
-      </p:sp>
-      <p:sp>
-        <p:nvSpPr>
-          <p:cNvPr id="41" name="Shape 39"/>
-          <p:cNvSpPr/>
-          <p:nvPr/>
-        </p:nvSpPr>
-        <p:spPr>
-          <a:xfrm>
-            <a:off x="7274052" y="4169664"/>
-            <a:ext cx="685800" cy="475488"/>
-          </a:xfrm>
-          <a:prstGeom prst="rect">
-            <a:avLst>
-              <a:gd name="adj" fmla="val 7692"/>
-            </a:avLst>
-          </a:prstGeom>
-          <a:solidFill>
-            <a:srgbClr val="FFFFFF"/>
-          </a:solidFill>
-          <a:ln w="12700">
-            <a:solidFill>
-              <a:srgbClr val="DB2777"/>
-            </a:solidFill>
-            <a:prstDash val="solid"/>
-          </a:ln>
-        </p:spPr>
-      </p:sp>
-      <p:sp>
-        <p:nvSpPr>
-          <p:cNvPr id="42" name="Text 40"/>
-          <p:cNvSpPr/>
-          <p:nvPr/>
-        </p:nvSpPr>
-        <p:spPr>
-          <a:xfrm>
-            <a:off x="7274052" y="4169664"/>
-            <a:ext cx="685800" cy="475488"/>
-          </a:xfrm>
-          <a:prstGeom prst="rect">
-            <a:avLst/>
-          </a:prstGeom>
-          <a:noFill/>
-          <a:ln/>
-        </p:spPr>
-        <p:txBody>
-          <a:bodyPr wrap="square" lIns="0" tIns="0" rIns="0" bIns="0" rtlCol="0" anchor="ctr"/>
-          <a:lstStyle/>
-          <a:p>
-            <a:pPr algn="ctr" indent="0" marL="0">
-              <a:buNone/>
-            </a:pPr>
-            <a:r>
-              <a:rPr lang="en-US" sz="900" b="1" dirty="0">
-                <a:solidFill>
-                  <a:srgbClr val="9D174D"/>
-                </a:solidFill>
-                <a:latin typeface="Trebuchet MS" pitchFamily="34" charset="0"/>
-                <a:ea typeface="Trebuchet MS" pitchFamily="34" charset="-122"/>
-                <a:cs typeface="Trebuchet MS" pitchFamily="34" charset="-120"/>
-              </a:rPr>
-              <a:t>ng</a:t>
+              <a:t>ed</a:t>
             </a:r>
             <a:endParaRPr lang="en-US" sz="900" dirty="0"/>
           </a:p>
@@ -11053,7 +10777,7 @@
                 <a:ea typeface="Calibri" pitchFamily="34" charset="-122"/>
                 <a:cs typeface="Calibri" pitchFamily="34" charset="-120"/>
               </a:rPr>
-              <a:t>Word Labs  •  wordlabs.app  •  Root: 'push' = to press or move forward</a:t>
+              <a:t>Word Labs  •  wordlabs.app  •  Root: 'push' = to press forward with force</a:t>
             </a:r>
             <a:endParaRPr lang="en-US" sz="800" dirty="0"/>
           </a:p>
@@ -11192,7 +10916,7 @@
                 <a:ea typeface="Trebuchet MS" pitchFamily="34" charset="-122"/>
                 <a:cs typeface="Trebuchet MS" pitchFamily="34" charset="-120"/>
               </a:rPr>
-              <a:t>pushover</a:t>
+              <a:t>pusher</a:t>
             </a:r>
             <a:endParaRPr lang="en-US" sz="2800" dirty="0"/>
           </a:p>
@@ -11880,7 +11604,7 @@
                 <a:ea typeface="Calibri" pitchFamily="34" charset="-122"/>
                 <a:cs typeface="Calibri" pitchFamily="34" charset="-120"/>
               </a:rPr>
-              <a:t>Word Labs  •  wordlabs.app  •  Root: 'push' = to press or move forward</a:t>
+              <a:t>Word Labs  •  wordlabs.app  •  Root: 'push' = to press forward with force</a:t>
             </a:r>
             <a:endParaRPr lang="en-US" sz="800" dirty="0"/>
           </a:p>
@@ -12019,7 +11743,7 @@
                 <a:ea typeface="Trebuchet MS" pitchFamily="34" charset="-122"/>
                 <a:cs typeface="Trebuchet MS" pitchFamily="34" charset="-120"/>
               </a:rPr>
-              <a:t>pushover</a:t>
+              <a:t>pusher</a:t>
             </a:r>
             <a:endParaRPr lang="en-US" sz="2800" dirty="0"/>
           </a:p>
@@ -12197,7 +11921,7 @@
                 <a:ea typeface="Calibri" pitchFamily="34" charset="-122"/>
                 <a:cs typeface="Calibri" pitchFamily="34" charset="-120"/>
               </a:rPr>
-              <a:t>to press or move forward</a:t>
+              <a:t>to press forward with force</a:t>
             </a:r>
             <a:endParaRPr lang="en-US" sz="850" dirty="0"/>
           </a:p>
@@ -12270,7 +11994,7 @@
                 <a:ea typeface="Trebuchet MS" pitchFamily="34" charset="-122"/>
                 <a:cs typeface="Trebuchet MS" pitchFamily="34" charset="-120"/>
               </a:rPr>
-              <a:t>over</a:t>
+              <a:t>er</a:t>
             </a:r>
             <a:endParaRPr lang="en-US" sz="1300" dirty="0"/>
           </a:p>
@@ -12309,7 +12033,7 @@
                 <a:ea typeface="Calibri" pitchFamily="34" charset="-122"/>
                 <a:cs typeface="Calibri" pitchFamily="34" charset="-120"/>
               </a:rPr>
-              <a:t>across or beyond</a:t>
+              <a:t>person who; more</a:t>
             </a:r>
             <a:endParaRPr lang="en-US" sz="850" dirty="0"/>
           </a:p>
@@ -12865,7 +12589,7 @@
                 <a:ea typeface="Calibri" pitchFamily="34" charset="-122"/>
                 <a:cs typeface="Calibri" pitchFamily="34" charset="-120"/>
               </a:rPr>
-              <a:t>Word Labs  •  wordlabs.app  •  Root: 'push' = to press or move forward</a:t>
+              <a:t>Word Labs  •  wordlabs.app  •  Root: 'push' = to press forward with force</a:t>
             </a:r>
             <a:endParaRPr lang="en-US" sz="800" dirty="0"/>
           </a:p>
@@ -13004,7 +12728,7 @@
                 <a:ea typeface="Trebuchet MS" pitchFamily="34" charset="-122"/>
                 <a:cs typeface="Trebuchet MS" pitchFamily="34" charset="-120"/>
               </a:rPr>
-              <a:t>pushover</a:t>
+              <a:t>pusher</a:t>
             </a:r>
             <a:endParaRPr lang="en-US" sz="2800" dirty="0"/>
           </a:p>
@@ -13182,7 +12906,7 @@
                 <a:ea typeface="Calibri" pitchFamily="34" charset="-122"/>
                 <a:cs typeface="Calibri" pitchFamily="34" charset="-120"/>
               </a:rPr>
-              <a:t>to press or move forward</a:t>
+              <a:t>to press forward with force</a:t>
             </a:r>
             <a:endParaRPr lang="en-US" sz="850" dirty="0"/>
           </a:p>
@@ -13255,7 +12979,7 @@
                 <a:ea typeface="Trebuchet MS" pitchFamily="34" charset="-122"/>
                 <a:cs typeface="Trebuchet MS" pitchFamily="34" charset="-120"/>
               </a:rPr>
-              <a:t>over</a:t>
+              <a:t>er</a:t>
             </a:r>
             <a:endParaRPr lang="en-US" sz="1300" dirty="0"/>
           </a:p>
@@ -13294,7 +13018,7 @@
                 <a:ea typeface="Calibri" pitchFamily="34" charset="-122"/>
                 <a:cs typeface="Calibri" pitchFamily="34" charset="-120"/>
               </a:rPr>
-              <a:t>across or beyond</a:t>
+              <a:t>person who; more</a:t>
             </a:r>
             <a:endParaRPr lang="en-US" sz="850" dirty="0"/>
           </a:p>
@@ -13401,7 +13125,7 @@
         </p:nvSpPr>
         <p:spPr>
           <a:xfrm>
-            <a:off x="2313432" y="3364992"/>
+            <a:off x="2999232" y="3364992"/>
             <a:ext cx="1645920" cy="475488"/>
           </a:xfrm>
           <a:prstGeom prst="rect">
@@ -13428,7 +13152,7 @@
         </p:nvSpPr>
         <p:spPr>
           <a:xfrm>
-            <a:off x="2313432" y="3364992"/>
+            <a:off x="2999232" y="3364992"/>
             <a:ext cx="1645920" cy="475488"/>
           </a:xfrm>
           <a:prstGeom prst="rect">
@@ -13467,8 +13191,8 @@
         </p:nvSpPr>
         <p:spPr>
           <a:xfrm>
-            <a:off x="3959352" y="3364992"/>
-            <a:ext cx="411480" cy="475488"/>
+            <a:off x="4645152" y="3364992"/>
+            <a:ext cx="1097280" cy="475488"/>
           </a:xfrm>
           <a:prstGeom prst="rect">
             <a:avLst/>
@@ -13506,7 +13230,7 @@
         </p:nvSpPr>
         <p:spPr>
           <a:xfrm>
-            <a:off x="4370832" y="3364992"/>
+            <a:off x="5742432" y="3364992"/>
             <a:ext cx="1645920" cy="475488"/>
           </a:xfrm>
           <a:prstGeom prst="rect">
@@ -13533,7 +13257,7 @@
         </p:nvSpPr>
         <p:spPr>
           <a:xfrm>
-            <a:off x="4370832" y="3364992"/>
+            <a:off x="5742432" y="3364992"/>
             <a:ext cx="1645920" cy="475488"/>
           </a:xfrm>
           <a:prstGeom prst="rect">
@@ -13558,7 +13282,7 @@
                 <a:ea typeface="Trebuchet MS" pitchFamily="34" charset="-122"/>
                 <a:cs typeface="Trebuchet MS" pitchFamily="34" charset="-120"/>
               </a:rPr>
-              <a:t>o</a:t>
+              <a:t>er</a:t>
             </a:r>
             <a:endParaRPr lang="en-US" sz="1400" dirty="0"/>
           </a:p>
@@ -13566,14 +13290,41 @@
       </p:sp>
       <p:sp>
         <p:nvSpPr>
-          <p:cNvPr id="30" name="Text 28"/>
-          <p:cNvSpPr/>
-          <p:nvPr/>
-        </p:nvSpPr>
-        <p:spPr>
-          <a:xfrm>
-            <a:off x="6016752" y="3364992"/>
-            <a:ext cx="411480" cy="475488"/>
+          <p:cNvPr id="30" name="Shape 28"/>
+          <p:cNvSpPr/>
+          <p:nvPr/>
+        </p:nvSpPr>
+        <p:spPr>
+          <a:xfrm>
+            <a:off x="365760" y="4096512"/>
+            <a:ext cx="1371600" cy="804672"/>
+          </a:xfrm>
+          <a:prstGeom prst="rect">
+            <a:avLst>
+              <a:gd name="adj" fmla="val 6818"/>
+            </a:avLst>
+          </a:prstGeom>
+          <a:solidFill>
+            <a:srgbClr val="E2E8F0"/>
+          </a:solidFill>
+          <a:ln w="12700">
+            <a:solidFill>
+              <a:srgbClr val="E2E8F0"/>
+            </a:solidFill>
+            <a:prstDash val="solid"/>
+          </a:ln>
+        </p:spPr>
+      </p:sp>
+      <p:sp>
+        <p:nvSpPr>
+          <p:cNvPr id="31" name="Text 29"/>
+          <p:cNvSpPr/>
+          <p:nvPr/>
+        </p:nvSpPr>
+        <p:spPr>
+          <a:xfrm>
+            <a:off x="365760" y="4096512"/>
+            <a:ext cx="1371600" cy="804672"/>
           </a:xfrm>
           <a:prstGeom prst="rect">
             <a:avLst/>
@@ -13589,96 +13340,30 @@
               <a:buNone/>
             </a:pPr>
             <a:r>
-              <a:rPr lang="en-US" sz="1600" b="1" dirty="0">
-                <a:solidFill>
-                  <a:srgbClr val="0D9488"/>
+              <a:rPr lang="en-US" sz="1100" b="1" dirty="0">
+                <a:solidFill>
+                  <a:srgbClr val="475569"/>
                 </a:solidFill>
                 <a:latin typeface="Trebuchet MS" pitchFamily="34" charset="0"/>
                 <a:ea typeface="Trebuchet MS" pitchFamily="34" charset="-122"/>
                 <a:cs typeface="Trebuchet MS" pitchFamily="34" charset="-120"/>
               </a:rPr>
-              <a:t>·</a:t>
-            </a:r>
-            <a:endParaRPr lang="en-US" sz="1600" dirty="0"/>
-          </a:p>
-        </p:txBody>
-      </p:sp>
-      <p:sp>
-        <p:nvSpPr>
-          <p:cNvPr id="31" name="Shape 29"/>
-          <p:cNvSpPr/>
-          <p:nvPr/>
-        </p:nvSpPr>
-        <p:spPr>
-          <a:xfrm>
-            <a:off x="6428232" y="3364992"/>
-            <a:ext cx="1645920" cy="475488"/>
-          </a:xfrm>
-          <a:prstGeom prst="rect">
-            <a:avLst>
-              <a:gd name="adj" fmla="val 9615"/>
-            </a:avLst>
-          </a:prstGeom>
-          <a:solidFill>
-            <a:srgbClr val="FFFFFF"/>
-          </a:solidFill>
-          <a:ln w="12700">
-            <a:solidFill>
-              <a:srgbClr val="0D9488"/>
-            </a:solidFill>
-            <a:prstDash val="solid"/>
-          </a:ln>
-        </p:spPr>
-      </p:sp>
-      <p:sp>
-        <p:nvSpPr>
-          <p:cNvPr id="32" name="Text 30"/>
-          <p:cNvSpPr/>
-          <p:nvPr/>
-        </p:nvSpPr>
-        <p:spPr>
-          <a:xfrm>
-            <a:off x="6428232" y="3364992"/>
-            <a:ext cx="1645920" cy="475488"/>
-          </a:xfrm>
-          <a:prstGeom prst="rect">
-            <a:avLst/>
-          </a:prstGeom>
-          <a:noFill/>
-          <a:ln/>
-        </p:spPr>
-        <p:txBody>
-          <a:bodyPr wrap="square" lIns="0" tIns="0" rIns="0" bIns="0" rtlCol="0" anchor="ctr"/>
-          <a:lstStyle/>
-          <a:p>
-            <a:pPr algn="ctr" indent="0" marL="0">
-              <a:buNone/>
-            </a:pPr>
-            <a:r>
-              <a:rPr lang="en-US" sz="1400" b="1" dirty="0">
-                <a:solidFill>
-                  <a:srgbClr val="0D9488"/>
-                </a:solidFill>
-                <a:latin typeface="Trebuchet MS" pitchFamily="34" charset="0"/>
-                <a:ea typeface="Trebuchet MS" pitchFamily="34" charset="-122"/>
-                <a:cs typeface="Trebuchet MS" pitchFamily="34" charset="-120"/>
-              </a:rPr>
-              <a:t>ver</a:t>
-            </a:r>
-            <a:endParaRPr lang="en-US" sz="1400" dirty="0"/>
-          </a:p>
-        </p:txBody>
-      </p:sp>
-      <p:sp>
-        <p:nvSpPr>
-          <p:cNvPr id="33" name="Shape 31"/>
-          <p:cNvSpPr/>
-          <p:nvPr/>
-        </p:nvSpPr>
-        <p:spPr>
-          <a:xfrm>
-            <a:off x="365760" y="4096512"/>
-            <a:ext cx="1371600" cy="804672"/>
+              <a:t>Phonemes</a:t>
+            </a:r>
+            <a:endParaRPr lang="en-US" sz="1100" dirty="0"/>
+          </a:p>
+        </p:txBody>
+      </p:sp>
+      <p:sp>
+        <p:nvSpPr>
+          <p:cNvPr id="32" name="Shape 30"/>
+          <p:cNvSpPr/>
+          <p:nvPr/>
+        </p:nvSpPr>
+        <p:spPr>
+          <a:xfrm>
+            <a:off x="1874520" y="4096512"/>
+            <a:ext cx="6903720" cy="804672"/>
           </a:xfrm>
           <a:prstGeom prst="rect">
             <a:avLst>
@@ -13686,85 +13371,19 @@
             </a:avLst>
           </a:prstGeom>
           <a:solidFill>
-            <a:srgbClr val="E2E8F0"/>
+            <a:srgbClr val="F8FAFC"/>
           </a:solidFill>
           <a:ln w="12700">
             <a:solidFill>
               <a:srgbClr val="E2E8F0"/>
             </a:solidFill>
-            <a:prstDash val="solid"/>
-          </a:ln>
-        </p:spPr>
-      </p:sp>
-      <p:sp>
-        <p:nvSpPr>
-          <p:cNvPr id="34" name="Text 32"/>
-          <p:cNvSpPr/>
-          <p:nvPr/>
-        </p:nvSpPr>
-        <p:spPr>
-          <a:xfrm>
-            <a:off x="365760" y="4096512"/>
-            <a:ext cx="1371600" cy="804672"/>
-          </a:xfrm>
-          <a:prstGeom prst="rect">
-            <a:avLst/>
-          </a:prstGeom>
-          <a:noFill/>
-          <a:ln/>
-        </p:spPr>
-        <p:txBody>
-          <a:bodyPr wrap="square" lIns="0" tIns="0" rIns="0" bIns="0" rtlCol="0" anchor="ctr"/>
-          <a:lstStyle/>
-          <a:p>
-            <a:pPr algn="ctr" indent="0" marL="0">
-              <a:buNone/>
-            </a:pPr>
-            <a:r>
-              <a:rPr lang="en-US" sz="1100" b="1" dirty="0">
-                <a:solidFill>
-                  <a:srgbClr val="475569"/>
-                </a:solidFill>
-                <a:latin typeface="Trebuchet MS" pitchFamily="34" charset="0"/>
-                <a:ea typeface="Trebuchet MS" pitchFamily="34" charset="-122"/>
-                <a:cs typeface="Trebuchet MS" pitchFamily="34" charset="-120"/>
-              </a:rPr>
-              <a:t>Phonemes</a:t>
-            </a:r>
-            <a:endParaRPr lang="en-US" sz="1100" dirty="0"/>
-          </a:p>
-        </p:txBody>
-      </p:sp>
-      <p:sp>
-        <p:nvSpPr>
-          <p:cNvPr id="35" name="Shape 33"/>
-          <p:cNvSpPr/>
-          <p:nvPr/>
-        </p:nvSpPr>
-        <p:spPr>
-          <a:xfrm>
-            <a:off x="1874520" y="4096512"/>
-            <a:ext cx="6903720" cy="804672"/>
-          </a:xfrm>
-          <a:prstGeom prst="rect">
-            <a:avLst>
-              <a:gd name="adj" fmla="val 6818"/>
-            </a:avLst>
-          </a:prstGeom>
-          <a:solidFill>
-            <a:srgbClr val="F8FAFC"/>
-          </a:solidFill>
-          <a:ln w="12700">
-            <a:solidFill>
-              <a:srgbClr val="E2E8F0"/>
-            </a:solidFill>
             <a:prstDash val="dash"/>
           </a:ln>
         </p:spPr>
       </p:sp>
       <p:sp>
         <p:nvSpPr>
-          <p:cNvPr id="36" name="Text 34"/>
+          <p:cNvPr id="33" name="Text 31"/>
           <p:cNvSpPr/>
           <p:nvPr/>
         </p:nvSpPr>
@@ -13996,7 +13615,7 @@
                 <a:ea typeface="Calibri" pitchFamily="34" charset="-122"/>
                 <a:cs typeface="Calibri" pitchFamily="34" charset="-120"/>
               </a:rPr>
-              <a:t>Root 'push' — to press or move forward</a:t>
+              <a:t>Root 'push' — to press forward with force</a:t>
             </a:r>
             <a:endParaRPr lang="en-US" sz="1600" dirty="0"/>
           </a:p>
@@ -14352,7 +13971,7 @@
                 <a:ea typeface="Calibri" pitchFamily="34" charset="-122"/>
                 <a:cs typeface="Calibri" pitchFamily="34" charset="-120"/>
               </a:rPr>
-              <a:t>Word Labs  •  wordlabs.app  •  Root: 'push' = to press or move forward</a:t>
+              <a:t>Word Labs  •  wordlabs.app  •  Root: 'push' = to press forward with force</a:t>
             </a:r>
             <a:endParaRPr lang="en-US" sz="800" dirty="0"/>
           </a:p>
@@ -14491,7 +14110,7 @@
                 <a:ea typeface="Trebuchet MS" pitchFamily="34" charset="-122"/>
                 <a:cs typeface="Trebuchet MS" pitchFamily="34" charset="-120"/>
               </a:rPr>
-              <a:t>pushover</a:t>
+              <a:t>pusher</a:t>
             </a:r>
             <a:endParaRPr lang="en-US" sz="2800" dirty="0"/>
           </a:p>
@@ -14669,7 +14288,7 @@
                 <a:ea typeface="Calibri" pitchFamily="34" charset="-122"/>
                 <a:cs typeface="Calibri" pitchFamily="34" charset="-120"/>
               </a:rPr>
-              <a:t>to press or move forward</a:t>
+              <a:t>to press forward with force</a:t>
             </a:r>
             <a:endParaRPr lang="en-US" sz="850" dirty="0"/>
           </a:p>
@@ -14742,7 +14361,7 @@
                 <a:ea typeface="Trebuchet MS" pitchFamily="34" charset="-122"/>
                 <a:cs typeface="Trebuchet MS" pitchFamily="34" charset="-120"/>
               </a:rPr>
-              <a:t>over</a:t>
+              <a:t>er</a:t>
             </a:r>
             <a:endParaRPr lang="en-US" sz="1300" dirty="0"/>
           </a:p>
@@ -14781,7 +14400,7 @@
                 <a:ea typeface="Calibri" pitchFamily="34" charset="-122"/>
                 <a:cs typeface="Calibri" pitchFamily="34" charset="-120"/>
               </a:rPr>
-              <a:t>across or beyond</a:t>
+              <a:t>person who; more</a:t>
             </a:r>
             <a:endParaRPr lang="en-US" sz="850" dirty="0"/>
           </a:p>
@@ -14888,7 +14507,7 @@
         </p:nvSpPr>
         <p:spPr>
           <a:xfrm>
-            <a:off x="2313432" y="3364992"/>
+            <a:off x="2999232" y="3364992"/>
             <a:ext cx="1645920" cy="475488"/>
           </a:xfrm>
           <a:prstGeom prst="rect">
@@ -14915,7 +14534,7 @@
         </p:nvSpPr>
         <p:spPr>
           <a:xfrm>
-            <a:off x="2313432" y="3364992"/>
+            <a:off x="2999232" y="3364992"/>
             <a:ext cx="1645920" cy="475488"/>
           </a:xfrm>
           <a:prstGeom prst="rect">
@@ -14954,8 +14573,8 @@
         </p:nvSpPr>
         <p:spPr>
           <a:xfrm>
-            <a:off x="3959352" y="3364992"/>
-            <a:ext cx="411480" cy="475488"/>
+            <a:off x="4645152" y="3364992"/>
+            <a:ext cx="1097280" cy="475488"/>
           </a:xfrm>
           <a:prstGeom prst="rect">
             <a:avLst/>
@@ -14993,7 +14612,7 @@
         </p:nvSpPr>
         <p:spPr>
           <a:xfrm>
-            <a:off x="4370832" y="3364992"/>
+            <a:off x="5742432" y="3364992"/>
             <a:ext cx="1645920" cy="475488"/>
           </a:xfrm>
           <a:prstGeom prst="rect">
@@ -15020,7 +14639,7 @@
         </p:nvSpPr>
         <p:spPr>
           <a:xfrm>
-            <a:off x="4370832" y="3364992"/>
+            <a:off x="5742432" y="3364992"/>
             <a:ext cx="1645920" cy="475488"/>
           </a:xfrm>
           <a:prstGeom prst="rect">
@@ -15045,7 +14664,7 @@
                 <a:ea typeface="Trebuchet MS" pitchFamily="34" charset="-122"/>
                 <a:cs typeface="Trebuchet MS" pitchFamily="34" charset="-120"/>
               </a:rPr>
-              <a:t>o</a:t>
+              <a:t>er</a:t>
             </a:r>
             <a:endParaRPr lang="en-US" sz="1400" dirty="0"/>
           </a:p>
@@ -15053,14 +14672,41 @@
       </p:sp>
       <p:sp>
         <p:nvSpPr>
-          <p:cNvPr id="30" name="Text 28"/>
-          <p:cNvSpPr/>
-          <p:nvPr/>
-        </p:nvSpPr>
-        <p:spPr>
-          <a:xfrm>
-            <a:off x="6016752" y="3364992"/>
-            <a:ext cx="411480" cy="475488"/>
+          <p:cNvPr id="30" name="Shape 28"/>
+          <p:cNvSpPr/>
+          <p:nvPr/>
+        </p:nvSpPr>
+        <p:spPr>
+          <a:xfrm>
+            <a:off x="365760" y="4096512"/>
+            <a:ext cx="1371600" cy="804672"/>
+          </a:xfrm>
+          <a:prstGeom prst="rect">
+            <a:avLst>
+              <a:gd name="adj" fmla="val 6818"/>
+            </a:avLst>
+          </a:prstGeom>
+          <a:solidFill>
+            <a:srgbClr val="E2E8F0"/>
+          </a:solidFill>
+          <a:ln w="12700">
+            <a:solidFill>
+              <a:srgbClr val="E2E8F0"/>
+            </a:solidFill>
+            <a:prstDash val="solid"/>
+          </a:ln>
+        </p:spPr>
+      </p:sp>
+      <p:sp>
+        <p:nvSpPr>
+          <p:cNvPr id="31" name="Text 29"/>
+          <p:cNvSpPr/>
+          <p:nvPr/>
+        </p:nvSpPr>
+        <p:spPr>
+          <a:xfrm>
+            <a:off x="365760" y="4096512"/>
+            <a:ext cx="1371600" cy="804672"/>
           </a:xfrm>
           <a:prstGeom prst="rect">
             <a:avLst/>
@@ -15076,57 +14722,84 @@
               <a:buNone/>
             </a:pPr>
             <a:r>
-              <a:rPr lang="en-US" sz="1600" b="1" dirty="0">
-                <a:solidFill>
-                  <a:srgbClr val="0D9488"/>
+              <a:rPr lang="en-US" sz="1100" b="1" dirty="0">
+                <a:solidFill>
+                  <a:srgbClr val="475569"/>
                 </a:solidFill>
                 <a:latin typeface="Trebuchet MS" pitchFamily="34" charset="0"/>
                 <a:ea typeface="Trebuchet MS" pitchFamily="34" charset="-122"/>
                 <a:cs typeface="Trebuchet MS" pitchFamily="34" charset="-120"/>
               </a:rPr>
-              <a:t>·</a:t>
-            </a:r>
-            <a:endParaRPr lang="en-US" sz="1600" dirty="0"/>
-          </a:p>
-        </p:txBody>
-      </p:sp>
-      <p:sp>
-        <p:nvSpPr>
-          <p:cNvPr id="31" name="Shape 29"/>
-          <p:cNvSpPr/>
-          <p:nvPr/>
-        </p:nvSpPr>
-        <p:spPr>
-          <a:xfrm>
-            <a:off x="6428232" y="3364992"/>
-            <a:ext cx="1645920" cy="475488"/>
+              <a:t>Phonemes</a:t>
+            </a:r>
+            <a:endParaRPr lang="en-US" sz="1100" dirty="0"/>
+          </a:p>
+        </p:txBody>
+      </p:sp>
+      <p:sp>
+        <p:nvSpPr>
+          <p:cNvPr id="32" name="Shape 30"/>
+          <p:cNvSpPr/>
+          <p:nvPr/>
+        </p:nvSpPr>
+        <p:spPr>
+          <a:xfrm>
+            <a:off x="1874520" y="4096512"/>
+            <a:ext cx="6903720" cy="658368"/>
           </a:xfrm>
           <a:prstGeom prst="rect">
             <a:avLst>
-              <a:gd name="adj" fmla="val 9615"/>
+              <a:gd name="adj" fmla="val 8333"/>
             </a:avLst>
           </a:prstGeom>
           <a:solidFill>
+            <a:srgbClr val="FCE7F3"/>
+          </a:solidFill>
+          <a:ln w="12700">
+            <a:solidFill>
+              <a:srgbClr val="DB2777"/>
+            </a:solidFill>
+            <a:prstDash val="solid"/>
+          </a:ln>
+        </p:spPr>
+      </p:sp>
+      <p:sp>
+        <p:nvSpPr>
+          <p:cNvPr id="33" name="Shape 31"/>
+          <p:cNvSpPr/>
+          <p:nvPr/>
+        </p:nvSpPr>
+        <p:spPr>
+          <a:xfrm>
+            <a:off x="2670048" y="4169664"/>
+            <a:ext cx="685800" cy="475488"/>
+          </a:xfrm>
+          <a:prstGeom prst="rect">
+            <a:avLst>
+              <a:gd name="adj" fmla="val 7692"/>
+            </a:avLst>
+          </a:prstGeom>
+          <a:solidFill>
             <a:srgbClr val="FFFFFF"/>
           </a:solidFill>
           <a:ln w="12700">
             <a:solidFill>
-              <a:srgbClr val="0D9488"/>
-            </a:solidFill>
-            <a:prstDash val="solid"/>
-          </a:ln>
-        </p:spPr>
-      </p:sp>
-      <p:sp>
-        <p:nvSpPr>
-          <p:cNvPr id="32" name="Text 30"/>
-          <p:cNvSpPr/>
-          <p:nvPr/>
-        </p:nvSpPr>
-        <p:spPr>
-          <a:xfrm>
-            <a:off x="6428232" y="3364992"/>
-            <a:ext cx="1645920" cy="475488"/>
+              <a:srgbClr val="DB2777"/>
+            </a:solidFill>
+            <a:prstDash val="solid"/>
+          </a:ln>
+        </p:spPr>
+      </p:sp>
+      <p:sp>
+        <p:nvSpPr>
+          <p:cNvPr id="34" name="Text 32"/>
+          <p:cNvSpPr/>
+          <p:nvPr/>
+        </p:nvSpPr>
+        <p:spPr>
+          <a:xfrm>
+            <a:off x="2670048" y="4169664"/>
+            <a:ext cx="685800" cy="475488"/>
           </a:xfrm>
           <a:prstGeom prst="rect">
             <a:avLst/>
@@ -15142,57 +14815,57 @@
               <a:buNone/>
             </a:pPr>
             <a:r>
-              <a:rPr lang="en-US" sz="1400" b="1" dirty="0">
-                <a:solidFill>
-                  <a:srgbClr val="0D9488"/>
+              <a:rPr lang="en-US" sz="900" b="1" dirty="0">
+                <a:solidFill>
+                  <a:srgbClr val="9D174D"/>
                 </a:solidFill>
                 <a:latin typeface="Trebuchet MS" pitchFamily="34" charset="0"/>
                 <a:ea typeface="Trebuchet MS" pitchFamily="34" charset="-122"/>
                 <a:cs typeface="Trebuchet MS" pitchFamily="34" charset="-120"/>
               </a:rPr>
-              <a:t>ver</a:t>
-            </a:r>
-            <a:endParaRPr lang="en-US" sz="1400" dirty="0"/>
-          </a:p>
-        </p:txBody>
-      </p:sp>
-      <p:sp>
-        <p:nvSpPr>
-          <p:cNvPr id="33" name="Shape 31"/>
-          <p:cNvSpPr/>
-          <p:nvPr/>
-        </p:nvSpPr>
-        <p:spPr>
-          <a:xfrm>
-            <a:off x="365760" y="4096512"/>
-            <a:ext cx="1371600" cy="804672"/>
+              <a:t>p</a:t>
+            </a:r>
+            <a:endParaRPr lang="en-US" sz="900" dirty="0"/>
+          </a:p>
+        </p:txBody>
+      </p:sp>
+      <p:sp>
+        <p:nvSpPr>
+          <p:cNvPr id="35" name="Shape 33"/>
+          <p:cNvSpPr/>
+          <p:nvPr/>
+        </p:nvSpPr>
+        <p:spPr>
+          <a:xfrm>
+            <a:off x="4123944" y="4169664"/>
+            <a:ext cx="685800" cy="475488"/>
           </a:xfrm>
           <a:prstGeom prst="rect">
             <a:avLst>
-              <a:gd name="adj" fmla="val 6818"/>
+              <a:gd name="adj" fmla="val 7692"/>
             </a:avLst>
           </a:prstGeom>
           <a:solidFill>
-            <a:srgbClr val="E2E8F0"/>
-          </a:solidFill>
-          <a:ln w="12700">
-            <a:solidFill>
-              <a:srgbClr val="E2E8F0"/>
-            </a:solidFill>
-            <a:prstDash val="solid"/>
-          </a:ln>
-        </p:spPr>
-      </p:sp>
-      <p:sp>
-        <p:nvSpPr>
-          <p:cNvPr id="34" name="Text 32"/>
-          <p:cNvSpPr/>
-          <p:nvPr/>
-        </p:nvSpPr>
-        <p:spPr>
-          <a:xfrm>
-            <a:off x="365760" y="4096512"/>
-            <a:ext cx="1371600" cy="804672"/>
+            <a:srgbClr val="FFFFFF"/>
+          </a:solidFill>
+          <a:ln w="12700">
+            <a:solidFill>
+              <a:srgbClr val="DB2777"/>
+            </a:solidFill>
+            <a:prstDash val="solid"/>
+          </a:ln>
+        </p:spPr>
+      </p:sp>
+      <p:sp>
+        <p:nvSpPr>
+          <p:cNvPr id="36" name="Text 34"/>
+          <p:cNvSpPr/>
+          <p:nvPr/>
+        </p:nvSpPr>
+        <p:spPr>
+          <a:xfrm>
+            <a:off x="4123944" y="4169664"/>
+            <a:ext cx="685800" cy="475488"/>
           </a:xfrm>
           <a:prstGeom prst="rect">
             <a:avLst/>
@@ -15208,56 +14881,29 @@
               <a:buNone/>
             </a:pPr>
             <a:r>
-              <a:rPr lang="en-US" sz="1100" b="1" dirty="0">
-                <a:solidFill>
-                  <a:srgbClr val="475569"/>
+              <a:rPr lang="en-US" sz="900" b="1" dirty="0">
+                <a:solidFill>
+                  <a:srgbClr val="9D174D"/>
                 </a:solidFill>
                 <a:latin typeface="Trebuchet MS" pitchFamily="34" charset="0"/>
                 <a:ea typeface="Trebuchet MS" pitchFamily="34" charset="-122"/>
                 <a:cs typeface="Trebuchet MS" pitchFamily="34" charset="-120"/>
               </a:rPr>
-              <a:t>Phonemes</a:t>
-            </a:r>
-            <a:endParaRPr lang="en-US" sz="1100" dirty="0"/>
-          </a:p>
-        </p:txBody>
-      </p:sp>
-      <p:sp>
-        <p:nvSpPr>
-          <p:cNvPr id="35" name="Shape 33"/>
-          <p:cNvSpPr/>
-          <p:nvPr/>
-        </p:nvSpPr>
-        <p:spPr>
-          <a:xfrm>
-            <a:off x="1874520" y="4096512"/>
-            <a:ext cx="6903720" cy="658368"/>
-          </a:xfrm>
-          <a:prstGeom prst="rect">
-            <a:avLst>
-              <a:gd name="adj" fmla="val 8333"/>
-            </a:avLst>
-          </a:prstGeom>
-          <a:solidFill>
-            <a:srgbClr val="FCE7F3"/>
-          </a:solidFill>
-          <a:ln w="12700">
-            <a:solidFill>
-              <a:srgbClr val="DB2777"/>
-            </a:solidFill>
-            <a:prstDash val="solid"/>
-          </a:ln>
-        </p:spPr>
-      </p:sp>
-      <p:sp>
-        <p:nvSpPr>
-          <p:cNvPr id="36" name="Shape 34"/>
-          <p:cNvSpPr/>
-          <p:nvPr/>
-        </p:nvSpPr>
-        <p:spPr>
-          <a:xfrm>
-            <a:off x="2254649" y="4169664"/>
+              <a:t>u</a:t>
+            </a:r>
+            <a:endParaRPr lang="en-US" sz="900" dirty="0"/>
+          </a:p>
+        </p:txBody>
+      </p:sp>
+      <p:sp>
+        <p:nvSpPr>
+          <p:cNvPr id="37" name="Shape 35"/>
+          <p:cNvSpPr/>
+          <p:nvPr/>
+        </p:nvSpPr>
+        <p:spPr>
+          <a:xfrm>
+            <a:off x="5577840" y="4169664"/>
             <a:ext cx="685800" cy="475488"/>
           </a:xfrm>
           <a:prstGeom prst="rect">
@@ -15278,13 +14924,13 @@
       </p:sp>
       <p:sp>
         <p:nvSpPr>
-          <p:cNvPr id="37" name="Text 35"/>
-          <p:cNvSpPr/>
-          <p:nvPr/>
-        </p:nvSpPr>
-        <p:spPr>
-          <a:xfrm>
-            <a:off x="2254649" y="4169664"/>
+          <p:cNvPr id="38" name="Text 36"/>
+          <p:cNvSpPr/>
+          <p:nvPr/>
+        </p:nvSpPr>
+        <p:spPr>
+          <a:xfrm>
+            <a:off x="5577840" y="4169664"/>
             <a:ext cx="685800" cy="475488"/>
           </a:xfrm>
           <a:prstGeom prst="rect">
@@ -15309,7 +14955,7 @@
                 <a:ea typeface="Trebuchet MS" pitchFamily="34" charset="-122"/>
                 <a:cs typeface="Trebuchet MS" pitchFamily="34" charset="-120"/>
               </a:rPr>
-              <a:t>p</a:t>
+              <a:t>sh</a:t>
             </a:r>
             <a:endParaRPr lang="en-US" sz="900" dirty="0"/>
           </a:p>
@@ -15317,13 +14963,13 @@
       </p:sp>
       <p:sp>
         <p:nvSpPr>
-          <p:cNvPr id="38" name="Shape 36"/>
-          <p:cNvSpPr/>
-          <p:nvPr/>
-        </p:nvSpPr>
-        <p:spPr>
-          <a:xfrm>
-            <a:off x="3293146" y="4169664"/>
+          <p:cNvPr id="39" name="Shape 37"/>
+          <p:cNvSpPr/>
+          <p:nvPr/>
+        </p:nvSpPr>
+        <p:spPr>
+          <a:xfrm>
+            <a:off x="7031736" y="4169664"/>
             <a:ext cx="685800" cy="475488"/>
           </a:xfrm>
           <a:prstGeom prst="rect">
@@ -15344,277 +14990,13 @@
       </p:sp>
       <p:sp>
         <p:nvSpPr>
-          <p:cNvPr id="39" name="Text 37"/>
-          <p:cNvSpPr/>
-          <p:nvPr/>
-        </p:nvSpPr>
-        <p:spPr>
-          <a:xfrm>
-            <a:off x="3293146" y="4169664"/>
-            <a:ext cx="685800" cy="475488"/>
-          </a:xfrm>
-          <a:prstGeom prst="rect">
-            <a:avLst/>
-          </a:prstGeom>
-          <a:noFill/>
-          <a:ln/>
-        </p:spPr>
-        <p:txBody>
-          <a:bodyPr wrap="square" lIns="0" tIns="0" rIns="0" bIns="0" rtlCol="0" anchor="ctr"/>
-          <a:lstStyle/>
-          <a:p>
-            <a:pPr algn="ctr" indent="0" marL="0">
-              <a:buNone/>
-            </a:pPr>
-            <a:r>
-              <a:rPr lang="en-US" sz="900" b="1" dirty="0">
-                <a:solidFill>
-                  <a:srgbClr val="9D174D"/>
-                </a:solidFill>
-                <a:latin typeface="Trebuchet MS" pitchFamily="34" charset="0"/>
-                <a:ea typeface="Trebuchet MS" pitchFamily="34" charset="-122"/>
-                <a:cs typeface="Trebuchet MS" pitchFamily="34" charset="-120"/>
-              </a:rPr>
-              <a:t>u</a:t>
-            </a:r>
-            <a:endParaRPr lang="en-US" sz="900" dirty="0"/>
-          </a:p>
-        </p:txBody>
-      </p:sp>
-      <p:sp>
-        <p:nvSpPr>
-          <p:cNvPr id="40" name="Shape 38"/>
-          <p:cNvSpPr/>
-          <p:nvPr/>
-        </p:nvSpPr>
-        <p:spPr>
-          <a:xfrm>
-            <a:off x="4331643" y="4169664"/>
-            <a:ext cx="685800" cy="475488"/>
-          </a:xfrm>
-          <a:prstGeom prst="rect">
-            <a:avLst>
-              <a:gd name="adj" fmla="val 7692"/>
-            </a:avLst>
-          </a:prstGeom>
-          <a:solidFill>
-            <a:srgbClr val="FFFFFF"/>
-          </a:solidFill>
-          <a:ln w="12700">
-            <a:solidFill>
-              <a:srgbClr val="DB2777"/>
-            </a:solidFill>
-            <a:prstDash val="solid"/>
-          </a:ln>
-        </p:spPr>
-      </p:sp>
-      <p:sp>
-        <p:nvSpPr>
-          <p:cNvPr id="41" name="Text 39"/>
-          <p:cNvSpPr/>
-          <p:nvPr/>
-        </p:nvSpPr>
-        <p:spPr>
-          <a:xfrm>
-            <a:off x="4331643" y="4169664"/>
-            <a:ext cx="685800" cy="475488"/>
-          </a:xfrm>
-          <a:prstGeom prst="rect">
-            <a:avLst/>
-          </a:prstGeom>
-          <a:noFill/>
-          <a:ln/>
-        </p:spPr>
-        <p:txBody>
-          <a:bodyPr wrap="square" lIns="0" tIns="0" rIns="0" bIns="0" rtlCol="0" anchor="ctr"/>
-          <a:lstStyle/>
-          <a:p>
-            <a:pPr algn="ctr" indent="0" marL="0">
-              <a:buNone/>
-            </a:pPr>
-            <a:r>
-              <a:rPr lang="en-US" sz="900" b="1" dirty="0">
-                <a:solidFill>
-                  <a:srgbClr val="9D174D"/>
-                </a:solidFill>
-                <a:latin typeface="Trebuchet MS" pitchFamily="34" charset="0"/>
-                <a:ea typeface="Trebuchet MS" pitchFamily="34" charset="-122"/>
-                <a:cs typeface="Trebuchet MS" pitchFamily="34" charset="-120"/>
-              </a:rPr>
-              <a:t>sh</a:t>
-            </a:r>
-            <a:endParaRPr lang="en-US" sz="900" dirty="0"/>
-          </a:p>
-        </p:txBody>
-      </p:sp>
-      <p:sp>
-        <p:nvSpPr>
-          <p:cNvPr id="42" name="Shape 40"/>
-          <p:cNvSpPr/>
-          <p:nvPr/>
-        </p:nvSpPr>
-        <p:spPr>
-          <a:xfrm>
-            <a:off x="5370141" y="4169664"/>
-            <a:ext cx="685800" cy="475488"/>
-          </a:xfrm>
-          <a:prstGeom prst="rect">
-            <a:avLst>
-              <a:gd name="adj" fmla="val 7692"/>
-            </a:avLst>
-          </a:prstGeom>
-          <a:solidFill>
-            <a:srgbClr val="FFFFFF"/>
-          </a:solidFill>
-          <a:ln w="12700">
-            <a:solidFill>
-              <a:srgbClr val="DB2777"/>
-            </a:solidFill>
-            <a:prstDash val="solid"/>
-          </a:ln>
-        </p:spPr>
-      </p:sp>
-      <p:sp>
-        <p:nvSpPr>
-          <p:cNvPr id="43" name="Text 41"/>
-          <p:cNvSpPr/>
-          <p:nvPr/>
-        </p:nvSpPr>
-        <p:spPr>
-          <a:xfrm>
-            <a:off x="5370141" y="4169664"/>
-            <a:ext cx="685800" cy="475488"/>
-          </a:xfrm>
-          <a:prstGeom prst="rect">
-            <a:avLst/>
-          </a:prstGeom>
-          <a:noFill/>
-          <a:ln/>
-        </p:spPr>
-        <p:txBody>
-          <a:bodyPr wrap="square" lIns="0" tIns="0" rIns="0" bIns="0" rtlCol="0" anchor="ctr"/>
-          <a:lstStyle/>
-          <a:p>
-            <a:pPr algn="ctr" indent="0" marL="0">
-              <a:buNone/>
-            </a:pPr>
-            <a:r>
-              <a:rPr lang="en-US" sz="900" b="1" dirty="0">
-                <a:solidFill>
-                  <a:srgbClr val="9D174D"/>
-                </a:solidFill>
-                <a:latin typeface="Trebuchet MS" pitchFamily="34" charset="0"/>
-                <a:ea typeface="Trebuchet MS" pitchFamily="34" charset="-122"/>
-                <a:cs typeface="Trebuchet MS" pitchFamily="34" charset="-120"/>
-              </a:rPr>
-              <a:t>o</a:t>
-            </a:r>
-            <a:endParaRPr lang="en-US" sz="900" dirty="0"/>
-          </a:p>
-        </p:txBody>
-      </p:sp>
-      <p:sp>
-        <p:nvSpPr>
-          <p:cNvPr id="44" name="Shape 42"/>
-          <p:cNvSpPr/>
-          <p:nvPr/>
-        </p:nvSpPr>
-        <p:spPr>
-          <a:xfrm>
-            <a:off x="6408638" y="4169664"/>
-            <a:ext cx="685800" cy="475488"/>
-          </a:xfrm>
-          <a:prstGeom prst="rect">
-            <a:avLst>
-              <a:gd name="adj" fmla="val 7692"/>
-            </a:avLst>
-          </a:prstGeom>
-          <a:solidFill>
-            <a:srgbClr val="FFFFFF"/>
-          </a:solidFill>
-          <a:ln w="12700">
-            <a:solidFill>
-              <a:srgbClr val="DB2777"/>
-            </a:solidFill>
-            <a:prstDash val="solid"/>
-          </a:ln>
-        </p:spPr>
-      </p:sp>
-      <p:sp>
-        <p:nvSpPr>
-          <p:cNvPr id="45" name="Text 43"/>
-          <p:cNvSpPr/>
-          <p:nvPr/>
-        </p:nvSpPr>
-        <p:spPr>
-          <a:xfrm>
-            <a:off x="6408638" y="4169664"/>
-            <a:ext cx="685800" cy="475488"/>
-          </a:xfrm>
-          <a:prstGeom prst="rect">
-            <a:avLst/>
-          </a:prstGeom>
-          <a:noFill/>
-          <a:ln/>
-        </p:spPr>
-        <p:txBody>
-          <a:bodyPr wrap="square" lIns="0" tIns="0" rIns="0" bIns="0" rtlCol="0" anchor="ctr"/>
-          <a:lstStyle/>
-          <a:p>
-            <a:pPr algn="ctr" indent="0" marL="0">
-              <a:buNone/>
-            </a:pPr>
-            <a:r>
-              <a:rPr lang="en-US" sz="900" b="1" dirty="0">
-                <a:solidFill>
-                  <a:srgbClr val="9D174D"/>
-                </a:solidFill>
-                <a:latin typeface="Trebuchet MS" pitchFamily="34" charset="0"/>
-                <a:ea typeface="Trebuchet MS" pitchFamily="34" charset="-122"/>
-                <a:cs typeface="Trebuchet MS" pitchFamily="34" charset="-120"/>
-              </a:rPr>
-              <a:t>v</a:t>
-            </a:r>
-            <a:endParaRPr lang="en-US" sz="900" dirty="0"/>
-          </a:p>
-        </p:txBody>
-      </p:sp>
-      <p:sp>
-        <p:nvSpPr>
-          <p:cNvPr id="46" name="Shape 44"/>
-          <p:cNvSpPr/>
-          <p:nvPr/>
-        </p:nvSpPr>
-        <p:spPr>
-          <a:xfrm>
-            <a:off x="7447135" y="4169664"/>
-            <a:ext cx="685800" cy="475488"/>
-          </a:xfrm>
-          <a:prstGeom prst="rect">
-            <a:avLst>
-              <a:gd name="adj" fmla="val 7692"/>
-            </a:avLst>
-          </a:prstGeom>
-          <a:solidFill>
-            <a:srgbClr val="FFFFFF"/>
-          </a:solidFill>
-          <a:ln w="12700">
-            <a:solidFill>
-              <a:srgbClr val="DB2777"/>
-            </a:solidFill>
-            <a:prstDash val="solid"/>
-          </a:ln>
-        </p:spPr>
-      </p:sp>
-      <p:sp>
-        <p:nvSpPr>
-          <p:cNvPr id="47" name="Text 45"/>
-          <p:cNvSpPr/>
-          <p:nvPr/>
-        </p:nvSpPr>
-        <p:spPr>
-          <a:xfrm>
-            <a:off x="7447135" y="4169664"/>
+          <p:cNvPr id="40" name="Text 38"/>
+          <p:cNvSpPr/>
+          <p:nvPr/>
+        </p:nvSpPr>
+        <p:spPr>
+          <a:xfrm>
+            <a:off x="7031736" y="4169664"/>
             <a:ext cx="685800" cy="475488"/>
           </a:xfrm>
           <a:prstGeom prst="rect">
@@ -16213,7 +15595,7 @@
                 <a:ea typeface="Calibri" pitchFamily="34" charset="-122"/>
                 <a:cs typeface="Calibri" pitchFamily="34" charset="-120"/>
               </a:rPr>
-              <a:t>Word Labs  •  wordlabs.app  •  Root: 'push' = to press or move forward</a:t>
+              <a:t>Word Labs  •  wordlabs.app  •  Root: 'push' = to press forward with force</a:t>
             </a:r>
             <a:endParaRPr lang="en-US" sz="800" dirty="0"/>
           </a:p>
@@ -16547,7 +15929,7 @@
                 <a:ea typeface="Trebuchet MS" pitchFamily="34" charset="-122"/>
                 <a:cs typeface="Trebuchet MS" pitchFamily="34" charset="-120"/>
               </a:rPr>
-              <a:t>2</a:t>
+              <a:t>0</a:t>
             </a:r>
             <a:pPr algn="ctr" indent="0" marL="0">
               <a:buNone/>
@@ -16561,7 +15943,7 @@
                 <a:ea typeface="Trebuchet MS" pitchFamily="34" charset="-122"/>
                 <a:cs typeface="Trebuchet MS" pitchFamily="34" charset="-120"/>
               </a:rPr>
-              <a:t>  punctuation marks</a:t>
+              <a:t>  punctuation mark</a:t>
             </a:r>
             <a:endParaRPr lang="en-US" sz="2800" dirty="0"/>
           </a:p>
@@ -16853,7 +16235,7 @@
                 <a:ea typeface="Calibri" pitchFamily="34" charset="-122"/>
                 <a:cs typeface="Calibri" pitchFamily="34" charset="-120"/>
               </a:rPr>
-              <a:t>Word Labs  •  wordlabs.app  •  Root: 'push' = to press or move forward</a:t>
+              <a:t>Word Labs  •  wordlabs.app  •  Root: 'push' = to press forward with force</a:t>
             </a:r>
             <a:endParaRPr lang="en-US" sz="800" dirty="0"/>
           </a:p>
@@ -16965,7 +16347,7 @@
                 <a:ea typeface="Calibri" pitchFamily="34" charset="-122"/>
                 <a:cs typeface="Calibri" pitchFamily="34" charset="-120"/>
               </a:rPr>
-              <a:t>The </a:t>
+              <a:t>He </a:t>
             </a:r>
             <a:pPr algn="l" indent="0" marL="0">
               <a:buNone/>
@@ -16982,7 +16364,7 @@
                 <a:ea typeface="Calibri" pitchFamily="34" charset="-122"/>
                 <a:cs typeface="Calibri" pitchFamily="34" charset="-120"/>
               </a:rPr>
-              <a:t>pushed</a:t>
+              <a:t>pushes</a:t>
             </a:r>
             <a:pPr algn="l" indent="0" marL="0">
               <a:buNone/>
@@ -16996,7 +16378,7 @@
                 <a:ea typeface="Calibri" pitchFamily="34" charset="-122"/>
                 <a:cs typeface="Calibri" pitchFamily="34" charset="-120"/>
               </a:rPr>
-              <a:t> trolley rolled into the </a:t>
+              <a:t> the swing higher each time. The </a:t>
             </a:r>
             <a:pPr algn="l" indent="0" marL="0">
               <a:buNone/>
@@ -17013,7 +16395,7 @@
                 <a:ea typeface="Calibri" pitchFamily="34" charset="-122"/>
                 <a:cs typeface="Calibri" pitchFamily="34" charset="-120"/>
               </a:rPr>
-              <a:t>pushchair</a:t>
+              <a:t>pushers</a:t>
             </a:r>
             <a:pPr algn="l" indent="0" marL="0">
               <a:buNone/>
@@ -17027,7 +16409,7 @@
                 <a:ea typeface="Calibri" pitchFamily="34" charset="-122"/>
                 <a:cs typeface="Calibri" pitchFamily="34" charset="-120"/>
               </a:rPr>
-              <a:t>, but luckily the quick-thinking </a:t>
+              <a:t> lined up to move the heavy cart. The children were </a:t>
             </a:r>
             <a:pPr algn="l" indent="0" marL="0">
               <a:buNone/>
@@ -17044,7 +16426,7 @@
                 <a:ea typeface="Calibri" pitchFamily="34" charset="-122"/>
                 <a:cs typeface="Calibri" pitchFamily="34" charset="-120"/>
               </a:rPr>
-              <a:t>pusher</a:t>
+              <a:t>pushing</a:t>
             </a:r>
             <a:pPr algn="l" indent="0" marL="0">
               <a:buNone/>
@@ -17058,7 +16440,7 @@
                 <a:ea typeface="Calibri" pitchFamily="34" charset="-122"/>
                 <a:cs typeface="Calibri" pitchFamily="34" charset="-120"/>
               </a:rPr>
-              <a:t> grabbed it in time!</a:t>
+              <a:t> the ball across the yard.</a:t>
             </a:r>
             <a:endParaRPr lang="en-US" sz="1800" dirty="0"/>
           </a:p>
@@ -17213,7 +16595,7 @@
                 <a:ea typeface="Trebuchet MS" pitchFamily="34" charset="-122"/>
                 <a:cs typeface="Trebuchet MS" pitchFamily="34" charset="-120"/>
               </a:rPr>
-              <a:t>pushed</a:t>
+              <a:t>pushes</a:t>
             </a:r>
             <a:endParaRPr lang="en-US" sz="1400" dirty="0"/>
           </a:p>
@@ -17341,7 +16723,7 @@
                 <a:ea typeface="Trebuchet MS" pitchFamily="34" charset="-122"/>
                 <a:cs typeface="Trebuchet MS" pitchFamily="34" charset="-120"/>
               </a:rPr>
-              <a:t>pushchair</a:t>
+              <a:t>pushers</a:t>
             </a:r>
             <a:endParaRPr lang="en-US" sz="1400" dirty="0"/>
           </a:p>
@@ -17469,7 +16851,7 @@
                 <a:ea typeface="Trebuchet MS" pitchFamily="34" charset="-122"/>
                 <a:cs typeface="Trebuchet MS" pitchFamily="34" charset="-120"/>
               </a:rPr>
-              <a:t>pusher</a:t>
+              <a:t>pushing</a:t>
             </a:r>
             <a:endParaRPr lang="en-US" sz="1400" dirty="0"/>
           </a:p>
@@ -17800,7 +17182,7 @@
                 <a:ea typeface="Calibri" pitchFamily="34" charset="-122"/>
                 <a:cs typeface="Calibri" pitchFamily="34" charset="-120"/>
               </a:rPr>
-              <a:t>Word Labs  •  wordlabs.app  •  Root: 'push' = to press or move forward</a:t>
+              <a:t>Word Labs  •  wordlabs.app  •  Root: 'push' = to press forward with force</a:t>
             </a:r>
             <a:endParaRPr lang="en-US" sz="800" dirty="0"/>
           </a:p>
@@ -17939,7 +17321,7 @@
                 <a:ea typeface="Trebuchet MS" pitchFamily="34" charset="-122"/>
                 <a:cs typeface="Trebuchet MS" pitchFamily="34" charset="-120"/>
               </a:rPr>
-              <a:t>pushed</a:t>
+              <a:t>pushes</a:t>
             </a:r>
             <a:endParaRPr lang="en-US" sz="2800" dirty="0"/>
           </a:p>
@@ -18627,7 +18009,7 @@
                 <a:ea typeface="Calibri" pitchFamily="34" charset="-122"/>
                 <a:cs typeface="Calibri" pitchFamily="34" charset="-120"/>
               </a:rPr>
-              <a:t>Word Labs  •  wordlabs.app  •  Root: 'push' = to press or move forward</a:t>
+              <a:t>Word Labs  •  wordlabs.app  •  Root: 'push' = to press forward with force</a:t>
             </a:r>
             <a:endParaRPr lang="en-US" sz="800" dirty="0"/>
           </a:p>
@@ -18766,7 +18148,7 @@
                 <a:ea typeface="Trebuchet MS" pitchFamily="34" charset="-122"/>
                 <a:cs typeface="Trebuchet MS" pitchFamily="34" charset="-120"/>
               </a:rPr>
-              <a:t>pushed</a:t>
+              <a:t>pushes</a:t>
             </a:r>
             <a:endParaRPr lang="en-US" sz="2800" dirty="0"/>
           </a:p>
@@ -18944,7 +18326,7 @@
                 <a:ea typeface="Calibri" pitchFamily="34" charset="-122"/>
                 <a:cs typeface="Calibri" pitchFamily="34" charset="-120"/>
               </a:rPr>
-              <a:t>to press or move forward</a:t>
+              <a:t>to press forward with force</a:t>
             </a:r>
             <a:endParaRPr lang="en-US" sz="850" dirty="0"/>
           </a:p>
@@ -19017,7 +18399,7 @@
                 <a:ea typeface="Trebuchet MS" pitchFamily="34" charset="-122"/>
                 <a:cs typeface="Trebuchet MS" pitchFamily="34" charset="-120"/>
               </a:rPr>
-              <a:t>ed</a:t>
+              <a:t>es</a:t>
             </a:r>
             <a:endParaRPr lang="en-US" sz="1300" dirty="0"/>
           </a:p>
@@ -19056,7 +18438,7 @@
                 <a:ea typeface="Calibri" pitchFamily="34" charset="-122"/>
                 <a:cs typeface="Calibri" pitchFamily="34" charset="-120"/>
               </a:rPr>
-              <a:t>action already done in the past</a:t>
+              <a:t>plural or present tense</a:t>
             </a:r>
             <a:endParaRPr lang="en-US" sz="850" dirty="0"/>
           </a:p>
@@ -19612,7 +18994,7 @@
                 <a:ea typeface="Calibri" pitchFamily="34" charset="-122"/>
                 <a:cs typeface="Calibri" pitchFamily="34" charset="-120"/>
               </a:rPr>
-              <a:t>Word Labs  •  wordlabs.app  •  Root: 'push' = to press or move forward</a:t>
+              <a:t>Word Labs  •  wordlabs.app  •  Root: 'push' = to press forward with force</a:t>
             </a:r>
             <a:endParaRPr lang="en-US" sz="800" dirty="0"/>
           </a:p>
@@ -19751,7 +19133,7 @@
                 <a:ea typeface="Trebuchet MS" pitchFamily="34" charset="-122"/>
                 <a:cs typeface="Trebuchet MS" pitchFamily="34" charset="-120"/>
               </a:rPr>
-              <a:t>pushed</a:t>
+              <a:t>pushes</a:t>
             </a:r>
             <a:endParaRPr lang="en-US" sz="2800" dirty="0"/>
           </a:p>
@@ -19929,7 +19311,7 @@
                 <a:ea typeface="Calibri" pitchFamily="34" charset="-122"/>
                 <a:cs typeface="Calibri" pitchFamily="34" charset="-120"/>
               </a:rPr>
-              <a:t>to press or move forward</a:t>
+              <a:t>to press forward with force</a:t>
             </a:r>
             <a:endParaRPr lang="en-US" sz="850" dirty="0"/>
           </a:p>
@@ -20002,7 +19384,7 @@
                 <a:ea typeface="Trebuchet MS" pitchFamily="34" charset="-122"/>
                 <a:cs typeface="Trebuchet MS" pitchFamily="34" charset="-120"/>
               </a:rPr>
-              <a:t>ed</a:t>
+              <a:t>es</a:t>
             </a:r>
             <a:endParaRPr lang="en-US" sz="1300" dirty="0"/>
           </a:p>
@@ -20041,7 +19423,7 @@
                 <a:ea typeface="Calibri" pitchFamily="34" charset="-122"/>
                 <a:cs typeface="Calibri" pitchFamily="34" charset="-120"/>
               </a:rPr>
-              <a:t>action already done in the past</a:t>
+              <a:t>plural or present tense</a:t>
             </a:r>
             <a:endParaRPr lang="en-US" sz="850" dirty="0"/>
           </a:p>
@@ -20148,7 +19530,7 @@
         </p:nvSpPr>
         <p:spPr>
           <a:xfrm>
-            <a:off x="4370832" y="3364992"/>
+            <a:off x="2999232" y="3364992"/>
             <a:ext cx="1645920" cy="475488"/>
           </a:xfrm>
           <a:prstGeom prst="rect">
@@ -20175,7 +19557,7 @@
         </p:nvSpPr>
         <p:spPr>
           <a:xfrm>
-            <a:off x="4370832" y="3364992"/>
+            <a:off x="2999232" y="3364992"/>
             <a:ext cx="1645920" cy="475488"/>
           </a:xfrm>
           <a:prstGeom prst="rect">
@@ -20200,7 +19582,7 @@
                 <a:ea typeface="Trebuchet MS" pitchFamily="34" charset="-122"/>
                 <a:cs typeface="Trebuchet MS" pitchFamily="34" charset="-120"/>
               </a:rPr>
-              <a:t>pushed</a:t>
+              <a:t>push</a:t>
             </a:r>
             <a:endParaRPr lang="en-US" sz="1400" dirty="0"/>
           </a:p>
@@ -20208,7 +19590,112 @@
       </p:sp>
       <p:sp>
         <p:nvSpPr>
-          <p:cNvPr id="27" name="Shape 25"/>
+          <p:cNvPr id="27" name="Text 25"/>
+          <p:cNvSpPr/>
+          <p:nvPr/>
+        </p:nvSpPr>
+        <p:spPr>
+          <a:xfrm>
+            <a:off x="4645152" y="3364992"/>
+            <a:ext cx="1097280" cy="475488"/>
+          </a:xfrm>
+          <a:prstGeom prst="rect">
+            <a:avLst/>
+          </a:prstGeom>
+          <a:noFill/>
+          <a:ln/>
+        </p:spPr>
+        <p:txBody>
+          <a:bodyPr wrap="square" lIns="0" tIns="0" rIns="0" bIns="0" rtlCol="0" anchor="ctr"/>
+          <a:lstStyle/>
+          <a:p>
+            <a:pPr algn="ctr" indent="0" marL="0">
+              <a:buNone/>
+            </a:pPr>
+            <a:r>
+              <a:rPr lang="en-US" sz="1600" b="1" dirty="0">
+                <a:solidFill>
+                  <a:srgbClr val="0D9488"/>
+                </a:solidFill>
+                <a:latin typeface="Trebuchet MS" pitchFamily="34" charset="0"/>
+                <a:ea typeface="Trebuchet MS" pitchFamily="34" charset="-122"/>
+                <a:cs typeface="Trebuchet MS" pitchFamily="34" charset="-120"/>
+              </a:rPr>
+              <a:t>·</a:t>
+            </a:r>
+            <a:endParaRPr lang="en-US" sz="1600" dirty="0"/>
+          </a:p>
+        </p:txBody>
+      </p:sp>
+      <p:sp>
+        <p:nvSpPr>
+          <p:cNvPr id="28" name="Shape 26"/>
+          <p:cNvSpPr/>
+          <p:nvPr/>
+        </p:nvSpPr>
+        <p:spPr>
+          <a:xfrm>
+            <a:off x="5742432" y="3364992"/>
+            <a:ext cx="1645920" cy="475488"/>
+          </a:xfrm>
+          <a:prstGeom prst="rect">
+            <a:avLst>
+              <a:gd name="adj" fmla="val 9615"/>
+            </a:avLst>
+          </a:prstGeom>
+          <a:solidFill>
+            <a:srgbClr val="FFFFFF"/>
+          </a:solidFill>
+          <a:ln w="12700">
+            <a:solidFill>
+              <a:srgbClr val="0D9488"/>
+            </a:solidFill>
+            <a:prstDash val="solid"/>
+          </a:ln>
+        </p:spPr>
+      </p:sp>
+      <p:sp>
+        <p:nvSpPr>
+          <p:cNvPr id="29" name="Text 27"/>
+          <p:cNvSpPr/>
+          <p:nvPr/>
+        </p:nvSpPr>
+        <p:spPr>
+          <a:xfrm>
+            <a:off x="5742432" y="3364992"/>
+            <a:ext cx="1645920" cy="475488"/>
+          </a:xfrm>
+          <a:prstGeom prst="rect">
+            <a:avLst/>
+          </a:prstGeom>
+          <a:noFill/>
+          <a:ln/>
+        </p:spPr>
+        <p:txBody>
+          <a:bodyPr wrap="square" lIns="0" tIns="0" rIns="0" bIns="0" rtlCol="0" anchor="ctr"/>
+          <a:lstStyle/>
+          <a:p>
+            <a:pPr algn="ctr" indent="0" marL="0">
+              <a:buNone/>
+            </a:pPr>
+            <a:r>
+              <a:rPr lang="en-US" sz="1400" b="1" dirty="0">
+                <a:solidFill>
+                  <a:srgbClr val="0D9488"/>
+                </a:solidFill>
+                <a:latin typeface="Trebuchet MS" pitchFamily="34" charset="0"/>
+                <a:ea typeface="Trebuchet MS" pitchFamily="34" charset="-122"/>
+                <a:cs typeface="Trebuchet MS" pitchFamily="34" charset="-120"/>
+              </a:rPr>
+              <a:t>es</a:t>
+            </a:r>
+            <a:endParaRPr lang="en-US" sz="1400" dirty="0"/>
+          </a:p>
+        </p:txBody>
+      </p:sp>
+      <p:sp>
+        <p:nvSpPr>
+          <p:cNvPr id="30" name="Shape 28"/>
           <p:cNvSpPr/>
           <p:nvPr/>
         </p:nvSpPr>
@@ -20235,7 +19722,7 @@
       </p:sp>
       <p:sp>
         <p:nvSpPr>
-          <p:cNvPr id="28" name="Text 26"/>
+          <p:cNvPr id="31" name="Text 29"/>
           <p:cNvSpPr/>
           <p:nvPr/>
         </p:nvSpPr>
@@ -20274,7 +19761,7 @@
       </p:sp>
       <p:sp>
         <p:nvSpPr>
-          <p:cNvPr id="29" name="Shape 27"/>
+          <p:cNvPr id="32" name="Shape 30"/>
           <p:cNvSpPr/>
           <p:nvPr/>
         </p:nvSpPr>
@@ -20301,7 +19788,7 @@
       </p:sp>
       <p:sp>
         <p:nvSpPr>
-          <p:cNvPr id="30" name="Text 28"/>
+          <p:cNvPr id="33" name="Text 31"/>
           <p:cNvSpPr/>
           <p:nvPr/>
         </p:nvSpPr>
@@ -20624,7 +20111,7 @@
                 <a:ea typeface="Calibri" pitchFamily="34" charset="-122"/>
                 <a:cs typeface="Calibri" pitchFamily="34" charset="-120"/>
               </a:rPr>
-              <a:t>Word Labs  •  wordlabs.app  •  Root: 'push' = to press or move forward</a:t>
+              <a:t>Word Labs  •  wordlabs.app  •  Root: 'push' = to press forward with force</a:t>
             </a:r>
             <a:endParaRPr lang="en-US" sz="800" dirty="0"/>
           </a:p>
@@ -20763,7 +20250,7 @@
                 <a:ea typeface="Trebuchet MS" pitchFamily="34" charset="-122"/>
                 <a:cs typeface="Trebuchet MS" pitchFamily="34" charset="-120"/>
               </a:rPr>
-              <a:t>pushed</a:t>
+              <a:t>pushes</a:t>
             </a:r>
             <a:endParaRPr lang="en-US" sz="2800" dirty="0"/>
           </a:p>
@@ -20941,7 +20428,7 @@
                 <a:ea typeface="Calibri" pitchFamily="34" charset="-122"/>
                 <a:cs typeface="Calibri" pitchFamily="34" charset="-120"/>
               </a:rPr>
-              <a:t>to press or move forward</a:t>
+              <a:t>to press forward with force</a:t>
             </a:r>
             <a:endParaRPr lang="en-US" sz="850" dirty="0"/>
           </a:p>
@@ -21014,7 +20501,7 @@
                 <a:ea typeface="Trebuchet MS" pitchFamily="34" charset="-122"/>
                 <a:cs typeface="Trebuchet MS" pitchFamily="34" charset="-120"/>
               </a:rPr>
-              <a:t>ed</a:t>
+              <a:t>es</a:t>
             </a:r>
             <a:endParaRPr lang="en-US" sz="1300" dirty="0"/>
           </a:p>
@@ -21053,7 +20540,7 @@
                 <a:ea typeface="Calibri" pitchFamily="34" charset="-122"/>
                 <a:cs typeface="Calibri" pitchFamily="34" charset="-120"/>
               </a:rPr>
-              <a:t>action already done in the past</a:t>
+              <a:t>plural or present tense</a:t>
             </a:r>
             <a:endParaRPr lang="en-US" sz="850" dirty="0"/>
           </a:p>
@@ -21160,7 +20647,7 @@
         </p:nvSpPr>
         <p:spPr>
           <a:xfrm>
-            <a:off x="4370832" y="3364992"/>
+            <a:off x="2999232" y="3364992"/>
             <a:ext cx="1645920" cy="475488"/>
           </a:xfrm>
           <a:prstGeom prst="rect">
@@ -21187,7 +20674,7 @@
         </p:nvSpPr>
         <p:spPr>
           <a:xfrm>
-            <a:off x="4370832" y="3364992"/>
+            <a:off x="2999232" y="3364992"/>
             <a:ext cx="1645920" cy="475488"/>
           </a:xfrm>
           <a:prstGeom prst="rect">
@@ -21212,7 +20699,7 @@
                 <a:ea typeface="Trebuchet MS" pitchFamily="34" charset="-122"/>
                 <a:cs typeface="Trebuchet MS" pitchFamily="34" charset="-120"/>
               </a:rPr>
-              <a:t>pushed</a:t>
+              <a:t>push</a:t>
             </a:r>
             <a:endParaRPr lang="en-US" sz="1400" dirty="0"/>
           </a:p>
@@ -21220,7 +20707,112 @@
       </p:sp>
       <p:sp>
         <p:nvSpPr>
-          <p:cNvPr id="27" name="Shape 25"/>
+          <p:cNvPr id="27" name="Text 25"/>
+          <p:cNvSpPr/>
+          <p:nvPr/>
+        </p:nvSpPr>
+        <p:spPr>
+          <a:xfrm>
+            <a:off x="4645152" y="3364992"/>
+            <a:ext cx="1097280" cy="475488"/>
+          </a:xfrm>
+          <a:prstGeom prst="rect">
+            <a:avLst/>
+          </a:prstGeom>
+          <a:noFill/>
+          <a:ln/>
+        </p:spPr>
+        <p:txBody>
+          <a:bodyPr wrap="square" lIns="0" tIns="0" rIns="0" bIns="0" rtlCol="0" anchor="ctr"/>
+          <a:lstStyle/>
+          <a:p>
+            <a:pPr algn="ctr" indent="0" marL="0">
+              <a:buNone/>
+            </a:pPr>
+            <a:r>
+              <a:rPr lang="en-US" sz="1600" b="1" dirty="0">
+                <a:solidFill>
+                  <a:srgbClr val="0D9488"/>
+                </a:solidFill>
+                <a:latin typeface="Trebuchet MS" pitchFamily="34" charset="0"/>
+                <a:ea typeface="Trebuchet MS" pitchFamily="34" charset="-122"/>
+                <a:cs typeface="Trebuchet MS" pitchFamily="34" charset="-120"/>
+              </a:rPr>
+              <a:t>·</a:t>
+            </a:r>
+            <a:endParaRPr lang="en-US" sz="1600" dirty="0"/>
+          </a:p>
+        </p:txBody>
+      </p:sp>
+      <p:sp>
+        <p:nvSpPr>
+          <p:cNvPr id="28" name="Shape 26"/>
+          <p:cNvSpPr/>
+          <p:nvPr/>
+        </p:nvSpPr>
+        <p:spPr>
+          <a:xfrm>
+            <a:off x="5742432" y="3364992"/>
+            <a:ext cx="1645920" cy="475488"/>
+          </a:xfrm>
+          <a:prstGeom prst="rect">
+            <a:avLst>
+              <a:gd name="adj" fmla="val 9615"/>
+            </a:avLst>
+          </a:prstGeom>
+          <a:solidFill>
+            <a:srgbClr val="FFFFFF"/>
+          </a:solidFill>
+          <a:ln w="12700">
+            <a:solidFill>
+              <a:srgbClr val="0D9488"/>
+            </a:solidFill>
+            <a:prstDash val="solid"/>
+          </a:ln>
+        </p:spPr>
+      </p:sp>
+      <p:sp>
+        <p:nvSpPr>
+          <p:cNvPr id="29" name="Text 27"/>
+          <p:cNvSpPr/>
+          <p:nvPr/>
+        </p:nvSpPr>
+        <p:spPr>
+          <a:xfrm>
+            <a:off x="5742432" y="3364992"/>
+            <a:ext cx="1645920" cy="475488"/>
+          </a:xfrm>
+          <a:prstGeom prst="rect">
+            <a:avLst/>
+          </a:prstGeom>
+          <a:noFill/>
+          <a:ln/>
+        </p:spPr>
+        <p:txBody>
+          <a:bodyPr wrap="square" lIns="0" tIns="0" rIns="0" bIns="0" rtlCol="0" anchor="ctr"/>
+          <a:lstStyle/>
+          <a:p>
+            <a:pPr algn="ctr" indent="0" marL="0">
+              <a:buNone/>
+            </a:pPr>
+            <a:r>
+              <a:rPr lang="en-US" sz="1400" b="1" dirty="0">
+                <a:solidFill>
+                  <a:srgbClr val="0D9488"/>
+                </a:solidFill>
+                <a:latin typeface="Trebuchet MS" pitchFamily="34" charset="0"/>
+                <a:ea typeface="Trebuchet MS" pitchFamily="34" charset="-122"/>
+                <a:cs typeface="Trebuchet MS" pitchFamily="34" charset="-120"/>
+              </a:rPr>
+              <a:t>es</a:t>
+            </a:r>
+            <a:endParaRPr lang="en-US" sz="1400" dirty="0"/>
+          </a:p>
+        </p:txBody>
+      </p:sp>
+      <p:sp>
+        <p:nvSpPr>
+          <p:cNvPr id="30" name="Shape 28"/>
           <p:cNvSpPr/>
           <p:nvPr/>
         </p:nvSpPr>
@@ -21247,7 +20839,7 @@
       </p:sp>
       <p:sp>
         <p:nvSpPr>
-          <p:cNvPr id="28" name="Text 26"/>
+          <p:cNvPr id="31" name="Text 29"/>
           <p:cNvSpPr/>
           <p:nvPr/>
         </p:nvSpPr>
@@ -21286,18 +20878,18 @@
       </p:sp>
       <p:sp>
         <p:nvSpPr>
-          <p:cNvPr id="29" name="Shape 27"/>
+          <p:cNvPr id="32" name="Shape 30"/>
           <p:cNvSpPr/>
           <p:nvPr/>
         </p:nvSpPr>
         <p:spPr>
           <a:xfrm>
             <a:off x="1874520" y="4096512"/>
-            <a:ext cx="6903720" cy="804672"/>
+            <a:ext cx="6903720" cy="658368"/>
           </a:xfrm>
           <a:prstGeom prst="rect">
             <a:avLst>
-              <a:gd name="adj" fmla="val 6818"/>
+              <a:gd name="adj" fmla="val 8333"/>
             </a:avLst>
           </a:prstGeom>
           <a:solidFill>
@@ -21313,18 +20905,18 @@
       </p:sp>
       <p:sp>
         <p:nvSpPr>
-          <p:cNvPr id="30" name="Shape 28"/>
-          <p:cNvSpPr/>
-          <p:nvPr/>
-        </p:nvSpPr>
-        <p:spPr>
-          <a:xfrm>
-            <a:off x="2670048" y="4169664"/>
-            <a:ext cx="685800" cy="384048"/>
+          <p:cNvPr id="33" name="Shape 31"/>
+          <p:cNvSpPr/>
+          <p:nvPr/>
+        </p:nvSpPr>
+        <p:spPr>
+          <a:xfrm>
+            <a:off x="2427732" y="4169664"/>
+            <a:ext cx="685800" cy="475488"/>
           </a:xfrm>
           <a:prstGeom prst="rect">
             <a:avLst>
-              <a:gd name="adj" fmla="val 9524"/>
+              <a:gd name="adj" fmla="val 7692"/>
             </a:avLst>
           </a:prstGeom>
           <a:solidFill>
@@ -21340,14 +20932,14 @@
       </p:sp>
       <p:sp>
         <p:nvSpPr>
-          <p:cNvPr id="31" name="Text 29"/>
-          <p:cNvSpPr/>
-          <p:nvPr/>
-        </p:nvSpPr>
-        <p:spPr>
-          <a:xfrm>
-            <a:off x="2670048" y="4169664"/>
-            <a:ext cx="685800" cy="384048"/>
+          <p:cNvPr id="34" name="Text 32"/>
+          <p:cNvSpPr/>
+          <p:nvPr/>
+        </p:nvSpPr>
+        <p:spPr>
+          <a:xfrm>
+            <a:off x="2427732" y="4169664"/>
+            <a:ext cx="685800" cy="475488"/>
           </a:xfrm>
           <a:prstGeom prst="rect">
             <a:avLst/>
@@ -21379,18 +20971,18 @@
       </p:sp>
       <p:sp>
         <p:nvSpPr>
-          <p:cNvPr id="32" name="Shape 30"/>
-          <p:cNvSpPr/>
-          <p:nvPr/>
-        </p:nvSpPr>
-        <p:spPr>
-          <a:xfrm>
-            <a:off x="4123944" y="4169664"/>
-            <a:ext cx="685800" cy="384048"/>
+          <p:cNvPr id="35" name="Shape 33"/>
+          <p:cNvSpPr/>
+          <p:nvPr/>
+        </p:nvSpPr>
+        <p:spPr>
+          <a:xfrm>
+            <a:off x="3639312" y="4169664"/>
+            <a:ext cx="685800" cy="475488"/>
           </a:xfrm>
           <a:prstGeom prst="rect">
             <a:avLst>
-              <a:gd name="adj" fmla="val 9524"/>
+              <a:gd name="adj" fmla="val 7692"/>
             </a:avLst>
           </a:prstGeom>
           <a:solidFill>
@@ -21406,14 +20998,14 @@
       </p:sp>
       <p:sp>
         <p:nvSpPr>
-          <p:cNvPr id="33" name="Text 31"/>
-          <p:cNvSpPr/>
-          <p:nvPr/>
-        </p:nvSpPr>
-        <p:spPr>
-          <a:xfrm>
-            <a:off x="4123944" y="4169664"/>
-            <a:ext cx="685800" cy="384048"/>
+          <p:cNvPr id="36" name="Text 34"/>
+          <p:cNvSpPr/>
+          <p:nvPr/>
+        </p:nvSpPr>
+        <p:spPr>
+          <a:xfrm>
+            <a:off x="3639312" y="4169664"/>
+            <a:ext cx="685800" cy="475488"/>
           </a:xfrm>
           <a:prstGeom prst="rect">
             <a:avLst/>
@@ -21445,18 +21037,18 @@
       </p:sp>
       <p:sp>
         <p:nvSpPr>
-          <p:cNvPr id="34" name="Shape 32"/>
-          <p:cNvSpPr/>
-          <p:nvPr/>
-        </p:nvSpPr>
-        <p:spPr>
-          <a:xfrm>
-            <a:off x="5577840" y="4169664"/>
-            <a:ext cx="685800" cy="384048"/>
+          <p:cNvPr id="37" name="Shape 35"/>
+          <p:cNvSpPr/>
+          <p:nvPr/>
+        </p:nvSpPr>
+        <p:spPr>
+          <a:xfrm>
+            <a:off x="4850892" y="4169664"/>
+            <a:ext cx="685800" cy="475488"/>
           </a:xfrm>
           <a:prstGeom prst="rect">
             <a:avLst>
-              <a:gd name="adj" fmla="val 9524"/>
+              <a:gd name="adj" fmla="val 7692"/>
             </a:avLst>
           </a:prstGeom>
           <a:solidFill>
@@ -21472,14 +21064,14 @@
       </p:sp>
       <p:sp>
         <p:nvSpPr>
-          <p:cNvPr id="35" name="Text 33"/>
-          <p:cNvSpPr/>
-          <p:nvPr/>
-        </p:nvSpPr>
-        <p:spPr>
-          <a:xfrm>
-            <a:off x="5577840" y="4169664"/>
-            <a:ext cx="685800" cy="384048"/>
+          <p:cNvPr id="38" name="Text 36"/>
+          <p:cNvSpPr/>
+          <p:nvPr/>
+        </p:nvSpPr>
+        <p:spPr>
+          <a:xfrm>
+            <a:off x="4850892" y="4169664"/>
+            <a:ext cx="685800" cy="475488"/>
           </a:xfrm>
           <a:prstGeom prst="rect">
             <a:avLst/>
@@ -21511,18 +21103,18 @@
       </p:sp>
       <p:sp>
         <p:nvSpPr>
-          <p:cNvPr id="36" name="Shape 34"/>
-          <p:cNvSpPr/>
-          <p:nvPr/>
-        </p:nvSpPr>
-        <p:spPr>
-          <a:xfrm>
-            <a:off x="7031736" y="4169664"/>
-            <a:ext cx="685800" cy="384048"/>
+          <p:cNvPr id="39" name="Shape 37"/>
+          <p:cNvSpPr/>
+          <p:nvPr/>
+        </p:nvSpPr>
+        <p:spPr>
+          <a:xfrm>
+            <a:off x="6062472" y="4169664"/>
+            <a:ext cx="685800" cy="475488"/>
           </a:xfrm>
           <a:prstGeom prst="rect">
             <a:avLst>
-              <a:gd name="adj" fmla="val 9524"/>
+              <a:gd name="adj" fmla="val 7692"/>
             </a:avLst>
           </a:prstGeom>
           <a:solidFill>
@@ -21538,14 +21130,14 @@
       </p:sp>
       <p:sp>
         <p:nvSpPr>
-          <p:cNvPr id="37" name="Text 35"/>
-          <p:cNvSpPr/>
-          <p:nvPr/>
-        </p:nvSpPr>
-        <p:spPr>
-          <a:xfrm>
-            <a:off x="7031736" y="4169664"/>
-            <a:ext cx="685800" cy="384048"/>
+          <p:cNvPr id="40" name="Text 38"/>
+          <p:cNvSpPr/>
+          <p:nvPr/>
+        </p:nvSpPr>
+        <p:spPr>
+          <a:xfrm>
+            <a:off x="6062472" y="4169664"/>
+            <a:ext cx="685800" cy="475488"/>
           </a:xfrm>
           <a:prstGeom prst="rect">
             <a:avLst/>
@@ -21569,7 +21161,7 @@
                 <a:ea typeface="Trebuchet MS" pitchFamily="34" charset="-122"/>
                 <a:cs typeface="Trebuchet MS" pitchFamily="34" charset="-120"/>
               </a:rPr>
-              <a:t>ed</a:t>
+              <a:t>e</a:t>
             </a:r>
             <a:endParaRPr lang="en-US" sz="900" dirty="0"/>
           </a:p>
@@ -21577,40 +21169,67 @@
       </p:sp>
       <p:sp>
         <p:nvSpPr>
-          <p:cNvPr id="38" name="Text 36"/>
-          <p:cNvSpPr/>
-          <p:nvPr/>
-        </p:nvSpPr>
-        <p:spPr>
-          <a:xfrm>
-            <a:off x="7031736" y="4572000"/>
-            <a:ext cx="685800" cy="219456"/>
-          </a:xfrm>
-          <a:prstGeom prst="rect">
-            <a:avLst/>
-          </a:prstGeom>
-          <a:noFill/>
-          <a:ln/>
-        </p:spPr>
-        <p:txBody>
-          <a:bodyPr wrap="square" lIns="0" tIns="0" rIns="0" bIns="0" rtlCol="0" anchor="t"/>
-          <a:lstStyle/>
-          <a:p>
-            <a:pPr algn="ctr" indent="0" marL="0">
-              <a:buNone/>
-            </a:pPr>
-            <a:r>
-              <a:rPr lang="en-US" sz="750" i="1" dirty="0">
-                <a:solidFill>
-                  <a:srgbClr val="94A3B8"/>
-                </a:solidFill>
-                <a:latin typeface="Calibri" pitchFamily="34" charset="0"/>
-                <a:ea typeface="Calibri" pitchFamily="34" charset="-122"/>
-                <a:cs typeface="Calibri" pitchFamily="34" charset="-120"/>
-              </a:rPr>
-              <a:t>/t/</a:t>
-            </a:r>
-            <a:endParaRPr lang="en-US" sz="750" dirty="0"/>
+          <p:cNvPr id="41" name="Shape 39"/>
+          <p:cNvSpPr/>
+          <p:nvPr/>
+        </p:nvSpPr>
+        <p:spPr>
+          <a:xfrm>
+            <a:off x="7274052" y="4169664"/>
+            <a:ext cx="685800" cy="475488"/>
+          </a:xfrm>
+          <a:prstGeom prst="rect">
+            <a:avLst>
+              <a:gd name="adj" fmla="val 7692"/>
+            </a:avLst>
+          </a:prstGeom>
+          <a:solidFill>
+            <a:srgbClr val="FFFFFF"/>
+          </a:solidFill>
+          <a:ln w="12700">
+            <a:solidFill>
+              <a:srgbClr val="DB2777"/>
+            </a:solidFill>
+            <a:prstDash val="solid"/>
+          </a:ln>
+        </p:spPr>
+      </p:sp>
+      <p:sp>
+        <p:nvSpPr>
+          <p:cNvPr id="42" name="Text 40"/>
+          <p:cNvSpPr/>
+          <p:nvPr/>
+        </p:nvSpPr>
+        <p:spPr>
+          <a:xfrm>
+            <a:off x="7274052" y="4169664"/>
+            <a:ext cx="685800" cy="475488"/>
+          </a:xfrm>
+          <a:prstGeom prst="rect">
+            <a:avLst/>
+          </a:prstGeom>
+          <a:noFill/>
+          <a:ln/>
+        </p:spPr>
+        <p:txBody>
+          <a:bodyPr wrap="square" lIns="0" tIns="0" rIns="0" bIns="0" rtlCol="0" anchor="ctr"/>
+          <a:lstStyle/>
+          <a:p>
+            <a:pPr algn="ctr" indent="0" marL="0">
+              <a:buNone/>
+            </a:pPr>
+            <a:r>
+              <a:rPr lang="en-US" sz="900" b="1" dirty="0">
+                <a:solidFill>
+                  <a:srgbClr val="9D174D"/>
+                </a:solidFill>
+                <a:latin typeface="Trebuchet MS" pitchFamily="34" charset="0"/>
+                <a:ea typeface="Trebuchet MS" pitchFamily="34" charset="-122"/>
+                <a:cs typeface="Trebuchet MS" pitchFamily="34" charset="-120"/>
+              </a:rPr>
+              <a:t>s</a:t>
+            </a:r>
+            <a:endParaRPr lang="en-US" sz="900" dirty="0"/>
           </a:p>
         </p:txBody>
       </p:sp>
@@ -21900,7 +21519,7 @@
                 <a:ea typeface="Calibri" pitchFamily="34" charset="-122"/>
                 <a:cs typeface="Calibri" pitchFamily="34" charset="-120"/>
               </a:rPr>
-              <a:t>Word Labs  •  wordlabs.app  •  Root: 'push' = to press or move forward</a:t>
+              <a:t>Word Labs  •  wordlabs.app  •  Root: 'push' = to press forward with force</a:t>
             </a:r>
             <a:endParaRPr lang="en-US" sz="800" dirty="0"/>
           </a:p>
@@ -22039,7 +21658,7 @@
                 <a:ea typeface="Trebuchet MS" pitchFamily="34" charset="-122"/>
                 <a:cs typeface="Trebuchet MS" pitchFamily="34" charset="-120"/>
               </a:rPr>
-              <a:t>pushchair</a:t>
+              <a:t>pushers</a:t>
             </a:r>
             <a:endParaRPr lang="en-US" sz="2800" dirty="0"/>
           </a:p>
@@ -22727,7 +22346,7 @@
                 <a:ea typeface="Calibri" pitchFamily="34" charset="-122"/>
                 <a:cs typeface="Calibri" pitchFamily="34" charset="-120"/>
               </a:rPr>
-              <a:t>Word Labs  •  wordlabs.app  •  Root: 'push' = to press or move forward</a:t>
+              <a:t>Word Labs  •  wordlabs.app  •  Root: 'push' = to press forward with force</a:t>
             </a:r>
             <a:endParaRPr lang="en-US" sz="800" dirty="0"/>
           </a:p>
@@ -22866,7 +22485,7 @@
                 <a:ea typeface="Trebuchet MS" pitchFamily="34" charset="-122"/>
                 <a:cs typeface="Trebuchet MS" pitchFamily="34" charset="-120"/>
               </a:rPr>
-              <a:t>pushchair</a:t>
+              <a:t>pushers</a:t>
             </a:r>
             <a:endParaRPr lang="en-US" sz="2800" dirty="0"/>
           </a:p>
@@ -22946,7 +22565,7 @@
         </p:nvSpPr>
         <p:spPr>
           <a:xfrm>
-            <a:off x="2938272" y="2258568"/>
+            <a:off x="2221992" y="2258568"/>
             <a:ext cx="1828800" cy="292608"/>
           </a:xfrm>
           <a:prstGeom prst="rect">
@@ -22980,7 +22599,7 @@
         </p:nvSpPr>
         <p:spPr>
           <a:xfrm>
-            <a:off x="2938272" y="2258568"/>
+            <a:off x="2221992" y="2258568"/>
             <a:ext cx="1828800" cy="292608"/>
           </a:xfrm>
           <a:prstGeom prst="rect">
@@ -23019,7 +22638,7 @@
         </p:nvSpPr>
         <p:spPr>
           <a:xfrm>
-            <a:off x="2938272" y="2569464"/>
+            <a:off x="2221992" y="2569464"/>
             <a:ext cx="1828800" cy="201168"/>
           </a:xfrm>
           <a:prstGeom prst="rect">
@@ -23044,7 +22663,7 @@
                 <a:ea typeface="Calibri" pitchFamily="34" charset="-122"/>
                 <a:cs typeface="Calibri" pitchFamily="34" charset="-120"/>
               </a:rPr>
-              <a:t>to press or move forward</a:t>
+              <a:t>to press forward with force</a:t>
             </a:r>
             <a:endParaRPr lang="en-US" sz="850" dirty="0"/>
           </a:p>
@@ -23058,7 +22677,7 @@
         </p:nvSpPr>
         <p:spPr>
           <a:xfrm>
-            <a:off x="5803392" y="2258568"/>
+            <a:off x="4370832" y="2258568"/>
             <a:ext cx="1828800" cy="292608"/>
           </a:xfrm>
           <a:prstGeom prst="rect">
@@ -23092,7 +22711,7 @@
         </p:nvSpPr>
         <p:spPr>
           <a:xfrm>
-            <a:off x="5803392" y="2258568"/>
+            <a:off x="4370832" y="2258568"/>
             <a:ext cx="1828800" cy="292608"/>
           </a:xfrm>
           <a:prstGeom prst="rect">
@@ -23117,7 +22736,7 @@
                 <a:ea typeface="Trebuchet MS" pitchFamily="34" charset="-122"/>
                 <a:cs typeface="Trebuchet MS" pitchFamily="34" charset="-120"/>
               </a:rPr>
-              <a:t>chair</a:t>
+              <a:t>er</a:t>
             </a:r>
             <a:endParaRPr lang="en-US" sz="1300" dirty="0"/>
           </a:p>
@@ -23131,7 +22750,7 @@
         </p:nvSpPr>
         <p:spPr>
           <a:xfrm>
-            <a:off x="5803392" y="2569464"/>
+            <a:off x="4370832" y="2569464"/>
             <a:ext cx="1828800" cy="201168"/>
           </a:xfrm>
           <a:prstGeom prst="rect">
@@ -23156,7 +22775,7 @@
                 <a:ea typeface="Calibri" pitchFamily="34" charset="-122"/>
                 <a:cs typeface="Calibri" pitchFamily="34" charset="-120"/>
               </a:rPr>
-              <a:t>a seat</a:t>
+              <a:t>person who; more</a:t>
             </a:r>
             <a:endParaRPr lang="en-US" sz="850" dirty="0"/>
           </a:p>
@@ -23165,6 +22784,118 @@
       <p:sp>
         <p:nvSpPr>
           <p:cNvPr id="22" name="Shape 20"/>
+          <p:cNvSpPr/>
+          <p:nvPr/>
+        </p:nvSpPr>
+        <p:spPr>
+          <a:xfrm>
+            <a:off x="6519672" y="2258568"/>
+            <a:ext cx="1828800" cy="292608"/>
+          </a:xfrm>
+          <a:prstGeom prst="rect">
+            <a:avLst>
+              <a:gd name="adj" fmla="val 25000"/>
+            </a:avLst>
+          </a:prstGeom>
+          <a:solidFill>
+            <a:srgbClr val="FCE7F3"/>
+          </a:solidFill>
+          <a:ln w="19050">
+            <a:solidFill>
+              <a:srgbClr val="DB2777"/>
+            </a:solidFill>
+            <a:prstDash val="solid"/>
+          </a:ln>
+          <a:effectLst>
+            <a:outerShdw sx="100000" sy="100000" kx="0" ky="0" algn="bl" rotWithShape="0" blurRad="101600" dist="38100" dir="8100000">
+              <a:srgbClr val="000000">
+                <a:alpha val="12000"/>
+              </a:srgbClr>
+            </a:outerShdw>
+          </a:effectLst>
+        </p:spPr>
+      </p:sp>
+      <p:sp>
+        <p:nvSpPr>
+          <p:cNvPr id="23" name="Text 21"/>
+          <p:cNvSpPr/>
+          <p:nvPr/>
+        </p:nvSpPr>
+        <p:spPr>
+          <a:xfrm>
+            <a:off x="6519672" y="2258568"/>
+            <a:ext cx="1828800" cy="292608"/>
+          </a:xfrm>
+          <a:prstGeom prst="rect">
+            <a:avLst/>
+          </a:prstGeom>
+          <a:noFill/>
+          <a:ln/>
+        </p:spPr>
+        <p:txBody>
+          <a:bodyPr wrap="square" lIns="0" tIns="0" rIns="0" bIns="0" rtlCol="0" anchor="ctr"/>
+          <a:lstStyle/>
+          <a:p>
+            <a:pPr algn="ctr" indent="0" marL="0">
+              <a:buNone/>
+            </a:pPr>
+            <a:r>
+              <a:rPr lang="en-US" sz="1300" b="1" dirty="0">
+                <a:solidFill>
+                  <a:srgbClr val="9D174D"/>
+                </a:solidFill>
+                <a:latin typeface="Trebuchet MS" pitchFamily="34" charset="0"/>
+                <a:ea typeface="Trebuchet MS" pitchFamily="34" charset="-122"/>
+                <a:cs typeface="Trebuchet MS" pitchFamily="34" charset="-120"/>
+              </a:rPr>
+              <a:t>s</a:t>
+            </a:r>
+            <a:endParaRPr lang="en-US" sz="1300" dirty="0"/>
+          </a:p>
+        </p:txBody>
+      </p:sp>
+      <p:sp>
+        <p:nvSpPr>
+          <p:cNvPr id="24" name="Text 22"/>
+          <p:cNvSpPr/>
+          <p:nvPr/>
+        </p:nvSpPr>
+        <p:spPr>
+          <a:xfrm>
+            <a:off x="6519672" y="2569464"/>
+            <a:ext cx="1828800" cy="201168"/>
+          </a:xfrm>
+          <a:prstGeom prst="rect">
+            <a:avLst/>
+          </a:prstGeom>
+          <a:noFill/>
+          <a:ln/>
+        </p:spPr>
+        <p:txBody>
+          <a:bodyPr wrap="square" lIns="0" tIns="0" rIns="0" bIns="0" rtlCol="0" anchor="t"/>
+          <a:lstStyle/>
+          <a:p>
+            <a:pPr algn="ctr" indent="0" marL="0">
+              <a:buNone/>
+            </a:pPr>
+            <a:r>
+              <a:rPr lang="en-US" sz="850" dirty="0">
+                <a:solidFill>
+                  <a:srgbClr val="475569"/>
+                </a:solidFill>
+                <a:latin typeface="Calibri" pitchFamily="34" charset="0"/>
+                <a:ea typeface="Calibri" pitchFamily="34" charset="-122"/>
+                <a:cs typeface="Calibri" pitchFamily="34" charset="-120"/>
+              </a:rPr>
+              <a:t>plural or present tense</a:t>
+            </a:r>
+            <a:endParaRPr lang="en-US" sz="850" dirty="0"/>
+          </a:p>
+        </p:txBody>
+      </p:sp>
+      <p:sp>
+        <p:nvSpPr>
+          <p:cNvPr id="25" name="Shape 23"/>
           <p:cNvSpPr/>
           <p:nvPr/>
         </p:nvSpPr>
@@ -23191,7 +22922,7 @@
       </p:sp>
       <p:sp>
         <p:nvSpPr>
-          <p:cNvPr id="23" name="Text 21"/>
+          <p:cNvPr id="26" name="Text 24"/>
           <p:cNvSpPr/>
           <p:nvPr/>
         </p:nvSpPr>
@@ -23230,7 +22961,7 @@
       </p:sp>
       <p:sp>
         <p:nvSpPr>
-          <p:cNvPr id="24" name="Shape 22"/>
+          <p:cNvPr id="27" name="Shape 25"/>
           <p:cNvSpPr/>
           <p:nvPr/>
         </p:nvSpPr>
@@ -23257,7 +22988,7 @@
       </p:sp>
       <p:sp>
         <p:nvSpPr>
-          <p:cNvPr id="25" name="Text 23"/>
+          <p:cNvPr id="28" name="Text 26"/>
           <p:cNvSpPr/>
           <p:nvPr/>
         </p:nvSpPr>
@@ -23296,7 +23027,7 @@
       </p:sp>
       <p:sp>
         <p:nvSpPr>
-          <p:cNvPr id="26" name="Shape 24"/>
+          <p:cNvPr id="29" name="Shape 27"/>
           <p:cNvSpPr/>
           <p:nvPr/>
         </p:nvSpPr>
@@ -23323,7 +23054,7 @@
       </p:sp>
       <p:sp>
         <p:nvSpPr>
-          <p:cNvPr id="27" name="Text 25"/>
+          <p:cNvPr id="30" name="Text 28"/>
           <p:cNvSpPr/>
           <p:nvPr/>
         </p:nvSpPr>
@@ -23362,7 +23093,7 @@
       </p:sp>
       <p:sp>
         <p:nvSpPr>
-          <p:cNvPr id="28" name="Shape 26"/>
+          <p:cNvPr id="31" name="Shape 29"/>
           <p:cNvSpPr/>
           <p:nvPr/>
         </p:nvSpPr>
@@ -23389,7 +23120,7 @@
       </p:sp>
       <p:sp>
         <p:nvSpPr>
-          <p:cNvPr id="29" name="Text 27"/>
+          <p:cNvPr id="32" name="Text 30"/>
           <p:cNvSpPr/>
           <p:nvPr/>
         </p:nvSpPr>
@@ -23712,7 +23443,7 @@
                 <a:ea typeface="Calibri" pitchFamily="34" charset="-122"/>
                 <a:cs typeface="Calibri" pitchFamily="34" charset="-120"/>
               </a:rPr>
-              <a:t>Word Labs  •  wordlabs.app  •  Root: 'push' = to press or move forward</a:t>
+              <a:t>Word Labs  •  wordlabs.app  •  Root: 'push' = to press forward with force</a:t>
             </a:r>
             <a:endParaRPr lang="en-US" sz="800" dirty="0"/>
           </a:p>
@@ -23785,7 +23516,7 @@
                 <a:ea typeface="Trebuchet MS" pitchFamily="34" charset="-122"/>
                 <a:cs typeface="Trebuchet MS" pitchFamily="34" charset="-120"/>
               </a:rPr>
-              <a:t>We are learning that the root 'push' means 'to press or move forward'.</a:t>
+              <a:t>We are learning that the root 'push' means 'to press forward with force'.</a:t>
             </a:r>
             <a:endParaRPr lang="en-US" sz="2000" dirty="0"/>
           </a:p>
@@ -24431,7 +24162,7 @@
                 <a:ea typeface="Calibri" pitchFamily="34" charset="-122"/>
                 <a:cs typeface="Calibri" pitchFamily="34" charset="-120"/>
               </a:rPr>
-              <a:t>Word Labs  •  wordlabs.app  •  Root: 'push' = to press or move forward</a:t>
+              <a:t>Word Labs  •  wordlabs.app  •  Root: 'push' = to press forward with force</a:t>
             </a:r>
             <a:endParaRPr lang="en-US" sz="800" dirty="0"/>
           </a:p>
@@ -24570,7 +24301,7 @@
                 <a:ea typeface="Trebuchet MS" pitchFamily="34" charset="-122"/>
                 <a:cs typeface="Trebuchet MS" pitchFamily="34" charset="-120"/>
               </a:rPr>
-              <a:t>pushchair</a:t>
+              <a:t>pushers</a:t>
             </a:r>
             <a:endParaRPr lang="en-US" sz="2800" dirty="0"/>
           </a:p>
@@ -24650,7 +24381,7 @@
         </p:nvSpPr>
         <p:spPr>
           <a:xfrm>
-            <a:off x="2938272" y="2258568"/>
+            <a:off x="2221992" y="2258568"/>
             <a:ext cx="1828800" cy="292608"/>
           </a:xfrm>
           <a:prstGeom prst="rect">
@@ -24684,7 +24415,7 @@
         </p:nvSpPr>
         <p:spPr>
           <a:xfrm>
-            <a:off x="2938272" y="2258568"/>
+            <a:off x="2221992" y="2258568"/>
             <a:ext cx="1828800" cy="292608"/>
           </a:xfrm>
           <a:prstGeom prst="rect">
@@ -24723,7 +24454,7 @@
         </p:nvSpPr>
         <p:spPr>
           <a:xfrm>
-            <a:off x="2938272" y="2569464"/>
+            <a:off x="2221992" y="2569464"/>
             <a:ext cx="1828800" cy="201168"/>
           </a:xfrm>
           <a:prstGeom prst="rect">
@@ -24748,7 +24479,7 @@
                 <a:ea typeface="Calibri" pitchFamily="34" charset="-122"/>
                 <a:cs typeface="Calibri" pitchFamily="34" charset="-120"/>
               </a:rPr>
-              <a:t>to press or move forward</a:t>
+              <a:t>to press forward with force</a:t>
             </a:r>
             <a:endParaRPr lang="en-US" sz="850" dirty="0"/>
           </a:p>
@@ -24762,7 +24493,7 @@
         </p:nvSpPr>
         <p:spPr>
           <a:xfrm>
-            <a:off x="5803392" y="2258568"/>
+            <a:off x="4370832" y="2258568"/>
             <a:ext cx="1828800" cy="292608"/>
           </a:xfrm>
           <a:prstGeom prst="rect">
@@ -24796,7 +24527,7 @@
         </p:nvSpPr>
         <p:spPr>
           <a:xfrm>
-            <a:off x="5803392" y="2258568"/>
+            <a:off x="4370832" y="2258568"/>
             <a:ext cx="1828800" cy="292608"/>
           </a:xfrm>
           <a:prstGeom prst="rect">
@@ -24821,7 +24552,7 @@
                 <a:ea typeface="Trebuchet MS" pitchFamily="34" charset="-122"/>
                 <a:cs typeface="Trebuchet MS" pitchFamily="34" charset="-120"/>
               </a:rPr>
-              <a:t>chair</a:t>
+              <a:t>er</a:t>
             </a:r>
             <a:endParaRPr lang="en-US" sz="1300" dirty="0"/>
           </a:p>
@@ -24835,7 +24566,7 @@
         </p:nvSpPr>
         <p:spPr>
           <a:xfrm>
-            <a:off x="5803392" y="2569464"/>
+            <a:off x="4370832" y="2569464"/>
             <a:ext cx="1828800" cy="201168"/>
           </a:xfrm>
           <a:prstGeom prst="rect">
@@ -24860,7 +24591,7 @@
                 <a:ea typeface="Calibri" pitchFamily="34" charset="-122"/>
                 <a:cs typeface="Calibri" pitchFamily="34" charset="-120"/>
               </a:rPr>
-              <a:t>a seat</a:t>
+              <a:t>person who; more</a:t>
             </a:r>
             <a:endParaRPr lang="en-US" sz="850" dirty="0"/>
           </a:p>
@@ -24869,6 +24600,118 @@
       <p:sp>
         <p:nvSpPr>
           <p:cNvPr id="22" name="Shape 20"/>
+          <p:cNvSpPr/>
+          <p:nvPr/>
+        </p:nvSpPr>
+        <p:spPr>
+          <a:xfrm>
+            <a:off x="6519672" y="2258568"/>
+            <a:ext cx="1828800" cy="292608"/>
+          </a:xfrm>
+          <a:prstGeom prst="rect">
+            <a:avLst>
+              <a:gd name="adj" fmla="val 25000"/>
+            </a:avLst>
+          </a:prstGeom>
+          <a:solidFill>
+            <a:srgbClr val="FCE7F3"/>
+          </a:solidFill>
+          <a:ln w="19050">
+            <a:solidFill>
+              <a:srgbClr val="DB2777"/>
+            </a:solidFill>
+            <a:prstDash val="solid"/>
+          </a:ln>
+          <a:effectLst>
+            <a:outerShdw sx="100000" sy="100000" kx="0" ky="0" algn="bl" rotWithShape="0" blurRad="101600" dist="38100" dir="8100000">
+              <a:srgbClr val="000000">
+                <a:alpha val="12000"/>
+              </a:srgbClr>
+            </a:outerShdw>
+          </a:effectLst>
+        </p:spPr>
+      </p:sp>
+      <p:sp>
+        <p:nvSpPr>
+          <p:cNvPr id="23" name="Text 21"/>
+          <p:cNvSpPr/>
+          <p:nvPr/>
+        </p:nvSpPr>
+        <p:spPr>
+          <a:xfrm>
+            <a:off x="6519672" y="2258568"/>
+            <a:ext cx="1828800" cy="292608"/>
+          </a:xfrm>
+          <a:prstGeom prst="rect">
+            <a:avLst/>
+          </a:prstGeom>
+          <a:noFill/>
+          <a:ln/>
+        </p:spPr>
+        <p:txBody>
+          <a:bodyPr wrap="square" lIns="0" tIns="0" rIns="0" bIns="0" rtlCol="0" anchor="ctr"/>
+          <a:lstStyle/>
+          <a:p>
+            <a:pPr algn="ctr" indent="0" marL="0">
+              <a:buNone/>
+            </a:pPr>
+            <a:r>
+              <a:rPr lang="en-US" sz="1300" b="1" dirty="0">
+                <a:solidFill>
+                  <a:srgbClr val="9D174D"/>
+                </a:solidFill>
+                <a:latin typeface="Trebuchet MS" pitchFamily="34" charset="0"/>
+                <a:ea typeface="Trebuchet MS" pitchFamily="34" charset="-122"/>
+                <a:cs typeface="Trebuchet MS" pitchFamily="34" charset="-120"/>
+              </a:rPr>
+              <a:t>s</a:t>
+            </a:r>
+            <a:endParaRPr lang="en-US" sz="1300" dirty="0"/>
+          </a:p>
+        </p:txBody>
+      </p:sp>
+      <p:sp>
+        <p:nvSpPr>
+          <p:cNvPr id="24" name="Text 22"/>
+          <p:cNvSpPr/>
+          <p:nvPr/>
+        </p:nvSpPr>
+        <p:spPr>
+          <a:xfrm>
+            <a:off x="6519672" y="2569464"/>
+            <a:ext cx="1828800" cy="201168"/>
+          </a:xfrm>
+          <a:prstGeom prst="rect">
+            <a:avLst/>
+          </a:prstGeom>
+          <a:noFill/>
+          <a:ln/>
+        </p:spPr>
+        <p:txBody>
+          <a:bodyPr wrap="square" lIns="0" tIns="0" rIns="0" bIns="0" rtlCol="0" anchor="t"/>
+          <a:lstStyle/>
+          <a:p>
+            <a:pPr algn="ctr" indent="0" marL="0">
+              <a:buNone/>
+            </a:pPr>
+            <a:r>
+              <a:rPr lang="en-US" sz="850" dirty="0">
+                <a:solidFill>
+                  <a:srgbClr val="475569"/>
+                </a:solidFill>
+                <a:latin typeface="Calibri" pitchFamily="34" charset="0"/>
+                <a:ea typeface="Calibri" pitchFamily="34" charset="-122"/>
+                <a:cs typeface="Calibri" pitchFamily="34" charset="-120"/>
+              </a:rPr>
+              <a:t>plural or present tense</a:t>
+            </a:r>
+            <a:endParaRPr lang="en-US" sz="850" dirty="0"/>
+          </a:p>
+        </p:txBody>
+      </p:sp>
+      <p:sp>
+        <p:nvSpPr>
+          <p:cNvPr id="25" name="Shape 23"/>
           <p:cNvSpPr/>
           <p:nvPr/>
         </p:nvSpPr>
@@ -24895,7 +24738,7 @@
       </p:sp>
       <p:sp>
         <p:nvSpPr>
-          <p:cNvPr id="23" name="Text 21"/>
+          <p:cNvPr id="26" name="Text 24"/>
           <p:cNvSpPr/>
           <p:nvPr/>
         </p:nvSpPr>
@@ -24934,7 +24777,7 @@
       </p:sp>
       <p:sp>
         <p:nvSpPr>
-          <p:cNvPr id="24" name="Shape 22"/>
+          <p:cNvPr id="27" name="Shape 25"/>
           <p:cNvSpPr/>
           <p:nvPr/>
         </p:nvSpPr>
@@ -24961,7 +24804,7 @@
       </p:sp>
       <p:sp>
         <p:nvSpPr>
-          <p:cNvPr id="25" name="Shape 23"/>
+          <p:cNvPr id="28" name="Shape 26"/>
           <p:cNvSpPr/>
           <p:nvPr/>
         </p:nvSpPr>
@@ -24988,7 +24831,7 @@
       </p:sp>
       <p:sp>
         <p:nvSpPr>
-          <p:cNvPr id="26" name="Text 24"/>
+          <p:cNvPr id="29" name="Text 27"/>
           <p:cNvSpPr/>
           <p:nvPr/>
         </p:nvSpPr>
@@ -25027,7 +24870,7 @@
       </p:sp>
       <p:sp>
         <p:nvSpPr>
-          <p:cNvPr id="27" name="Text 25"/>
+          <p:cNvPr id="30" name="Text 28"/>
           <p:cNvSpPr/>
           <p:nvPr/>
         </p:nvSpPr>
@@ -25066,7 +24909,7 @@
       </p:sp>
       <p:sp>
         <p:nvSpPr>
-          <p:cNvPr id="28" name="Shape 26"/>
+          <p:cNvPr id="31" name="Shape 29"/>
           <p:cNvSpPr/>
           <p:nvPr/>
         </p:nvSpPr>
@@ -25093,7 +24936,7 @@
       </p:sp>
       <p:sp>
         <p:nvSpPr>
-          <p:cNvPr id="29" name="Text 27"/>
+          <p:cNvPr id="32" name="Text 30"/>
           <p:cNvSpPr/>
           <p:nvPr/>
         </p:nvSpPr>
@@ -25124,7 +24967,7 @@
                 <a:ea typeface="Trebuchet MS" pitchFamily="34" charset="-122"/>
                 <a:cs typeface="Trebuchet MS" pitchFamily="34" charset="-120"/>
               </a:rPr>
-              <a:t>chair</a:t>
+              <a:t>ers</a:t>
             </a:r>
             <a:endParaRPr lang="en-US" sz="1400" dirty="0"/>
           </a:p>
@@ -25132,7 +24975,7 @@
       </p:sp>
       <p:sp>
         <p:nvSpPr>
-          <p:cNvPr id="30" name="Shape 28"/>
+          <p:cNvPr id="33" name="Shape 31"/>
           <p:cNvSpPr/>
           <p:nvPr/>
         </p:nvSpPr>
@@ -25159,7 +25002,7 @@
       </p:sp>
       <p:sp>
         <p:nvSpPr>
-          <p:cNvPr id="31" name="Text 29"/>
+          <p:cNvPr id="34" name="Text 32"/>
           <p:cNvSpPr/>
           <p:nvPr/>
         </p:nvSpPr>
@@ -25198,7 +25041,7 @@
       </p:sp>
       <p:sp>
         <p:nvSpPr>
-          <p:cNvPr id="32" name="Shape 30"/>
+          <p:cNvPr id="35" name="Shape 33"/>
           <p:cNvSpPr/>
           <p:nvPr/>
         </p:nvSpPr>
@@ -25225,7 +25068,7 @@
       </p:sp>
       <p:sp>
         <p:nvSpPr>
-          <p:cNvPr id="33" name="Text 31"/>
+          <p:cNvPr id="36" name="Text 34"/>
           <p:cNvSpPr/>
           <p:nvPr/>
         </p:nvSpPr>
@@ -25548,7 +25391,7 @@
                 <a:ea typeface="Calibri" pitchFamily="34" charset="-122"/>
                 <a:cs typeface="Calibri" pitchFamily="34" charset="-120"/>
               </a:rPr>
-              <a:t>Word Labs  •  wordlabs.app  •  Root: 'push' = to press or move forward</a:t>
+              <a:t>Word Labs  •  wordlabs.app  •  Root: 'push' = to press forward with force</a:t>
             </a:r>
             <a:endParaRPr lang="en-US" sz="800" dirty="0"/>
           </a:p>
@@ -25687,7 +25530,7 @@
                 <a:ea typeface="Trebuchet MS" pitchFamily="34" charset="-122"/>
                 <a:cs typeface="Trebuchet MS" pitchFamily="34" charset="-120"/>
               </a:rPr>
-              <a:t>pushchair</a:t>
+              <a:t>pushers</a:t>
             </a:r>
             <a:endParaRPr lang="en-US" sz="2800" dirty="0"/>
           </a:p>
@@ -25767,7 +25610,7 @@
         </p:nvSpPr>
         <p:spPr>
           <a:xfrm>
-            <a:off x="2938272" y="2258568"/>
+            <a:off x="2221992" y="2258568"/>
             <a:ext cx="1828800" cy="292608"/>
           </a:xfrm>
           <a:prstGeom prst="rect">
@@ -25801,7 +25644,7 @@
         </p:nvSpPr>
         <p:spPr>
           <a:xfrm>
-            <a:off x="2938272" y="2258568"/>
+            <a:off x="2221992" y="2258568"/>
             <a:ext cx="1828800" cy="292608"/>
           </a:xfrm>
           <a:prstGeom prst="rect">
@@ -25840,7 +25683,7 @@
         </p:nvSpPr>
         <p:spPr>
           <a:xfrm>
-            <a:off x="2938272" y="2569464"/>
+            <a:off x="2221992" y="2569464"/>
             <a:ext cx="1828800" cy="201168"/>
           </a:xfrm>
           <a:prstGeom prst="rect">
@@ -25865,7 +25708,7 @@
                 <a:ea typeface="Calibri" pitchFamily="34" charset="-122"/>
                 <a:cs typeface="Calibri" pitchFamily="34" charset="-120"/>
               </a:rPr>
-              <a:t>to press or move forward</a:t>
+              <a:t>to press forward with force</a:t>
             </a:r>
             <a:endParaRPr lang="en-US" sz="850" dirty="0"/>
           </a:p>
@@ -25879,7 +25722,7 @@
         </p:nvSpPr>
         <p:spPr>
           <a:xfrm>
-            <a:off x="5803392" y="2258568"/>
+            <a:off x="4370832" y="2258568"/>
             <a:ext cx="1828800" cy="292608"/>
           </a:xfrm>
           <a:prstGeom prst="rect">
@@ -25913,7 +25756,7 @@
         </p:nvSpPr>
         <p:spPr>
           <a:xfrm>
-            <a:off x="5803392" y="2258568"/>
+            <a:off x="4370832" y="2258568"/>
             <a:ext cx="1828800" cy="292608"/>
           </a:xfrm>
           <a:prstGeom prst="rect">
@@ -25938,7 +25781,7 @@
                 <a:ea typeface="Trebuchet MS" pitchFamily="34" charset="-122"/>
                 <a:cs typeface="Trebuchet MS" pitchFamily="34" charset="-120"/>
               </a:rPr>
-              <a:t>chair</a:t>
+              <a:t>er</a:t>
             </a:r>
             <a:endParaRPr lang="en-US" sz="1300" dirty="0"/>
           </a:p>
@@ -25952,7 +25795,7 @@
         </p:nvSpPr>
         <p:spPr>
           <a:xfrm>
-            <a:off x="5803392" y="2569464"/>
+            <a:off x="4370832" y="2569464"/>
             <a:ext cx="1828800" cy="201168"/>
           </a:xfrm>
           <a:prstGeom prst="rect">
@@ -25977,7 +25820,7 @@
                 <a:ea typeface="Calibri" pitchFamily="34" charset="-122"/>
                 <a:cs typeface="Calibri" pitchFamily="34" charset="-120"/>
               </a:rPr>
-              <a:t>a seat</a:t>
+              <a:t>person who; more</a:t>
             </a:r>
             <a:endParaRPr lang="en-US" sz="850" dirty="0"/>
           </a:p>
@@ -25986,6 +25829,118 @@
       <p:sp>
         <p:nvSpPr>
           <p:cNvPr id="22" name="Shape 20"/>
+          <p:cNvSpPr/>
+          <p:nvPr/>
+        </p:nvSpPr>
+        <p:spPr>
+          <a:xfrm>
+            <a:off x="6519672" y="2258568"/>
+            <a:ext cx="1828800" cy="292608"/>
+          </a:xfrm>
+          <a:prstGeom prst="rect">
+            <a:avLst>
+              <a:gd name="adj" fmla="val 25000"/>
+            </a:avLst>
+          </a:prstGeom>
+          <a:solidFill>
+            <a:srgbClr val="FCE7F3"/>
+          </a:solidFill>
+          <a:ln w="19050">
+            <a:solidFill>
+              <a:srgbClr val="DB2777"/>
+            </a:solidFill>
+            <a:prstDash val="solid"/>
+          </a:ln>
+          <a:effectLst>
+            <a:outerShdw sx="100000" sy="100000" kx="0" ky="0" algn="bl" rotWithShape="0" blurRad="101600" dist="38100" dir="8100000">
+              <a:srgbClr val="000000">
+                <a:alpha val="12000"/>
+              </a:srgbClr>
+            </a:outerShdw>
+          </a:effectLst>
+        </p:spPr>
+      </p:sp>
+      <p:sp>
+        <p:nvSpPr>
+          <p:cNvPr id="23" name="Text 21"/>
+          <p:cNvSpPr/>
+          <p:nvPr/>
+        </p:nvSpPr>
+        <p:spPr>
+          <a:xfrm>
+            <a:off x="6519672" y="2258568"/>
+            <a:ext cx="1828800" cy="292608"/>
+          </a:xfrm>
+          <a:prstGeom prst="rect">
+            <a:avLst/>
+          </a:prstGeom>
+          <a:noFill/>
+          <a:ln/>
+        </p:spPr>
+        <p:txBody>
+          <a:bodyPr wrap="square" lIns="0" tIns="0" rIns="0" bIns="0" rtlCol="0" anchor="ctr"/>
+          <a:lstStyle/>
+          <a:p>
+            <a:pPr algn="ctr" indent="0" marL="0">
+              <a:buNone/>
+            </a:pPr>
+            <a:r>
+              <a:rPr lang="en-US" sz="1300" b="1" dirty="0">
+                <a:solidFill>
+                  <a:srgbClr val="9D174D"/>
+                </a:solidFill>
+                <a:latin typeface="Trebuchet MS" pitchFamily="34" charset="0"/>
+                <a:ea typeface="Trebuchet MS" pitchFamily="34" charset="-122"/>
+                <a:cs typeface="Trebuchet MS" pitchFamily="34" charset="-120"/>
+              </a:rPr>
+              <a:t>s</a:t>
+            </a:r>
+            <a:endParaRPr lang="en-US" sz="1300" dirty="0"/>
+          </a:p>
+        </p:txBody>
+      </p:sp>
+      <p:sp>
+        <p:nvSpPr>
+          <p:cNvPr id="24" name="Text 22"/>
+          <p:cNvSpPr/>
+          <p:nvPr/>
+        </p:nvSpPr>
+        <p:spPr>
+          <a:xfrm>
+            <a:off x="6519672" y="2569464"/>
+            <a:ext cx="1828800" cy="201168"/>
+          </a:xfrm>
+          <a:prstGeom prst="rect">
+            <a:avLst/>
+          </a:prstGeom>
+          <a:noFill/>
+          <a:ln/>
+        </p:spPr>
+        <p:txBody>
+          <a:bodyPr wrap="square" lIns="0" tIns="0" rIns="0" bIns="0" rtlCol="0" anchor="t"/>
+          <a:lstStyle/>
+          <a:p>
+            <a:pPr algn="ctr" indent="0" marL="0">
+              <a:buNone/>
+            </a:pPr>
+            <a:r>
+              <a:rPr lang="en-US" sz="850" dirty="0">
+                <a:solidFill>
+                  <a:srgbClr val="475569"/>
+                </a:solidFill>
+                <a:latin typeface="Calibri" pitchFamily="34" charset="0"/>
+                <a:ea typeface="Calibri" pitchFamily="34" charset="-122"/>
+                <a:cs typeface="Calibri" pitchFamily="34" charset="-120"/>
+              </a:rPr>
+              <a:t>plural or present tense</a:t>
+            </a:r>
+            <a:endParaRPr lang="en-US" sz="850" dirty="0"/>
+          </a:p>
+        </p:txBody>
+      </p:sp>
+      <p:sp>
+        <p:nvSpPr>
+          <p:cNvPr id="25" name="Shape 23"/>
           <p:cNvSpPr/>
           <p:nvPr/>
         </p:nvSpPr>
@@ -26012,7 +25967,7 @@
       </p:sp>
       <p:sp>
         <p:nvSpPr>
-          <p:cNvPr id="23" name="Text 21"/>
+          <p:cNvPr id="26" name="Text 24"/>
           <p:cNvSpPr/>
           <p:nvPr/>
         </p:nvSpPr>
@@ -26051,7 +26006,7 @@
       </p:sp>
       <p:sp>
         <p:nvSpPr>
-          <p:cNvPr id="24" name="Shape 22"/>
+          <p:cNvPr id="27" name="Shape 25"/>
           <p:cNvSpPr/>
           <p:nvPr/>
         </p:nvSpPr>
@@ -26078,7 +26033,7 @@
       </p:sp>
       <p:sp>
         <p:nvSpPr>
-          <p:cNvPr id="25" name="Shape 23"/>
+          <p:cNvPr id="28" name="Shape 26"/>
           <p:cNvSpPr/>
           <p:nvPr/>
         </p:nvSpPr>
@@ -26105,7 +26060,7 @@
       </p:sp>
       <p:sp>
         <p:nvSpPr>
-          <p:cNvPr id="26" name="Text 24"/>
+          <p:cNvPr id="29" name="Text 27"/>
           <p:cNvSpPr/>
           <p:nvPr/>
         </p:nvSpPr>
@@ -26144,7 +26099,7 @@
       </p:sp>
       <p:sp>
         <p:nvSpPr>
-          <p:cNvPr id="27" name="Text 25"/>
+          <p:cNvPr id="30" name="Text 28"/>
           <p:cNvSpPr/>
           <p:nvPr/>
         </p:nvSpPr>
@@ -26183,7 +26138,7 @@
       </p:sp>
       <p:sp>
         <p:nvSpPr>
-          <p:cNvPr id="28" name="Shape 26"/>
+          <p:cNvPr id="31" name="Shape 29"/>
           <p:cNvSpPr/>
           <p:nvPr/>
         </p:nvSpPr>
@@ -26210,7 +26165,7 @@
       </p:sp>
       <p:sp>
         <p:nvSpPr>
-          <p:cNvPr id="29" name="Text 27"/>
+          <p:cNvPr id="32" name="Text 30"/>
           <p:cNvSpPr/>
           <p:nvPr/>
         </p:nvSpPr>
@@ -26241,7 +26196,7 @@
                 <a:ea typeface="Trebuchet MS" pitchFamily="34" charset="-122"/>
                 <a:cs typeface="Trebuchet MS" pitchFamily="34" charset="-120"/>
               </a:rPr>
-              <a:t>chair</a:t>
+              <a:t>ers</a:t>
             </a:r>
             <a:endParaRPr lang="en-US" sz="1400" dirty="0"/>
           </a:p>
@@ -26249,7 +26204,7 @@
       </p:sp>
       <p:sp>
         <p:nvSpPr>
-          <p:cNvPr id="30" name="Shape 28"/>
+          <p:cNvPr id="33" name="Shape 31"/>
           <p:cNvSpPr/>
           <p:nvPr/>
         </p:nvSpPr>
@@ -26276,7 +26231,7 @@
       </p:sp>
       <p:sp>
         <p:nvSpPr>
-          <p:cNvPr id="31" name="Text 29"/>
+          <p:cNvPr id="34" name="Text 32"/>
           <p:cNvSpPr/>
           <p:nvPr/>
         </p:nvSpPr>
@@ -26315,7 +26270,7 @@
       </p:sp>
       <p:sp>
         <p:nvSpPr>
-          <p:cNvPr id="32" name="Shape 30"/>
+          <p:cNvPr id="35" name="Shape 33"/>
           <p:cNvSpPr/>
           <p:nvPr/>
         </p:nvSpPr>
@@ -26342,7 +26297,7 @@
       </p:sp>
       <p:sp>
         <p:nvSpPr>
-          <p:cNvPr id="33" name="Shape 31"/>
+          <p:cNvPr id="36" name="Shape 34"/>
           <p:cNvSpPr/>
           <p:nvPr/>
         </p:nvSpPr>
@@ -26369,7 +26324,7 @@
       </p:sp>
       <p:sp>
         <p:nvSpPr>
-          <p:cNvPr id="34" name="Text 32"/>
+          <p:cNvPr id="37" name="Text 35"/>
           <p:cNvSpPr/>
           <p:nvPr/>
         </p:nvSpPr>
@@ -26408,7 +26363,7 @@
       </p:sp>
       <p:sp>
         <p:nvSpPr>
-          <p:cNvPr id="35" name="Shape 33"/>
+          <p:cNvPr id="38" name="Shape 36"/>
           <p:cNvSpPr/>
           <p:nvPr/>
         </p:nvSpPr>
@@ -26435,7 +26390,7 @@
       </p:sp>
       <p:sp>
         <p:nvSpPr>
-          <p:cNvPr id="36" name="Text 34"/>
+          <p:cNvPr id="39" name="Text 37"/>
           <p:cNvSpPr/>
           <p:nvPr/>
         </p:nvSpPr>
@@ -26474,7 +26429,7 @@
       </p:sp>
       <p:sp>
         <p:nvSpPr>
-          <p:cNvPr id="37" name="Shape 35"/>
+          <p:cNvPr id="40" name="Shape 38"/>
           <p:cNvSpPr/>
           <p:nvPr/>
         </p:nvSpPr>
@@ -26501,7 +26456,7 @@
       </p:sp>
       <p:sp>
         <p:nvSpPr>
-          <p:cNvPr id="38" name="Text 36"/>
+          <p:cNvPr id="41" name="Text 39"/>
           <p:cNvSpPr/>
           <p:nvPr/>
         </p:nvSpPr>
@@ -26540,7 +26495,7 @@
       </p:sp>
       <p:sp>
         <p:nvSpPr>
-          <p:cNvPr id="39" name="Shape 37"/>
+          <p:cNvPr id="42" name="Shape 40"/>
           <p:cNvSpPr/>
           <p:nvPr/>
         </p:nvSpPr>
@@ -26567,7 +26522,7 @@
       </p:sp>
       <p:sp>
         <p:nvSpPr>
-          <p:cNvPr id="40" name="Text 38"/>
+          <p:cNvPr id="43" name="Text 41"/>
           <p:cNvSpPr/>
           <p:nvPr/>
         </p:nvSpPr>
@@ -26598,7 +26553,7 @@
                 <a:ea typeface="Trebuchet MS" pitchFamily="34" charset="-122"/>
                 <a:cs typeface="Trebuchet MS" pitchFamily="34" charset="-120"/>
               </a:rPr>
-              <a:t>ch</a:t>
+              <a:t>er</a:t>
             </a:r>
             <a:endParaRPr lang="en-US" sz="900" dirty="0"/>
           </a:p>
@@ -26606,7 +26561,7 @@
       </p:sp>
       <p:sp>
         <p:nvSpPr>
-          <p:cNvPr id="41" name="Shape 39"/>
+          <p:cNvPr id="44" name="Shape 42"/>
           <p:cNvSpPr/>
           <p:nvPr/>
         </p:nvSpPr>
@@ -26633,7 +26588,7 @@
       </p:sp>
       <p:sp>
         <p:nvSpPr>
-          <p:cNvPr id="42" name="Text 40"/>
+          <p:cNvPr id="45" name="Text 43"/>
           <p:cNvSpPr/>
           <p:nvPr/>
         </p:nvSpPr>
@@ -26664,7 +26619,7 @@
                 <a:ea typeface="Trebuchet MS" pitchFamily="34" charset="-122"/>
                 <a:cs typeface="Trebuchet MS" pitchFamily="34" charset="-120"/>
               </a:rPr>
-              <a:t>air</a:t>
+              <a:t>s</a:t>
             </a:r>
             <a:endParaRPr lang="en-US" sz="900" dirty="0"/>
           </a:p>
@@ -26956,7 +26911,7 @@
                 <a:ea typeface="Calibri" pitchFamily="34" charset="-122"/>
                 <a:cs typeface="Calibri" pitchFamily="34" charset="-120"/>
               </a:rPr>
-              <a:t>Word Labs  •  wordlabs.app  •  Root: 'push' = to press or move forward</a:t>
+              <a:t>Word Labs  •  wordlabs.app  •  Root: 'push' = to press forward with force</a:t>
             </a:r>
             <a:endParaRPr lang="en-US" sz="800" dirty="0"/>
           </a:p>
@@ -27095,7 +27050,7 @@
                 <a:ea typeface="Trebuchet MS" pitchFamily="34" charset="-122"/>
                 <a:cs typeface="Trebuchet MS" pitchFamily="34" charset="-120"/>
               </a:rPr>
-              <a:t>pusher</a:t>
+              <a:t>pushing</a:t>
             </a:r>
             <a:endParaRPr lang="en-US" sz="2800" dirty="0"/>
           </a:p>
@@ -27783,7 +27738,7 @@
                 <a:ea typeface="Calibri" pitchFamily="34" charset="-122"/>
                 <a:cs typeface="Calibri" pitchFamily="34" charset="-120"/>
               </a:rPr>
-              <a:t>Word Labs  •  wordlabs.app  •  Root: 'push' = to press or move forward</a:t>
+              <a:t>Word Labs  •  wordlabs.app  •  Root: 'push' = to press forward with force</a:t>
             </a:r>
             <a:endParaRPr lang="en-US" sz="800" dirty="0"/>
           </a:p>
@@ -27922,7 +27877,7 @@
                 <a:ea typeface="Trebuchet MS" pitchFamily="34" charset="-122"/>
                 <a:cs typeface="Trebuchet MS" pitchFamily="34" charset="-120"/>
               </a:rPr>
-              <a:t>pusher</a:t>
+              <a:t>pushing</a:t>
             </a:r>
             <a:endParaRPr lang="en-US" sz="2800" dirty="0"/>
           </a:p>
@@ -28100,7 +28055,7 @@
                 <a:ea typeface="Calibri" pitchFamily="34" charset="-122"/>
                 <a:cs typeface="Calibri" pitchFamily="34" charset="-120"/>
               </a:rPr>
-              <a:t>to press or move forward</a:t>
+              <a:t>to press forward with force</a:t>
             </a:r>
             <a:endParaRPr lang="en-US" sz="850" dirty="0"/>
           </a:p>
@@ -28173,7 +28128,7 @@
                 <a:ea typeface="Trebuchet MS" pitchFamily="34" charset="-122"/>
                 <a:cs typeface="Trebuchet MS" pitchFamily="34" charset="-120"/>
               </a:rPr>
-              <a:t>er</a:t>
+              <a:t>ing</a:t>
             </a:r>
             <a:endParaRPr lang="en-US" sz="1300" dirty="0"/>
           </a:p>
@@ -28212,7 +28167,7 @@
                 <a:ea typeface="Calibri" pitchFamily="34" charset="-122"/>
                 <a:cs typeface="Calibri" pitchFamily="34" charset="-120"/>
               </a:rPr>
-              <a:t>a person or thing that does something</a:t>
+              <a:t>happening now</a:t>
             </a:r>
             <a:endParaRPr lang="en-US" sz="850" dirty="0"/>
           </a:p>
@@ -28768,7 +28723,7 @@
                 <a:ea typeface="Calibri" pitchFamily="34" charset="-122"/>
                 <a:cs typeface="Calibri" pitchFamily="34" charset="-120"/>
               </a:rPr>
-              <a:t>Word Labs  •  wordlabs.app  •  Root: 'push' = to press or move forward</a:t>
+              <a:t>Word Labs  •  wordlabs.app  •  Root: 'push' = to press forward with force</a:t>
             </a:r>
             <a:endParaRPr lang="en-US" sz="800" dirty="0"/>
           </a:p>
@@ -28907,7 +28862,7 @@
                 <a:ea typeface="Trebuchet MS" pitchFamily="34" charset="-122"/>
                 <a:cs typeface="Trebuchet MS" pitchFamily="34" charset="-120"/>
               </a:rPr>
-              <a:t>pusher</a:t>
+              <a:t>pushing</a:t>
             </a:r>
             <a:endParaRPr lang="en-US" sz="2800" dirty="0"/>
           </a:p>
@@ -29085,7 +29040,7 @@
                 <a:ea typeface="Calibri" pitchFamily="34" charset="-122"/>
                 <a:cs typeface="Calibri" pitchFamily="34" charset="-120"/>
               </a:rPr>
-              <a:t>to press or move forward</a:t>
+              <a:t>to press forward with force</a:t>
             </a:r>
             <a:endParaRPr lang="en-US" sz="850" dirty="0"/>
           </a:p>
@@ -29158,7 +29113,7 @@
                 <a:ea typeface="Trebuchet MS" pitchFamily="34" charset="-122"/>
                 <a:cs typeface="Trebuchet MS" pitchFamily="34" charset="-120"/>
               </a:rPr>
-              <a:t>er</a:t>
+              <a:t>ing</a:t>
             </a:r>
             <a:endParaRPr lang="en-US" sz="1300" dirty="0"/>
           </a:p>
@@ -29197,7 +29152,7 @@
                 <a:ea typeface="Calibri" pitchFamily="34" charset="-122"/>
                 <a:cs typeface="Calibri" pitchFamily="34" charset="-120"/>
               </a:rPr>
-              <a:t>a person or thing that does something</a:t>
+              <a:t>happening now</a:t>
             </a:r>
             <a:endParaRPr lang="en-US" sz="850" dirty="0"/>
           </a:p>
@@ -29461,7 +29416,7 @@
                 <a:ea typeface="Trebuchet MS" pitchFamily="34" charset="-122"/>
                 <a:cs typeface="Trebuchet MS" pitchFamily="34" charset="-120"/>
               </a:rPr>
-              <a:t>er</a:t>
+              <a:t>ing</a:t>
             </a:r>
             <a:endParaRPr lang="en-US" sz="1400" dirty="0"/>
           </a:p>
@@ -29885,7 +29840,7 @@
                 <a:ea typeface="Calibri" pitchFamily="34" charset="-122"/>
                 <a:cs typeface="Calibri" pitchFamily="34" charset="-120"/>
               </a:rPr>
-              <a:t>Word Labs  •  wordlabs.app  •  Root: 'push' = to press or move forward</a:t>
+              <a:t>Word Labs  •  wordlabs.app  •  Root: 'push' = to press forward with force</a:t>
             </a:r>
             <a:endParaRPr lang="en-US" sz="800" dirty="0"/>
           </a:p>
@@ -30024,7 +29979,7 @@
                 <a:ea typeface="Trebuchet MS" pitchFamily="34" charset="-122"/>
                 <a:cs typeface="Trebuchet MS" pitchFamily="34" charset="-120"/>
               </a:rPr>
-              <a:t>pusher</a:t>
+              <a:t>pushing</a:t>
             </a:r>
             <a:endParaRPr lang="en-US" sz="2800" dirty="0"/>
           </a:p>
@@ -30202,7 +30157,7 @@
                 <a:ea typeface="Calibri" pitchFamily="34" charset="-122"/>
                 <a:cs typeface="Calibri" pitchFamily="34" charset="-120"/>
               </a:rPr>
-              <a:t>to press or move forward</a:t>
+              <a:t>to press forward with force</a:t>
             </a:r>
             <a:endParaRPr lang="en-US" sz="850" dirty="0"/>
           </a:p>
@@ -30275,7 +30230,7 @@
                 <a:ea typeface="Trebuchet MS" pitchFamily="34" charset="-122"/>
                 <a:cs typeface="Trebuchet MS" pitchFamily="34" charset="-120"/>
               </a:rPr>
-              <a:t>er</a:t>
+              <a:t>ing</a:t>
             </a:r>
             <a:endParaRPr lang="en-US" sz="1300" dirty="0"/>
           </a:p>
@@ -30314,7 +30269,7 @@
                 <a:ea typeface="Calibri" pitchFamily="34" charset="-122"/>
                 <a:cs typeface="Calibri" pitchFamily="34" charset="-120"/>
               </a:rPr>
-              <a:t>a person or thing that does something</a:t>
+              <a:t>happening now</a:t>
             </a:r>
             <a:endParaRPr lang="en-US" sz="850" dirty="0"/>
           </a:p>
@@ -30578,7 +30533,7 @@
                 <a:ea typeface="Trebuchet MS" pitchFamily="34" charset="-122"/>
                 <a:cs typeface="Trebuchet MS" pitchFamily="34" charset="-120"/>
               </a:rPr>
-              <a:t>er</a:t>
+              <a:t>ing</a:t>
             </a:r>
             <a:endParaRPr lang="en-US" sz="1400" dirty="0"/>
           </a:p>
@@ -30685,7 +30640,7 @@
         </p:nvSpPr>
         <p:spPr>
           <a:xfrm>
-            <a:off x="2670048" y="4169664"/>
+            <a:off x="2427732" y="4169664"/>
             <a:ext cx="685800" cy="475488"/>
           </a:xfrm>
           <a:prstGeom prst="rect">
@@ -30712,7 +30667,7 @@
         </p:nvSpPr>
         <p:spPr>
           <a:xfrm>
-            <a:off x="2670048" y="4169664"/>
+            <a:off x="2427732" y="4169664"/>
             <a:ext cx="685800" cy="475488"/>
           </a:xfrm>
           <a:prstGeom prst="rect">
@@ -30751,7 +30706,7 @@
         </p:nvSpPr>
         <p:spPr>
           <a:xfrm>
-            <a:off x="4123944" y="4169664"/>
+            <a:off x="3639312" y="4169664"/>
             <a:ext cx="685800" cy="475488"/>
           </a:xfrm>
           <a:prstGeom prst="rect">
@@ -30778,7 +30733,7 @@
         </p:nvSpPr>
         <p:spPr>
           <a:xfrm>
-            <a:off x="4123944" y="4169664"/>
+            <a:off x="3639312" y="4169664"/>
             <a:ext cx="685800" cy="475488"/>
           </a:xfrm>
           <a:prstGeom prst="rect">
@@ -30817,7 +30772,7 @@
         </p:nvSpPr>
         <p:spPr>
           <a:xfrm>
-            <a:off x="5577840" y="4169664"/>
+            <a:off x="4850892" y="4169664"/>
             <a:ext cx="685800" cy="475488"/>
           </a:xfrm>
           <a:prstGeom prst="rect">
@@ -30844,7 +30799,7 @@
         </p:nvSpPr>
         <p:spPr>
           <a:xfrm>
-            <a:off x="5577840" y="4169664"/>
+            <a:off x="4850892" y="4169664"/>
             <a:ext cx="685800" cy="475488"/>
           </a:xfrm>
           <a:prstGeom prst="rect">
@@ -30883,7 +30838,7 @@
         </p:nvSpPr>
         <p:spPr>
           <a:xfrm>
-            <a:off x="7031736" y="4169664"/>
+            <a:off x="6062472" y="4169664"/>
             <a:ext cx="685800" cy="475488"/>
           </a:xfrm>
           <a:prstGeom prst="rect">
@@ -30910,7 +30865,7 @@
         </p:nvSpPr>
         <p:spPr>
           <a:xfrm>
-            <a:off x="7031736" y="4169664"/>
+            <a:off x="6062472" y="4169664"/>
             <a:ext cx="685800" cy="475488"/>
           </a:xfrm>
           <a:prstGeom prst="rect">
@@ -30935,7 +30890,73 @@
                 <a:ea typeface="Trebuchet MS" pitchFamily="34" charset="-122"/>
                 <a:cs typeface="Trebuchet MS" pitchFamily="34" charset="-120"/>
               </a:rPr>
-              <a:t>er</a:t>
+              <a:t>i</a:t>
+            </a:r>
+            <a:endParaRPr lang="en-US" sz="900" dirty="0"/>
+          </a:p>
+        </p:txBody>
+      </p:sp>
+      <p:sp>
+        <p:nvSpPr>
+          <p:cNvPr id="41" name="Shape 39"/>
+          <p:cNvSpPr/>
+          <p:nvPr/>
+        </p:nvSpPr>
+        <p:spPr>
+          <a:xfrm>
+            <a:off x="7274052" y="4169664"/>
+            <a:ext cx="685800" cy="475488"/>
+          </a:xfrm>
+          <a:prstGeom prst="rect">
+            <a:avLst>
+              <a:gd name="adj" fmla="val 7692"/>
+            </a:avLst>
+          </a:prstGeom>
+          <a:solidFill>
+            <a:srgbClr val="FFFFFF"/>
+          </a:solidFill>
+          <a:ln w="12700">
+            <a:solidFill>
+              <a:srgbClr val="DB2777"/>
+            </a:solidFill>
+            <a:prstDash val="solid"/>
+          </a:ln>
+        </p:spPr>
+      </p:sp>
+      <p:sp>
+        <p:nvSpPr>
+          <p:cNvPr id="42" name="Text 40"/>
+          <p:cNvSpPr/>
+          <p:nvPr/>
+        </p:nvSpPr>
+        <p:spPr>
+          <a:xfrm>
+            <a:off x="7274052" y="4169664"/>
+            <a:ext cx="685800" cy="475488"/>
+          </a:xfrm>
+          <a:prstGeom prst="rect">
+            <a:avLst/>
+          </a:prstGeom>
+          <a:noFill/>
+          <a:ln/>
+        </p:spPr>
+        <p:txBody>
+          <a:bodyPr wrap="square" lIns="0" tIns="0" rIns="0" bIns="0" rtlCol="0" anchor="ctr"/>
+          <a:lstStyle/>
+          <a:p>
+            <a:pPr algn="ctr" indent="0" marL="0">
+              <a:buNone/>
+            </a:pPr>
+            <a:r>
+              <a:rPr lang="en-US" sz="900" b="1" dirty="0">
+                <a:solidFill>
+                  <a:srgbClr val="9D174D"/>
+                </a:solidFill>
+                <a:latin typeface="Trebuchet MS" pitchFamily="34" charset="0"/>
+                <a:ea typeface="Trebuchet MS" pitchFamily="34" charset="-122"/>
+                <a:cs typeface="Trebuchet MS" pitchFamily="34" charset="-120"/>
+              </a:rPr>
+              <a:t>ng</a:t>
             </a:r>
             <a:endParaRPr lang="en-US" sz="900" dirty="0"/>
           </a:p>
@@ -31227,7 +31248,7 @@
                 <a:ea typeface="Calibri" pitchFamily="34" charset="-122"/>
                 <a:cs typeface="Calibri" pitchFamily="34" charset="-120"/>
               </a:rPr>
-              <a:t>Word Labs  •  wordlabs.app  •  Root: 'push' = to press or move forward</a:t>
+              <a:t>Word Labs  •  wordlabs.app  •  Root: 'push' = to press forward with force</a:t>
             </a:r>
             <a:endParaRPr lang="en-US" sz="800" dirty="0"/>
           </a:p>
@@ -32396,7 +32417,7 @@
                 <a:ea typeface="Calibri" pitchFamily="34" charset="-122"/>
                 <a:cs typeface="Calibri" pitchFamily="34" charset="-120"/>
               </a:rPr>
-              <a:t>Word Labs  •  wordlabs.app  •  Root: 'push' = to press or move forward</a:t>
+              <a:t>Word Labs  •  wordlabs.app  •  Root: 'push' = to press forward with force</a:t>
             </a:r>
             <a:endParaRPr lang="en-US" sz="800" dirty="0"/>
           </a:p>
@@ -32654,7 +32675,7 @@
             <a:avLst/>
           </a:prstGeom>
           <a:solidFill>
-            <a:srgbClr val="DDD6FE"/>
+            <a:srgbClr val="F8FAFC"/>
           </a:solidFill>
           <a:ln w="12700">
             <a:solidFill>
@@ -32666,14 +32687,39 @@
       </p:sp>
       <p:sp>
         <p:nvSpPr>
-          <p:cNvPr id="18" name="Text 16"/>
-          <p:cNvSpPr/>
-          <p:nvPr/>
-        </p:nvSpPr>
-        <p:spPr>
-          <a:xfrm>
-            <a:off x="365760" y="1563624"/>
-            <a:ext cx="2468880" cy="402336"/>
+          <p:cNvPr id="18" name="Shape 16"/>
+          <p:cNvSpPr/>
+          <p:nvPr/>
+        </p:nvSpPr>
+        <p:spPr>
+          <a:xfrm>
+            <a:off x="2971800" y="1563624"/>
+            <a:ext cx="2834640" cy="402336"/>
+          </a:xfrm>
+          <a:prstGeom prst="rect">
+            <a:avLst/>
+          </a:prstGeom>
+          <a:solidFill>
+            <a:srgbClr val="CCFBF1"/>
+          </a:solidFill>
+          <a:ln w="12700">
+            <a:solidFill>
+              <a:srgbClr val="E2E8F0"/>
+            </a:solidFill>
+            <a:prstDash val="solid"/>
+          </a:ln>
+        </p:spPr>
+      </p:sp>
+      <p:sp>
+        <p:nvSpPr>
+          <p:cNvPr id="19" name="Text 17"/>
+          <p:cNvSpPr/>
+          <p:nvPr/>
+        </p:nvSpPr>
+        <p:spPr>
+          <a:xfrm>
+            <a:off x="2971800" y="1563624"/>
+            <a:ext cx="2834640" cy="402336"/>
           </a:xfrm>
           <a:prstGeom prst="rect">
             <a:avLst/>
@@ -32691,13 +32737,13 @@
             <a:r>
               <a:rPr lang="en-US" sz="1300" b="1" dirty="0">
                 <a:solidFill>
-                  <a:srgbClr val="4C1D95"/>
+                  <a:srgbClr val="0F766E"/>
                 </a:solidFill>
                 <a:latin typeface="Trebuchet MS" pitchFamily="34" charset="0"/>
                 <a:ea typeface="Trebuchet MS" pitchFamily="34" charset="-122"/>
                 <a:cs typeface="Trebuchet MS" pitchFamily="34" charset="-120"/>
               </a:rPr>
-              <a:t>out-</a:t>
+              <a:t>push</a:t>
             </a:r>
             <a:endParaRPr lang="en-US" sz="1300" dirty="0"/>
           </a:p>
@@ -32705,20 +32751,20 @@
       </p:sp>
       <p:sp>
         <p:nvSpPr>
-          <p:cNvPr id="19" name="Shape 17"/>
-          <p:cNvSpPr/>
-          <p:nvPr/>
-        </p:nvSpPr>
-        <p:spPr>
-          <a:xfrm>
-            <a:off x="2971800" y="1563624"/>
+          <p:cNvPr id="20" name="Shape 18"/>
+          <p:cNvSpPr/>
+          <p:nvPr/>
+        </p:nvSpPr>
+        <p:spPr>
+          <a:xfrm>
+            <a:off x="5943600" y="1563624"/>
             <a:ext cx="2834640" cy="402336"/>
           </a:xfrm>
           <a:prstGeom prst="rect">
             <a:avLst/>
           </a:prstGeom>
           <a:solidFill>
-            <a:srgbClr val="CCFBF1"/>
+            <a:srgbClr val="FCE7F3"/>
           </a:solidFill>
           <a:ln w="12700">
             <a:solidFill>
@@ -32730,13 +32776,13 @@
       </p:sp>
       <p:sp>
         <p:nvSpPr>
-          <p:cNvPr id="20" name="Text 18"/>
-          <p:cNvSpPr/>
-          <p:nvPr/>
-        </p:nvSpPr>
-        <p:spPr>
-          <a:xfrm>
-            <a:off x="2971800" y="1563624"/>
+          <p:cNvPr id="21" name="Text 19"/>
+          <p:cNvSpPr/>
+          <p:nvPr/>
+        </p:nvSpPr>
+        <p:spPr>
+          <a:xfrm>
+            <a:off x="5943600" y="1563624"/>
             <a:ext cx="2834640" cy="402336"/>
           </a:xfrm>
           <a:prstGeom prst="rect">
@@ -32755,13 +32801,13 @@
             <a:r>
               <a:rPr lang="en-US" sz="1300" b="1" dirty="0">
                 <a:solidFill>
-                  <a:srgbClr val="0F766E"/>
+                  <a:srgbClr val="9D174D"/>
                 </a:solidFill>
                 <a:latin typeface="Trebuchet MS" pitchFamily="34" charset="0"/>
                 <a:ea typeface="Trebuchet MS" pitchFamily="34" charset="-122"/>
                 <a:cs typeface="Trebuchet MS" pitchFamily="34" charset="-120"/>
               </a:rPr>
-              <a:t>push</a:t>
+              <a:t>-ed</a:t>
             </a:r>
             <a:endParaRPr lang="en-US" sz="1300" dirty="0"/>
           </a:p>
@@ -32769,19 +32815,69 @@
       </p:sp>
       <p:sp>
         <p:nvSpPr>
-          <p:cNvPr id="21" name="Shape 19"/>
-          <p:cNvSpPr/>
-          <p:nvPr/>
-        </p:nvSpPr>
-        <p:spPr>
-          <a:xfrm>
-            <a:off x="5943600" y="1563624"/>
+          <p:cNvPr id="22" name="Shape 20"/>
+          <p:cNvSpPr/>
+          <p:nvPr/>
+        </p:nvSpPr>
+        <p:spPr>
+          <a:xfrm>
+            <a:off x="365760" y="1984248"/>
+            <a:ext cx="2468880" cy="402336"/>
+          </a:xfrm>
+          <a:prstGeom prst="rect">
+            <a:avLst/>
+          </a:prstGeom>
+          <a:solidFill>
+            <a:srgbClr val="F1F5F9"/>
+          </a:solidFill>
+          <a:ln w="12700">
+            <a:solidFill>
+              <a:srgbClr val="E2E8F0"/>
+            </a:solidFill>
+            <a:prstDash val="solid"/>
+          </a:ln>
+        </p:spPr>
+      </p:sp>
+      <p:sp>
+        <p:nvSpPr>
+          <p:cNvPr id="23" name="Shape 21"/>
+          <p:cNvSpPr/>
+          <p:nvPr/>
+        </p:nvSpPr>
+        <p:spPr>
+          <a:xfrm>
+            <a:off x="2971800" y="1984248"/>
             <a:ext cx="2834640" cy="402336"/>
           </a:xfrm>
           <a:prstGeom prst="rect">
             <a:avLst/>
           </a:prstGeom>
           <a:solidFill>
+            <a:srgbClr val="F1F5F9"/>
+          </a:solidFill>
+          <a:ln w="12700">
+            <a:solidFill>
+              <a:srgbClr val="E2E8F0"/>
+            </a:solidFill>
+            <a:prstDash val="solid"/>
+          </a:ln>
+        </p:spPr>
+      </p:sp>
+      <p:sp>
+        <p:nvSpPr>
+          <p:cNvPr id="24" name="Shape 22"/>
+          <p:cNvSpPr/>
+          <p:nvPr/>
+        </p:nvSpPr>
+        <p:spPr>
+          <a:xfrm>
+            <a:off x="5943600" y="1984248"/>
+            <a:ext cx="2834640" cy="402336"/>
+          </a:xfrm>
+          <a:prstGeom prst="rect">
+            <a:avLst/>
+          </a:prstGeom>
+          <a:solidFill>
             <a:srgbClr val="FCE7F3"/>
           </a:solidFill>
           <a:ln w="12700">
@@ -32794,13 +32890,13 @@
       </p:sp>
       <p:sp>
         <p:nvSpPr>
-          <p:cNvPr id="22" name="Text 20"/>
-          <p:cNvSpPr/>
-          <p:nvPr/>
-        </p:nvSpPr>
-        <p:spPr>
-          <a:xfrm>
-            <a:off x="5943600" y="1563624"/>
+          <p:cNvPr id="25" name="Text 23"/>
+          <p:cNvSpPr/>
+          <p:nvPr/>
+        </p:nvSpPr>
+        <p:spPr>
+          <a:xfrm>
+            <a:off x="5943600" y="1984248"/>
             <a:ext cx="2834640" cy="402336"/>
           </a:xfrm>
           <a:prstGeom prst="rect">
@@ -32825,7 +32921,7 @@
                 <a:ea typeface="Trebuchet MS" pitchFamily="34" charset="-122"/>
                 <a:cs typeface="Trebuchet MS" pitchFamily="34" charset="-120"/>
               </a:rPr>
-              <a:t>-ed</a:t>
+              <a:t>-er</a:t>
             </a:r>
             <a:endParaRPr lang="en-US" sz="1300" dirty="0"/>
           </a:p>
@@ -32833,20 +32929,20 @@
       </p:sp>
       <p:sp>
         <p:nvSpPr>
-          <p:cNvPr id="23" name="Shape 21"/>
-          <p:cNvSpPr/>
-          <p:nvPr/>
-        </p:nvSpPr>
-        <p:spPr>
-          <a:xfrm>
-            <a:off x="365760" y="1984248"/>
+          <p:cNvPr id="26" name="Shape 24"/>
+          <p:cNvSpPr/>
+          <p:nvPr/>
+        </p:nvSpPr>
+        <p:spPr>
+          <a:xfrm>
+            <a:off x="365760" y="2404872"/>
             <a:ext cx="2468880" cy="402336"/>
           </a:xfrm>
           <a:prstGeom prst="rect">
             <a:avLst/>
           </a:prstGeom>
           <a:solidFill>
-            <a:srgbClr val="DDD6FE"/>
+            <a:srgbClr val="F8FAFC"/>
           </a:solidFill>
           <a:ln w="12700">
             <a:solidFill>
@@ -32858,14 +32954,64 @@
       </p:sp>
       <p:sp>
         <p:nvSpPr>
-          <p:cNvPr id="24" name="Text 22"/>
-          <p:cNvSpPr/>
-          <p:nvPr/>
-        </p:nvSpPr>
-        <p:spPr>
-          <a:xfrm>
-            <a:off x="365760" y="1984248"/>
-            <a:ext cx="2468880" cy="402336"/>
+          <p:cNvPr id="27" name="Shape 25"/>
+          <p:cNvSpPr/>
+          <p:nvPr/>
+        </p:nvSpPr>
+        <p:spPr>
+          <a:xfrm>
+            <a:off x="2971800" y="2404872"/>
+            <a:ext cx="2834640" cy="402336"/>
+          </a:xfrm>
+          <a:prstGeom prst="rect">
+            <a:avLst/>
+          </a:prstGeom>
+          <a:solidFill>
+            <a:srgbClr val="F8FAFC"/>
+          </a:solidFill>
+          <a:ln w="12700">
+            <a:solidFill>
+              <a:srgbClr val="E2E8F0"/>
+            </a:solidFill>
+            <a:prstDash val="solid"/>
+          </a:ln>
+        </p:spPr>
+      </p:sp>
+      <p:sp>
+        <p:nvSpPr>
+          <p:cNvPr id="28" name="Shape 26"/>
+          <p:cNvSpPr/>
+          <p:nvPr/>
+        </p:nvSpPr>
+        <p:spPr>
+          <a:xfrm>
+            <a:off x="5943600" y="2404872"/>
+            <a:ext cx="2834640" cy="402336"/>
+          </a:xfrm>
+          <a:prstGeom prst="rect">
+            <a:avLst/>
+          </a:prstGeom>
+          <a:solidFill>
+            <a:srgbClr val="FCE7F3"/>
+          </a:solidFill>
+          <a:ln w="12700">
+            <a:solidFill>
+              <a:srgbClr val="E2E8F0"/>
+            </a:solidFill>
+            <a:prstDash val="solid"/>
+          </a:ln>
+        </p:spPr>
+      </p:sp>
+      <p:sp>
+        <p:nvSpPr>
+          <p:cNvPr id="29" name="Text 27"/>
+          <p:cNvSpPr/>
+          <p:nvPr/>
+        </p:nvSpPr>
+        <p:spPr>
+          <a:xfrm>
+            <a:off x="5943600" y="2404872"/>
+            <a:ext cx="2834640" cy="402336"/>
           </a:xfrm>
           <a:prstGeom prst="rect">
             <a:avLst/>
@@ -32883,13 +33029,13 @@
             <a:r>
               <a:rPr lang="en-US" sz="1300" b="1" dirty="0">
                 <a:solidFill>
-                  <a:srgbClr val="4C1D95"/>
+                  <a:srgbClr val="9D174D"/>
                 </a:solidFill>
                 <a:latin typeface="Trebuchet MS" pitchFamily="34" charset="0"/>
                 <a:ea typeface="Trebuchet MS" pitchFamily="34" charset="-122"/>
                 <a:cs typeface="Trebuchet MS" pitchFamily="34" charset="-120"/>
               </a:rPr>
-              <a:t>over-</a:t>
+              <a:t>-es</a:t>
             </a:r>
             <a:endParaRPr lang="en-US" sz="1300" dirty="0"/>
           </a:p>
@@ -32897,13 +33043,38 @@
       </p:sp>
       <p:sp>
         <p:nvSpPr>
-          <p:cNvPr id="25" name="Shape 23"/>
-          <p:cNvSpPr/>
-          <p:nvPr/>
-        </p:nvSpPr>
-        <p:spPr>
-          <a:xfrm>
-            <a:off x="2971800" y="1984248"/>
+          <p:cNvPr id="30" name="Shape 28"/>
+          <p:cNvSpPr/>
+          <p:nvPr/>
+        </p:nvSpPr>
+        <p:spPr>
+          <a:xfrm>
+            <a:off x="365760" y="2825496"/>
+            <a:ext cx="2468880" cy="402336"/>
+          </a:xfrm>
+          <a:prstGeom prst="rect">
+            <a:avLst/>
+          </a:prstGeom>
+          <a:solidFill>
+            <a:srgbClr val="F1F5F9"/>
+          </a:solidFill>
+          <a:ln w="12700">
+            <a:solidFill>
+              <a:srgbClr val="E2E8F0"/>
+            </a:solidFill>
+            <a:prstDash val="solid"/>
+          </a:ln>
+        </p:spPr>
+      </p:sp>
+      <p:sp>
+        <p:nvSpPr>
+          <p:cNvPr id="31" name="Shape 29"/>
+          <p:cNvSpPr/>
+          <p:nvPr/>
+        </p:nvSpPr>
+        <p:spPr>
+          <a:xfrm>
+            <a:off x="2971800" y="2825496"/>
             <a:ext cx="2834640" cy="402336"/>
           </a:xfrm>
           <a:prstGeom prst="rect">
@@ -32922,13 +33093,13 @@
       </p:sp>
       <p:sp>
         <p:nvSpPr>
-          <p:cNvPr id="26" name="Shape 24"/>
-          <p:cNvSpPr/>
-          <p:nvPr/>
-        </p:nvSpPr>
-        <p:spPr>
-          <a:xfrm>
-            <a:off x="5943600" y="1984248"/>
+          <p:cNvPr id="32" name="Shape 30"/>
+          <p:cNvSpPr/>
+          <p:nvPr/>
+        </p:nvSpPr>
+        <p:spPr>
+          <a:xfrm>
+            <a:off x="5943600" y="2825496"/>
             <a:ext cx="2834640" cy="402336"/>
           </a:xfrm>
           <a:prstGeom prst="rect">
@@ -32947,13 +33118,13 @@
       </p:sp>
       <p:sp>
         <p:nvSpPr>
-          <p:cNvPr id="27" name="Text 25"/>
-          <p:cNvSpPr/>
-          <p:nvPr/>
-        </p:nvSpPr>
-        <p:spPr>
-          <a:xfrm>
-            <a:off x="5943600" y="1984248"/>
+          <p:cNvPr id="33" name="Text 31"/>
+          <p:cNvSpPr/>
+          <p:nvPr/>
+        </p:nvSpPr>
+        <p:spPr>
+          <a:xfrm>
+            <a:off x="5943600" y="2825496"/>
             <a:ext cx="2834640" cy="402336"/>
           </a:xfrm>
           <a:prstGeom prst="rect">
@@ -32986,39 +33157,14 @@
       </p:sp>
       <p:sp>
         <p:nvSpPr>
-          <p:cNvPr id="28" name="Shape 26"/>
-          <p:cNvSpPr/>
-          <p:nvPr/>
-        </p:nvSpPr>
-        <p:spPr>
-          <a:xfrm>
-            <a:off x="365760" y="2404872"/>
-            <a:ext cx="2468880" cy="402336"/>
-          </a:xfrm>
-          <a:prstGeom prst="rect">
-            <a:avLst/>
-          </a:prstGeom>
-          <a:solidFill>
-            <a:srgbClr val="DDD6FE"/>
-          </a:solidFill>
-          <a:ln w="12700">
-            <a:solidFill>
-              <a:srgbClr val="E2E8F0"/>
-            </a:solidFill>
-            <a:prstDash val="solid"/>
-          </a:ln>
-        </p:spPr>
-      </p:sp>
-      <p:sp>
-        <p:nvSpPr>
-          <p:cNvPr id="29" name="Text 27"/>
-          <p:cNvSpPr/>
-          <p:nvPr/>
-        </p:nvSpPr>
-        <p:spPr>
-          <a:xfrm>
-            <a:off x="365760" y="2404872"/>
-            <a:ext cx="2468880" cy="402336"/>
+          <p:cNvPr id="34" name="Text 32"/>
+          <p:cNvSpPr/>
+          <p:nvPr/>
+        </p:nvSpPr>
+        <p:spPr>
+          <a:xfrm>
+            <a:off x="365760" y="3611880"/>
+            <a:ext cx="1828800" cy="347472"/>
           </a:xfrm>
           <a:prstGeom prst="rect">
             <a:avLst/>
@@ -33030,84 +33176,61 @@
           <a:bodyPr wrap="square" lIns="0" tIns="0" rIns="0" bIns="0" rtlCol="0" anchor="ctr"/>
           <a:lstStyle/>
           <a:p>
-            <a:pPr algn="ctr" indent="0" marL="0">
-              <a:buNone/>
-            </a:pPr>
-            <a:r>
-              <a:rPr lang="en-US" sz="1300" b="1" dirty="0">
-                <a:solidFill>
-                  <a:srgbClr val="4C1D95"/>
+            <a:pPr algn="l" indent="0" marL="0">
+              <a:buNone/>
+            </a:pPr>
+            <a:r>
+              <a:rPr lang="en-US" sz="1200" b="1" dirty="0">
+                <a:solidFill>
+                  <a:srgbClr val="0F172A"/>
                 </a:solidFill>
                 <a:latin typeface="Trebuchet MS" pitchFamily="34" charset="0"/>
                 <a:ea typeface="Trebuchet MS" pitchFamily="34" charset="-122"/>
                 <a:cs typeface="Trebuchet MS" pitchFamily="34" charset="-120"/>
               </a:rPr>
-              <a:t>up-</a:t>
-            </a:r>
-            <a:endParaRPr lang="en-US" sz="1300" dirty="0"/>
-          </a:p>
-        </p:txBody>
-      </p:sp>
-      <p:sp>
-        <p:nvSpPr>
-          <p:cNvPr id="30" name="Shape 28"/>
-          <p:cNvSpPr/>
-          <p:nvPr/>
-        </p:nvSpPr>
-        <p:spPr>
-          <a:xfrm>
-            <a:off x="2971800" y="2404872"/>
-            <a:ext cx="2834640" cy="402336"/>
-          </a:xfrm>
-          <a:prstGeom prst="rect">
-            <a:avLst/>
-          </a:prstGeom>
-          <a:solidFill>
-            <a:srgbClr val="F8FAFC"/>
-          </a:solidFill>
-          <a:ln w="12700">
-            <a:solidFill>
-              <a:srgbClr val="E2E8F0"/>
-            </a:solidFill>
-            <a:prstDash val="solid"/>
-          </a:ln>
-        </p:spPr>
-      </p:sp>
-      <p:sp>
-        <p:nvSpPr>
-          <p:cNvPr id="31" name="Shape 29"/>
-          <p:cNvSpPr/>
-          <p:nvPr/>
-        </p:nvSpPr>
-        <p:spPr>
-          <a:xfrm>
-            <a:off x="5943600" y="2404872"/>
-            <a:ext cx="2834640" cy="402336"/>
-          </a:xfrm>
-          <a:prstGeom prst="rect">
-            <a:avLst/>
-          </a:prstGeom>
-          <a:solidFill>
-            <a:srgbClr val="FCE7F3"/>
-          </a:solidFill>
-          <a:ln w="12700">
-            <a:solidFill>
-              <a:srgbClr val="E2E8F0"/>
-            </a:solidFill>
-            <a:prstDash val="solid"/>
-          </a:ln>
-        </p:spPr>
-      </p:sp>
-      <p:sp>
-        <p:nvSpPr>
-          <p:cNvPr id="32" name="Text 30"/>
-          <p:cNvSpPr/>
-          <p:nvPr/>
-        </p:nvSpPr>
-        <p:spPr>
-          <a:xfrm>
-            <a:off x="5943600" y="2404872"/>
-            <a:ext cx="2834640" cy="402336"/>
+              <a:t>Sample words:</a:t>
+            </a:r>
+            <a:endParaRPr lang="en-US" sz="1200" dirty="0"/>
+          </a:p>
+        </p:txBody>
+      </p:sp>
+      <p:sp>
+        <p:nvSpPr>
+          <p:cNvPr id="35" name="Shape 33"/>
+          <p:cNvSpPr/>
+          <p:nvPr/>
+        </p:nvSpPr>
+        <p:spPr>
+          <a:xfrm>
+            <a:off x="365760" y="4023360"/>
+            <a:ext cx="2011680" cy="402336"/>
+          </a:xfrm>
+          <a:prstGeom prst="rect">
+            <a:avLst>
+              <a:gd name="adj" fmla="val 13636"/>
+            </a:avLst>
+          </a:prstGeom>
+          <a:solidFill>
+            <a:srgbClr val="EEF2FF"/>
+          </a:solidFill>
+          <a:ln w="12700">
+            <a:solidFill>
+              <a:srgbClr val="6366F1"/>
+            </a:solidFill>
+            <a:prstDash val="solid"/>
+          </a:ln>
+        </p:spPr>
+      </p:sp>
+      <p:sp>
+        <p:nvSpPr>
+          <p:cNvPr id="36" name="Text 34"/>
+          <p:cNvSpPr/>
+          <p:nvPr/>
+        </p:nvSpPr>
+        <p:spPr>
+          <a:xfrm>
+            <a:off x="365760" y="4023360"/>
+            <a:ext cx="2011680" cy="402336"/>
           </a:xfrm>
           <a:prstGeom prst="rect">
             <a:avLst/>
@@ -33123,888 +33246,15 @@
               <a:buNone/>
             </a:pPr>
             <a:r>
-              <a:rPr lang="en-US" sz="1300" b="1" dirty="0">
-                <a:solidFill>
-                  <a:srgbClr val="9D174D"/>
+              <a:rPr lang="en-US" sz="1200" b="1" dirty="0">
+                <a:solidFill>
+                  <a:srgbClr val="4338CA"/>
                 </a:solidFill>
                 <a:latin typeface="Trebuchet MS" pitchFamily="34" charset="0"/>
                 <a:ea typeface="Trebuchet MS" pitchFamily="34" charset="-122"/>
                 <a:cs typeface="Trebuchet MS" pitchFamily="34" charset="-120"/>
               </a:rPr>
-              <a:t>-er</a:t>
-            </a:r>
-            <a:endParaRPr lang="en-US" sz="1300" dirty="0"/>
-          </a:p>
-        </p:txBody>
-      </p:sp>
-      <p:sp>
-        <p:nvSpPr>
-          <p:cNvPr id="33" name="Shape 31"/>
-          <p:cNvSpPr/>
-          <p:nvPr/>
-        </p:nvSpPr>
-        <p:spPr>
-          <a:xfrm>
-            <a:off x="365760" y="2825496"/>
-            <a:ext cx="2468880" cy="402336"/>
-          </a:xfrm>
-          <a:prstGeom prst="rect">
-            <a:avLst/>
-          </a:prstGeom>
-          <a:solidFill>
-            <a:srgbClr val="DDD6FE"/>
-          </a:solidFill>
-          <a:ln w="12700">
-            <a:solidFill>
-              <a:srgbClr val="E2E8F0"/>
-            </a:solidFill>
-            <a:prstDash val="solid"/>
-          </a:ln>
-        </p:spPr>
-      </p:sp>
-      <p:sp>
-        <p:nvSpPr>
-          <p:cNvPr id="34" name="Text 32"/>
-          <p:cNvSpPr/>
-          <p:nvPr/>
-        </p:nvSpPr>
-        <p:spPr>
-          <a:xfrm>
-            <a:off x="365760" y="2825496"/>
-            <a:ext cx="2468880" cy="402336"/>
-          </a:xfrm>
-          <a:prstGeom prst="rect">
-            <a:avLst/>
-          </a:prstGeom>
-          <a:noFill/>
-          <a:ln/>
-        </p:spPr>
-        <p:txBody>
-          <a:bodyPr wrap="square" lIns="0" tIns="0" rIns="0" bIns="0" rtlCol="0" anchor="ctr"/>
-          <a:lstStyle/>
-          <a:p>
-            <a:pPr algn="ctr" indent="0" marL="0">
-              <a:buNone/>
-            </a:pPr>
-            <a:r>
-              <a:rPr lang="en-US" sz="1300" b="1" dirty="0">
-                <a:solidFill>
-                  <a:srgbClr val="4C1D95"/>
-                </a:solidFill>
-                <a:latin typeface="Trebuchet MS" pitchFamily="34" charset="0"/>
-                <a:ea typeface="Trebuchet MS" pitchFamily="34" charset="-122"/>
-                <a:cs typeface="Trebuchet MS" pitchFamily="34" charset="-120"/>
-              </a:rPr>
-              <a:t>re-</a:t>
-            </a:r>
-            <a:endParaRPr lang="en-US" sz="1300" dirty="0"/>
-          </a:p>
-        </p:txBody>
-      </p:sp>
-      <p:sp>
-        <p:nvSpPr>
-          <p:cNvPr id="35" name="Shape 33"/>
-          <p:cNvSpPr/>
-          <p:nvPr/>
-        </p:nvSpPr>
-        <p:spPr>
-          <a:xfrm>
-            <a:off x="2971800" y="2825496"/>
-            <a:ext cx="2834640" cy="402336"/>
-          </a:xfrm>
-          <a:prstGeom prst="rect">
-            <a:avLst/>
-          </a:prstGeom>
-          <a:solidFill>
-            <a:srgbClr val="F1F5F9"/>
-          </a:solidFill>
-          <a:ln w="12700">
-            <a:solidFill>
-              <a:srgbClr val="E2E8F0"/>
-            </a:solidFill>
-            <a:prstDash val="solid"/>
-          </a:ln>
-        </p:spPr>
-      </p:sp>
-      <p:sp>
-        <p:nvSpPr>
-          <p:cNvPr id="36" name="Shape 34"/>
-          <p:cNvSpPr/>
-          <p:nvPr/>
-        </p:nvSpPr>
-        <p:spPr>
-          <a:xfrm>
-            <a:off x="5943600" y="2825496"/>
-            <a:ext cx="2834640" cy="402336"/>
-          </a:xfrm>
-          <a:prstGeom prst="rect">
-            <a:avLst/>
-          </a:prstGeom>
-          <a:solidFill>
-            <a:srgbClr val="FCE7F3"/>
-          </a:solidFill>
-          <a:ln w="12700">
-            <a:solidFill>
-              <a:srgbClr val="E2E8F0"/>
-            </a:solidFill>
-            <a:prstDash val="solid"/>
-          </a:ln>
-        </p:spPr>
-      </p:sp>
-      <p:sp>
-        <p:nvSpPr>
-          <p:cNvPr id="37" name="Text 35"/>
-          <p:cNvSpPr/>
-          <p:nvPr/>
-        </p:nvSpPr>
-        <p:spPr>
-          <a:xfrm>
-            <a:off x="5943600" y="2825496"/>
-            <a:ext cx="2834640" cy="402336"/>
-          </a:xfrm>
-          <a:prstGeom prst="rect">
-            <a:avLst/>
-          </a:prstGeom>
-          <a:noFill/>
-          <a:ln/>
-        </p:spPr>
-        <p:txBody>
-          <a:bodyPr wrap="square" lIns="0" tIns="0" rIns="0" bIns="0" rtlCol="0" anchor="ctr"/>
-          <a:lstStyle/>
-          <a:p>
-            <a:pPr algn="ctr" indent="0" marL="0">
-              <a:buNone/>
-            </a:pPr>
-            <a:r>
-              <a:rPr lang="en-US" sz="1300" b="1" dirty="0">
-                <a:solidFill>
-                  <a:srgbClr val="9D174D"/>
-                </a:solidFill>
-                <a:latin typeface="Trebuchet MS" pitchFamily="34" charset="0"/>
-                <a:ea typeface="Trebuchet MS" pitchFamily="34" charset="-122"/>
-                <a:cs typeface="Trebuchet MS" pitchFamily="34" charset="-120"/>
-              </a:rPr>
-              <a:t>-ers</a:t>
-            </a:r>
-            <a:endParaRPr lang="en-US" sz="1300" dirty="0"/>
-          </a:p>
-        </p:txBody>
-      </p:sp>
-      <p:sp>
-        <p:nvSpPr>
-          <p:cNvPr id="38" name="Shape 36"/>
-          <p:cNvSpPr/>
-          <p:nvPr/>
-        </p:nvSpPr>
-        <p:spPr>
-          <a:xfrm>
-            <a:off x="365760" y="3246120"/>
-            <a:ext cx="2468880" cy="402336"/>
-          </a:xfrm>
-          <a:prstGeom prst="rect">
-            <a:avLst/>
-          </a:prstGeom>
-          <a:solidFill>
-            <a:srgbClr val="DDD6FE"/>
-          </a:solidFill>
-          <a:ln w="12700">
-            <a:solidFill>
-              <a:srgbClr val="E2E8F0"/>
-            </a:solidFill>
-            <a:prstDash val="solid"/>
-          </a:ln>
-        </p:spPr>
-      </p:sp>
-      <p:sp>
-        <p:nvSpPr>
-          <p:cNvPr id="39" name="Text 37"/>
-          <p:cNvSpPr/>
-          <p:nvPr/>
-        </p:nvSpPr>
-        <p:spPr>
-          <a:xfrm>
-            <a:off x="365760" y="3246120"/>
-            <a:ext cx="2468880" cy="402336"/>
-          </a:xfrm>
-          <a:prstGeom prst="rect">
-            <a:avLst/>
-          </a:prstGeom>
-          <a:noFill/>
-          <a:ln/>
-        </p:spPr>
-        <p:txBody>
-          <a:bodyPr wrap="square" lIns="0" tIns="0" rIns="0" bIns="0" rtlCol="0" anchor="ctr"/>
-          <a:lstStyle/>
-          <a:p>
-            <a:pPr algn="ctr" indent="0" marL="0">
-              <a:buNone/>
-            </a:pPr>
-            <a:r>
-              <a:rPr lang="en-US" sz="1300" b="1" dirty="0">
-                <a:solidFill>
-                  <a:srgbClr val="4C1D95"/>
-                </a:solidFill>
-                <a:latin typeface="Trebuchet MS" pitchFamily="34" charset="0"/>
-                <a:ea typeface="Trebuchet MS" pitchFamily="34" charset="-122"/>
-                <a:cs typeface="Trebuchet MS" pitchFamily="34" charset="-120"/>
-              </a:rPr>
-              <a:t>hand-</a:t>
-            </a:r>
-            <a:endParaRPr lang="en-US" sz="1300" dirty="0"/>
-          </a:p>
-        </p:txBody>
-      </p:sp>
-      <p:sp>
-        <p:nvSpPr>
-          <p:cNvPr id="40" name="Shape 38"/>
-          <p:cNvSpPr/>
-          <p:nvPr/>
-        </p:nvSpPr>
-        <p:spPr>
-          <a:xfrm>
-            <a:off x="2971800" y="3246120"/>
-            <a:ext cx="2834640" cy="402336"/>
-          </a:xfrm>
-          <a:prstGeom prst="rect">
-            <a:avLst/>
-          </a:prstGeom>
-          <a:solidFill>
-            <a:srgbClr val="F8FAFC"/>
-          </a:solidFill>
-          <a:ln w="12700">
-            <a:solidFill>
-              <a:srgbClr val="E2E8F0"/>
-            </a:solidFill>
-            <a:prstDash val="solid"/>
-          </a:ln>
-        </p:spPr>
-      </p:sp>
-      <p:sp>
-        <p:nvSpPr>
-          <p:cNvPr id="41" name="Shape 39"/>
-          <p:cNvSpPr/>
-          <p:nvPr/>
-        </p:nvSpPr>
-        <p:spPr>
-          <a:xfrm>
-            <a:off x="5943600" y="3246120"/>
-            <a:ext cx="2834640" cy="402336"/>
-          </a:xfrm>
-          <a:prstGeom prst="rect">
-            <a:avLst/>
-          </a:prstGeom>
-          <a:solidFill>
-            <a:srgbClr val="FCE7F3"/>
-          </a:solidFill>
-          <a:ln w="12700">
-            <a:solidFill>
-              <a:srgbClr val="E2E8F0"/>
-            </a:solidFill>
-            <a:prstDash val="solid"/>
-          </a:ln>
-        </p:spPr>
-      </p:sp>
-      <p:sp>
-        <p:nvSpPr>
-          <p:cNvPr id="42" name="Text 40"/>
-          <p:cNvSpPr/>
-          <p:nvPr/>
-        </p:nvSpPr>
-        <p:spPr>
-          <a:xfrm>
-            <a:off x="5943600" y="3246120"/>
-            <a:ext cx="2834640" cy="402336"/>
-          </a:xfrm>
-          <a:prstGeom prst="rect">
-            <a:avLst/>
-          </a:prstGeom>
-          <a:noFill/>
-          <a:ln/>
-        </p:spPr>
-        <p:txBody>
-          <a:bodyPr wrap="square" lIns="0" tIns="0" rIns="0" bIns="0" rtlCol="0" anchor="ctr"/>
-          <a:lstStyle/>
-          <a:p>
-            <a:pPr algn="ctr" indent="0" marL="0">
-              <a:buNone/>
-            </a:pPr>
-            <a:r>
-              <a:rPr lang="en-US" sz="1300" b="1" dirty="0">
-                <a:solidFill>
-                  <a:srgbClr val="9D174D"/>
-                </a:solidFill>
-                <a:latin typeface="Trebuchet MS" pitchFamily="34" charset="0"/>
-                <a:ea typeface="Trebuchet MS" pitchFamily="34" charset="-122"/>
-                <a:cs typeface="Trebuchet MS" pitchFamily="34" charset="-120"/>
-              </a:rPr>
-              <a:t>-over</a:t>
-            </a:r>
-            <a:endParaRPr lang="en-US" sz="1300" dirty="0"/>
-          </a:p>
-        </p:txBody>
-      </p:sp>
-      <p:sp>
-        <p:nvSpPr>
-          <p:cNvPr id="43" name="Text 41"/>
-          <p:cNvSpPr/>
-          <p:nvPr/>
-        </p:nvSpPr>
-        <p:spPr>
-          <a:xfrm>
-            <a:off x="365760" y="3611880"/>
-            <a:ext cx="1828800" cy="347472"/>
-          </a:xfrm>
-          <a:prstGeom prst="rect">
-            <a:avLst/>
-          </a:prstGeom>
-          <a:noFill/>
-          <a:ln/>
-        </p:spPr>
-        <p:txBody>
-          <a:bodyPr wrap="square" lIns="0" tIns="0" rIns="0" bIns="0" rtlCol="0" anchor="ctr"/>
-          <a:lstStyle/>
-          <a:p>
-            <a:pPr algn="l" indent="0" marL="0">
-              <a:buNone/>
-            </a:pPr>
-            <a:r>
-              <a:rPr lang="en-US" sz="1200" b="1" dirty="0">
-                <a:solidFill>
-                  <a:srgbClr val="0F172A"/>
-                </a:solidFill>
-                <a:latin typeface="Trebuchet MS" pitchFamily="34" charset="0"/>
-                <a:ea typeface="Trebuchet MS" pitchFamily="34" charset="-122"/>
-                <a:cs typeface="Trebuchet MS" pitchFamily="34" charset="-120"/>
-              </a:rPr>
-              <a:t>Sample words:</a:t>
-            </a:r>
-            <a:endParaRPr lang="en-US" sz="1200" dirty="0"/>
-          </a:p>
-        </p:txBody>
-      </p:sp>
-      <p:sp>
-        <p:nvSpPr>
-          <p:cNvPr id="44" name="Shape 42"/>
-          <p:cNvSpPr/>
-          <p:nvPr/>
-        </p:nvSpPr>
-        <p:spPr>
-          <a:xfrm>
-            <a:off x="365760" y="4023360"/>
-            <a:ext cx="2011680" cy="402336"/>
-          </a:xfrm>
-          <a:prstGeom prst="rect">
-            <a:avLst>
-              <a:gd name="adj" fmla="val 13636"/>
-            </a:avLst>
-          </a:prstGeom>
-          <a:solidFill>
-            <a:srgbClr val="EEF2FF"/>
-          </a:solidFill>
-          <a:ln w="12700">
-            <a:solidFill>
-              <a:srgbClr val="6366F1"/>
-            </a:solidFill>
-            <a:prstDash val="solid"/>
-          </a:ln>
-        </p:spPr>
-      </p:sp>
-      <p:sp>
-        <p:nvSpPr>
-          <p:cNvPr id="45" name="Text 43"/>
-          <p:cNvSpPr/>
-          <p:nvPr/>
-        </p:nvSpPr>
-        <p:spPr>
-          <a:xfrm>
-            <a:off x="365760" y="4023360"/>
-            <a:ext cx="2011680" cy="402336"/>
-          </a:xfrm>
-          <a:prstGeom prst="rect">
-            <a:avLst/>
-          </a:prstGeom>
-          <a:noFill/>
-          <a:ln/>
-        </p:spPr>
-        <p:txBody>
-          <a:bodyPr wrap="square" lIns="0" tIns="0" rIns="0" bIns="0" rtlCol="0" anchor="ctr"/>
-          <a:lstStyle/>
-          <a:p>
-            <a:pPr algn="ctr" indent="0" marL="0">
-              <a:buNone/>
-            </a:pPr>
-            <a:r>
-              <a:rPr lang="en-US" sz="1200" b="1" dirty="0">
-                <a:solidFill>
-                  <a:srgbClr val="4338CA"/>
-                </a:solidFill>
-                <a:latin typeface="Trebuchet MS" pitchFamily="34" charset="0"/>
-                <a:ea typeface="Trebuchet MS" pitchFamily="34" charset="-122"/>
-                <a:cs typeface="Trebuchet MS" pitchFamily="34" charset="-120"/>
-              </a:rPr>
-              <a:t>pushchair</a:t>
-            </a:r>
-            <a:endParaRPr lang="en-US" sz="1200" dirty="0"/>
-          </a:p>
-        </p:txBody>
-      </p:sp>
-      <p:sp>
-        <p:nvSpPr>
-          <p:cNvPr id="46" name="Shape 44"/>
-          <p:cNvSpPr/>
-          <p:nvPr/>
-        </p:nvSpPr>
-        <p:spPr>
-          <a:xfrm>
-            <a:off x="2542032" y="4023360"/>
-            <a:ext cx="2011680" cy="402336"/>
-          </a:xfrm>
-          <a:prstGeom prst="rect">
-            <a:avLst>
-              <a:gd name="adj" fmla="val 13636"/>
-            </a:avLst>
-          </a:prstGeom>
-          <a:solidFill>
-            <a:srgbClr val="EEF2FF"/>
-          </a:solidFill>
-          <a:ln w="12700">
-            <a:solidFill>
-              <a:srgbClr val="6366F1"/>
-            </a:solidFill>
-            <a:prstDash val="solid"/>
-          </a:ln>
-        </p:spPr>
-      </p:sp>
-      <p:sp>
-        <p:nvSpPr>
-          <p:cNvPr id="47" name="Text 45"/>
-          <p:cNvSpPr/>
-          <p:nvPr/>
-        </p:nvSpPr>
-        <p:spPr>
-          <a:xfrm>
-            <a:off x="2542032" y="4023360"/>
-            <a:ext cx="2011680" cy="402336"/>
-          </a:xfrm>
-          <a:prstGeom prst="rect">
-            <a:avLst/>
-          </a:prstGeom>
-          <a:noFill/>
-          <a:ln/>
-        </p:spPr>
-        <p:txBody>
-          <a:bodyPr wrap="square" lIns="0" tIns="0" rIns="0" bIns="0" rtlCol="0" anchor="ctr"/>
-          <a:lstStyle/>
-          <a:p>
-            <a:pPr algn="ctr" indent="0" marL="0">
-              <a:buNone/>
-            </a:pPr>
-            <a:r>
-              <a:rPr lang="en-US" sz="1200" b="1" dirty="0">
-                <a:solidFill>
-                  <a:srgbClr val="4338CA"/>
-                </a:solidFill>
-                <a:latin typeface="Trebuchet MS" pitchFamily="34" charset="0"/>
-                <a:ea typeface="Trebuchet MS" pitchFamily="34" charset="-122"/>
-                <a:cs typeface="Trebuchet MS" pitchFamily="34" charset="-120"/>
-              </a:rPr>
-              <a:t>pushing</a:t>
-            </a:r>
-            <a:endParaRPr lang="en-US" sz="1200" dirty="0"/>
-          </a:p>
-        </p:txBody>
-      </p:sp>
-      <p:sp>
-        <p:nvSpPr>
-          <p:cNvPr id="48" name="Shape 46"/>
-          <p:cNvSpPr/>
-          <p:nvPr/>
-        </p:nvSpPr>
-        <p:spPr>
-          <a:xfrm>
-            <a:off x="4718304" y="4023360"/>
-            <a:ext cx="2011680" cy="402336"/>
-          </a:xfrm>
-          <a:prstGeom prst="rect">
-            <a:avLst>
-              <a:gd name="adj" fmla="val 13636"/>
-            </a:avLst>
-          </a:prstGeom>
-          <a:solidFill>
-            <a:srgbClr val="EEF2FF"/>
-          </a:solidFill>
-          <a:ln w="12700">
-            <a:solidFill>
-              <a:srgbClr val="6366F1"/>
-            </a:solidFill>
-            <a:prstDash val="solid"/>
-          </a:ln>
-        </p:spPr>
-      </p:sp>
-      <p:sp>
-        <p:nvSpPr>
-          <p:cNvPr id="49" name="Text 47"/>
-          <p:cNvSpPr/>
-          <p:nvPr/>
-        </p:nvSpPr>
-        <p:spPr>
-          <a:xfrm>
-            <a:off x="4718304" y="4023360"/>
-            <a:ext cx="2011680" cy="402336"/>
-          </a:xfrm>
-          <a:prstGeom prst="rect">
-            <a:avLst/>
-          </a:prstGeom>
-          <a:noFill/>
-          <a:ln/>
-        </p:spPr>
-        <p:txBody>
-          <a:bodyPr wrap="square" lIns="0" tIns="0" rIns="0" bIns="0" rtlCol="0" anchor="ctr"/>
-          <a:lstStyle/>
-          <a:p>
-            <a:pPr algn="ctr" indent="0" marL="0">
-              <a:buNone/>
-            </a:pPr>
-            <a:r>
-              <a:rPr lang="en-US" sz="1200" b="1" dirty="0">
-                <a:solidFill>
-                  <a:srgbClr val="4338CA"/>
-                </a:solidFill>
-                <a:latin typeface="Trebuchet MS" pitchFamily="34" charset="0"/>
-                <a:ea typeface="Trebuchet MS" pitchFamily="34" charset="-122"/>
-                <a:cs typeface="Trebuchet MS" pitchFamily="34" charset="-120"/>
-              </a:rPr>
-              <a:t>pushed</a:t>
-            </a:r>
-            <a:endParaRPr lang="en-US" sz="1200" dirty="0"/>
-          </a:p>
-        </p:txBody>
-      </p:sp>
-      <p:sp>
-        <p:nvSpPr>
-          <p:cNvPr id="50" name="Shape 48"/>
-          <p:cNvSpPr/>
-          <p:nvPr/>
-        </p:nvSpPr>
-        <p:spPr>
-          <a:xfrm>
-            <a:off x="6894576" y="4023360"/>
-            <a:ext cx="2011680" cy="402336"/>
-          </a:xfrm>
-          <a:prstGeom prst="rect">
-            <a:avLst>
-              <a:gd name="adj" fmla="val 13636"/>
-            </a:avLst>
-          </a:prstGeom>
-          <a:solidFill>
-            <a:srgbClr val="EEF2FF"/>
-          </a:solidFill>
-          <a:ln w="12700">
-            <a:solidFill>
-              <a:srgbClr val="6366F1"/>
-            </a:solidFill>
-            <a:prstDash val="solid"/>
-          </a:ln>
-        </p:spPr>
-      </p:sp>
-      <p:sp>
-        <p:nvSpPr>
-          <p:cNvPr id="51" name="Text 49"/>
-          <p:cNvSpPr/>
-          <p:nvPr/>
-        </p:nvSpPr>
-        <p:spPr>
-          <a:xfrm>
-            <a:off x="6894576" y="4023360"/>
-            <a:ext cx="2011680" cy="402336"/>
-          </a:xfrm>
-          <a:prstGeom prst="rect">
-            <a:avLst/>
-          </a:prstGeom>
-          <a:noFill/>
-          <a:ln/>
-        </p:spPr>
-        <p:txBody>
-          <a:bodyPr wrap="square" lIns="0" tIns="0" rIns="0" bIns="0" rtlCol="0" anchor="ctr"/>
-          <a:lstStyle/>
-          <a:p>
-            <a:pPr algn="ctr" indent="0" marL="0">
-              <a:buNone/>
-            </a:pPr>
-            <a:r>
-              <a:rPr lang="en-US" sz="1200" b="1" dirty="0">
-                <a:solidFill>
-                  <a:srgbClr val="4338CA"/>
-                </a:solidFill>
-                <a:latin typeface="Trebuchet MS" pitchFamily="34" charset="0"/>
-                <a:ea typeface="Trebuchet MS" pitchFamily="34" charset="-122"/>
-                <a:cs typeface="Trebuchet MS" pitchFamily="34" charset="-120"/>
-              </a:rPr>
-              <a:t>pusher</a:t>
-            </a:r>
-            <a:endParaRPr lang="en-US" sz="1200" dirty="0"/>
-          </a:p>
-        </p:txBody>
-      </p:sp>
-      <p:sp>
-        <p:nvSpPr>
-          <p:cNvPr id="52" name="Shape 50"/>
-          <p:cNvSpPr/>
-          <p:nvPr/>
-        </p:nvSpPr>
-        <p:spPr>
-          <a:xfrm>
-            <a:off x="365760" y="4498848"/>
-            <a:ext cx="2011680" cy="402336"/>
-          </a:xfrm>
-          <a:prstGeom prst="rect">
-            <a:avLst>
-              <a:gd name="adj" fmla="val 13636"/>
-            </a:avLst>
-          </a:prstGeom>
-          <a:solidFill>
-            <a:srgbClr val="EEF2FF"/>
-          </a:solidFill>
-          <a:ln w="12700">
-            <a:solidFill>
-              <a:srgbClr val="6366F1"/>
-            </a:solidFill>
-            <a:prstDash val="solid"/>
-          </a:ln>
-        </p:spPr>
-      </p:sp>
-      <p:sp>
-        <p:nvSpPr>
-          <p:cNvPr id="53" name="Text 51"/>
-          <p:cNvSpPr/>
-          <p:nvPr/>
-        </p:nvSpPr>
-        <p:spPr>
-          <a:xfrm>
-            <a:off x="365760" y="4498848"/>
-            <a:ext cx="2011680" cy="402336"/>
-          </a:xfrm>
-          <a:prstGeom prst="rect">
-            <a:avLst/>
-          </a:prstGeom>
-          <a:noFill/>
-          <a:ln/>
-        </p:spPr>
-        <p:txBody>
-          <a:bodyPr wrap="square" lIns="0" tIns="0" rIns="0" bIns="0" rtlCol="0" anchor="ctr"/>
-          <a:lstStyle/>
-          <a:p>
-            <a:pPr algn="ctr" indent="0" marL="0">
-              <a:buNone/>
-            </a:pPr>
-            <a:r>
-              <a:rPr lang="en-US" sz="1200" b="1" dirty="0">
-                <a:solidFill>
-                  <a:srgbClr val="4338CA"/>
-                </a:solidFill>
-                <a:latin typeface="Trebuchet MS" pitchFamily="34" charset="0"/>
-                <a:ea typeface="Trebuchet MS" pitchFamily="34" charset="-122"/>
-                <a:cs typeface="Trebuchet MS" pitchFamily="34" charset="-120"/>
-              </a:rPr>
-              <a:t>outpush</a:t>
-            </a:r>
-            <a:endParaRPr lang="en-US" sz="1200" dirty="0"/>
-          </a:p>
-        </p:txBody>
-      </p:sp>
-      <p:sp>
-        <p:nvSpPr>
-          <p:cNvPr id="54" name="Shape 52"/>
-          <p:cNvSpPr/>
-          <p:nvPr/>
-        </p:nvSpPr>
-        <p:spPr>
-          <a:xfrm>
-            <a:off x="2542032" y="4498848"/>
-            <a:ext cx="2011680" cy="402336"/>
-          </a:xfrm>
-          <a:prstGeom prst="rect">
-            <a:avLst>
-              <a:gd name="adj" fmla="val 13636"/>
-            </a:avLst>
-          </a:prstGeom>
-          <a:solidFill>
-            <a:srgbClr val="EEF2FF"/>
-          </a:solidFill>
-          <a:ln w="12700">
-            <a:solidFill>
-              <a:srgbClr val="6366F1"/>
-            </a:solidFill>
-            <a:prstDash val="solid"/>
-          </a:ln>
-        </p:spPr>
-      </p:sp>
-      <p:sp>
-        <p:nvSpPr>
-          <p:cNvPr id="55" name="Text 53"/>
-          <p:cNvSpPr/>
-          <p:nvPr/>
-        </p:nvSpPr>
-        <p:spPr>
-          <a:xfrm>
-            <a:off x="2542032" y="4498848"/>
-            <a:ext cx="2011680" cy="402336"/>
-          </a:xfrm>
-          <a:prstGeom prst="rect">
-            <a:avLst/>
-          </a:prstGeom>
-          <a:noFill/>
-          <a:ln/>
-        </p:spPr>
-        <p:txBody>
-          <a:bodyPr wrap="square" lIns="0" tIns="0" rIns="0" bIns="0" rtlCol="0" anchor="ctr"/>
-          <a:lstStyle/>
-          <a:p>
-            <a:pPr algn="ctr" indent="0" marL="0">
-              <a:buNone/>
-            </a:pPr>
-            <a:r>
-              <a:rPr lang="en-US" sz="1200" b="1" dirty="0">
-                <a:solidFill>
-                  <a:srgbClr val="4338CA"/>
-                </a:solidFill>
-                <a:latin typeface="Trebuchet MS" pitchFamily="34" charset="0"/>
-                <a:ea typeface="Trebuchet MS" pitchFamily="34" charset="-122"/>
-                <a:cs typeface="Trebuchet MS" pitchFamily="34" charset="-120"/>
-              </a:rPr>
-              <a:t>pushover</a:t>
-            </a:r>
-            <a:endParaRPr lang="en-US" sz="1200" dirty="0"/>
-          </a:p>
-        </p:txBody>
-      </p:sp>
-      <p:sp>
-        <p:nvSpPr>
-          <p:cNvPr id="56" name="Shape 54"/>
-          <p:cNvSpPr/>
-          <p:nvPr/>
-        </p:nvSpPr>
-        <p:spPr>
-          <a:xfrm>
-            <a:off x="4718304" y="4498848"/>
-            <a:ext cx="2011680" cy="402336"/>
-          </a:xfrm>
-          <a:prstGeom prst="rect">
-            <a:avLst>
-              <a:gd name="adj" fmla="val 13636"/>
-            </a:avLst>
-          </a:prstGeom>
-          <a:solidFill>
-            <a:srgbClr val="EEF2FF"/>
-          </a:solidFill>
-          <a:ln w="12700">
-            <a:solidFill>
-              <a:srgbClr val="6366F1"/>
-            </a:solidFill>
-            <a:prstDash val="solid"/>
-          </a:ln>
-        </p:spPr>
-      </p:sp>
-      <p:sp>
-        <p:nvSpPr>
-          <p:cNvPr id="57" name="Text 55"/>
-          <p:cNvSpPr/>
-          <p:nvPr/>
-        </p:nvSpPr>
-        <p:spPr>
-          <a:xfrm>
-            <a:off x="4718304" y="4498848"/>
-            <a:ext cx="2011680" cy="402336"/>
-          </a:xfrm>
-          <a:prstGeom prst="rect">
-            <a:avLst/>
-          </a:prstGeom>
-          <a:noFill/>
-          <a:ln/>
-        </p:spPr>
-        <p:txBody>
-          <a:bodyPr wrap="square" lIns="0" tIns="0" rIns="0" bIns="0" rtlCol="0" anchor="ctr"/>
-          <a:lstStyle/>
-          <a:p>
-            <a:pPr algn="ctr" indent="0" marL="0">
-              <a:buNone/>
-            </a:pPr>
-            <a:r>
-              <a:rPr lang="en-US" sz="1200" b="1" dirty="0">
-                <a:solidFill>
-                  <a:srgbClr val="4338CA"/>
-                </a:solidFill>
-                <a:latin typeface="Trebuchet MS" pitchFamily="34" charset="0"/>
-                <a:ea typeface="Trebuchet MS" pitchFamily="34" charset="-122"/>
-                <a:cs typeface="Trebuchet MS" pitchFamily="34" charset="-120"/>
-              </a:rPr>
-              <a:t>pushpin</a:t>
-            </a:r>
-            <a:endParaRPr lang="en-US" sz="1200" dirty="0"/>
-          </a:p>
-        </p:txBody>
-      </p:sp>
-      <p:sp>
-        <p:nvSpPr>
-          <p:cNvPr id="58" name="Shape 56"/>
-          <p:cNvSpPr/>
-          <p:nvPr/>
-        </p:nvSpPr>
-        <p:spPr>
-          <a:xfrm>
-            <a:off x="6894576" y="4498848"/>
-            <a:ext cx="2011680" cy="402336"/>
-          </a:xfrm>
-          <a:prstGeom prst="rect">
-            <a:avLst>
-              <a:gd name="adj" fmla="val 13636"/>
-            </a:avLst>
-          </a:prstGeom>
-          <a:solidFill>
-            <a:srgbClr val="EEF2FF"/>
-          </a:solidFill>
-          <a:ln w="12700">
-            <a:solidFill>
-              <a:srgbClr val="6366F1"/>
-            </a:solidFill>
-            <a:prstDash val="solid"/>
-          </a:ln>
-        </p:spPr>
-      </p:sp>
-      <p:sp>
-        <p:nvSpPr>
-          <p:cNvPr id="59" name="Text 57"/>
-          <p:cNvSpPr/>
-          <p:nvPr/>
-        </p:nvSpPr>
-        <p:spPr>
-          <a:xfrm>
-            <a:off x="6894576" y="4498848"/>
-            <a:ext cx="2011680" cy="402336"/>
-          </a:xfrm>
-          <a:prstGeom prst="rect">
-            <a:avLst/>
-          </a:prstGeom>
-          <a:noFill/>
-          <a:ln/>
-        </p:spPr>
-        <p:txBody>
-          <a:bodyPr wrap="square" lIns="0" tIns="0" rIns="0" bIns="0" rtlCol="0" anchor="ctr"/>
-          <a:lstStyle/>
-          <a:p>
-            <a:pPr algn="ctr" indent="0" marL="0">
-              <a:buNone/>
-            </a:pPr>
-            <a:r>
-              <a:rPr lang="en-US" sz="1200" b="1" dirty="0">
-                <a:solidFill>
-                  <a:srgbClr val="4338CA"/>
-                </a:solidFill>
-                <a:latin typeface="Trebuchet MS" pitchFamily="34" charset="0"/>
-                <a:ea typeface="Trebuchet MS" pitchFamily="34" charset="-122"/>
-                <a:cs typeface="Trebuchet MS" pitchFamily="34" charset="-120"/>
-              </a:rPr>
-              <a:t>handpush</a:t>
+              <a:t>push</a:t>
             </a:r>
             <a:endParaRPr lang="en-US" sz="1200" dirty="0"/>
           </a:p>
@@ -34296,7 +33546,7 @@
                 <a:ea typeface="Calibri" pitchFamily="34" charset="-122"/>
                 <a:cs typeface="Calibri" pitchFamily="34" charset="-120"/>
               </a:rPr>
-              <a:t>Word Labs  •  wordlabs.app  •  Root: 'push' = to press or move forward</a:t>
+              <a:t>Word Labs  •  wordlabs.app  •  Root: 'push' = to press forward with force</a:t>
             </a:r>
             <a:endParaRPr lang="en-US" sz="800" dirty="0"/>
           </a:p>
@@ -34460,7 +33710,7 @@
                 <a:ea typeface="Calibri" pitchFamily="34" charset="-122"/>
                 <a:cs typeface="Calibri" pitchFamily="34" charset="-120"/>
               </a:rPr>
-              <a:t>The core part of a word carrying its basic meaning. For example, 'push' means 'to press or move forward'.</a:t>
+              <a:t>The core part of a word carrying its basic meaning. For example, 'push' means 'to press forward with force'.</a:t>
             </a:r>
             <a:endParaRPr lang="en-US" sz="1350" dirty="0"/>
           </a:p>
@@ -35080,7 +34330,7 @@
                 <a:ea typeface="Calibri" pitchFamily="34" charset="-122"/>
                 <a:cs typeface="Calibri" pitchFamily="34" charset="-120"/>
               </a:rPr>
-              <a:t>Word Labs  •  wordlabs.app  •  Root: 'push' = to press or move forward</a:t>
+              <a:t>Word Labs  •  wordlabs.app  •  Root: 'push' = to press forward with force</a:t>
             </a:r>
             <a:endParaRPr lang="en-US" sz="800" dirty="0"/>
           </a:p>
@@ -35192,7 +34442,7 @@
                 <a:ea typeface="Calibri" pitchFamily="34" charset="-122"/>
                 <a:cs typeface="Calibri" pitchFamily="34" charset="-120"/>
               </a:rPr>
-              <a:t>1.  The suffix '-ing' cannot be added to the root 'push'.</a:t>
+              <a:t>1.  'push' means 'to pull something gently towards you'.</a:t>
             </a:r>
             <a:endParaRPr lang="en-US" sz="1300" dirty="0"/>
           </a:p>
@@ -35331,7 +34581,7 @@
                 <a:ea typeface="Calibri" pitchFamily="34" charset="-122"/>
                 <a:cs typeface="Calibri" pitchFamily="34" charset="-120"/>
               </a:rPr>
-              <a:t>2.  The root 'push' comes from a Greek word meaning 'to pull'.</a:t>
+              <a:t>2.  'push' means 'to press against something with force to move it'.</a:t>
             </a:r>
             <a:endParaRPr lang="en-US" sz="1300" dirty="0"/>
           </a:p>
@@ -35354,11 +34604,11 @@
             </a:avLst>
           </a:prstGeom>
           <a:solidFill>
-            <a:srgbClr val="FEE2E2"/>
-          </a:solidFill>
-          <a:ln w="12700">
-            <a:solidFill>
-              <a:srgbClr val="DC2626"/>
+            <a:srgbClr val="DCFCE7"/>
+          </a:solidFill>
+          <a:ln w="12700">
+            <a:solidFill>
+              <a:srgbClr val="16A34A"/>
             </a:solidFill>
             <a:prstDash val="solid"/>
           </a:ln>
@@ -35391,13 +34641,13 @@
             <a:r>
               <a:rPr lang="en-US" sz="1100" b="1" dirty="0">
                 <a:solidFill>
-                  <a:srgbClr val="DC2626"/>
+                  <a:srgbClr val="16A34A"/>
                 </a:solidFill>
                 <a:latin typeface="Trebuchet MS" pitchFamily="34" charset="0"/>
                 <a:ea typeface="Trebuchet MS" pitchFamily="34" charset="-122"/>
                 <a:cs typeface="Trebuchet MS" pitchFamily="34" charset="-120"/>
               </a:rPr>
-              <a:t>FALSE</a:t>
+              <a:t>TRUE</a:t>
             </a:r>
             <a:endParaRPr lang="en-US" sz="1100" dirty="0"/>
           </a:p>
@@ -35470,7 +34720,7 @@
                 <a:ea typeface="Calibri" pitchFamily="34" charset="-122"/>
                 <a:cs typeface="Calibri" pitchFamily="34" charset="-120"/>
               </a:rPr>
-              <a:t>3.  A 'pushchair' is a type of wheeled chair that you push.</a:t>
+              <a:t>3.  'push' means 'to press forward with force'.</a:t>
             </a:r>
             <a:endParaRPr lang="en-US" sz="1300" dirty="0"/>
           </a:p>
@@ -35512,284 +34762,6 @@
         <p:spPr>
           <a:xfrm>
             <a:off x="7772400" y="2596896"/>
-            <a:ext cx="1005840" cy="566928"/>
-          </a:xfrm>
-          <a:prstGeom prst="rect">
-            <a:avLst/>
-          </a:prstGeom>
-          <a:noFill/>
-          <a:ln/>
-        </p:spPr>
-        <p:txBody>
-          <a:bodyPr wrap="square" lIns="0" tIns="0" rIns="0" bIns="0" rtlCol="0" anchor="ctr"/>
-          <a:lstStyle/>
-          <a:p>
-            <a:pPr algn="ctr" indent="0" marL="0">
-              <a:buNone/>
-            </a:pPr>
-            <a:r>
-              <a:rPr lang="en-US" sz="1100" b="1" dirty="0">
-                <a:solidFill>
-                  <a:srgbClr val="16A34A"/>
-                </a:solidFill>
-                <a:latin typeface="Trebuchet MS" pitchFamily="34" charset="0"/>
-                <a:ea typeface="Trebuchet MS" pitchFamily="34" charset="-122"/>
-                <a:cs typeface="Trebuchet MS" pitchFamily="34" charset="-120"/>
-              </a:rPr>
-              <a:t>TRUE</a:t>
-            </a:r>
-            <a:endParaRPr lang="en-US" sz="1100" dirty="0"/>
-          </a:p>
-        </p:txBody>
-      </p:sp>
-      <p:sp>
-        <p:nvSpPr>
-          <p:cNvPr id="23" name="Shape 21"/>
-          <p:cNvSpPr/>
-          <p:nvPr/>
-        </p:nvSpPr>
-        <p:spPr>
-          <a:xfrm>
-            <a:off x="365760" y="3291840"/>
-            <a:ext cx="7315200" cy="566928"/>
-          </a:xfrm>
-          <a:prstGeom prst="rect">
-            <a:avLst>
-              <a:gd name="adj" fmla="val 12903"/>
-            </a:avLst>
-          </a:prstGeom>
-          <a:solidFill>
-            <a:srgbClr val="F8FAFC"/>
-          </a:solidFill>
-          <a:ln w="12700">
-            <a:solidFill>
-              <a:srgbClr val="E2E8F0"/>
-            </a:solidFill>
-            <a:prstDash val="solid"/>
-          </a:ln>
-          <a:effectLst>
-            <a:outerShdw sx="100000" sy="100000" kx="0" ky="0" algn="bl" rotWithShape="0" blurRad="101600" dist="38100" dir="8100000">
-              <a:srgbClr val="000000">
-                <a:alpha val="12000"/>
-              </a:srgbClr>
-            </a:outerShdw>
-          </a:effectLst>
-        </p:spPr>
-      </p:sp>
-      <p:sp>
-        <p:nvSpPr>
-          <p:cNvPr id="24" name="Text 22"/>
-          <p:cNvSpPr/>
-          <p:nvPr/>
-        </p:nvSpPr>
-        <p:spPr>
-          <a:xfrm>
-            <a:off x="548640" y="3291840"/>
-            <a:ext cx="6949440" cy="566928"/>
-          </a:xfrm>
-          <a:prstGeom prst="rect">
-            <a:avLst/>
-          </a:prstGeom>
-          <a:noFill/>
-          <a:ln/>
-        </p:spPr>
-        <p:txBody>
-          <a:bodyPr wrap="square" rtlCol="0" anchor="ctr"/>
-          <a:lstStyle/>
-          <a:p>
-            <a:pPr algn="l" indent="0" marL="0">
-              <a:buNone/>
-            </a:pPr>
-            <a:r>
-              <a:rPr lang="en-US" sz="1300" dirty="0">
-                <a:solidFill>
-                  <a:srgbClr val="0F172A"/>
-                </a:solidFill>
-                <a:latin typeface="Calibri" pitchFamily="34" charset="0"/>
-                <a:ea typeface="Calibri" pitchFamily="34" charset="-122"/>
-                <a:cs typeface="Calibri" pitchFamily="34" charset="-120"/>
-              </a:rPr>
-              <a:t>4.  Adding '-ed' to 'push' makes a past tense word.</a:t>
-            </a:r>
-            <a:endParaRPr lang="en-US" sz="1300" dirty="0"/>
-          </a:p>
-        </p:txBody>
-      </p:sp>
-      <p:sp>
-        <p:nvSpPr>
-          <p:cNvPr id="25" name="Shape 23"/>
-          <p:cNvSpPr/>
-          <p:nvPr/>
-        </p:nvSpPr>
-        <p:spPr>
-          <a:xfrm>
-            <a:off x="7772400" y="3291840"/>
-            <a:ext cx="1005840" cy="566928"/>
-          </a:xfrm>
-          <a:prstGeom prst="rect">
-            <a:avLst>
-              <a:gd name="adj" fmla="val 12903"/>
-            </a:avLst>
-          </a:prstGeom>
-          <a:solidFill>
-            <a:srgbClr val="DCFCE7"/>
-          </a:solidFill>
-          <a:ln w="12700">
-            <a:solidFill>
-              <a:srgbClr val="16A34A"/>
-            </a:solidFill>
-            <a:prstDash val="solid"/>
-          </a:ln>
-        </p:spPr>
-      </p:sp>
-      <p:sp>
-        <p:nvSpPr>
-          <p:cNvPr id="26" name="Text 24"/>
-          <p:cNvSpPr/>
-          <p:nvPr/>
-        </p:nvSpPr>
-        <p:spPr>
-          <a:xfrm>
-            <a:off x="7772400" y="3291840"/>
-            <a:ext cx="1005840" cy="566928"/>
-          </a:xfrm>
-          <a:prstGeom prst="rect">
-            <a:avLst/>
-          </a:prstGeom>
-          <a:noFill/>
-          <a:ln/>
-        </p:spPr>
-        <p:txBody>
-          <a:bodyPr wrap="square" lIns="0" tIns="0" rIns="0" bIns="0" rtlCol="0" anchor="ctr"/>
-          <a:lstStyle/>
-          <a:p>
-            <a:pPr algn="ctr" indent="0" marL="0">
-              <a:buNone/>
-            </a:pPr>
-            <a:r>
-              <a:rPr lang="en-US" sz="1100" b="1" dirty="0">
-                <a:solidFill>
-                  <a:srgbClr val="16A34A"/>
-                </a:solidFill>
-                <a:latin typeface="Trebuchet MS" pitchFamily="34" charset="0"/>
-                <a:ea typeface="Trebuchet MS" pitchFamily="34" charset="-122"/>
-                <a:cs typeface="Trebuchet MS" pitchFamily="34" charset="-120"/>
-              </a:rPr>
-              <a:t>TRUE</a:t>
-            </a:r>
-            <a:endParaRPr lang="en-US" sz="1100" dirty="0"/>
-          </a:p>
-        </p:txBody>
-      </p:sp>
-      <p:sp>
-        <p:nvSpPr>
-          <p:cNvPr id="27" name="Shape 25"/>
-          <p:cNvSpPr/>
-          <p:nvPr/>
-        </p:nvSpPr>
-        <p:spPr>
-          <a:xfrm>
-            <a:off x="365760" y="3986784"/>
-            <a:ext cx="7315200" cy="566928"/>
-          </a:xfrm>
-          <a:prstGeom prst="rect">
-            <a:avLst>
-              <a:gd name="adj" fmla="val 12903"/>
-            </a:avLst>
-          </a:prstGeom>
-          <a:solidFill>
-            <a:srgbClr val="F8FAFC"/>
-          </a:solidFill>
-          <a:ln w="12700">
-            <a:solidFill>
-              <a:srgbClr val="E2E8F0"/>
-            </a:solidFill>
-            <a:prstDash val="solid"/>
-          </a:ln>
-          <a:effectLst>
-            <a:outerShdw sx="100000" sy="100000" kx="0" ky="0" algn="bl" rotWithShape="0" blurRad="101600" dist="38100" dir="8100000">
-              <a:srgbClr val="000000">
-                <a:alpha val="12000"/>
-              </a:srgbClr>
-            </a:outerShdw>
-          </a:effectLst>
-        </p:spPr>
-      </p:sp>
-      <p:sp>
-        <p:nvSpPr>
-          <p:cNvPr id="28" name="Text 26"/>
-          <p:cNvSpPr/>
-          <p:nvPr/>
-        </p:nvSpPr>
-        <p:spPr>
-          <a:xfrm>
-            <a:off x="548640" y="3986784"/>
-            <a:ext cx="6949440" cy="566928"/>
-          </a:xfrm>
-          <a:prstGeom prst="rect">
-            <a:avLst/>
-          </a:prstGeom>
-          <a:noFill/>
-          <a:ln/>
-        </p:spPr>
-        <p:txBody>
-          <a:bodyPr wrap="square" rtlCol="0" anchor="ctr"/>
-          <a:lstStyle/>
-          <a:p>
-            <a:pPr algn="l" indent="0" marL="0">
-              <a:buNone/>
-            </a:pPr>
-            <a:r>
-              <a:rPr lang="en-US" sz="1300" dirty="0">
-                <a:solidFill>
-                  <a:srgbClr val="0F172A"/>
-                </a:solidFill>
-                <a:latin typeface="Calibri" pitchFamily="34" charset="0"/>
-                <a:ea typeface="Calibri" pitchFamily="34" charset="-122"/>
-                <a:cs typeface="Calibri" pitchFamily="34" charset="-120"/>
-              </a:rPr>
-              <a:t>5.  The word 'pushover' contains the root 'push'.</a:t>
-            </a:r>
-            <a:endParaRPr lang="en-US" sz="1300" dirty="0"/>
-          </a:p>
-        </p:txBody>
-      </p:sp>
-      <p:sp>
-        <p:nvSpPr>
-          <p:cNvPr id="29" name="Shape 27"/>
-          <p:cNvSpPr/>
-          <p:nvPr/>
-        </p:nvSpPr>
-        <p:spPr>
-          <a:xfrm>
-            <a:off x="7772400" y="3986784"/>
-            <a:ext cx="1005840" cy="566928"/>
-          </a:xfrm>
-          <a:prstGeom prst="rect">
-            <a:avLst>
-              <a:gd name="adj" fmla="val 12903"/>
-            </a:avLst>
-          </a:prstGeom>
-          <a:solidFill>
-            <a:srgbClr val="DCFCE7"/>
-          </a:solidFill>
-          <a:ln w="12700">
-            <a:solidFill>
-              <a:srgbClr val="16A34A"/>
-            </a:solidFill>
-            <a:prstDash val="solid"/>
-          </a:ln>
-        </p:spPr>
-      </p:sp>
-      <p:sp>
-        <p:nvSpPr>
-          <p:cNvPr id="30" name="Text 28"/>
-          <p:cNvSpPr/>
-          <p:nvPr/>
-        </p:nvSpPr>
-        <p:spPr>
-          <a:xfrm>
-            <a:off x="7772400" y="3986784"/>
             <a:ext cx="1005840" cy="566928"/>
           </a:xfrm>
           <a:prstGeom prst="rect">
@@ -36106,7 +35078,7 @@
                 <a:ea typeface="Calibri" pitchFamily="34" charset="-122"/>
                 <a:cs typeface="Calibri" pitchFamily="34" charset="-120"/>
               </a:rPr>
-              <a:t>Word Labs  •  wordlabs.app  •  Root: 'push' = to press or move forward</a:t>
+              <a:t>Word Labs  •  wordlabs.app  •  Root: 'push' = to press forward with force</a:t>
             </a:r>
             <a:endParaRPr lang="en-US" sz="800" dirty="0"/>
           </a:p>
@@ -36243,7 +35215,7 @@
                 <a:ea typeface="Trebuchet MS" pitchFamily="34" charset="-122"/>
                 <a:cs typeface="Trebuchet MS" pitchFamily="34" charset="-120"/>
               </a:rPr>
-              <a:t>to press or move forward</a:t>
+              <a:t>to press forward with force</a:t>
             </a:r>
             <a:endParaRPr lang="en-US" sz="2000" dirty="0"/>
           </a:p>
@@ -36282,7 +35254,7 @@
                 <a:ea typeface="Calibri" pitchFamily="34" charset="-122"/>
                 <a:cs typeface="Calibri" pitchFamily="34" charset="-120"/>
               </a:rPr>
-              <a:t>Origin: Latin: pulsare</a:t>
+              <a:t>Origin: Anglo-Saxon (Old English) root</a:t>
             </a:r>
             <a:endParaRPr lang="en-US" sz="1100" dirty="0"/>
           </a:p>
@@ -36387,403 +35359,7 @@
                 <a:ea typeface="Trebuchet MS" pitchFamily="34" charset="-122"/>
                 <a:cs typeface="Trebuchet MS" pitchFamily="34" charset="-120"/>
               </a:rPr>
-              <a:t>pushchair</a:t>
-            </a:r>
-            <a:endParaRPr lang="en-US" sz="1300" dirty="0"/>
-          </a:p>
-        </p:txBody>
-      </p:sp>
-      <p:sp>
-        <p:nvSpPr>
-          <p:cNvPr id="18" name="Shape 16"/>
-          <p:cNvSpPr/>
-          <p:nvPr/>
-        </p:nvSpPr>
-        <p:spPr>
-          <a:xfrm>
-            <a:off x="2514600" y="2743200"/>
-            <a:ext cx="2011680" cy="502920"/>
-          </a:xfrm>
-          <a:prstGeom prst="rect">
-            <a:avLst>
-              <a:gd name="adj" fmla="val 14545"/>
-            </a:avLst>
-          </a:prstGeom>
-          <a:solidFill>
-            <a:srgbClr val="EEF2FF"/>
-          </a:solidFill>
-          <a:ln w="12700">
-            <a:solidFill>
-              <a:srgbClr val="6366F1"/>
-            </a:solidFill>
-            <a:prstDash val="solid"/>
-          </a:ln>
-        </p:spPr>
-      </p:sp>
-      <p:sp>
-        <p:nvSpPr>
-          <p:cNvPr id="19" name="Text 17"/>
-          <p:cNvSpPr/>
-          <p:nvPr/>
-        </p:nvSpPr>
-        <p:spPr>
-          <a:xfrm>
-            <a:off x="2514600" y="2743200"/>
-            <a:ext cx="2011680" cy="502920"/>
-          </a:xfrm>
-          <a:prstGeom prst="rect">
-            <a:avLst/>
-          </a:prstGeom>
-          <a:noFill/>
-          <a:ln/>
-        </p:spPr>
-        <p:txBody>
-          <a:bodyPr wrap="square" lIns="0" tIns="0" rIns="0" bIns="0" rtlCol="0" anchor="ctr"/>
-          <a:lstStyle/>
-          <a:p>
-            <a:pPr algn="ctr" indent="0" marL="0">
-              <a:buNone/>
-            </a:pPr>
-            <a:r>
-              <a:rPr lang="en-US" sz="1300" b="1" dirty="0">
-                <a:solidFill>
-                  <a:srgbClr val="4338CA"/>
-                </a:solidFill>
-                <a:latin typeface="Trebuchet MS" pitchFamily="34" charset="0"/>
-                <a:ea typeface="Trebuchet MS" pitchFamily="34" charset="-122"/>
-                <a:cs typeface="Trebuchet MS" pitchFamily="34" charset="-120"/>
-              </a:rPr>
-              <a:t>pushing</a:t>
-            </a:r>
-            <a:endParaRPr lang="en-US" sz="1300" dirty="0"/>
-          </a:p>
-        </p:txBody>
-      </p:sp>
-      <p:sp>
-        <p:nvSpPr>
-          <p:cNvPr id="20" name="Shape 18"/>
-          <p:cNvSpPr/>
-          <p:nvPr/>
-        </p:nvSpPr>
-        <p:spPr>
-          <a:xfrm>
-            <a:off x="4663440" y="2743200"/>
-            <a:ext cx="2011680" cy="502920"/>
-          </a:xfrm>
-          <a:prstGeom prst="rect">
-            <a:avLst>
-              <a:gd name="adj" fmla="val 14545"/>
-            </a:avLst>
-          </a:prstGeom>
-          <a:solidFill>
-            <a:srgbClr val="EEF2FF"/>
-          </a:solidFill>
-          <a:ln w="12700">
-            <a:solidFill>
-              <a:srgbClr val="6366F1"/>
-            </a:solidFill>
-            <a:prstDash val="solid"/>
-          </a:ln>
-        </p:spPr>
-      </p:sp>
-      <p:sp>
-        <p:nvSpPr>
-          <p:cNvPr id="21" name="Text 19"/>
-          <p:cNvSpPr/>
-          <p:nvPr/>
-        </p:nvSpPr>
-        <p:spPr>
-          <a:xfrm>
-            <a:off x="4663440" y="2743200"/>
-            <a:ext cx="2011680" cy="502920"/>
-          </a:xfrm>
-          <a:prstGeom prst="rect">
-            <a:avLst/>
-          </a:prstGeom>
-          <a:noFill/>
-          <a:ln/>
-        </p:spPr>
-        <p:txBody>
-          <a:bodyPr wrap="square" lIns="0" tIns="0" rIns="0" bIns="0" rtlCol="0" anchor="ctr"/>
-          <a:lstStyle/>
-          <a:p>
-            <a:pPr algn="ctr" indent="0" marL="0">
-              <a:buNone/>
-            </a:pPr>
-            <a:r>
-              <a:rPr lang="en-US" sz="1300" b="1" dirty="0">
-                <a:solidFill>
-                  <a:srgbClr val="4338CA"/>
-                </a:solidFill>
-                <a:latin typeface="Trebuchet MS" pitchFamily="34" charset="0"/>
-                <a:ea typeface="Trebuchet MS" pitchFamily="34" charset="-122"/>
-                <a:cs typeface="Trebuchet MS" pitchFamily="34" charset="-120"/>
-              </a:rPr>
-              <a:t>pushed</a:t>
-            </a:r>
-            <a:endParaRPr lang="en-US" sz="1300" dirty="0"/>
-          </a:p>
-        </p:txBody>
-      </p:sp>
-      <p:sp>
-        <p:nvSpPr>
-          <p:cNvPr id="22" name="Shape 20"/>
-          <p:cNvSpPr/>
-          <p:nvPr/>
-        </p:nvSpPr>
-        <p:spPr>
-          <a:xfrm>
-            <a:off x="6812280" y="2743200"/>
-            <a:ext cx="2011680" cy="502920"/>
-          </a:xfrm>
-          <a:prstGeom prst="rect">
-            <a:avLst>
-              <a:gd name="adj" fmla="val 14545"/>
-            </a:avLst>
-          </a:prstGeom>
-          <a:solidFill>
-            <a:srgbClr val="EEF2FF"/>
-          </a:solidFill>
-          <a:ln w="12700">
-            <a:solidFill>
-              <a:srgbClr val="6366F1"/>
-            </a:solidFill>
-            <a:prstDash val="solid"/>
-          </a:ln>
-        </p:spPr>
-      </p:sp>
-      <p:sp>
-        <p:nvSpPr>
-          <p:cNvPr id="23" name="Text 21"/>
-          <p:cNvSpPr/>
-          <p:nvPr/>
-        </p:nvSpPr>
-        <p:spPr>
-          <a:xfrm>
-            <a:off x="6812280" y="2743200"/>
-            <a:ext cx="2011680" cy="502920"/>
-          </a:xfrm>
-          <a:prstGeom prst="rect">
-            <a:avLst/>
-          </a:prstGeom>
-          <a:noFill/>
-          <a:ln/>
-        </p:spPr>
-        <p:txBody>
-          <a:bodyPr wrap="square" lIns="0" tIns="0" rIns="0" bIns="0" rtlCol="0" anchor="ctr"/>
-          <a:lstStyle/>
-          <a:p>
-            <a:pPr algn="ctr" indent="0" marL="0">
-              <a:buNone/>
-            </a:pPr>
-            <a:r>
-              <a:rPr lang="en-US" sz="1300" b="1" dirty="0">
-                <a:solidFill>
-                  <a:srgbClr val="4338CA"/>
-                </a:solidFill>
-                <a:latin typeface="Trebuchet MS" pitchFamily="34" charset="0"/>
-                <a:ea typeface="Trebuchet MS" pitchFamily="34" charset="-122"/>
-                <a:cs typeface="Trebuchet MS" pitchFamily="34" charset="-120"/>
-              </a:rPr>
-              <a:t>pusher</a:t>
-            </a:r>
-            <a:endParaRPr lang="en-US" sz="1300" dirty="0"/>
-          </a:p>
-        </p:txBody>
-      </p:sp>
-      <p:sp>
-        <p:nvSpPr>
-          <p:cNvPr id="24" name="Shape 22"/>
-          <p:cNvSpPr/>
-          <p:nvPr/>
-        </p:nvSpPr>
-        <p:spPr>
-          <a:xfrm>
-            <a:off x="365760" y="3401568"/>
-            <a:ext cx="2011680" cy="502920"/>
-          </a:xfrm>
-          <a:prstGeom prst="rect">
-            <a:avLst>
-              <a:gd name="adj" fmla="val 14545"/>
-            </a:avLst>
-          </a:prstGeom>
-          <a:solidFill>
-            <a:srgbClr val="EEF2FF"/>
-          </a:solidFill>
-          <a:ln w="12700">
-            <a:solidFill>
-              <a:srgbClr val="6366F1"/>
-            </a:solidFill>
-            <a:prstDash val="solid"/>
-          </a:ln>
-        </p:spPr>
-      </p:sp>
-      <p:sp>
-        <p:nvSpPr>
-          <p:cNvPr id="25" name="Text 23"/>
-          <p:cNvSpPr/>
-          <p:nvPr/>
-        </p:nvSpPr>
-        <p:spPr>
-          <a:xfrm>
-            <a:off x="365760" y="3401568"/>
-            <a:ext cx="2011680" cy="502920"/>
-          </a:xfrm>
-          <a:prstGeom prst="rect">
-            <a:avLst/>
-          </a:prstGeom>
-          <a:noFill/>
-          <a:ln/>
-        </p:spPr>
-        <p:txBody>
-          <a:bodyPr wrap="square" lIns="0" tIns="0" rIns="0" bIns="0" rtlCol="0" anchor="ctr"/>
-          <a:lstStyle/>
-          <a:p>
-            <a:pPr algn="ctr" indent="0" marL="0">
-              <a:buNone/>
-            </a:pPr>
-            <a:r>
-              <a:rPr lang="en-US" sz="1300" b="1" dirty="0">
-                <a:solidFill>
-                  <a:srgbClr val="4338CA"/>
-                </a:solidFill>
-                <a:latin typeface="Trebuchet MS" pitchFamily="34" charset="0"/>
-                <a:ea typeface="Trebuchet MS" pitchFamily="34" charset="-122"/>
-                <a:cs typeface="Trebuchet MS" pitchFamily="34" charset="-120"/>
-              </a:rPr>
-              <a:t>outpush</a:t>
-            </a:r>
-            <a:endParaRPr lang="en-US" sz="1300" dirty="0"/>
-          </a:p>
-        </p:txBody>
-      </p:sp>
-      <p:sp>
-        <p:nvSpPr>
-          <p:cNvPr id="26" name="Shape 24"/>
-          <p:cNvSpPr/>
-          <p:nvPr/>
-        </p:nvSpPr>
-        <p:spPr>
-          <a:xfrm>
-            <a:off x="2514600" y="3401568"/>
-            <a:ext cx="2011680" cy="502920"/>
-          </a:xfrm>
-          <a:prstGeom prst="rect">
-            <a:avLst>
-              <a:gd name="adj" fmla="val 14545"/>
-            </a:avLst>
-          </a:prstGeom>
-          <a:solidFill>
-            <a:srgbClr val="EEF2FF"/>
-          </a:solidFill>
-          <a:ln w="12700">
-            <a:solidFill>
-              <a:srgbClr val="6366F1"/>
-            </a:solidFill>
-            <a:prstDash val="solid"/>
-          </a:ln>
-        </p:spPr>
-      </p:sp>
-      <p:sp>
-        <p:nvSpPr>
-          <p:cNvPr id="27" name="Text 25"/>
-          <p:cNvSpPr/>
-          <p:nvPr/>
-        </p:nvSpPr>
-        <p:spPr>
-          <a:xfrm>
-            <a:off x="2514600" y="3401568"/>
-            <a:ext cx="2011680" cy="502920"/>
-          </a:xfrm>
-          <a:prstGeom prst="rect">
-            <a:avLst/>
-          </a:prstGeom>
-          <a:noFill/>
-          <a:ln/>
-        </p:spPr>
-        <p:txBody>
-          <a:bodyPr wrap="square" lIns="0" tIns="0" rIns="0" bIns="0" rtlCol="0" anchor="ctr"/>
-          <a:lstStyle/>
-          <a:p>
-            <a:pPr algn="ctr" indent="0" marL="0">
-              <a:buNone/>
-            </a:pPr>
-            <a:r>
-              <a:rPr lang="en-US" sz="1300" b="1" dirty="0">
-                <a:solidFill>
-                  <a:srgbClr val="4338CA"/>
-                </a:solidFill>
-                <a:latin typeface="Trebuchet MS" pitchFamily="34" charset="0"/>
-                <a:ea typeface="Trebuchet MS" pitchFamily="34" charset="-122"/>
-                <a:cs typeface="Trebuchet MS" pitchFamily="34" charset="-120"/>
-              </a:rPr>
-              <a:t>pushover</a:t>
-            </a:r>
-            <a:endParaRPr lang="en-US" sz="1300" dirty="0"/>
-          </a:p>
-        </p:txBody>
-      </p:sp>
-      <p:sp>
-        <p:nvSpPr>
-          <p:cNvPr id="28" name="Shape 26"/>
-          <p:cNvSpPr/>
-          <p:nvPr/>
-        </p:nvSpPr>
-        <p:spPr>
-          <a:xfrm>
-            <a:off x="4663440" y="3401568"/>
-            <a:ext cx="2011680" cy="502920"/>
-          </a:xfrm>
-          <a:prstGeom prst="rect">
-            <a:avLst>
-              <a:gd name="adj" fmla="val 14545"/>
-            </a:avLst>
-          </a:prstGeom>
-          <a:solidFill>
-            <a:srgbClr val="EEF2FF"/>
-          </a:solidFill>
-          <a:ln w="12700">
-            <a:solidFill>
-              <a:srgbClr val="6366F1"/>
-            </a:solidFill>
-            <a:prstDash val="solid"/>
-          </a:ln>
-        </p:spPr>
-      </p:sp>
-      <p:sp>
-        <p:nvSpPr>
-          <p:cNvPr id="29" name="Text 27"/>
-          <p:cNvSpPr/>
-          <p:nvPr/>
-        </p:nvSpPr>
-        <p:spPr>
-          <a:xfrm>
-            <a:off x="4663440" y="3401568"/>
-            <a:ext cx="2011680" cy="502920"/>
-          </a:xfrm>
-          <a:prstGeom prst="rect">
-            <a:avLst/>
-          </a:prstGeom>
-          <a:noFill/>
-          <a:ln/>
-        </p:spPr>
-        <p:txBody>
-          <a:bodyPr wrap="square" lIns="0" tIns="0" rIns="0" bIns="0" rtlCol="0" anchor="ctr"/>
-          <a:lstStyle/>
-          <a:p>
-            <a:pPr algn="ctr" indent="0" marL="0">
-              <a:buNone/>
-            </a:pPr>
-            <a:r>
-              <a:rPr lang="en-US" sz="1300" b="1" dirty="0">
-                <a:solidFill>
-                  <a:srgbClr val="4338CA"/>
-                </a:solidFill>
-                <a:latin typeface="Trebuchet MS" pitchFamily="34" charset="0"/>
-                <a:ea typeface="Trebuchet MS" pitchFamily="34" charset="-122"/>
-                <a:cs typeface="Trebuchet MS" pitchFamily="34" charset="-120"/>
-              </a:rPr>
-              <a:t>pushpin</a:t>
+              <a:t>push</a:t>
             </a:r>
             <a:endParaRPr lang="en-US" sz="1300" dirty="0"/>
           </a:p>
@@ -37075,7 +35651,7 @@
                 <a:ea typeface="Calibri" pitchFamily="34" charset="-122"/>
                 <a:cs typeface="Calibri" pitchFamily="34" charset="-120"/>
               </a:rPr>
-              <a:t>Word Labs  •  wordlabs.app  •  Root: 'push' = to press or move forward</a:t>
+              <a:t>Word Labs  •  wordlabs.app  •  Root: 'push' = to press forward with force</a:t>
             </a:r>
             <a:endParaRPr lang="en-US" sz="800" dirty="0"/>
           </a:p>
@@ -37333,7 +35909,7 @@
             <a:avLst/>
           </a:prstGeom>
           <a:solidFill>
-            <a:srgbClr val="DDD6FE"/>
+            <a:srgbClr val="F8FAFC"/>
           </a:solidFill>
           <a:ln w="12700">
             <a:solidFill>
@@ -37345,14 +35921,39 @@
       </p:sp>
       <p:sp>
         <p:nvSpPr>
-          <p:cNvPr id="18" name="Text 16"/>
-          <p:cNvSpPr/>
-          <p:nvPr/>
-        </p:nvSpPr>
-        <p:spPr>
-          <a:xfrm>
-            <a:off x="640080" y="1755648"/>
-            <a:ext cx="1463040" cy="420624"/>
+          <p:cNvPr id="18" name="Shape 16"/>
+          <p:cNvSpPr/>
+          <p:nvPr/>
+        </p:nvSpPr>
+        <p:spPr>
+          <a:xfrm>
+            <a:off x="3291840" y="1755648"/>
+            <a:ext cx="1645920" cy="420624"/>
+          </a:xfrm>
+          <a:prstGeom prst="rect">
+            <a:avLst/>
+          </a:prstGeom>
+          <a:solidFill>
+            <a:srgbClr val="CCFBF1"/>
+          </a:solidFill>
+          <a:ln w="12700">
+            <a:solidFill>
+              <a:srgbClr val="E5E7EB"/>
+            </a:solidFill>
+            <a:prstDash val="solid"/>
+          </a:ln>
+        </p:spPr>
+      </p:sp>
+      <p:sp>
+        <p:nvSpPr>
+          <p:cNvPr id="19" name="Text 17"/>
+          <p:cNvSpPr/>
+          <p:nvPr/>
+        </p:nvSpPr>
+        <p:spPr>
+          <a:xfrm>
+            <a:off x="3291840" y="1755648"/>
+            <a:ext cx="1645920" cy="420624"/>
           </a:xfrm>
           <a:prstGeom prst="rect">
             <a:avLst/>
@@ -37370,13 +35971,13 @@
             <a:r>
               <a:rPr lang="en-US" sz="1300" b="1" dirty="0">
                 <a:solidFill>
-                  <a:srgbClr val="4C1D95"/>
+                  <a:srgbClr val="0F766E"/>
                 </a:solidFill>
                 <a:latin typeface="Trebuchet MS" pitchFamily="34" charset="0"/>
                 <a:ea typeface="Trebuchet MS" pitchFamily="34" charset="-122"/>
                 <a:cs typeface="Trebuchet MS" pitchFamily="34" charset="-120"/>
               </a:rPr>
-              <a:t>out-</a:t>
+              <a:t>push</a:t>
             </a:r>
             <a:endParaRPr lang="en-US" sz="1300" dirty="0"/>
           </a:p>
@@ -37384,20 +35985,20 @@
       </p:sp>
       <p:sp>
         <p:nvSpPr>
-          <p:cNvPr id="19" name="Shape 17"/>
-          <p:cNvSpPr/>
-          <p:nvPr/>
-        </p:nvSpPr>
-        <p:spPr>
-          <a:xfrm>
-            <a:off x="3291840" y="1755648"/>
-            <a:ext cx="1645920" cy="420624"/>
-          </a:xfrm>
-          <a:prstGeom prst="rect">
-            <a:avLst/>
-          </a:prstGeom>
-          <a:solidFill>
-            <a:srgbClr val="CCFBF1"/>
+          <p:cNvPr id="20" name="Shape 18"/>
+          <p:cNvSpPr/>
+          <p:nvPr/>
+        </p:nvSpPr>
+        <p:spPr>
+          <a:xfrm>
+            <a:off x="5943600" y="1755648"/>
+            <a:ext cx="1463040" cy="420624"/>
+          </a:xfrm>
+          <a:prstGeom prst="rect">
+            <a:avLst/>
+          </a:prstGeom>
+          <a:solidFill>
+            <a:srgbClr val="FCE7F3"/>
           </a:solidFill>
           <a:ln w="12700">
             <a:solidFill>
@@ -37409,14 +36010,14 @@
       </p:sp>
       <p:sp>
         <p:nvSpPr>
-          <p:cNvPr id="20" name="Text 18"/>
-          <p:cNvSpPr/>
-          <p:nvPr/>
-        </p:nvSpPr>
-        <p:spPr>
-          <a:xfrm>
-            <a:off x="3291840" y="1755648"/>
-            <a:ext cx="1645920" cy="420624"/>
+          <p:cNvPr id="21" name="Text 19"/>
+          <p:cNvSpPr/>
+          <p:nvPr/>
+        </p:nvSpPr>
+        <p:spPr>
+          <a:xfrm>
+            <a:off x="5943600" y="1755648"/>
+            <a:ext cx="1463040" cy="420624"/>
           </a:xfrm>
           <a:prstGeom prst="rect">
             <a:avLst/>
@@ -37434,13 +36035,13 @@
             <a:r>
               <a:rPr lang="en-US" sz="1300" b="1" dirty="0">
                 <a:solidFill>
-                  <a:srgbClr val="0F766E"/>
+                  <a:srgbClr val="9D174D"/>
                 </a:solidFill>
                 <a:latin typeface="Trebuchet MS" pitchFamily="34" charset="0"/>
                 <a:ea typeface="Trebuchet MS" pitchFamily="34" charset="-122"/>
                 <a:cs typeface="Trebuchet MS" pitchFamily="34" charset="-120"/>
               </a:rPr>
-              <a:t>push</a:t>
+              <a:t>-ed</a:t>
             </a:r>
             <a:endParaRPr lang="en-US" sz="1300" dirty="0"/>
           </a:p>
@@ -37448,19 +36049,69 @@
       </p:sp>
       <p:sp>
         <p:nvSpPr>
-          <p:cNvPr id="21" name="Shape 19"/>
-          <p:cNvSpPr/>
-          <p:nvPr/>
-        </p:nvSpPr>
-        <p:spPr>
-          <a:xfrm>
-            <a:off x="5943600" y="1755648"/>
+          <p:cNvPr id="22" name="Shape 20"/>
+          <p:cNvSpPr/>
+          <p:nvPr/>
+        </p:nvSpPr>
+        <p:spPr>
+          <a:xfrm>
+            <a:off x="640080" y="2212848"/>
             <a:ext cx="1463040" cy="420624"/>
           </a:xfrm>
           <a:prstGeom prst="rect">
             <a:avLst/>
           </a:prstGeom>
           <a:solidFill>
+            <a:srgbClr val="F1F5F9"/>
+          </a:solidFill>
+          <a:ln w="12700">
+            <a:solidFill>
+              <a:srgbClr val="E5E7EB"/>
+            </a:solidFill>
+            <a:prstDash val="solid"/>
+          </a:ln>
+        </p:spPr>
+      </p:sp>
+      <p:sp>
+        <p:nvSpPr>
+          <p:cNvPr id="23" name="Shape 21"/>
+          <p:cNvSpPr/>
+          <p:nvPr/>
+        </p:nvSpPr>
+        <p:spPr>
+          <a:xfrm>
+            <a:off x="3291840" y="2212848"/>
+            <a:ext cx="1645920" cy="420624"/>
+          </a:xfrm>
+          <a:prstGeom prst="rect">
+            <a:avLst/>
+          </a:prstGeom>
+          <a:solidFill>
+            <a:srgbClr val="F1F5F9"/>
+          </a:solidFill>
+          <a:ln w="12700">
+            <a:solidFill>
+              <a:srgbClr val="E5E7EB"/>
+            </a:solidFill>
+            <a:prstDash val="solid"/>
+          </a:ln>
+        </p:spPr>
+      </p:sp>
+      <p:sp>
+        <p:nvSpPr>
+          <p:cNvPr id="24" name="Shape 22"/>
+          <p:cNvSpPr/>
+          <p:nvPr/>
+        </p:nvSpPr>
+        <p:spPr>
+          <a:xfrm>
+            <a:off x="5943600" y="2212848"/>
+            <a:ext cx="1463040" cy="420624"/>
+          </a:xfrm>
+          <a:prstGeom prst="rect">
+            <a:avLst/>
+          </a:prstGeom>
+          <a:solidFill>
             <a:srgbClr val="FCE7F3"/>
           </a:solidFill>
           <a:ln w="12700">
@@ -37473,13 +36124,13 @@
       </p:sp>
       <p:sp>
         <p:nvSpPr>
-          <p:cNvPr id="22" name="Text 20"/>
-          <p:cNvSpPr/>
-          <p:nvPr/>
-        </p:nvSpPr>
-        <p:spPr>
-          <a:xfrm>
-            <a:off x="5943600" y="1755648"/>
+          <p:cNvPr id="25" name="Text 23"/>
+          <p:cNvSpPr/>
+          <p:nvPr/>
+        </p:nvSpPr>
+        <p:spPr>
+          <a:xfrm>
+            <a:off x="5943600" y="2212848"/>
             <a:ext cx="1463040" cy="420624"/>
           </a:xfrm>
           <a:prstGeom prst="rect">
@@ -37504,7 +36155,7 @@
                 <a:ea typeface="Trebuchet MS" pitchFamily="34" charset="-122"/>
                 <a:cs typeface="Trebuchet MS" pitchFamily="34" charset="-120"/>
               </a:rPr>
-              <a:t>-ed</a:t>
+              <a:t>-er</a:t>
             </a:r>
             <a:endParaRPr lang="en-US" sz="1300" dirty="0"/>
           </a:p>
@@ -37512,20 +36163,20 @@
       </p:sp>
       <p:sp>
         <p:nvSpPr>
-          <p:cNvPr id="23" name="Shape 21"/>
-          <p:cNvSpPr/>
-          <p:nvPr/>
-        </p:nvSpPr>
-        <p:spPr>
-          <a:xfrm>
-            <a:off x="640080" y="2212848"/>
+          <p:cNvPr id="26" name="Shape 24"/>
+          <p:cNvSpPr/>
+          <p:nvPr/>
+        </p:nvSpPr>
+        <p:spPr>
+          <a:xfrm>
+            <a:off x="640080" y="2670048"/>
             <a:ext cx="1463040" cy="420624"/>
           </a:xfrm>
           <a:prstGeom prst="rect">
             <a:avLst/>
           </a:prstGeom>
           <a:solidFill>
-            <a:srgbClr val="DDD6FE"/>
+            <a:srgbClr val="F8FAFC"/>
           </a:solidFill>
           <a:ln w="12700">
             <a:solidFill>
@@ -37537,18 +36188,68 @@
       </p:sp>
       <p:sp>
         <p:nvSpPr>
-          <p:cNvPr id="24" name="Text 22"/>
-          <p:cNvSpPr/>
-          <p:nvPr/>
-        </p:nvSpPr>
-        <p:spPr>
-          <a:xfrm>
-            <a:off x="640080" y="2212848"/>
+          <p:cNvPr id="27" name="Shape 25"/>
+          <p:cNvSpPr/>
+          <p:nvPr/>
+        </p:nvSpPr>
+        <p:spPr>
+          <a:xfrm>
+            <a:off x="3291840" y="2670048"/>
+            <a:ext cx="1645920" cy="420624"/>
+          </a:xfrm>
+          <a:prstGeom prst="rect">
+            <a:avLst/>
+          </a:prstGeom>
+          <a:solidFill>
+            <a:srgbClr val="F8FAFC"/>
+          </a:solidFill>
+          <a:ln w="12700">
+            <a:solidFill>
+              <a:srgbClr val="E5E7EB"/>
+            </a:solidFill>
+            <a:prstDash val="solid"/>
+          </a:ln>
+        </p:spPr>
+      </p:sp>
+      <p:sp>
+        <p:nvSpPr>
+          <p:cNvPr id="28" name="Shape 26"/>
+          <p:cNvSpPr/>
+          <p:nvPr/>
+        </p:nvSpPr>
+        <p:spPr>
+          <a:xfrm>
+            <a:off x="5943600" y="2670048"/>
             <a:ext cx="1463040" cy="420624"/>
           </a:xfrm>
           <a:prstGeom prst="rect">
             <a:avLst/>
           </a:prstGeom>
+          <a:solidFill>
+            <a:srgbClr val="FCE7F3"/>
+          </a:solidFill>
+          <a:ln w="12700">
+            <a:solidFill>
+              <a:srgbClr val="E5E7EB"/>
+            </a:solidFill>
+            <a:prstDash val="solid"/>
+          </a:ln>
+        </p:spPr>
+      </p:sp>
+      <p:sp>
+        <p:nvSpPr>
+          <p:cNvPr id="29" name="Text 27"/>
+          <p:cNvSpPr/>
+          <p:nvPr/>
+        </p:nvSpPr>
+        <p:spPr>
+          <a:xfrm>
+            <a:off x="5943600" y="2670048"/>
+            <a:ext cx="1463040" cy="420624"/>
+          </a:xfrm>
+          <a:prstGeom prst="rect">
+            <a:avLst/>
+          </a:prstGeom>
           <a:noFill/>
           <a:ln/>
         </p:spPr>
@@ -37562,13 +36263,13 @@
             <a:r>
               <a:rPr lang="en-US" sz="1300" b="1" dirty="0">
                 <a:solidFill>
-                  <a:srgbClr val="4C1D95"/>
+                  <a:srgbClr val="9D174D"/>
                 </a:solidFill>
                 <a:latin typeface="Trebuchet MS" pitchFamily="34" charset="0"/>
                 <a:ea typeface="Trebuchet MS" pitchFamily="34" charset="-122"/>
                 <a:cs typeface="Trebuchet MS" pitchFamily="34" charset="-120"/>
               </a:rPr>
-              <a:t>over-</a:t>
+              <a:t>-es</a:t>
             </a:r>
             <a:endParaRPr lang="en-US" sz="1300" dirty="0"/>
           </a:p>
@@ -37576,13 +36277,38 @@
       </p:sp>
       <p:sp>
         <p:nvSpPr>
-          <p:cNvPr id="25" name="Shape 23"/>
-          <p:cNvSpPr/>
-          <p:nvPr/>
-        </p:nvSpPr>
-        <p:spPr>
-          <a:xfrm>
-            <a:off x="3291840" y="2212848"/>
+          <p:cNvPr id="30" name="Shape 28"/>
+          <p:cNvSpPr/>
+          <p:nvPr/>
+        </p:nvSpPr>
+        <p:spPr>
+          <a:xfrm>
+            <a:off x="640080" y="3127248"/>
+            <a:ext cx="1463040" cy="420624"/>
+          </a:xfrm>
+          <a:prstGeom prst="rect">
+            <a:avLst/>
+          </a:prstGeom>
+          <a:solidFill>
+            <a:srgbClr val="F1F5F9"/>
+          </a:solidFill>
+          <a:ln w="12700">
+            <a:solidFill>
+              <a:srgbClr val="E5E7EB"/>
+            </a:solidFill>
+            <a:prstDash val="solid"/>
+          </a:ln>
+        </p:spPr>
+      </p:sp>
+      <p:sp>
+        <p:nvSpPr>
+          <p:cNvPr id="31" name="Shape 29"/>
+          <p:cNvSpPr/>
+          <p:nvPr/>
+        </p:nvSpPr>
+        <p:spPr>
+          <a:xfrm>
+            <a:off x="3291840" y="3127248"/>
             <a:ext cx="1645920" cy="420624"/>
           </a:xfrm>
           <a:prstGeom prst="rect">
@@ -37601,13 +36327,13 @@
       </p:sp>
       <p:sp>
         <p:nvSpPr>
-          <p:cNvPr id="26" name="Shape 24"/>
-          <p:cNvSpPr/>
-          <p:nvPr/>
-        </p:nvSpPr>
-        <p:spPr>
-          <a:xfrm>
-            <a:off x="5943600" y="2212848"/>
+          <p:cNvPr id="32" name="Shape 30"/>
+          <p:cNvSpPr/>
+          <p:nvPr/>
+        </p:nvSpPr>
+        <p:spPr>
+          <a:xfrm>
+            <a:off x="5943600" y="3127248"/>
             <a:ext cx="1463040" cy="420624"/>
           </a:xfrm>
           <a:prstGeom prst="rect">
@@ -37626,13 +36352,13 @@
       </p:sp>
       <p:sp>
         <p:nvSpPr>
-          <p:cNvPr id="27" name="Text 25"/>
-          <p:cNvSpPr/>
-          <p:nvPr/>
-        </p:nvSpPr>
-        <p:spPr>
-          <a:xfrm>
-            <a:off x="5943600" y="2212848"/>
+          <p:cNvPr id="33" name="Text 31"/>
+          <p:cNvSpPr/>
+          <p:nvPr/>
+        </p:nvSpPr>
+        <p:spPr>
+          <a:xfrm>
+            <a:off x="5943600" y="3127248"/>
             <a:ext cx="1463040" cy="420624"/>
           </a:xfrm>
           <a:prstGeom prst="rect">
@@ -37665,472 +36391,13 @@
       </p:sp>
       <p:sp>
         <p:nvSpPr>
-          <p:cNvPr id="28" name="Shape 26"/>
-          <p:cNvSpPr/>
-          <p:nvPr/>
-        </p:nvSpPr>
-        <p:spPr>
-          <a:xfrm>
-            <a:off x="640080" y="2670048"/>
-            <a:ext cx="1463040" cy="420624"/>
-          </a:xfrm>
-          <a:prstGeom prst="rect">
-            <a:avLst/>
-          </a:prstGeom>
-          <a:solidFill>
-            <a:srgbClr val="DDD6FE"/>
-          </a:solidFill>
-          <a:ln w="12700">
-            <a:solidFill>
-              <a:srgbClr val="E5E7EB"/>
-            </a:solidFill>
-            <a:prstDash val="solid"/>
-          </a:ln>
-        </p:spPr>
-      </p:sp>
-      <p:sp>
-        <p:nvSpPr>
-          <p:cNvPr id="29" name="Text 27"/>
-          <p:cNvSpPr/>
-          <p:nvPr/>
-        </p:nvSpPr>
-        <p:spPr>
-          <a:xfrm>
-            <a:off x="640080" y="2670048"/>
-            <a:ext cx="1463040" cy="420624"/>
-          </a:xfrm>
-          <a:prstGeom prst="rect">
-            <a:avLst/>
-          </a:prstGeom>
-          <a:noFill/>
-          <a:ln/>
-        </p:spPr>
-        <p:txBody>
-          <a:bodyPr wrap="square" lIns="0" tIns="0" rIns="0" bIns="0" rtlCol="0" anchor="ctr"/>
-          <a:lstStyle/>
-          <a:p>
-            <a:pPr algn="ctr" indent="0" marL="0">
-              <a:buNone/>
-            </a:pPr>
-            <a:r>
-              <a:rPr lang="en-US" sz="1300" b="1" dirty="0">
-                <a:solidFill>
-                  <a:srgbClr val="4C1D95"/>
-                </a:solidFill>
-                <a:latin typeface="Trebuchet MS" pitchFamily="34" charset="0"/>
-                <a:ea typeface="Trebuchet MS" pitchFamily="34" charset="-122"/>
-                <a:cs typeface="Trebuchet MS" pitchFamily="34" charset="-120"/>
-              </a:rPr>
-              <a:t>up-</a:t>
-            </a:r>
-            <a:endParaRPr lang="en-US" sz="1300" dirty="0"/>
-          </a:p>
-        </p:txBody>
-      </p:sp>
-      <p:sp>
-        <p:nvSpPr>
-          <p:cNvPr id="30" name="Shape 28"/>
-          <p:cNvSpPr/>
-          <p:nvPr/>
-        </p:nvSpPr>
-        <p:spPr>
-          <a:xfrm>
-            <a:off x="3291840" y="2670048"/>
-            <a:ext cx="1645920" cy="420624"/>
-          </a:xfrm>
-          <a:prstGeom prst="rect">
-            <a:avLst/>
-          </a:prstGeom>
-          <a:solidFill>
-            <a:srgbClr val="F8FAFC"/>
-          </a:solidFill>
-          <a:ln w="12700">
-            <a:solidFill>
-              <a:srgbClr val="E5E7EB"/>
-            </a:solidFill>
-            <a:prstDash val="solid"/>
-          </a:ln>
-        </p:spPr>
-      </p:sp>
-      <p:sp>
-        <p:nvSpPr>
-          <p:cNvPr id="31" name="Shape 29"/>
-          <p:cNvSpPr/>
-          <p:nvPr/>
-        </p:nvSpPr>
-        <p:spPr>
-          <a:xfrm>
-            <a:off x="5943600" y="2670048"/>
-            <a:ext cx="1463040" cy="420624"/>
-          </a:xfrm>
-          <a:prstGeom prst="rect">
-            <a:avLst/>
-          </a:prstGeom>
-          <a:solidFill>
-            <a:srgbClr val="FCE7F3"/>
-          </a:solidFill>
-          <a:ln w="12700">
-            <a:solidFill>
-              <a:srgbClr val="E5E7EB"/>
-            </a:solidFill>
-            <a:prstDash val="solid"/>
-          </a:ln>
-        </p:spPr>
-      </p:sp>
-      <p:sp>
-        <p:nvSpPr>
-          <p:cNvPr id="32" name="Text 30"/>
-          <p:cNvSpPr/>
-          <p:nvPr/>
-        </p:nvSpPr>
-        <p:spPr>
-          <a:xfrm>
-            <a:off x="5943600" y="2670048"/>
-            <a:ext cx="1463040" cy="420624"/>
-          </a:xfrm>
-          <a:prstGeom prst="rect">
-            <a:avLst/>
-          </a:prstGeom>
-          <a:noFill/>
-          <a:ln/>
-        </p:spPr>
-        <p:txBody>
-          <a:bodyPr wrap="square" lIns="0" tIns="0" rIns="0" bIns="0" rtlCol="0" anchor="ctr"/>
-          <a:lstStyle/>
-          <a:p>
-            <a:pPr algn="ctr" indent="0" marL="0">
-              <a:buNone/>
-            </a:pPr>
-            <a:r>
-              <a:rPr lang="en-US" sz="1300" b="1" dirty="0">
-                <a:solidFill>
-                  <a:srgbClr val="9D174D"/>
-                </a:solidFill>
-                <a:latin typeface="Trebuchet MS" pitchFamily="34" charset="0"/>
-                <a:ea typeface="Trebuchet MS" pitchFamily="34" charset="-122"/>
-                <a:cs typeface="Trebuchet MS" pitchFamily="34" charset="-120"/>
-              </a:rPr>
-              <a:t>-er</a:t>
-            </a:r>
-            <a:endParaRPr lang="en-US" sz="1300" dirty="0"/>
-          </a:p>
-        </p:txBody>
-      </p:sp>
-      <p:sp>
-        <p:nvSpPr>
-          <p:cNvPr id="33" name="Shape 31"/>
-          <p:cNvSpPr/>
-          <p:nvPr/>
-        </p:nvSpPr>
-        <p:spPr>
-          <a:xfrm>
-            <a:off x="640080" y="3127248"/>
-            <a:ext cx="1463040" cy="420624"/>
-          </a:xfrm>
-          <a:prstGeom prst="rect">
-            <a:avLst/>
-          </a:prstGeom>
-          <a:solidFill>
-            <a:srgbClr val="DDD6FE"/>
-          </a:solidFill>
-          <a:ln w="12700">
-            <a:solidFill>
-              <a:srgbClr val="E5E7EB"/>
-            </a:solidFill>
-            <a:prstDash val="solid"/>
-          </a:ln>
-        </p:spPr>
-      </p:sp>
-      <p:sp>
-        <p:nvSpPr>
           <p:cNvPr id="34" name="Text 32"/>
           <p:cNvSpPr/>
           <p:nvPr/>
         </p:nvSpPr>
         <p:spPr>
           <a:xfrm>
-            <a:off x="640080" y="3127248"/>
-            <a:ext cx="1463040" cy="420624"/>
-          </a:xfrm>
-          <a:prstGeom prst="rect">
-            <a:avLst/>
-          </a:prstGeom>
-          <a:noFill/>
-          <a:ln/>
-        </p:spPr>
-        <p:txBody>
-          <a:bodyPr wrap="square" lIns="0" tIns="0" rIns="0" bIns="0" rtlCol="0" anchor="ctr"/>
-          <a:lstStyle/>
-          <a:p>
-            <a:pPr algn="ctr" indent="0" marL="0">
-              <a:buNone/>
-            </a:pPr>
-            <a:r>
-              <a:rPr lang="en-US" sz="1300" b="1" dirty="0">
-                <a:solidFill>
-                  <a:srgbClr val="4C1D95"/>
-                </a:solidFill>
-                <a:latin typeface="Trebuchet MS" pitchFamily="34" charset="0"/>
-                <a:ea typeface="Trebuchet MS" pitchFamily="34" charset="-122"/>
-                <a:cs typeface="Trebuchet MS" pitchFamily="34" charset="-120"/>
-              </a:rPr>
-              <a:t>re-</a:t>
-            </a:r>
-            <a:endParaRPr lang="en-US" sz="1300" dirty="0"/>
-          </a:p>
-        </p:txBody>
-      </p:sp>
-      <p:sp>
-        <p:nvSpPr>
-          <p:cNvPr id="35" name="Shape 33"/>
-          <p:cNvSpPr/>
-          <p:nvPr/>
-        </p:nvSpPr>
-        <p:spPr>
-          <a:xfrm>
-            <a:off x="3291840" y="3127248"/>
-            <a:ext cx="1645920" cy="420624"/>
-          </a:xfrm>
-          <a:prstGeom prst="rect">
-            <a:avLst/>
-          </a:prstGeom>
-          <a:solidFill>
-            <a:srgbClr val="F1F5F9"/>
-          </a:solidFill>
-          <a:ln w="12700">
-            <a:solidFill>
-              <a:srgbClr val="E5E7EB"/>
-            </a:solidFill>
-            <a:prstDash val="solid"/>
-          </a:ln>
-        </p:spPr>
-      </p:sp>
-      <p:sp>
-        <p:nvSpPr>
-          <p:cNvPr id="36" name="Shape 34"/>
-          <p:cNvSpPr/>
-          <p:nvPr/>
-        </p:nvSpPr>
-        <p:spPr>
-          <a:xfrm>
-            <a:off x="5943600" y="3127248"/>
-            <a:ext cx="1463040" cy="420624"/>
-          </a:xfrm>
-          <a:prstGeom prst="rect">
-            <a:avLst/>
-          </a:prstGeom>
-          <a:solidFill>
-            <a:srgbClr val="FCE7F3"/>
-          </a:solidFill>
-          <a:ln w="12700">
-            <a:solidFill>
-              <a:srgbClr val="E5E7EB"/>
-            </a:solidFill>
-            <a:prstDash val="solid"/>
-          </a:ln>
-        </p:spPr>
-      </p:sp>
-      <p:sp>
-        <p:nvSpPr>
-          <p:cNvPr id="37" name="Text 35"/>
-          <p:cNvSpPr/>
-          <p:nvPr/>
-        </p:nvSpPr>
-        <p:spPr>
-          <a:xfrm>
-            <a:off x="5943600" y="3127248"/>
-            <a:ext cx="1463040" cy="420624"/>
-          </a:xfrm>
-          <a:prstGeom prst="rect">
-            <a:avLst/>
-          </a:prstGeom>
-          <a:noFill/>
-          <a:ln/>
-        </p:spPr>
-        <p:txBody>
-          <a:bodyPr wrap="square" lIns="0" tIns="0" rIns="0" bIns="0" rtlCol="0" anchor="ctr"/>
-          <a:lstStyle/>
-          <a:p>
-            <a:pPr algn="ctr" indent="0" marL="0">
-              <a:buNone/>
-            </a:pPr>
-            <a:r>
-              <a:rPr lang="en-US" sz="1300" b="1" dirty="0">
-                <a:solidFill>
-                  <a:srgbClr val="9D174D"/>
-                </a:solidFill>
-                <a:latin typeface="Trebuchet MS" pitchFamily="34" charset="0"/>
-                <a:ea typeface="Trebuchet MS" pitchFamily="34" charset="-122"/>
-                <a:cs typeface="Trebuchet MS" pitchFamily="34" charset="-120"/>
-              </a:rPr>
-              <a:t>-ers</a:t>
-            </a:r>
-            <a:endParaRPr lang="en-US" sz="1300" dirty="0"/>
-          </a:p>
-        </p:txBody>
-      </p:sp>
-      <p:sp>
-        <p:nvSpPr>
-          <p:cNvPr id="38" name="Shape 36"/>
-          <p:cNvSpPr/>
-          <p:nvPr/>
-        </p:nvSpPr>
-        <p:spPr>
-          <a:xfrm>
-            <a:off x="640080" y="3584448"/>
-            <a:ext cx="1463040" cy="420624"/>
-          </a:xfrm>
-          <a:prstGeom prst="rect">
-            <a:avLst/>
-          </a:prstGeom>
-          <a:solidFill>
-            <a:srgbClr val="DDD6FE"/>
-          </a:solidFill>
-          <a:ln w="12700">
-            <a:solidFill>
-              <a:srgbClr val="E5E7EB"/>
-            </a:solidFill>
-            <a:prstDash val="solid"/>
-          </a:ln>
-        </p:spPr>
-      </p:sp>
-      <p:sp>
-        <p:nvSpPr>
-          <p:cNvPr id="39" name="Text 37"/>
-          <p:cNvSpPr/>
-          <p:nvPr/>
-        </p:nvSpPr>
-        <p:spPr>
-          <a:xfrm>
-            <a:off x="640080" y="3584448"/>
-            <a:ext cx="1463040" cy="420624"/>
-          </a:xfrm>
-          <a:prstGeom prst="rect">
-            <a:avLst/>
-          </a:prstGeom>
-          <a:noFill/>
-          <a:ln/>
-        </p:spPr>
-        <p:txBody>
-          <a:bodyPr wrap="square" lIns="0" tIns="0" rIns="0" bIns="0" rtlCol="0" anchor="ctr"/>
-          <a:lstStyle/>
-          <a:p>
-            <a:pPr algn="ctr" indent="0" marL="0">
-              <a:buNone/>
-            </a:pPr>
-            <a:r>
-              <a:rPr lang="en-US" sz="1300" b="1" dirty="0">
-                <a:solidFill>
-                  <a:srgbClr val="4C1D95"/>
-                </a:solidFill>
-                <a:latin typeface="Trebuchet MS" pitchFamily="34" charset="0"/>
-                <a:ea typeface="Trebuchet MS" pitchFamily="34" charset="-122"/>
-                <a:cs typeface="Trebuchet MS" pitchFamily="34" charset="-120"/>
-              </a:rPr>
-              <a:t>hand-</a:t>
-            </a:r>
-            <a:endParaRPr lang="en-US" sz="1300" dirty="0"/>
-          </a:p>
-        </p:txBody>
-      </p:sp>
-      <p:sp>
-        <p:nvSpPr>
-          <p:cNvPr id="40" name="Shape 38"/>
-          <p:cNvSpPr/>
-          <p:nvPr/>
-        </p:nvSpPr>
-        <p:spPr>
-          <a:xfrm>
-            <a:off x="3291840" y="3584448"/>
-            <a:ext cx="1645920" cy="420624"/>
-          </a:xfrm>
-          <a:prstGeom prst="rect">
-            <a:avLst/>
-          </a:prstGeom>
-          <a:solidFill>
-            <a:srgbClr val="F8FAFC"/>
-          </a:solidFill>
-          <a:ln w="12700">
-            <a:solidFill>
-              <a:srgbClr val="E5E7EB"/>
-            </a:solidFill>
-            <a:prstDash val="solid"/>
-          </a:ln>
-        </p:spPr>
-      </p:sp>
-      <p:sp>
-        <p:nvSpPr>
-          <p:cNvPr id="41" name="Shape 39"/>
-          <p:cNvSpPr/>
-          <p:nvPr/>
-        </p:nvSpPr>
-        <p:spPr>
-          <a:xfrm>
-            <a:off x="5943600" y="3584448"/>
-            <a:ext cx="1463040" cy="420624"/>
-          </a:xfrm>
-          <a:prstGeom prst="rect">
-            <a:avLst/>
-          </a:prstGeom>
-          <a:solidFill>
-            <a:srgbClr val="FCE7F3"/>
-          </a:solidFill>
-          <a:ln w="12700">
-            <a:solidFill>
-              <a:srgbClr val="E5E7EB"/>
-            </a:solidFill>
-            <a:prstDash val="solid"/>
-          </a:ln>
-        </p:spPr>
-      </p:sp>
-      <p:sp>
-        <p:nvSpPr>
-          <p:cNvPr id="42" name="Text 40"/>
-          <p:cNvSpPr/>
-          <p:nvPr/>
-        </p:nvSpPr>
-        <p:spPr>
-          <a:xfrm>
-            <a:off x="5943600" y="3584448"/>
-            <a:ext cx="1463040" cy="420624"/>
-          </a:xfrm>
-          <a:prstGeom prst="rect">
-            <a:avLst/>
-          </a:prstGeom>
-          <a:noFill/>
-          <a:ln/>
-        </p:spPr>
-        <p:txBody>
-          <a:bodyPr wrap="square" lIns="0" tIns="0" rIns="0" bIns="0" rtlCol="0" anchor="ctr"/>
-          <a:lstStyle/>
-          <a:p>
-            <a:pPr algn="ctr" indent="0" marL="0">
-              <a:buNone/>
-            </a:pPr>
-            <a:r>
-              <a:rPr lang="en-US" sz="1300" b="1" dirty="0">
-                <a:solidFill>
-                  <a:srgbClr val="9D174D"/>
-                </a:solidFill>
-                <a:latin typeface="Trebuchet MS" pitchFamily="34" charset="0"/>
-                <a:ea typeface="Trebuchet MS" pitchFamily="34" charset="-122"/>
-                <a:cs typeface="Trebuchet MS" pitchFamily="34" charset="-120"/>
-              </a:rPr>
-              <a:t>-over</a:t>
-            </a:r>
-            <a:endParaRPr lang="en-US" sz="1300" dirty="0"/>
-          </a:p>
-        </p:txBody>
-      </p:sp>
-      <p:sp>
-        <p:nvSpPr>
-          <p:cNvPr id="43" name="Text 41"/>
-          <p:cNvSpPr/>
-          <p:nvPr/>
-        </p:nvSpPr>
-        <p:spPr>
-          <a:xfrm>
-            <a:off x="365760" y="4178808"/>
+            <a:off x="365760" y="3721608"/>
             <a:ext cx="1097280" cy="420624"/>
           </a:xfrm>
           <a:prstGeom prst="rect">
@@ -38163,14 +36430,14 @@
       </p:sp>
       <p:sp>
         <p:nvSpPr>
-          <p:cNvPr id="44" name="Shape 42"/>
-          <p:cNvSpPr/>
-          <p:nvPr/>
-        </p:nvSpPr>
-        <p:spPr>
-          <a:xfrm>
-            <a:off x="1508760" y="4178808"/>
-            <a:ext cx="950976" cy="420624"/>
+          <p:cNvPr id="35" name="Shape 33"/>
+          <p:cNvSpPr/>
+          <p:nvPr/>
+        </p:nvSpPr>
+        <p:spPr>
+          <a:xfrm>
+            <a:off x="1508760" y="3721608"/>
+            <a:ext cx="1243584" cy="420624"/>
           </a:xfrm>
           <a:prstGeom prst="rect">
             <a:avLst>
@@ -38178,11 +36445,11 @@
             </a:avLst>
           </a:prstGeom>
           <a:solidFill>
-            <a:srgbClr val="DDD6FE"/>
+            <a:srgbClr val="CCFBF1"/>
           </a:solidFill>
           <a:ln w="19050">
             <a:solidFill>
-              <a:srgbClr val="7C3AED"/>
+              <a:srgbClr val="0D9488"/>
             </a:solidFill>
             <a:prstDash val="solid"/>
           </a:ln>
@@ -38197,14 +36464,14 @@
       </p:sp>
       <p:sp>
         <p:nvSpPr>
-          <p:cNvPr id="45" name="Text 43"/>
-          <p:cNvSpPr/>
-          <p:nvPr/>
-        </p:nvSpPr>
-        <p:spPr>
-          <a:xfrm>
-            <a:off x="1508760" y="4178808"/>
-            <a:ext cx="950976" cy="420624"/>
+          <p:cNvPr id="36" name="Text 34"/>
+          <p:cNvSpPr/>
+          <p:nvPr/>
+        </p:nvSpPr>
+        <p:spPr>
+          <a:xfrm>
+            <a:off x="1508760" y="3721608"/>
+            <a:ext cx="1243584" cy="420624"/>
           </a:xfrm>
           <a:prstGeom prst="rect">
             <a:avLst/>
@@ -38222,13 +36489,13 @@
             <a:r>
               <a:rPr lang="en-US" sz="1300" b="1" dirty="0">
                 <a:solidFill>
-                  <a:srgbClr val="4C1D95"/>
+                  <a:srgbClr val="0F766E"/>
                 </a:solidFill>
                 <a:latin typeface="Trebuchet MS" pitchFamily="34" charset="0"/>
                 <a:ea typeface="Trebuchet MS" pitchFamily="34" charset="-122"/>
                 <a:cs typeface="Trebuchet MS" pitchFamily="34" charset="-120"/>
               </a:rPr>
-              <a:t>out-</a:t>
+              <a:t>'push'</a:t>
             </a:r>
             <a:endParaRPr lang="en-US" sz="1300" dirty="0"/>
           </a:p>
@@ -38236,13 +36503,13 @@
       </p:sp>
       <p:sp>
         <p:nvSpPr>
-          <p:cNvPr id="46" name="Text 44"/>
-          <p:cNvSpPr/>
-          <p:nvPr/>
-        </p:nvSpPr>
-        <p:spPr>
-          <a:xfrm>
-            <a:off x="2487168" y="4178808"/>
+          <p:cNvPr id="37" name="Text 35"/>
+          <p:cNvSpPr/>
+          <p:nvPr/>
+        </p:nvSpPr>
+        <p:spPr>
+          <a:xfrm>
+            <a:off x="2779776" y="3721608"/>
             <a:ext cx="320040" cy="420624"/>
           </a:xfrm>
           <a:prstGeom prst="rect">
@@ -38275,14 +36542,14 @@
       </p:sp>
       <p:sp>
         <p:nvSpPr>
-          <p:cNvPr id="47" name="Shape 45"/>
-          <p:cNvSpPr/>
-          <p:nvPr/>
-        </p:nvSpPr>
-        <p:spPr>
-          <a:xfrm>
-            <a:off x="2834640" y="4178808"/>
-            <a:ext cx="1243584" cy="420624"/>
+          <p:cNvPr id="38" name="Shape 36"/>
+          <p:cNvSpPr/>
+          <p:nvPr/>
+        </p:nvSpPr>
+        <p:spPr>
+          <a:xfrm>
+            <a:off x="3127248" y="3721608"/>
+            <a:ext cx="822960" cy="420624"/>
           </a:xfrm>
           <a:prstGeom prst="rect">
             <a:avLst>
@@ -38290,11 +36557,11 @@
             </a:avLst>
           </a:prstGeom>
           <a:solidFill>
-            <a:srgbClr val="CCFBF1"/>
+            <a:srgbClr val="FCE7F3"/>
           </a:solidFill>
           <a:ln w="19050">
             <a:solidFill>
-              <a:srgbClr val="0D9488"/>
+              <a:srgbClr val="DB2777"/>
             </a:solidFill>
             <a:prstDash val="solid"/>
           </a:ln>
@@ -38309,14 +36576,14 @@
       </p:sp>
       <p:sp>
         <p:nvSpPr>
-          <p:cNvPr id="48" name="Text 46"/>
-          <p:cNvSpPr/>
-          <p:nvPr/>
-        </p:nvSpPr>
-        <p:spPr>
-          <a:xfrm>
-            <a:off x="2834640" y="4178808"/>
-            <a:ext cx="1243584" cy="420624"/>
+          <p:cNvPr id="39" name="Text 37"/>
+          <p:cNvSpPr/>
+          <p:nvPr/>
+        </p:nvSpPr>
+        <p:spPr>
+          <a:xfrm>
+            <a:off x="3127248" y="3721608"/>
+            <a:ext cx="822960" cy="420624"/>
           </a:xfrm>
           <a:prstGeom prst="rect">
             <a:avLst/>
@@ -38334,13 +36601,13 @@
             <a:r>
               <a:rPr lang="en-US" sz="1300" b="1" dirty="0">
                 <a:solidFill>
-                  <a:srgbClr val="0F766E"/>
+                  <a:srgbClr val="9D174D"/>
                 </a:solidFill>
                 <a:latin typeface="Trebuchet MS" pitchFamily="34" charset="0"/>
                 <a:ea typeface="Trebuchet MS" pitchFamily="34" charset="-122"/>
                 <a:cs typeface="Trebuchet MS" pitchFamily="34" charset="-120"/>
               </a:rPr>
-              <a:t>'push'</a:t>
+              <a:t>-ed</a:t>
             </a:r>
             <a:endParaRPr lang="en-US" sz="1300" dirty="0"/>
           </a:p>
@@ -38348,14 +36615,14 @@
       </p:sp>
       <p:sp>
         <p:nvSpPr>
-          <p:cNvPr id="49" name="Text 47"/>
-          <p:cNvSpPr/>
-          <p:nvPr/>
-        </p:nvSpPr>
-        <p:spPr>
-          <a:xfrm>
-            <a:off x="4105656" y="4178808"/>
-            <a:ext cx="320040" cy="420624"/>
+          <p:cNvPr id="40" name="Text 38"/>
+          <p:cNvSpPr/>
+          <p:nvPr/>
+        </p:nvSpPr>
+        <p:spPr>
+          <a:xfrm>
+            <a:off x="4023360" y="3721608"/>
+            <a:ext cx="365760" cy="420624"/>
           </a:xfrm>
           <a:prstGeom prst="rect">
             <a:avLst/>
@@ -38371,30 +36638,30 @@
               <a:buNone/>
             </a:pPr>
             <a:r>
-              <a:rPr lang="en-US" sz="1400" dirty="0">
-                <a:solidFill>
-                  <a:srgbClr val="475569"/>
+              <a:rPr lang="en-US" sz="1800" b="1" dirty="0">
+                <a:solidFill>
+                  <a:srgbClr val="0D9488"/>
                 </a:solidFill>
                 <a:latin typeface="Trebuchet MS" pitchFamily="34" charset="0"/>
                 <a:ea typeface="Trebuchet MS" pitchFamily="34" charset="-122"/>
                 <a:cs typeface="Trebuchet MS" pitchFamily="34" charset="-120"/>
               </a:rPr>
-              <a:t>+</a:t>
-            </a:r>
-            <a:endParaRPr lang="en-US" sz="1400" dirty="0"/>
-          </a:p>
-        </p:txBody>
-      </p:sp>
-      <p:sp>
-        <p:nvSpPr>
-          <p:cNvPr id="50" name="Shape 48"/>
-          <p:cNvSpPr/>
-          <p:nvPr/>
-        </p:nvSpPr>
-        <p:spPr>
-          <a:xfrm>
-            <a:off x="4453128" y="4178808"/>
-            <a:ext cx="822960" cy="420624"/>
+              <a:t>=</a:t>
+            </a:r>
+            <a:endParaRPr lang="en-US" sz="1800" dirty="0"/>
+          </a:p>
+        </p:txBody>
+      </p:sp>
+      <p:sp>
+        <p:nvSpPr>
+          <p:cNvPr id="41" name="Shape 39"/>
+          <p:cNvSpPr/>
+          <p:nvPr/>
+        </p:nvSpPr>
+        <p:spPr>
+          <a:xfrm>
+            <a:off x="4434840" y="3721608"/>
+            <a:ext cx="2194560" cy="420624"/>
           </a:xfrm>
           <a:prstGeom prst="rect">
             <a:avLst>
@@ -38402,33 +36669,26 @@
             </a:avLst>
           </a:prstGeom>
           <a:solidFill>
-            <a:srgbClr val="FCE7F3"/>
-          </a:solidFill>
-          <a:ln w="19050">
-            <a:solidFill>
-              <a:srgbClr val="DB2777"/>
-            </a:solidFill>
-            <a:prstDash val="solid"/>
-          </a:ln>
-          <a:effectLst>
-            <a:outerShdw sx="100000" sy="100000" kx="0" ky="0" algn="bl" rotWithShape="0" blurRad="101600" dist="38100" dir="8100000">
-              <a:srgbClr val="000000">
-                <a:alpha val="12000"/>
-              </a:srgbClr>
-            </a:outerShdw>
-          </a:effectLst>
-        </p:spPr>
-      </p:sp>
-      <p:sp>
-        <p:nvSpPr>
-          <p:cNvPr id="51" name="Text 49"/>
-          <p:cNvSpPr/>
-          <p:nvPr/>
-        </p:nvSpPr>
-        <p:spPr>
-          <a:xfrm>
-            <a:off x="4453128" y="4178808"/>
-            <a:ext cx="822960" cy="420624"/>
+            <a:srgbClr val="0D9488"/>
+          </a:solidFill>
+          <a:ln w="12700">
+            <a:solidFill>
+              <a:srgbClr val="0D9488"/>
+            </a:solidFill>
+            <a:prstDash val="solid"/>
+          </a:ln>
+        </p:spPr>
+      </p:sp>
+      <p:sp>
+        <p:nvSpPr>
+          <p:cNvPr id="42" name="Text 40"/>
+          <p:cNvSpPr/>
+          <p:nvPr/>
+        </p:nvSpPr>
+        <p:spPr>
+          <a:xfrm>
+            <a:off x="4434840" y="3721608"/>
+            <a:ext cx="2194560" cy="420624"/>
           </a:xfrm>
           <a:prstGeom prst="rect">
             <a:avLst/>
@@ -38444,120 +36704,15 @@
               <a:buNone/>
             </a:pPr>
             <a:r>
-              <a:rPr lang="en-US" sz="1300" b="1" dirty="0">
-                <a:solidFill>
-                  <a:srgbClr val="9D174D"/>
+              <a:rPr lang="en-US" sz="1400" b="1" dirty="0">
+                <a:solidFill>
+                  <a:srgbClr val="FFFFFF"/>
                 </a:solidFill>
                 <a:latin typeface="Trebuchet MS" pitchFamily="34" charset="0"/>
                 <a:ea typeface="Trebuchet MS" pitchFamily="34" charset="-122"/>
                 <a:cs typeface="Trebuchet MS" pitchFamily="34" charset="-120"/>
               </a:rPr>
-              <a:t>-ed</a:t>
-            </a:r>
-            <a:endParaRPr lang="en-US" sz="1300" dirty="0"/>
-          </a:p>
-        </p:txBody>
-      </p:sp>
-      <p:sp>
-        <p:nvSpPr>
-          <p:cNvPr id="52" name="Text 50"/>
-          <p:cNvSpPr/>
-          <p:nvPr/>
-        </p:nvSpPr>
-        <p:spPr>
-          <a:xfrm>
-            <a:off x="5349240" y="4178808"/>
-            <a:ext cx="365760" cy="420624"/>
-          </a:xfrm>
-          <a:prstGeom prst="rect">
-            <a:avLst/>
-          </a:prstGeom>
-          <a:noFill/>
-          <a:ln/>
-        </p:spPr>
-        <p:txBody>
-          <a:bodyPr wrap="square" lIns="0" tIns="0" rIns="0" bIns="0" rtlCol="0" anchor="ctr"/>
-          <a:lstStyle/>
-          <a:p>
-            <a:pPr algn="ctr" indent="0" marL="0">
-              <a:buNone/>
-            </a:pPr>
-            <a:r>
-              <a:rPr lang="en-US" sz="1800" b="1" dirty="0">
-                <a:solidFill>
-                  <a:srgbClr val="0D9488"/>
-                </a:solidFill>
-                <a:latin typeface="Trebuchet MS" pitchFamily="34" charset="0"/>
-                <a:ea typeface="Trebuchet MS" pitchFamily="34" charset="-122"/>
-                <a:cs typeface="Trebuchet MS" pitchFamily="34" charset="-120"/>
-              </a:rPr>
-              <a:t>=</a:t>
-            </a:r>
-            <a:endParaRPr lang="en-US" sz="1800" dirty="0"/>
-          </a:p>
-        </p:txBody>
-      </p:sp>
-      <p:sp>
-        <p:nvSpPr>
-          <p:cNvPr id="53" name="Shape 51"/>
-          <p:cNvSpPr/>
-          <p:nvPr/>
-        </p:nvSpPr>
-        <p:spPr>
-          <a:xfrm>
-            <a:off x="5760720" y="4178808"/>
-            <a:ext cx="2194560" cy="420624"/>
-          </a:xfrm>
-          <a:prstGeom prst="rect">
-            <a:avLst>
-              <a:gd name="adj" fmla="val 17391"/>
-            </a:avLst>
-          </a:prstGeom>
-          <a:solidFill>
-            <a:srgbClr val="0D9488"/>
-          </a:solidFill>
-          <a:ln w="12700">
-            <a:solidFill>
-              <a:srgbClr val="0D9488"/>
-            </a:solidFill>
-            <a:prstDash val="solid"/>
-          </a:ln>
-        </p:spPr>
-      </p:sp>
-      <p:sp>
-        <p:nvSpPr>
-          <p:cNvPr id="54" name="Text 52"/>
-          <p:cNvSpPr/>
-          <p:nvPr/>
-        </p:nvSpPr>
-        <p:spPr>
-          <a:xfrm>
-            <a:off x="5760720" y="4178808"/>
-            <a:ext cx="2194560" cy="420624"/>
-          </a:xfrm>
-          <a:prstGeom prst="rect">
-            <a:avLst/>
-          </a:prstGeom>
-          <a:noFill/>
-          <a:ln/>
-        </p:spPr>
-        <p:txBody>
-          <a:bodyPr wrap="square" lIns="0" tIns="0" rIns="0" bIns="0" rtlCol="0" anchor="ctr"/>
-          <a:lstStyle/>
-          <a:p>
-            <a:pPr algn="ctr" indent="0" marL="0">
-              <a:buNone/>
-            </a:pPr>
-            <a:r>
-              <a:rPr lang="en-US" sz="1400" b="1" dirty="0">
-                <a:solidFill>
-                  <a:srgbClr val="FFFFFF"/>
-                </a:solidFill>
-                <a:latin typeface="Trebuchet MS" pitchFamily="34" charset="0"/>
-                <a:ea typeface="Trebuchet MS" pitchFamily="34" charset="-122"/>
-                <a:cs typeface="Trebuchet MS" pitchFamily="34" charset="-120"/>
-              </a:rPr>
-              <a:t>pushchair</a:t>
+              <a:t>push</a:t>
             </a:r>
             <a:endParaRPr lang="en-US" sz="1400" dirty="0"/>
           </a:p>
@@ -38849,7 +37004,7 @@
                 <a:ea typeface="Calibri" pitchFamily="34" charset="-122"/>
                 <a:cs typeface="Calibri" pitchFamily="34" charset="-120"/>
               </a:rPr>
-              <a:t>Word Labs  •  wordlabs.app  •  Root: 'push' = to press or move forward</a:t>
+              <a:t>Word Labs  •  wordlabs.app  •  Root: 'push' = to press forward with force</a:t>
             </a:r>
             <a:endParaRPr lang="en-US" sz="800" dirty="0"/>
           </a:p>
@@ -38961,7 +37116,7 @@
                 <a:ea typeface="Trebuchet MS" pitchFamily="34" charset="-122"/>
                 <a:cs typeface="Trebuchet MS" pitchFamily="34" charset="-120"/>
               </a:rPr>
-              <a:t>pushchair</a:t>
+              <a:t>push</a:t>
             </a:r>
             <a:endParaRPr lang="en-US" sz="1200" dirty="0"/>
           </a:p>
@@ -39027,841 +37182,7 @@
                 <a:ea typeface="Calibri" pitchFamily="34" charset="-122"/>
                 <a:cs typeface="Calibri" pitchFamily="34" charset="-120"/>
               </a:rPr>
-              <a:t>What happened when someone already moved something away using force.</a:t>
-            </a:r>
-            <a:endParaRPr lang="en-US" sz="1200" dirty="0"/>
-          </a:p>
-        </p:txBody>
-      </p:sp>
-      <p:sp>
-        <p:nvSpPr>
-          <p:cNvPr id="15" name="Shape 13"/>
-          <p:cNvSpPr/>
-          <p:nvPr/>
-        </p:nvSpPr>
-        <p:spPr>
-          <a:xfrm>
-            <a:off x="365760" y="1719072"/>
-            <a:ext cx="2011680" cy="457200"/>
-          </a:xfrm>
-          <a:prstGeom prst="rect">
-            <a:avLst>
-              <a:gd name="adj" fmla="val 12000"/>
-            </a:avLst>
-          </a:prstGeom>
-          <a:solidFill>
-            <a:srgbClr val="EEF2FF"/>
-          </a:solidFill>
-          <a:ln w="12700">
-            <a:solidFill>
-              <a:srgbClr val="6366F1"/>
-            </a:solidFill>
-            <a:prstDash val="solid"/>
-          </a:ln>
-          <a:effectLst>
-            <a:outerShdw sx="100000" sy="100000" kx="0" ky="0" algn="bl" rotWithShape="0" blurRad="101600" dist="38100" dir="8100000">
-              <a:srgbClr val="000000">
-                <a:alpha val="12000"/>
-              </a:srgbClr>
-            </a:outerShdw>
-          </a:effectLst>
-        </p:spPr>
-      </p:sp>
-      <p:sp>
-        <p:nvSpPr>
-          <p:cNvPr id="16" name="Text 14"/>
-          <p:cNvSpPr/>
-          <p:nvPr/>
-        </p:nvSpPr>
-        <p:spPr>
-          <a:xfrm>
-            <a:off x="365760" y="1719072"/>
-            <a:ext cx="2011680" cy="457200"/>
-          </a:xfrm>
-          <a:prstGeom prst="rect">
-            <a:avLst/>
-          </a:prstGeom>
-          <a:noFill/>
-          <a:ln/>
-        </p:spPr>
-        <p:txBody>
-          <a:bodyPr wrap="square" lIns="0" tIns="0" rIns="0" bIns="0" rtlCol="0" anchor="ctr"/>
-          <a:lstStyle/>
-          <a:p>
-            <a:pPr algn="ctr" indent="0" marL="0">
-              <a:buNone/>
-            </a:pPr>
-            <a:r>
-              <a:rPr lang="en-US" sz="1200" b="1" dirty="0">
-                <a:solidFill>
-                  <a:srgbClr val="4338CA"/>
-                </a:solidFill>
-                <a:latin typeface="Trebuchet MS" pitchFamily="34" charset="0"/>
-                <a:ea typeface="Trebuchet MS" pitchFamily="34" charset="-122"/>
-                <a:cs typeface="Trebuchet MS" pitchFamily="34" charset="-120"/>
-              </a:rPr>
-              <a:t>pushing</a:t>
-            </a:r>
-            <a:endParaRPr lang="en-US" sz="1200" dirty="0"/>
-          </a:p>
-        </p:txBody>
-      </p:sp>
-      <p:sp>
-        <p:nvSpPr>
-          <p:cNvPr id="17" name="Shape 15"/>
-          <p:cNvSpPr/>
-          <p:nvPr/>
-        </p:nvSpPr>
-        <p:spPr>
-          <a:xfrm>
-            <a:off x="2514600" y="1719072"/>
-            <a:ext cx="6263640" cy="457200"/>
-          </a:xfrm>
-          <a:prstGeom prst="rect">
-            <a:avLst>
-              <a:gd name="adj" fmla="val 12000"/>
-            </a:avLst>
-          </a:prstGeom>
-          <a:solidFill>
-            <a:srgbClr val="F8FAFC"/>
-          </a:solidFill>
-          <a:ln w="12700">
-            <a:solidFill>
-              <a:srgbClr val="E2E8F0"/>
-            </a:solidFill>
-            <a:prstDash val="solid"/>
-          </a:ln>
-        </p:spPr>
-      </p:sp>
-      <p:sp>
-        <p:nvSpPr>
-          <p:cNvPr id="18" name="Text 16"/>
-          <p:cNvSpPr/>
-          <p:nvPr/>
-        </p:nvSpPr>
-        <p:spPr>
-          <a:xfrm>
-            <a:off x="2651760" y="1719072"/>
-            <a:ext cx="6035040" cy="457200"/>
-          </a:xfrm>
-          <a:prstGeom prst="rect">
-            <a:avLst/>
-          </a:prstGeom>
-          <a:noFill/>
-          <a:ln/>
-        </p:spPr>
-        <p:txBody>
-          <a:bodyPr wrap="square" rtlCol="0" anchor="ctr"/>
-          <a:lstStyle/>
-          <a:p>
-            <a:pPr algn="l" indent="0" marL="0">
-              <a:buNone/>
-            </a:pPr>
-            <a:r>
-              <a:rPr lang="en-US" sz="1200" dirty="0">
-                <a:solidFill>
-                  <a:srgbClr val="0F172A"/>
-                </a:solidFill>
-                <a:latin typeface="Calibri" pitchFamily="34" charset="0"/>
-                <a:ea typeface="Calibri" pitchFamily="34" charset="-122"/>
-                <a:cs typeface="Calibri" pitchFamily="34" charset="-120"/>
-              </a:rPr>
-              <a:t>To push something outward or beyond a normal boundary.</a:t>
-            </a:r>
-            <a:endParaRPr lang="en-US" sz="1200" dirty="0"/>
-          </a:p>
-        </p:txBody>
-      </p:sp>
-      <p:sp>
-        <p:nvSpPr>
-          <p:cNvPr id="19" name="Shape 17"/>
-          <p:cNvSpPr/>
-          <p:nvPr/>
-        </p:nvSpPr>
-        <p:spPr>
-          <a:xfrm>
-            <a:off x="365760" y="2249424"/>
-            <a:ext cx="2011680" cy="457200"/>
-          </a:xfrm>
-          <a:prstGeom prst="rect">
-            <a:avLst>
-              <a:gd name="adj" fmla="val 12000"/>
-            </a:avLst>
-          </a:prstGeom>
-          <a:solidFill>
-            <a:srgbClr val="EEF2FF"/>
-          </a:solidFill>
-          <a:ln w="12700">
-            <a:solidFill>
-              <a:srgbClr val="6366F1"/>
-            </a:solidFill>
-            <a:prstDash val="solid"/>
-          </a:ln>
-          <a:effectLst>
-            <a:outerShdw sx="100000" sy="100000" kx="0" ky="0" algn="bl" rotWithShape="0" blurRad="101600" dist="38100" dir="8100000">
-              <a:srgbClr val="000000">
-                <a:alpha val="12000"/>
-              </a:srgbClr>
-            </a:outerShdw>
-          </a:effectLst>
-        </p:spPr>
-      </p:sp>
-      <p:sp>
-        <p:nvSpPr>
-          <p:cNvPr id="20" name="Text 18"/>
-          <p:cNvSpPr/>
-          <p:nvPr/>
-        </p:nvSpPr>
-        <p:spPr>
-          <a:xfrm>
-            <a:off x="365760" y="2249424"/>
-            <a:ext cx="2011680" cy="457200"/>
-          </a:xfrm>
-          <a:prstGeom prst="rect">
-            <a:avLst/>
-          </a:prstGeom>
-          <a:noFill/>
-          <a:ln/>
-        </p:spPr>
-        <p:txBody>
-          <a:bodyPr wrap="square" lIns="0" tIns="0" rIns="0" bIns="0" rtlCol="0" anchor="ctr"/>
-          <a:lstStyle/>
-          <a:p>
-            <a:pPr algn="ctr" indent="0" marL="0">
-              <a:buNone/>
-            </a:pPr>
-            <a:r>
-              <a:rPr lang="en-US" sz="1200" b="1" dirty="0">
-                <a:solidFill>
-                  <a:srgbClr val="4338CA"/>
-                </a:solidFill>
-                <a:latin typeface="Trebuchet MS" pitchFamily="34" charset="0"/>
-                <a:ea typeface="Trebuchet MS" pitchFamily="34" charset="-122"/>
-                <a:cs typeface="Trebuchet MS" pitchFamily="34" charset="-120"/>
-              </a:rPr>
-              <a:t>pushed</a:t>
-            </a:r>
-            <a:endParaRPr lang="en-US" sz="1200" dirty="0"/>
-          </a:p>
-        </p:txBody>
-      </p:sp>
-      <p:sp>
-        <p:nvSpPr>
-          <p:cNvPr id="21" name="Shape 19"/>
-          <p:cNvSpPr/>
-          <p:nvPr/>
-        </p:nvSpPr>
-        <p:spPr>
-          <a:xfrm>
-            <a:off x="2514600" y="2249424"/>
-            <a:ext cx="6263640" cy="457200"/>
-          </a:xfrm>
-          <a:prstGeom prst="rect">
-            <a:avLst>
-              <a:gd name="adj" fmla="val 12000"/>
-            </a:avLst>
-          </a:prstGeom>
-          <a:solidFill>
-            <a:srgbClr val="F8FAFC"/>
-          </a:solidFill>
-          <a:ln w="12700">
-            <a:solidFill>
-              <a:srgbClr val="E2E8F0"/>
-            </a:solidFill>
-            <a:prstDash val="solid"/>
-          </a:ln>
-        </p:spPr>
-      </p:sp>
-      <p:sp>
-        <p:nvSpPr>
-          <p:cNvPr id="22" name="Text 20"/>
-          <p:cNvSpPr/>
-          <p:nvPr/>
-        </p:nvSpPr>
-        <p:spPr>
-          <a:xfrm>
-            <a:off x="2651760" y="2249424"/>
-            <a:ext cx="6035040" cy="457200"/>
-          </a:xfrm>
-          <a:prstGeom prst="rect">
-            <a:avLst/>
-          </a:prstGeom>
-          <a:noFill/>
-          <a:ln/>
-        </p:spPr>
-        <p:txBody>
-          <a:bodyPr wrap="square" rtlCol="0" anchor="ctr"/>
-          <a:lstStyle/>
-          <a:p>
-            <a:pPr algn="l" indent="0" marL="0">
-              <a:buNone/>
-            </a:pPr>
-            <a:r>
-              <a:rPr lang="en-US" sz="1200" dirty="0">
-                <a:solidFill>
-                  <a:srgbClr val="0F172A"/>
-                </a:solidFill>
-                <a:latin typeface="Calibri" pitchFamily="34" charset="0"/>
-                <a:ea typeface="Calibri" pitchFamily="34" charset="-122"/>
-                <a:cs typeface="Calibri" pitchFamily="34" charset="-120"/>
-              </a:rPr>
-              <a:t>A small chair on wheels that you push to carry a baby or young child around.</a:t>
-            </a:r>
-            <a:endParaRPr lang="en-US" sz="1200" dirty="0"/>
-          </a:p>
-        </p:txBody>
-      </p:sp>
-      <p:sp>
-        <p:nvSpPr>
-          <p:cNvPr id="23" name="Shape 21"/>
-          <p:cNvSpPr/>
-          <p:nvPr/>
-        </p:nvSpPr>
-        <p:spPr>
-          <a:xfrm>
-            <a:off x="365760" y="2779776"/>
-            <a:ext cx="2011680" cy="457200"/>
-          </a:xfrm>
-          <a:prstGeom prst="rect">
-            <a:avLst>
-              <a:gd name="adj" fmla="val 12000"/>
-            </a:avLst>
-          </a:prstGeom>
-          <a:solidFill>
-            <a:srgbClr val="EEF2FF"/>
-          </a:solidFill>
-          <a:ln w="12700">
-            <a:solidFill>
-              <a:srgbClr val="6366F1"/>
-            </a:solidFill>
-            <a:prstDash val="solid"/>
-          </a:ln>
-          <a:effectLst>
-            <a:outerShdw sx="100000" sy="100000" kx="0" ky="0" algn="bl" rotWithShape="0" blurRad="101600" dist="38100" dir="8100000">
-              <a:srgbClr val="000000">
-                <a:alpha val="12000"/>
-              </a:srgbClr>
-            </a:outerShdw>
-          </a:effectLst>
-        </p:spPr>
-      </p:sp>
-      <p:sp>
-        <p:nvSpPr>
-          <p:cNvPr id="24" name="Text 22"/>
-          <p:cNvSpPr/>
-          <p:nvPr/>
-        </p:nvSpPr>
-        <p:spPr>
-          <a:xfrm>
-            <a:off x="365760" y="2779776"/>
-            <a:ext cx="2011680" cy="457200"/>
-          </a:xfrm>
-          <a:prstGeom prst="rect">
-            <a:avLst/>
-          </a:prstGeom>
-          <a:noFill/>
-          <a:ln/>
-        </p:spPr>
-        <p:txBody>
-          <a:bodyPr wrap="square" lIns="0" tIns="0" rIns="0" bIns="0" rtlCol="0" anchor="ctr"/>
-          <a:lstStyle/>
-          <a:p>
-            <a:pPr algn="ctr" indent="0" marL="0">
-              <a:buNone/>
-            </a:pPr>
-            <a:r>
-              <a:rPr lang="en-US" sz="1200" b="1" dirty="0">
-                <a:solidFill>
-                  <a:srgbClr val="4338CA"/>
-                </a:solidFill>
-                <a:latin typeface="Trebuchet MS" pitchFamily="34" charset="0"/>
-                <a:ea typeface="Trebuchet MS" pitchFamily="34" charset="-122"/>
-                <a:cs typeface="Trebuchet MS" pitchFamily="34" charset="-120"/>
-              </a:rPr>
-              <a:t>pusher</a:t>
-            </a:r>
-            <a:endParaRPr lang="en-US" sz="1200" dirty="0"/>
-          </a:p>
-        </p:txBody>
-      </p:sp>
-      <p:sp>
-        <p:nvSpPr>
-          <p:cNvPr id="25" name="Shape 23"/>
-          <p:cNvSpPr/>
-          <p:nvPr/>
-        </p:nvSpPr>
-        <p:spPr>
-          <a:xfrm>
-            <a:off x="2514600" y="2779776"/>
-            <a:ext cx="6263640" cy="457200"/>
-          </a:xfrm>
-          <a:prstGeom prst="rect">
-            <a:avLst>
-              <a:gd name="adj" fmla="val 12000"/>
-            </a:avLst>
-          </a:prstGeom>
-          <a:solidFill>
-            <a:srgbClr val="F8FAFC"/>
-          </a:solidFill>
-          <a:ln w="12700">
-            <a:solidFill>
-              <a:srgbClr val="E2E8F0"/>
-            </a:solidFill>
-            <a:prstDash val="solid"/>
-          </a:ln>
-        </p:spPr>
-      </p:sp>
-      <p:sp>
-        <p:nvSpPr>
-          <p:cNvPr id="26" name="Text 24"/>
-          <p:cNvSpPr/>
-          <p:nvPr/>
-        </p:nvSpPr>
-        <p:spPr>
-          <a:xfrm>
-            <a:off x="2651760" y="2779776"/>
-            <a:ext cx="6035040" cy="457200"/>
-          </a:xfrm>
-          <a:prstGeom prst="rect">
-            <a:avLst/>
-          </a:prstGeom>
-          <a:noFill/>
-          <a:ln/>
-        </p:spPr>
-        <p:txBody>
-          <a:bodyPr wrap="square" rtlCol="0" anchor="ctr"/>
-          <a:lstStyle/>
-          <a:p>
-            <a:pPr algn="l" indent="0" marL="0">
-              <a:buNone/>
-            </a:pPr>
-            <a:r>
-              <a:rPr lang="en-US" sz="1200" dirty="0">
-                <a:solidFill>
-                  <a:srgbClr val="0F172A"/>
-                </a:solidFill>
-                <a:latin typeface="Calibri" pitchFamily="34" charset="0"/>
-                <a:ea typeface="Calibri" pitchFamily="34" charset="-122"/>
-                <a:cs typeface="Calibri" pitchFamily="34" charset="-120"/>
-              </a:rPr>
-              <a:t>Something very easy to do, or a person who is easily convinced to do things.</a:t>
-            </a:r>
-            <a:endParaRPr lang="en-US" sz="1200" dirty="0"/>
-          </a:p>
-        </p:txBody>
-      </p:sp>
-      <p:sp>
-        <p:nvSpPr>
-          <p:cNvPr id="27" name="Shape 25"/>
-          <p:cNvSpPr/>
-          <p:nvPr/>
-        </p:nvSpPr>
-        <p:spPr>
-          <a:xfrm>
-            <a:off x="365760" y="3310128"/>
-            <a:ext cx="2011680" cy="457200"/>
-          </a:xfrm>
-          <a:prstGeom prst="rect">
-            <a:avLst>
-              <a:gd name="adj" fmla="val 12000"/>
-            </a:avLst>
-          </a:prstGeom>
-          <a:solidFill>
-            <a:srgbClr val="EEF2FF"/>
-          </a:solidFill>
-          <a:ln w="12700">
-            <a:solidFill>
-              <a:srgbClr val="6366F1"/>
-            </a:solidFill>
-            <a:prstDash val="solid"/>
-          </a:ln>
-          <a:effectLst>
-            <a:outerShdw sx="100000" sy="100000" kx="0" ky="0" algn="bl" rotWithShape="0" blurRad="101600" dist="38100" dir="8100000">
-              <a:srgbClr val="000000">
-                <a:alpha val="12000"/>
-              </a:srgbClr>
-            </a:outerShdw>
-          </a:effectLst>
-        </p:spPr>
-      </p:sp>
-      <p:sp>
-        <p:nvSpPr>
-          <p:cNvPr id="28" name="Text 26"/>
-          <p:cNvSpPr/>
-          <p:nvPr/>
-        </p:nvSpPr>
-        <p:spPr>
-          <a:xfrm>
-            <a:off x="365760" y="3310128"/>
-            <a:ext cx="2011680" cy="457200"/>
-          </a:xfrm>
-          <a:prstGeom prst="rect">
-            <a:avLst/>
-          </a:prstGeom>
-          <a:noFill/>
-          <a:ln/>
-        </p:spPr>
-        <p:txBody>
-          <a:bodyPr wrap="square" lIns="0" tIns="0" rIns="0" bIns="0" rtlCol="0" anchor="ctr"/>
-          <a:lstStyle/>
-          <a:p>
-            <a:pPr algn="ctr" indent="0" marL="0">
-              <a:buNone/>
-            </a:pPr>
-            <a:r>
-              <a:rPr lang="en-US" sz="1200" b="1" dirty="0">
-                <a:solidFill>
-                  <a:srgbClr val="4338CA"/>
-                </a:solidFill>
-                <a:latin typeface="Trebuchet MS" pitchFamily="34" charset="0"/>
-                <a:ea typeface="Trebuchet MS" pitchFamily="34" charset="-122"/>
-                <a:cs typeface="Trebuchet MS" pitchFamily="34" charset="-120"/>
-              </a:rPr>
-              <a:t>outpush</a:t>
-            </a:r>
-            <a:endParaRPr lang="en-US" sz="1200" dirty="0"/>
-          </a:p>
-        </p:txBody>
-      </p:sp>
-      <p:sp>
-        <p:nvSpPr>
-          <p:cNvPr id="29" name="Shape 27"/>
-          <p:cNvSpPr/>
-          <p:nvPr/>
-        </p:nvSpPr>
-        <p:spPr>
-          <a:xfrm>
-            <a:off x="2514600" y="3310128"/>
-            <a:ext cx="6263640" cy="457200"/>
-          </a:xfrm>
-          <a:prstGeom prst="rect">
-            <a:avLst>
-              <a:gd name="adj" fmla="val 12000"/>
-            </a:avLst>
-          </a:prstGeom>
-          <a:solidFill>
-            <a:srgbClr val="F8FAFC"/>
-          </a:solidFill>
-          <a:ln w="12700">
-            <a:solidFill>
-              <a:srgbClr val="E2E8F0"/>
-            </a:solidFill>
-            <a:prstDash val="solid"/>
-          </a:ln>
-        </p:spPr>
-      </p:sp>
-      <p:sp>
-        <p:nvSpPr>
-          <p:cNvPr id="30" name="Text 28"/>
-          <p:cNvSpPr/>
-          <p:nvPr/>
-        </p:nvSpPr>
-        <p:spPr>
-          <a:xfrm>
-            <a:off x="2651760" y="3310128"/>
-            <a:ext cx="6035040" cy="457200"/>
-          </a:xfrm>
-          <a:prstGeom prst="rect">
-            <a:avLst/>
-          </a:prstGeom>
-          <a:noFill/>
-          <a:ln/>
-        </p:spPr>
-        <p:txBody>
-          <a:bodyPr wrap="square" rtlCol="0" anchor="ctr"/>
-          <a:lstStyle/>
-          <a:p>
-            <a:pPr algn="l" indent="0" marL="0">
-              <a:buNone/>
-            </a:pPr>
-            <a:r>
-              <a:rPr lang="en-US" sz="1200" dirty="0">
-                <a:solidFill>
-                  <a:srgbClr val="0F172A"/>
-                </a:solidFill>
-                <a:latin typeface="Calibri" pitchFamily="34" charset="0"/>
-                <a:ea typeface="Calibri" pitchFamily="34" charset="-122"/>
-                <a:cs typeface="Calibri" pitchFamily="34" charset="-120"/>
-              </a:rPr>
-              <a:t>A small pin with a flat top used to stick paper to a board by pushing it in.</a:t>
-            </a:r>
-            <a:endParaRPr lang="en-US" sz="1200" dirty="0"/>
-          </a:p>
-        </p:txBody>
-      </p:sp>
-      <p:sp>
-        <p:nvSpPr>
-          <p:cNvPr id="31" name="Shape 29"/>
-          <p:cNvSpPr/>
-          <p:nvPr/>
-        </p:nvSpPr>
-        <p:spPr>
-          <a:xfrm>
-            <a:off x="365760" y="3840480"/>
-            <a:ext cx="2011680" cy="457200"/>
-          </a:xfrm>
-          <a:prstGeom prst="rect">
-            <a:avLst>
-              <a:gd name="adj" fmla="val 12000"/>
-            </a:avLst>
-          </a:prstGeom>
-          <a:solidFill>
-            <a:srgbClr val="EEF2FF"/>
-          </a:solidFill>
-          <a:ln w="12700">
-            <a:solidFill>
-              <a:srgbClr val="6366F1"/>
-            </a:solidFill>
-            <a:prstDash val="solid"/>
-          </a:ln>
-          <a:effectLst>
-            <a:outerShdw sx="100000" sy="100000" kx="0" ky="0" algn="bl" rotWithShape="0" blurRad="101600" dist="38100" dir="8100000">
-              <a:srgbClr val="000000">
-                <a:alpha val="12000"/>
-              </a:srgbClr>
-            </a:outerShdw>
-          </a:effectLst>
-        </p:spPr>
-      </p:sp>
-      <p:sp>
-        <p:nvSpPr>
-          <p:cNvPr id="32" name="Text 30"/>
-          <p:cNvSpPr/>
-          <p:nvPr/>
-        </p:nvSpPr>
-        <p:spPr>
-          <a:xfrm>
-            <a:off x="365760" y="3840480"/>
-            <a:ext cx="2011680" cy="457200"/>
-          </a:xfrm>
-          <a:prstGeom prst="rect">
-            <a:avLst/>
-          </a:prstGeom>
-          <a:noFill/>
-          <a:ln/>
-        </p:spPr>
-        <p:txBody>
-          <a:bodyPr wrap="square" lIns="0" tIns="0" rIns="0" bIns="0" rtlCol="0" anchor="ctr"/>
-          <a:lstStyle/>
-          <a:p>
-            <a:pPr algn="ctr" indent="0" marL="0">
-              <a:buNone/>
-            </a:pPr>
-            <a:r>
-              <a:rPr lang="en-US" sz="1200" b="1" dirty="0">
-                <a:solidFill>
-                  <a:srgbClr val="4338CA"/>
-                </a:solidFill>
-                <a:latin typeface="Trebuchet MS" pitchFamily="34" charset="0"/>
-                <a:ea typeface="Trebuchet MS" pitchFamily="34" charset="-122"/>
-                <a:cs typeface="Trebuchet MS" pitchFamily="34" charset="-120"/>
-              </a:rPr>
-              <a:t>pushover</a:t>
-            </a:r>
-            <a:endParaRPr lang="en-US" sz="1200" dirty="0"/>
-          </a:p>
-        </p:txBody>
-      </p:sp>
-      <p:sp>
-        <p:nvSpPr>
-          <p:cNvPr id="33" name="Shape 31"/>
-          <p:cNvSpPr/>
-          <p:nvPr/>
-        </p:nvSpPr>
-        <p:spPr>
-          <a:xfrm>
-            <a:off x="2514600" y="3840480"/>
-            <a:ext cx="6263640" cy="457200"/>
-          </a:xfrm>
-          <a:prstGeom prst="rect">
-            <a:avLst>
-              <a:gd name="adj" fmla="val 12000"/>
-            </a:avLst>
-          </a:prstGeom>
-          <a:solidFill>
-            <a:srgbClr val="F8FAFC"/>
-          </a:solidFill>
-          <a:ln w="12700">
-            <a:solidFill>
-              <a:srgbClr val="E2E8F0"/>
-            </a:solidFill>
-            <a:prstDash val="solid"/>
-          </a:ln>
-        </p:spPr>
-      </p:sp>
-      <p:sp>
-        <p:nvSpPr>
-          <p:cNvPr id="34" name="Text 32"/>
-          <p:cNvSpPr/>
-          <p:nvPr/>
-        </p:nvSpPr>
-        <p:spPr>
-          <a:xfrm>
-            <a:off x="2651760" y="3840480"/>
-            <a:ext cx="6035040" cy="457200"/>
-          </a:xfrm>
-          <a:prstGeom prst="rect">
-            <a:avLst/>
-          </a:prstGeom>
-          <a:noFill/>
-          <a:ln/>
-        </p:spPr>
-        <p:txBody>
-          <a:bodyPr wrap="square" rtlCol="0" anchor="ctr"/>
-          <a:lstStyle/>
-          <a:p>
-            <a:pPr algn="l" indent="0" marL="0">
-              <a:buNone/>
-            </a:pPr>
-            <a:r>
-              <a:rPr lang="en-US" sz="1200" dirty="0">
-                <a:solidFill>
-                  <a:srgbClr val="0F172A"/>
-                </a:solidFill>
-                <a:latin typeface="Calibri" pitchFamily="34" charset="0"/>
-                <a:ea typeface="Calibri" pitchFamily="34" charset="-122"/>
-                <a:cs typeface="Calibri" pitchFamily="34" charset="-120"/>
-              </a:rPr>
-              <a:t>A person or thing that pushes something along.</a:t>
-            </a:r>
-            <a:endParaRPr lang="en-US" sz="1200" dirty="0"/>
-          </a:p>
-        </p:txBody>
-      </p:sp>
-      <p:sp>
-        <p:nvSpPr>
-          <p:cNvPr id="35" name="Shape 33"/>
-          <p:cNvSpPr/>
-          <p:nvPr/>
-        </p:nvSpPr>
-        <p:spPr>
-          <a:xfrm>
-            <a:off x="365760" y="4370832"/>
-            <a:ext cx="2011680" cy="457200"/>
-          </a:xfrm>
-          <a:prstGeom prst="rect">
-            <a:avLst>
-              <a:gd name="adj" fmla="val 12000"/>
-            </a:avLst>
-          </a:prstGeom>
-          <a:solidFill>
-            <a:srgbClr val="EEF2FF"/>
-          </a:solidFill>
-          <a:ln w="12700">
-            <a:solidFill>
-              <a:srgbClr val="6366F1"/>
-            </a:solidFill>
-            <a:prstDash val="solid"/>
-          </a:ln>
-          <a:effectLst>
-            <a:outerShdw sx="100000" sy="100000" kx="0" ky="0" algn="bl" rotWithShape="0" blurRad="101600" dist="38100" dir="8100000">
-              <a:srgbClr val="000000">
-                <a:alpha val="12000"/>
-              </a:srgbClr>
-            </a:outerShdw>
-          </a:effectLst>
-        </p:spPr>
-      </p:sp>
-      <p:sp>
-        <p:nvSpPr>
-          <p:cNvPr id="36" name="Text 34"/>
-          <p:cNvSpPr/>
-          <p:nvPr/>
-        </p:nvSpPr>
-        <p:spPr>
-          <a:xfrm>
-            <a:off x="365760" y="4370832"/>
-            <a:ext cx="2011680" cy="457200"/>
-          </a:xfrm>
-          <a:prstGeom prst="rect">
-            <a:avLst/>
-          </a:prstGeom>
-          <a:noFill/>
-          <a:ln/>
-        </p:spPr>
-        <p:txBody>
-          <a:bodyPr wrap="square" lIns="0" tIns="0" rIns="0" bIns="0" rtlCol="0" anchor="ctr"/>
-          <a:lstStyle/>
-          <a:p>
-            <a:pPr algn="ctr" indent="0" marL="0">
-              <a:buNone/>
-            </a:pPr>
-            <a:r>
-              <a:rPr lang="en-US" sz="1200" b="1" dirty="0">
-                <a:solidFill>
-                  <a:srgbClr val="4338CA"/>
-                </a:solidFill>
-                <a:latin typeface="Trebuchet MS" pitchFamily="34" charset="0"/>
-                <a:ea typeface="Trebuchet MS" pitchFamily="34" charset="-122"/>
-                <a:cs typeface="Trebuchet MS" pitchFamily="34" charset="-120"/>
-              </a:rPr>
-              <a:t>pushpin</a:t>
-            </a:r>
-            <a:endParaRPr lang="en-US" sz="1200" dirty="0"/>
-          </a:p>
-        </p:txBody>
-      </p:sp>
-      <p:sp>
-        <p:nvSpPr>
-          <p:cNvPr id="37" name="Shape 35"/>
-          <p:cNvSpPr/>
-          <p:nvPr/>
-        </p:nvSpPr>
-        <p:spPr>
-          <a:xfrm>
-            <a:off x="2514600" y="4370832"/>
-            <a:ext cx="6263640" cy="457200"/>
-          </a:xfrm>
-          <a:prstGeom prst="rect">
-            <a:avLst>
-              <a:gd name="adj" fmla="val 12000"/>
-            </a:avLst>
-          </a:prstGeom>
-          <a:solidFill>
-            <a:srgbClr val="F8FAFC"/>
-          </a:solidFill>
-          <a:ln w="12700">
-            <a:solidFill>
-              <a:srgbClr val="E2E8F0"/>
-            </a:solidFill>
-            <a:prstDash val="solid"/>
-          </a:ln>
-        </p:spPr>
-      </p:sp>
-      <p:sp>
-        <p:nvSpPr>
-          <p:cNvPr id="38" name="Text 36"/>
-          <p:cNvSpPr/>
-          <p:nvPr/>
-        </p:nvSpPr>
-        <p:spPr>
-          <a:xfrm>
-            <a:off x="2651760" y="4370832"/>
-            <a:ext cx="6035040" cy="457200"/>
-          </a:xfrm>
-          <a:prstGeom prst="rect">
-            <a:avLst/>
-          </a:prstGeom>
-          <a:noFill/>
-          <a:ln/>
-        </p:spPr>
-        <p:txBody>
-          <a:bodyPr wrap="square" rtlCol="0" anchor="ctr"/>
-          <a:lstStyle/>
-          <a:p>
-            <a:pPr algn="l" indent="0" marL="0">
-              <a:buNone/>
-            </a:pPr>
-            <a:r>
-              <a:rPr lang="en-US" sz="1200" dirty="0">
-                <a:solidFill>
-                  <a:srgbClr val="0F172A"/>
-                </a:solidFill>
-                <a:latin typeface="Calibri" pitchFamily="34" charset="0"/>
-                <a:ea typeface="Calibri" pitchFamily="34" charset="-122"/>
-                <a:cs typeface="Calibri" pitchFamily="34" charset="-120"/>
-              </a:rPr>
-              <a:t>Using your hands or body to move something away from you with force.</a:t>
+              <a:t>to press against something with force to move it</a:t>
             </a:r>
             <a:endParaRPr lang="en-US" sz="1200" dirty="0"/>
           </a:p>
@@ -40153,7 +37474,7 @@
                 <a:ea typeface="Calibri" pitchFamily="34" charset="-122"/>
                 <a:cs typeface="Calibri" pitchFamily="34" charset="-120"/>
               </a:rPr>
-              <a:t>Word Labs  •  wordlabs.app  •  Root: 'push' = to press or move forward</a:t>
+              <a:t>Word Labs  •  wordlabs.app  •  Root: 'push' = to press forward with force</a:t>
             </a:r>
             <a:endParaRPr lang="en-US" sz="800" dirty="0"/>
           </a:p>
@@ -40356,7 +37677,7 @@
                 <a:ea typeface="Calibri" pitchFamily="34" charset="-122"/>
                 <a:cs typeface="Calibri" pitchFamily="34" charset="-120"/>
               </a:rPr>
-              <a:t>The teacher reminded the students that pushing in the corridor is dangerous and disrespectful.</a:t>
+              <a:t>Please push the door open, it doesn't pull.</a:t>
             </a:r>
             <a:endParaRPr lang="en-US" sz="1500" dirty="0"/>
           </a:p>
@@ -40520,7 +37841,7 @@
                 <a:ea typeface="Calibri" pitchFamily="34" charset="-122"/>
                 <a:cs typeface="Calibri" pitchFamily="34" charset="-120"/>
               </a:rPr>
-              <a:t>During the science experiment, the children discovered that a pushpin could hold several sheets of paper to the board.</a:t>
+              <a:t>She pushed the door open with both hands.</a:t>
             </a:r>
             <a:endParaRPr lang="en-US" sz="1500" dirty="0"/>
           </a:p>
@@ -40684,7 +38005,7 @@
                 <a:ea typeface="Calibri" pitchFamily="34" charset="-122"/>
                 <a:cs typeface="Calibri" pitchFamily="34" charset="-120"/>
               </a:rPr>
-              <a:t>Mia found the maths puzzle to be a complete pushover because she had practised all week.</a:t>
+              <a:t>The pusher moved the trolley down the aisle.</a:t>
             </a:r>
             <a:endParaRPr lang="en-US" sz="1500" dirty="0"/>
           </a:p>
